--- a/studies/osu-test-buoy/Capytaine_analysis_OSU_buoy.pptx
+++ b/studies/osu-test-buoy/Capytaine_analysis_OSU_buoy.pptx
@@ -13,6 +13,9 @@
     <p:sldId id="261" r:id="rId12"/>
     <p:sldId id="262" r:id="rId13"/>
     <p:sldId id="263" r:id="rId14"/>
+    <p:sldId id="264" r:id="rId15"/>
+    <p:sldId id="265" r:id="rId16"/>
+    <p:sldId id="266" r:id="rId17"/>
   </p:sldIdLst>
   <p:sldSz cx="12191695" cy="6858000" type="screen4x3"/>
   <p:notesSz cx="6858000" cy="9144000"/>
@@ -3295,6 +3298,1113 @@
 </p:sld>
 </file>
 
+<file path=ppt/slides/slide10.xml><?xml version="1.0" encoding="utf-8"?>
+<p:sld xmlns:a="http://schemas.openxmlformats.org/drawingml/2006/main" xmlns:p="http://schemas.openxmlformats.org/presentationml/2006/main" xmlns:r="http://schemas.openxmlformats.org/officeDocument/2006/relationships">
+  <p:cSld>
+    <p:bg>
+      <p:bgPr>
+        <a:solidFill>
+          <a:srgbClr val="FFFFFF"/>
+        </a:solidFill>
+        <a:effectLst/>
+      </p:bgPr>
+    </p:bg>
+    <p:spTree>
+      <p:nvGrpSpPr>
+        <p:cNvPr id="1" name=""/>
+        <p:cNvGrpSpPr/>
+        <p:nvPr/>
+      </p:nvGrpSpPr>
+      <p:grpSpPr/>
+      <p:sp>
+        <p:nvSpPr>
+          <p:cNvPr id="2" name="TextBox 1"/>
+          <p:cNvSpPr txBox="1"/>
+          <p:nvPr/>
+        </p:nvSpPr>
+        <p:spPr>
+          <a:xfrm>
+            <a:off x="640080" y="384048"/>
+            <a:ext cx="10972800" cy="365760"/>
+          </a:xfrm>
+          <a:prstGeom prst="rect">
+            <a:avLst/>
+          </a:prstGeom>
+          <a:noFill/>
+        </p:spPr>
+        <p:txBody>
+          <a:bodyPr wrap="none">
+            <a:spAutoFit/>
+          </a:bodyPr>
+          <a:lstStyle/>
+          <a:p>
+            <a:r>
+              <a:rPr sz="1300" b="1">
+                <a:solidFill>
+                  <a:srgbClr val="0C8B96"/>
+                </a:solidFill>
+                <a:latin typeface="Segoe UI"/>
+              </a:rPr>
+              <a:t>WHAT WE ASSUMED, AND WHY</a:t>
+            </a:r>
+          </a:p>
+        </p:txBody>
+      </p:sp>
+      <p:sp>
+        <p:nvSpPr>
+          <p:cNvPr id="3" name="TextBox 2"/>
+          <p:cNvSpPr txBox="1"/>
+          <p:nvPr/>
+        </p:nvSpPr>
+        <p:spPr>
+          <a:xfrm>
+            <a:off x="640080" y="658368"/>
+            <a:ext cx="10972800" cy="822960"/>
+          </a:xfrm>
+          <a:prstGeom prst="rect">
+            <a:avLst/>
+          </a:prstGeom>
+          <a:noFill/>
+        </p:spPr>
+        <p:txBody>
+          <a:bodyPr wrap="none">
+            <a:spAutoFit/>
+          </a:bodyPr>
+          <a:lstStyle/>
+          <a:p>
+            <a:r>
+              <a:rPr sz="3000" b="1">
+                <a:solidFill>
+                  <a:srgbClr val="25323A"/>
+                </a:solidFill>
+                <a:latin typeface="Segoe UI"/>
+              </a:rPr>
+              <a:t>Modelling assumptions &amp; their basis</a:t>
+            </a:r>
+          </a:p>
+        </p:txBody>
+      </p:sp>
+      <p:sp>
+        <p:nvSpPr>
+          <p:cNvPr id="4" name="Rectangle 3"/>
+          <p:cNvSpPr/>
+          <p:nvPr/>
+        </p:nvSpPr>
+        <p:spPr>
+          <a:xfrm>
+            <a:off x="658368" y="1444752"/>
+            <a:ext cx="2011680" cy="54864"/>
+          </a:xfrm>
+          <a:prstGeom prst="rect">
+            <a:avLst/>
+          </a:prstGeom>
+          <a:solidFill>
+            <a:srgbClr val="0C8B96"/>
+          </a:solidFill>
+          <a:ln>
+            <a:noFill/>
+          </a:ln>
+          <a:effectLst/>
+        </p:spPr>
+        <p:style>
+          <a:lnRef idx="1">
+            <a:schemeClr val="accent1"/>
+          </a:lnRef>
+          <a:fillRef idx="3">
+            <a:schemeClr val="accent1"/>
+          </a:fillRef>
+          <a:effectRef idx="2">
+            <a:schemeClr val="accent1"/>
+          </a:effectRef>
+          <a:fontRef idx="minor">
+            <a:schemeClr val="lt1"/>
+          </a:fontRef>
+        </p:style>
+        <p:txBody>
+          <a:bodyPr rtlCol="0" anchor="ctr"/>
+          <a:lstStyle/>
+          <a:p>
+            <a:pPr algn="ctr"/>
+          </a:p>
+        </p:txBody>
+      </p:sp>
+      <p:graphicFrame>
+        <p:nvGraphicFramePr>
+          <p:cNvPr id="5" name="Table 4"/>
+          <p:cNvGraphicFramePr>
+            <a:graphicFrameLocks noGrp="1"/>
+          </p:cNvGraphicFramePr>
+          <p:nvPr/>
+        </p:nvGraphicFramePr>
+        <p:xfrm>
+          <a:off x="502920" y="1664208"/>
+          <a:ext cx="11201400" cy="4480560"/>
+        </p:xfrm>
+        <a:graphic>
+          <a:graphicData uri="http://schemas.openxmlformats.org/drawingml/2006/table">
+            <a:tbl>
+              <a:tblPr>
+                <a:tableStyleId>{5C22544A-7EE6-4342-B048-85BDC9FD1C3A}</a:tableStyleId>
+              </a:tblPr>
+              <a:tblGrid>
+                <a:gridCol w="2788920"/>
+                <a:gridCol w="2148840"/>
+                <a:gridCol w="6263640"/>
+              </a:tblGrid>
+              <a:tr h="384048">
+                <a:tc>
+                  <a:txBody>
+                    <a:bodyPr wrap="square"/>
+                    <a:lstStyle/>
+                    <a:p>
+                      <a:pPr algn="l"/>
+                      <a:r>
+                        <a:rPr sz="1300" b="1" i="0">
+                          <a:solidFill>
+                            <a:srgbClr val="FFFFFF"/>
+                          </a:solidFill>
+                          <a:latin typeface="Segoe UI"/>
+                        </a:rPr>
+                        <a:t>Assumption</a:t>
+                      </a:r>
+                    </a:p>
+                  </a:txBody>
+                  <a:tcPr anchor="ctr" marL="88900" marR="63500" marT="25400" marB="25400">
+                    <a:solidFill>
+                      <a:srgbClr val="0C8B96"/>
+                    </a:solidFill>
+                  </a:tcPr>
+                </a:tc>
+                <a:tc>
+                  <a:txBody>
+                    <a:bodyPr wrap="square"/>
+                    <a:lstStyle/>
+                    <a:p>
+                      <a:pPr algn="ctr"/>
+                      <a:r>
+                        <a:rPr sz="1300" b="1" i="0">
+                          <a:solidFill>
+                            <a:srgbClr val="FFFFFF"/>
+                          </a:solidFill>
+                          <a:latin typeface="Segoe UI"/>
+                        </a:rPr>
+                        <a:t>Value</a:t>
+                      </a:r>
+                    </a:p>
+                  </a:txBody>
+                  <a:tcPr anchor="ctr" marL="88900" marR="63500" marT="25400" marB="25400">
+                    <a:solidFill>
+                      <a:srgbClr val="0C8B96"/>
+                    </a:solidFill>
+                  </a:tcPr>
+                </a:tc>
+                <a:tc>
+                  <a:txBody>
+                    <a:bodyPr wrap="square"/>
+                    <a:lstStyle/>
+                    <a:p>
+                      <a:pPr algn="l"/>
+                      <a:r>
+                        <a:rPr sz="1300" b="1" i="0">
+                          <a:solidFill>
+                            <a:srgbClr val="FFFFFF"/>
+                          </a:solidFill>
+                          <a:latin typeface="Segoe UI"/>
+                        </a:rPr>
+                        <a:t>Basis / support</a:t>
+                      </a:r>
+                    </a:p>
+                  </a:txBody>
+                  <a:tcPr anchor="ctr" marL="88900" marR="63500" marT="25400" marB="25400">
+                    <a:solidFill>
+                      <a:srgbClr val="0C8B96"/>
+                    </a:solidFill>
+                  </a:tcPr>
+                </a:tc>
+              </a:tr>
+              <a:tr h="585216">
+                <a:tc>
+                  <a:txBody>
+                    <a:bodyPr wrap="square"/>
+                    <a:lstStyle/>
+                    <a:p>
+                      <a:pPr algn="l"/>
+                      <a:r>
+                        <a:rPr sz="1200" b="0" i="0">
+                          <a:solidFill>
+                            <a:srgbClr val="25323A"/>
+                          </a:solidFill>
+                          <a:latin typeface="Segoe UI"/>
+                        </a:rPr>
+                        <a:t>Spar drag  </a:t>
+                      </a:r>
+                      <a:r>
+                        <a:rPr sz="1200" b="0" i="1">
+                          <a:solidFill>
+                            <a:srgbClr val="25323A"/>
+                          </a:solidFill>
+                          <a:latin typeface="Segoe UI"/>
+                        </a:rPr>
+                        <a:t>Cd</a:t>
+                      </a:r>
+                      <a:r>
+                        <a:rPr sz="1200" b="0" i="0">
+                          <a:solidFill>
+                            <a:srgbClr val="25323A"/>
+                          </a:solidFill>
+                          <a:latin typeface="Segoe UI"/>
+                        </a:rPr>
+                        <a:t> (transverse)</a:t>
+                      </a:r>
+                    </a:p>
+                  </a:txBody>
+                  <a:tcPr anchor="ctr" marL="88900" marR="63500" marT="25400" marB="25400">
+                    <a:solidFill>
+                      <a:srgbClr val="F3F8F9"/>
+                    </a:solidFill>
+                  </a:tcPr>
+                </a:tc>
+                <a:tc>
+                  <a:txBody>
+                    <a:bodyPr wrap="square"/>
+                    <a:lstStyle/>
+                    <a:p>
+                      <a:pPr algn="ctr"/>
+                      <a:r>
+                        <a:rPr sz="1200" b="1" i="0">
+                          <a:solidFill>
+                            <a:srgbClr val="25323A"/>
+                          </a:solidFill>
+                          <a:latin typeface="Segoe UI"/>
+                        </a:rPr>
+                        <a:t>1.2</a:t>
+                      </a:r>
+                    </a:p>
+                  </a:txBody>
+                  <a:tcPr anchor="ctr" marL="88900" marR="63500" marT="25400" marB="25400">
+                    <a:solidFill>
+                      <a:srgbClr val="F3F8F9"/>
+                    </a:solidFill>
+                  </a:tcPr>
+                </a:tc>
+                <a:tc>
+                  <a:txBody>
+                    <a:bodyPr wrap="square"/>
+                    <a:lstStyle/>
+                    <a:p>
+                      <a:pPr algn="l"/>
+                      <a:r>
+                        <a:rPr sz="1100" b="0" i="0">
+                          <a:solidFill>
+                            <a:srgbClr val="25323A"/>
+                          </a:solidFill>
+                          <a:latin typeface="Segoe UI"/>
+                        </a:rPr>
+                        <a:t>Smooth circular cylinder (Morison). Standard 1.0–1.2 (DNV-RP-C205; Sarpkaya). </a:t>
+                      </a:r>
+                      <a:r>
+                        <a:rPr sz="1100" b="0" i="1">
+                          <a:solidFill>
+                            <a:srgbClr val="25323A"/>
+                          </a:solidFill>
+                          <a:latin typeface="Segoe UI"/>
+                        </a:rPr>
+                        <a:t>Sets surge &amp; pitch drag; negligible in heave.</a:t>
+                      </a:r>
+                    </a:p>
+                  </a:txBody>
+                  <a:tcPr anchor="ctr" marL="88900" marR="63500" marT="25400" marB="25400">
+                    <a:solidFill>
+                      <a:srgbClr val="F3F8F9"/>
+                    </a:solidFill>
+                  </a:tcPr>
+                </a:tc>
+              </a:tr>
+              <a:tr h="585216">
+                <a:tc>
+                  <a:txBody>
+                    <a:bodyPr wrap="square"/>
+                    <a:lstStyle/>
+                    <a:p>
+                      <a:pPr algn="l"/>
+                      <a:r>
+                        <a:rPr sz="1200" b="0" i="0">
+                          <a:solidFill>
+                            <a:srgbClr val="25323A"/>
+                          </a:solidFill>
+                          <a:latin typeface="Segoe UI"/>
+                        </a:rPr>
+                        <a:t>Heave-plate normal  </a:t>
+                      </a:r>
+                      <a:r>
+                        <a:rPr sz="1200" b="0" i="1">
+                          <a:solidFill>
+                            <a:srgbClr val="25323A"/>
+                          </a:solidFill>
+                          <a:latin typeface="Segoe UI"/>
+                        </a:rPr>
+                        <a:t>Cd_n</a:t>
+                      </a:r>
+                    </a:p>
+                  </a:txBody>
+                  <a:tcPr anchor="ctr" marL="88900" marR="63500" marT="25400" marB="25400">
+                    <a:solidFill>
+                      <a:srgbClr val="FFFFFF"/>
+                    </a:solidFill>
+                  </a:tcPr>
+                </a:tc>
+                <a:tc>
+                  <a:txBody>
+                    <a:bodyPr wrap="square"/>
+                    <a:lstStyle/>
+                    <a:p>
+                      <a:pPr algn="ctr"/>
+                      <a:r>
+                        <a:rPr sz="1200" b="1" i="0">
+                          <a:solidFill>
+                            <a:srgbClr val="D1543A"/>
+                          </a:solidFill>
+                          <a:latin typeface="Segoe UI"/>
+                        </a:rPr>
+                        <a:t>5.0</a:t>
+                      </a:r>
+                    </a:p>
+                  </a:txBody>
+                  <a:tcPr anchor="ctr" marL="88900" marR="63500" marT="25400" marB="25400">
+                    <a:solidFill>
+                      <a:srgbClr val="FFFFFF"/>
+                    </a:solidFill>
+                  </a:tcPr>
+                </a:tc>
+                <a:tc>
+                  <a:txBody>
+                    <a:bodyPr wrap="square"/>
+                    <a:lstStyle/>
+                    <a:p>
+                      <a:pPr algn="l"/>
+                      <a:r>
+                        <a:rPr sz="1100" b="0" i="0">
+                          <a:solidFill>
+                            <a:srgbClr val="25323A"/>
+                          </a:solidFill>
+                          <a:latin typeface="Segoe UI"/>
+                        </a:rPr>
+                        <a:t>Flat disc at low KC (≈ 2–3 at a 100 mm release): flow separates, published Cd ≈ 4–8. Dominates heave damping.  </a:t>
+                      </a:r>
+                      <a:r>
+                        <a:rPr sz="1100" b="1" i="0">
+                          <a:solidFill>
+                            <a:srgbClr val="D1543A"/>
+                          </a:solidFill>
+                          <a:latin typeface="Segoe UI"/>
+                        </a:rPr>
+                        <a:t>Placeholder → the tank pins it.</a:t>
+                      </a:r>
+                    </a:p>
+                  </a:txBody>
+                  <a:tcPr anchor="ctr" marL="88900" marR="63500" marT="25400" marB="25400">
+                    <a:solidFill>
+                      <a:srgbClr val="FFFFFF"/>
+                    </a:solidFill>
+                  </a:tcPr>
+                </a:tc>
+              </a:tr>
+              <a:tr h="585216">
+                <a:tc>
+                  <a:txBody>
+                    <a:bodyPr wrap="square"/>
+                    <a:lstStyle/>
+                    <a:p>
+                      <a:pPr algn="l"/>
+                      <a:r>
+                        <a:rPr sz="1200" b="0" i="0">
+                          <a:solidFill>
+                            <a:srgbClr val="25323A"/>
+                          </a:solidFill>
+                          <a:latin typeface="Segoe UI"/>
+                        </a:rPr>
+                        <a:t>Heave-plate tangential  </a:t>
+                      </a:r>
+                      <a:r>
+                        <a:rPr sz="1200" b="0" i="1">
+                          <a:solidFill>
+                            <a:srgbClr val="25323A"/>
+                          </a:solidFill>
+                          <a:latin typeface="Segoe UI"/>
+                        </a:rPr>
+                        <a:t>Cd_t</a:t>
+                      </a:r>
+                    </a:p>
+                  </a:txBody>
+                  <a:tcPr anchor="ctr" marL="88900" marR="63500" marT="25400" marB="25400">
+                    <a:solidFill>
+                      <a:srgbClr val="F3F8F9"/>
+                    </a:solidFill>
+                  </a:tcPr>
+                </a:tc>
+                <a:tc>
+                  <a:txBody>
+                    <a:bodyPr wrap="square"/>
+                    <a:lstStyle/>
+                    <a:p>
+                      <a:pPr algn="ctr"/>
+                      <a:r>
+                        <a:rPr sz="1200" b="1" i="0">
+                          <a:solidFill>
+                            <a:srgbClr val="25323A"/>
+                          </a:solidFill>
+                          <a:latin typeface="Segoe UI"/>
+                        </a:rPr>
+                        <a:t>1.5</a:t>
+                      </a:r>
+                    </a:p>
+                  </a:txBody>
+                  <a:tcPr anchor="ctr" marL="88900" marR="63500" marT="25400" marB="25400">
+                    <a:solidFill>
+                      <a:srgbClr val="F3F8F9"/>
+                    </a:solidFill>
+                  </a:tcPr>
+                </a:tc>
+                <a:tc>
+                  <a:txBody>
+                    <a:bodyPr wrap="square"/>
+                    <a:lstStyle/>
+                    <a:p>
+                      <a:pPr algn="l"/>
+                      <a:r>
+                        <a:rPr sz="1100" b="0" i="0">
+                          <a:solidFill>
+                            <a:srgbClr val="25323A"/>
+                          </a:solidFill>
+                          <a:latin typeface="Segoe UI"/>
+                        </a:rPr>
+                        <a:t>Edge / skin friction on the rim; small contribution.</a:t>
+                      </a:r>
+                    </a:p>
+                  </a:txBody>
+                  <a:tcPr anchor="ctr" marL="88900" marR="63500" marT="25400" marB="25400">
+                    <a:solidFill>
+                      <a:srgbClr val="F3F8F9"/>
+                    </a:solidFill>
+                  </a:tcPr>
+                </a:tc>
+              </a:tr>
+              <a:tr h="585216">
+                <a:tc>
+                  <a:txBody>
+                    <a:bodyPr wrap="square"/>
+                    <a:lstStyle/>
+                    <a:p>
+                      <a:pPr algn="l"/>
+                      <a:r>
+                        <a:rPr sz="1200" b="0" i="0">
+                          <a:solidFill>
+                            <a:srgbClr val="25323A"/>
+                          </a:solidFill>
+                          <a:latin typeface="Segoe UI"/>
+                        </a:rPr>
+                        <a:t>Plate added mass</a:t>
+                      </a:r>
+                    </a:p>
+                  </a:txBody>
+                  <a:tcPr anchor="ctr" marL="88900" marR="63500" marT="25400" marB="25400">
+                    <a:solidFill>
+                      <a:srgbClr val="FFFFFF"/>
+                    </a:solidFill>
+                  </a:tcPr>
+                </a:tc>
+                <a:tc>
+                  <a:txBody>
+                    <a:bodyPr wrap="square"/>
+                    <a:lstStyle/>
+                    <a:p>
+                      <a:pPr algn="ctr"/>
+                      <a:r>
+                        <a:rPr sz="1200" b="1" i="0">
+                          <a:solidFill>
+                            <a:srgbClr val="D1543A"/>
+                          </a:solidFill>
+                          <a:latin typeface="Segoe UI"/>
+                        </a:rPr>
+                        <a:t>solid disc, Ø0.287 m</a:t>
+                      </a:r>
+                    </a:p>
+                  </a:txBody>
+                  <a:tcPr anchor="ctr" marL="88900" marR="63500" marT="25400" marB="25400">
+                    <a:solidFill>
+                      <a:srgbClr val="FFFFFF"/>
+                    </a:solidFill>
+                  </a:tcPr>
+                </a:tc>
+                <a:tc>
+                  <a:txBody>
+                    <a:bodyPr wrap="square"/>
+                    <a:lstStyle/>
+                    <a:p>
+                      <a:pPr algn="l"/>
+                      <a:r>
+                        <a:rPr sz="1100" b="0" i="0">
+                          <a:solidFill>
+                            <a:srgbClr val="25323A"/>
+                          </a:solidFill>
+                          <a:latin typeface="Segoe UI"/>
+                        </a:rPr>
+                        <a:t>Potential-flow UPPER bound — the perforated/webbed frame passes flow, so it adds less (porous-disk theory, Molin).  </a:t>
+                      </a:r>
+                      <a:r>
+                        <a:rPr sz="1100" b="1" i="0">
+                          <a:solidFill>
+                            <a:srgbClr val="D1543A"/>
+                          </a:solidFill>
+                          <a:latin typeface="Segoe UI"/>
+                        </a:rPr>
+                        <a:t>Bracket → the tank pins A33.</a:t>
+                      </a:r>
+                    </a:p>
+                  </a:txBody>
+                  <a:tcPr anchor="ctr" marL="88900" marR="63500" marT="25400" marB="25400">
+                    <a:solidFill>
+                      <a:srgbClr val="FFFFFF"/>
+                    </a:solidFill>
+                  </a:tcPr>
+                </a:tc>
+              </a:tr>
+              <a:tr h="585216">
+                <a:tc>
+                  <a:txBody>
+                    <a:bodyPr wrap="square"/>
+                    <a:lstStyle/>
+                    <a:p>
+                      <a:pPr algn="l"/>
+                      <a:r>
+                        <a:rPr sz="1200" b="0" i="0">
+                          <a:solidFill>
+                            <a:srgbClr val="25323A"/>
+                          </a:solidFill>
+                          <a:latin typeface="Segoe UI"/>
+                        </a:rPr>
+                        <a:t>Mass / CoG</a:t>
+                      </a:r>
+                    </a:p>
+                  </a:txBody>
+                  <a:tcPr anchor="ctr" marL="88900" marR="63500" marT="25400" marB="25400">
+                    <a:solidFill>
+                      <a:srgbClr val="F3F8F9"/>
+                    </a:solidFill>
+                  </a:tcPr>
+                </a:tc>
+                <a:tc>
+                  <a:txBody>
+                    <a:bodyPr wrap="square"/>
+                    <a:lstStyle/>
+                    <a:p>
+                      <a:pPr algn="ctr"/>
+                      <a:r>
+                        <a:rPr sz="1200" b="1" i="0">
+                          <a:solidFill>
+                            <a:srgbClr val="25323A"/>
+                          </a:solidFill>
+                          <a:latin typeface="Segoe UI"/>
+                        </a:rPr>
+                        <a:t>21.52 kg;  −0.907 m</a:t>
+                      </a:r>
+                    </a:p>
+                  </a:txBody>
+                  <a:tcPr anchor="ctr" marL="88900" marR="63500" marT="25400" marB="25400">
+                    <a:solidFill>
+                      <a:srgbClr val="F3F8F9"/>
+                    </a:solidFill>
+                  </a:tcPr>
+                </a:tc>
+                <a:tc>
+                  <a:txBody>
+                    <a:bodyPr wrap="square"/>
+                    <a:lstStyle/>
+                    <a:p>
+                      <a:pPr algn="l"/>
+                      <a:r>
+                        <a:rPr sz="1100" b="0" i="0">
+                          <a:solidFill>
+                            <a:srgbClr val="25323A"/>
+                          </a:solidFill>
+                          <a:latin typeface="Segoe UI"/>
+                        </a:rPr>
+                        <a:t>Spreadsheet structure 8.16 kg + measured unloaded waterline 967 mm. Independent geometry check (cyl + frame + lead) agrees within ~1.5%.</a:t>
+                      </a:r>
+                    </a:p>
+                  </a:txBody>
+                  <a:tcPr anchor="ctr" marL="88900" marR="63500" marT="25400" marB="25400">
+                    <a:solidFill>
+                      <a:srgbClr val="F3F8F9"/>
+                    </a:solidFill>
+                  </a:tcPr>
+                </a:tc>
+              </a:tr>
+              <a:tr h="585216">
+                <a:tc>
+                  <a:txBody>
+                    <a:bodyPr wrap="square"/>
+                    <a:lstStyle/>
+                    <a:p>
+                      <a:pPr algn="l"/>
+                      <a:r>
+                        <a:rPr sz="1200" b="0" i="0">
+                          <a:solidFill>
+                            <a:srgbClr val="25323A"/>
+                          </a:solidFill>
+                          <a:latin typeface="Segoe UI"/>
+                        </a:rPr>
+                        <a:t>Pitch / roll inertia</a:t>
+                      </a:r>
+                    </a:p>
+                  </a:txBody>
+                  <a:tcPr anchor="ctr" marL="88900" marR="63500" marT="25400" marB="25400">
+                    <a:solidFill>
+                      <a:srgbClr val="FFFFFF"/>
+                    </a:solidFill>
+                  </a:tcPr>
+                </a:tc>
+                <a:tc>
+                  <a:txBody>
+                    <a:bodyPr wrap="square"/>
+                    <a:lstStyle/>
+                    <a:p>
+                      <a:pPr algn="ctr"/>
+                      <a:r>
+                        <a:rPr sz="1200" b="1" i="0">
+                          <a:solidFill>
+                            <a:srgbClr val="25323A"/>
+                          </a:solidFill>
+                          <a:latin typeface="Segoe UI"/>
+                        </a:rPr>
+                        <a:t>10.2 kg·m²</a:t>
+                      </a:r>
+                    </a:p>
+                  </a:txBody>
+                  <a:tcPr anchor="ctr" marL="88900" marR="63500" marT="25400" marB="25400">
+                    <a:solidFill>
+                      <a:srgbClr val="FFFFFF"/>
+                    </a:solidFill>
+                  </a:tcPr>
+                </a:tc>
+                <a:tc>
+                  <a:txBody>
+                    <a:bodyPr wrap="square"/>
+                    <a:lstStyle/>
+                    <a:p>
+                      <a:pPr algn="l"/>
+                      <a:r>
+                        <a:rPr sz="1100" b="0" i="0">
+                          <a:solidFill>
+                            <a:srgbClr val="25323A"/>
+                          </a:solidFill>
+                          <a:latin typeface="Segoe UI"/>
+                        </a:rPr>
+                        <a:t>gmsh per-part inertia tensors + uniform effective density; the deep lead ballast dominates, so it is robust to the internal mass split. CATIA would refine.</a:t>
+                      </a:r>
+                    </a:p>
+                  </a:txBody>
+                  <a:tcPr anchor="ctr" marL="88900" marR="63500" marT="25400" marB="25400">
+                    <a:solidFill>
+                      <a:srgbClr val="FFFFFF"/>
+                    </a:solidFill>
+                  </a:tcPr>
+                </a:tc>
+              </a:tr>
+              <a:tr h="585216">
+                <a:tc>
+                  <a:txBody>
+                    <a:bodyPr wrap="square"/>
+                    <a:lstStyle/>
+                    <a:p>
+                      <a:pPr algn="l"/>
+                      <a:r>
+                        <a:rPr sz="1200" b="0" i="0">
+                          <a:solidFill>
+                            <a:srgbClr val="25323A"/>
+                          </a:solidFill>
+                          <a:latin typeface="Segoe UI"/>
+                        </a:rPr>
+                        <a:t>Water &amp; BEM</a:t>
+                      </a:r>
+                    </a:p>
+                  </a:txBody>
+                  <a:tcPr anchor="ctr" marL="88900" marR="63500" marT="25400" marB="25400">
+                    <a:solidFill>
+                      <a:srgbClr val="F3F8F9"/>
+                    </a:solidFill>
+                  </a:tcPr>
+                </a:tc>
+                <a:tc>
+                  <a:txBody>
+                    <a:bodyPr wrap="square"/>
+                    <a:lstStyle/>
+                    <a:p>
+                      <a:pPr algn="ctr"/>
+                      <a:r>
+                        <a:rPr sz="1200" b="1" i="0">
+                          <a:solidFill>
+                            <a:srgbClr val="25323A"/>
+                          </a:solidFill>
+                          <a:latin typeface="Segoe UI"/>
+                        </a:rPr>
+                        <a:t>fresh; deep; linear</a:t>
+                      </a:r>
+                    </a:p>
+                  </a:txBody>
+                  <a:tcPr anchor="ctr" marL="88900" marR="63500" marT="25400" marB="25400">
+                    <a:solidFill>
+                      <a:srgbClr val="F3F8F9"/>
+                    </a:solidFill>
+                  </a:tcPr>
+                </a:tc>
+                <a:tc>
+                  <a:txBody>
+                    <a:bodyPr wrap="square"/>
+                    <a:lstStyle/>
+                    <a:p>
+                      <a:pPr algn="l"/>
+                      <a:r>
+                        <a:rPr sz="1100" b="0" i="0">
+                          <a:solidFill>
+                            <a:srgbClr val="25323A"/>
+                          </a:solidFill>
+                          <a:latin typeface="Segoe UI"/>
+                        </a:rPr>
+                        <a:t>OSU Hinsdale lab is fresh (ρ = 998); period is density-independent for a free body. Potential flow is inviscid — viscous drag added via Morison. Confirm tank depth vs 1.42 m draft.</a:t>
+                      </a:r>
+                    </a:p>
+                  </a:txBody>
+                  <a:tcPr anchor="ctr" marL="88900" marR="63500" marT="25400" marB="25400">
+                    <a:solidFill>
+                      <a:srgbClr val="F3F8F9"/>
+                    </a:solidFill>
+                  </a:tcPr>
+                </a:tc>
+              </a:tr>
+            </a:tbl>
+          </a:graphicData>
+        </a:graphic>
+      </p:graphicFrame>
+      <p:sp>
+        <p:nvSpPr>
+          <p:cNvPr id="6" name="TextBox 5"/>
+          <p:cNvSpPr txBox="1"/>
+          <p:nvPr/>
+        </p:nvSpPr>
+        <p:spPr>
+          <a:xfrm>
+            <a:off x="502920" y="6272784"/>
+            <a:ext cx="11201400" cy="457200"/>
+          </a:xfrm>
+          <a:prstGeom prst="rect">
+            <a:avLst/>
+          </a:prstGeom>
+          <a:noFill/>
+        </p:spPr>
+        <p:txBody>
+          <a:bodyPr wrap="square">
+            <a:spAutoFit/>
+          </a:bodyPr>
+          <a:lstStyle/>
+          <a:p>
+            <a:r>
+              <a:rPr sz="1050" b="1">
+                <a:solidFill>
+                  <a:srgbClr val="D1543A"/>
+                </a:solidFill>
+                <a:latin typeface="Segoe UI"/>
+              </a:rPr>
+              <a:t>Red = placeholder the tank measures</a:t>
+            </a:r>
+            <a:r>
+              <a:rPr sz="1050" b="0">
+                <a:solidFill>
+                  <a:srgbClr val="54636D"/>
+                </a:solidFill>
+                <a:latin typeface="Segoe UI"/>
+              </a:rPr>
+              <a:t>  (period → plate added mass, decay rate → plate Cd).  Coefficient ranges per DNV-RP-C205 &amp; Sarpkaya; perforated-plate reduction per porous-disk theory.</a:t>
+            </a:r>
+          </a:p>
+        </p:txBody>
+      </p:sp>
+    </p:spTree>
+  </p:cSld>
+  <p:clrMapOvr>
+    <a:masterClrMapping/>
+  </p:clrMapOvr>
+</p:sld>
+</file>
+
+<file path=ppt/slides/slide11.xml><?xml version="1.0" encoding="utf-8"?>
+<p:sld xmlns:a="http://schemas.openxmlformats.org/drawingml/2006/main" xmlns:p="http://schemas.openxmlformats.org/presentationml/2006/main" xmlns:r="http://schemas.openxmlformats.org/officeDocument/2006/relationships">
+  <p:cSld>
+    <p:bg>
+      <p:bgPr>
+        <a:solidFill>
+          <a:srgbClr val="FFFFFF"/>
+        </a:solidFill>
+        <a:effectLst/>
+      </p:bgPr>
+    </p:bg>
+    <p:spTree>
+      <p:nvGrpSpPr>
+        <p:cNvPr id="1" name=""/>
+        <p:cNvGrpSpPr/>
+        <p:nvPr/>
+      </p:nvGrpSpPr>
+      <p:grpSpPr/>
+      <p:sp>
+        <p:nvSpPr>
+          <p:cNvPr id="2" name="TextBox 1"/>
+          <p:cNvSpPr txBox="1"/>
+          <p:nvPr/>
+        </p:nvSpPr>
+        <p:spPr>
+          <a:xfrm>
+            <a:off x="640080" y="384048"/>
+            <a:ext cx="10972800" cy="365760"/>
+          </a:xfrm>
+          <a:prstGeom prst="rect">
+            <a:avLst/>
+          </a:prstGeom>
+          <a:noFill/>
+        </p:spPr>
+        <p:txBody>
+          <a:bodyPr wrap="none">
+            <a:spAutoFit/>
+          </a:bodyPr>
+          <a:lstStyle/>
+          <a:p>
+            <a:r>
+              <a:rPr sz="1300" b="1">
+                <a:solidFill>
+                  <a:srgbClr val="0C8B96"/>
+                </a:solidFill>
+                <a:latin typeface="Segoe UI"/>
+              </a:rPr>
+              <a:t>WHAT TO EXPECT</a:t>
+            </a:r>
+          </a:p>
+        </p:txBody>
+      </p:sp>
+      <p:sp>
+        <p:nvSpPr>
+          <p:cNvPr id="3" name="TextBox 2"/>
+          <p:cNvSpPr txBox="1"/>
+          <p:nvPr/>
+        </p:nvSpPr>
+        <p:spPr>
+          <a:xfrm>
+            <a:off x="640080" y="658368"/>
+            <a:ext cx="10972800" cy="822960"/>
+          </a:xfrm>
+          <a:prstGeom prst="rect">
+            <a:avLst/>
+          </a:prstGeom>
+          <a:noFill/>
+        </p:spPr>
+        <p:txBody>
+          <a:bodyPr wrap="none">
+            <a:spAutoFit/>
+          </a:bodyPr>
+          <a:lstStyle/>
+          <a:p>
+            <a:r>
+              <a:rPr sz="3000" b="1">
+                <a:solidFill>
+                  <a:srgbClr val="25323A"/>
+                </a:solidFill>
+                <a:latin typeface="Segoe UI"/>
+              </a:rPr>
+              <a:t>Pre-test heave decay prediction</a:t>
+            </a:r>
+          </a:p>
+        </p:txBody>
+      </p:sp>
+      <p:sp>
+        <p:nvSpPr>
+          <p:cNvPr id="4" name="Rectangle 3"/>
+          <p:cNvSpPr/>
+          <p:nvPr/>
+        </p:nvSpPr>
+        <p:spPr>
+          <a:xfrm>
+            <a:off x="658368" y="1444752"/>
+            <a:ext cx="2011680" cy="54864"/>
+          </a:xfrm>
+          <a:prstGeom prst="rect">
+            <a:avLst/>
+          </a:prstGeom>
+          <a:solidFill>
+            <a:srgbClr val="0C8B96"/>
+          </a:solidFill>
+          <a:ln>
+            <a:noFill/>
+          </a:ln>
+          <a:effectLst/>
+        </p:spPr>
+        <p:style>
+          <a:lnRef idx="1">
+            <a:schemeClr val="accent1"/>
+          </a:lnRef>
+          <a:fillRef idx="3">
+            <a:schemeClr val="accent1"/>
+          </a:fillRef>
+          <a:effectRef idx="2">
+            <a:schemeClr val="accent1"/>
+          </a:effectRef>
+          <a:fontRef idx="minor">
+            <a:schemeClr val="lt1"/>
+          </a:fontRef>
+        </p:style>
+        <p:txBody>
+          <a:bodyPr rtlCol="0" anchor="ctr"/>
+          <a:lstStyle/>
+          <a:p>
+            <a:pPr algn="ctr"/>
+          </a:p>
+        </p:txBody>
+      </p:sp>
+      <p:pic>
+        <p:nvPicPr>
+          <p:cNvPr id="5" name="Picture 4" descr="OSU_heave_decay_prediction.png"/>
+          <p:cNvPicPr>
+            <a:picLocks noChangeAspect="1"/>
+          </p:cNvPicPr>
+          <p:nvPr/>
+        </p:nvPicPr>
+        <p:blipFill>
+          <a:blip r:embed="rId2"/>
+          <a:stretch>
+            <a:fillRect/>
+          </a:stretch>
+        </p:blipFill>
+        <p:spPr>
+          <a:xfrm>
+            <a:off x="1051560" y="1691640"/>
+            <a:ext cx="10058400" cy="3923260"/>
+          </a:xfrm>
+          <a:prstGeom prst="rect">
+            <a:avLst/>
+          </a:prstGeom>
+        </p:spPr>
+      </p:pic>
+      <p:sp>
+        <p:nvSpPr>
+          <p:cNvPr id="6" name="Rectangle 5"/>
+          <p:cNvSpPr/>
+          <p:nvPr/>
+        </p:nvSpPr>
+        <p:spPr>
+          <a:xfrm>
+            <a:off x="777240" y="5806440"/>
+            <a:ext cx="10607040" cy="749808"/>
+          </a:xfrm>
+          <a:prstGeom prst="rect">
+            <a:avLst/>
+          </a:prstGeom>
+          <a:solidFill>
+            <a:srgbClr val="EEF6F7"/>
+          </a:solidFill>
+          <a:ln>
+            <a:noFill/>
+          </a:ln>
+          <a:effectLst/>
+        </p:spPr>
+        <p:style>
+          <a:lnRef idx="1">
+            <a:schemeClr val="accent1"/>
+          </a:lnRef>
+          <a:fillRef idx="3">
+            <a:schemeClr val="accent1"/>
+          </a:fillRef>
+          <a:effectRef idx="2">
+            <a:schemeClr val="accent1"/>
+          </a:effectRef>
+          <a:fontRef idx="minor">
+            <a:schemeClr val="lt1"/>
+          </a:fontRef>
+        </p:style>
+        <p:txBody>
+          <a:bodyPr rtlCol="0" anchor="ctr"/>
+          <a:lstStyle/>
+          <a:p>
+            <a:pPr algn="ctr"/>
+          </a:p>
+        </p:txBody>
+      </p:sp>
+      <p:sp>
+        <p:nvSpPr>
+          <p:cNvPr id="7" name="TextBox 6"/>
+          <p:cNvSpPr txBox="1"/>
+          <p:nvPr/>
+        </p:nvSpPr>
+        <p:spPr>
+          <a:xfrm>
+            <a:off x="960120" y="5852160"/>
+            <a:ext cx="10241280" cy="658368"/>
+          </a:xfrm>
+          <a:prstGeom prst="rect">
+            <a:avLst/>
+          </a:prstGeom>
+          <a:noFill/>
+        </p:spPr>
+        <p:txBody>
+          <a:bodyPr wrap="square" anchor="ctr">
+            <a:spAutoFit/>
+          </a:bodyPr>
+          <a:lstStyle/>
+          <a:p>
+            <a:pPr algn="ctr"/>
+            <a:r>
+              <a:rPr sz="1400" b="1">
+                <a:solidFill>
+                  <a:srgbClr val="0A5560"/>
+                </a:solidFill>
+                <a:latin typeface="Segoe UI"/>
+              </a:rPr>
+              <a:t>Period is predictable → T ≈ 2.3–2.4 s</a:t>
+            </a:r>
+            <a:r>
+              <a:rPr sz="1400" b="0">
+                <a:solidFill>
+                  <a:srgbClr val="25323A"/>
+                </a:solidFill>
+                <a:latin typeface="Segoe UI"/>
+              </a:rPr>
+              <a:t>   (M, C₃₃ known; only plate added mass uncertain).   </a:t>
+            </a:r>
+            <a:r>
+              <a:rPr sz="1400" b="1">
+                <a:solidFill>
+                  <a:srgbClr val="D1543A"/>
+                </a:solidFill>
+                <a:latin typeface="Segoe UI"/>
+              </a:rPr>
+              <a:t>Damping is the measurement</a:t>
+            </a:r>
+            <a:r>
+              <a:rPr sz="1400" b="0">
+                <a:solidFill>
+                  <a:srgbClr val="25323A"/>
+                </a:solidFill>
+                <a:latin typeface="Segoe UI"/>
+              </a:rPr>
+              <a:t>  → ζ₁ ≈ 8–15% at 100 mm.  Test pins: period→added mass, decay→drag Cd.</a:t>
+            </a:r>
+          </a:p>
+        </p:txBody>
+      </p:sp>
+    </p:spTree>
+  </p:cSld>
+  <p:clrMapOvr>
+    <a:masterClrMapping/>
+  </p:clrMapOvr>
+</p:sld>
+</file>
+
 <file path=ppt/slides/slide2.xml><?xml version="1.0" encoding="utf-8"?>
 <p:sld xmlns:a="http://schemas.openxmlformats.org/drawingml/2006/main" xmlns:p="http://schemas.openxmlformats.org/presentationml/2006/main" xmlns:r="http://schemas.openxmlformats.org/officeDocument/2006/relationships">
   <p:cSld>
@@ -3743,7 +4853,7 @@
                 </a:solidFill>
                 <a:latin typeface="Segoe UI"/>
               </a:rPr>
-              <a:t>OVERVIEW</a:t>
+              <a:t>THE MODEL</a:t>
             </a:r>
           </a:p>
         </p:txBody>
@@ -3777,7 +4887,7 @@
                 </a:solidFill>
                 <a:latin typeface="Segoe UI"/>
               </a:rPr>
-              <a:t>The two sub-problems — and how they combine</a:t>
+              <a:t>The mesh we solve on</a:t>
             </a:r>
           </a:p>
         </p:txBody>
@@ -3828,7 +4938,7 @@
       </p:sp>
       <p:pic>
         <p:nvPicPr>
-          <p:cNvPr id="5" name="Picture 4" descr="Capytaine_explained.png"/>
+          <p:cNvPr id="5" name="Picture 4" descr="OSU_buoy_mesh_capytaine.png"/>
           <p:cNvPicPr>
             <a:picLocks noChangeAspect="1"/>
           </p:cNvPicPr>
@@ -3842,14 +4952,129 @@
         </p:blipFill>
         <p:spPr>
           <a:xfrm>
-            <a:off x="1600200" y="1691640"/>
-            <a:ext cx="7848985" cy="4754880"/>
+            <a:off x="3063240" y="1371600"/>
+            <a:ext cx="6881071" cy="4553712"/>
           </a:xfrm>
           <a:prstGeom prst="rect">
             <a:avLst/>
           </a:prstGeom>
         </p:spPr>
       </p:pic>
+      <p:sp>
+        <p:nvSpPr>
+          <p:cNvPr id="6" name="Rectangle 5"/>
+          <p:cNvSpPr/>
+          <p:nvPr/>
+        </p:nvSpPr>
+        <p:spPr>
+          <a:xfrm>
+            <a:off x="777240" y="6035040"/>
+            <a:ext cx="10607040" cy="640080"/>
+          </a:xfrm>
+          <a:prstGeom prst="rect">
+            <a:avLst/>
+          </a:prstGeom>
+          <a:solidFill>
+            <a:srgbClr val="EEF6F7"/>
+          </a:solidFill>
+          <a:ln>
+            <a:noFill/>
+          </a:ln>
+          <a:effectLst/>
+        </p:spPr>
+        <p:style>
+          <a:lnRef idx="1">
+            <a:schemeClr val="accent1"/>
+          </a:lnRef>
+          <a:fillRef idx="3">
+            <a:schemeClr val="accent1"/>
+          </a:fillRef>
+          <a:effectRef idx="2">
+            <a:schemeClr val="accent1"/>
+          </a:effectRef>
+          <a:fontRef idx="minor">
+            <a:schemeClr val="lt1"/>
+          </a:fontRef>
+        </p:style>
+        <p:txBody>
+          <a:bodyPr rtlCol="0" anchor="ctr"/>
+          <a:lstStyle/>
+          <a:p>
+            <a:pPr algn="ctr"/>
+          </a:p>
+        </p:txBody>
+      </p:sp>
+      <p:sp>
+        <p:nvSpPr>
+          <p:cNvPr id="7" name="TextBox 6"/>
+          <p:cNvSpPr txBox="1"/>
+          <p:nvPr/>
+        </p:nvSpPr>
+        <p:spPr>
+          <a:xfrm>
+            <a:off x="960120" y="6071616"/>
+            <a:ext cx="10241280" cy="566928"/>
+          </a:xfrm>
+          <a:prstGeom prst="rect">
+            <a:avLst/>
+          </a:prstGeom>
+          <a:noFill/>
+        </p:spPr>
+        <p:txBody>
+          <a:bodyPr wrap="square" anchor="ctr">
+            <a:spAutoFit/>
+          </a:bodyPr>
+          <a:lstStyle/>
+          <a:p>
+            <a:pPr algn="ctr"/>
+            <a:r>
+              <a:rPr sz="1300" b="0">
+                <a:solidFill>
+                  <a:srgbClr val="25323A"/>
+                </a:solidFill>
+                <a:latin typeface="Segoe UI"/>
+              </a:rPr>
+              <a:t>6″ spar cylinder + a </a:t>
+            </a:r>
+            <a:r>
+              <a:rPr sz="1300" b="1">
+                <a:solidFill>
+                  <a:srgbClr val="0A5560"/>
+                </a:solidFill>
+                <a:latin typeface="Segoe UI"/>
+              </a:rPr>
+              <a:t>placeholder solid equal-area disc</a:t>
+            </a:r>
+            <a:r>
+              <a:rPr sz="1300" b="0">
+                <a:solidFill>
+                  <a:srgbClr val="25323A"/>
+                </a:solidFill>
+                <a:latin typeface="Segoe UI"/>
+              </a:rPr>
+              <a:t> for the perforated heave plate.  Capytaine meshes the </a:t>
+            </a:r>
+            <a:r>
+              <a:rPr sz="1300" b="1">
+                <a:solidFill>
+                  <a:srgbClr val="25323A"/>
+                </a:solidFill>
+                <a:latin typeface="Segoe UI"/>
+              </a:rPr>
+              <a:t>wetted part (z &lt; 0, 3408 panels)</a:t>
+            </a:r>
+            <a:r>
+              <a:rPr sz="1300" b="0">
+                <a:solidFill>
+                  <a:srgbClr val="25323A"/>
+                </a:solidFill>
+                <a:latin typeface="Segoe UI"/>
+              </a:rPr>
+              <a:t>; the plate’s real hydro comes from the tank.</a:t>
+            </a:r>
+          </a:p>
+        </p:txBody>
+      </p:sp>
     </p:spTree>
   </p:cSld>
   <p:clrMapOvr>
@@ -3905,7 +5130,7 @@
                 </a:solidFill>
                 <a:latin typeface="Segoe UI"/>
               </a:rPr>
-              <a:t>SUB-PROBLEM ①</a:t>
+              <a:t>OVERVIEW</a:t>
             </a:r>
           </a:p>
         </p:txBody>
@@ -3939,7 +5164,7 @@
                 </a:solidFill>
                 <a:latin typeface="Segoe UI"/>
               </a:rPr>
-              <a:t>Radiation — “body as a wavemaker”</a:t>
+              <a:t>The two sub-problems — and how they combine</a:t>
             </a:r>
           </a:p>
         </p:txBody>
@@ -3988,251 +5213,30 @@
           </a:p>
         </p:txBody>
       </p:sp>
-      <p:sp>
-        <p:nvSpPr>
-          <p:cNvPr id="5" name="TextBox 4"/>
-          <p:cNvSpPr txBox="1"/>
+      <p:pic>
+        <p:nvPicPr>
+          <p:cNvPr id="5" name="Picture 4" descr="Capytaine_explained.png"/>
+          <p:cNvPicPr>
+            <a:picLocks noChangeAspect="1"/>
+          </p:cNvPicPr>
           <p:nvPr/>
-        </p:nvSpPr>
-        <p:spPr>
-          <a:xfrm>
-            <a:off x="777240" y="1828800"/>
-            <a:ext cx="10698480" cy="4572000"/>
+        </p:nvPicPr>
+        <p:blipFill>
+          <a:blip r:embed="rId2"/>
+          <a:stretch>
+            <a:fillRect/>
+          </a:stretch>
+        </p:blipFill>
+        <p:spPr>
+          <a:xfrm>
+            <a:off x="1600200" y="1691640"/>
+            <a:ext cx="7848985" cy="4754880"/>
           </a:xfrm>
           <a:prstGeom prst="rect">
             <a:avLst/>
           </a:prstGeom>
-          <a:noFill/>
-        </p:spPr>
-        <p:txBody>
-          <a:bodyPr wrap="square">
-            <a:spAutoFit/>
-          </a:bodyPr>
-          <a:lstStyle/>
-          <a:p>
-            <a:pPr>
-              <a:spcBef>
-                <a:spcPts val="200"/>
-              </a:spcBef>
-              <a:spcAft>
-                <a:spcPts val="1200"/>
-              </a:spcAft>
-            </a:pPr>
-            <a:r>
-              <a:rPr sz="1800">
-                <a:solidFill>
-                  <a:srgbClr val="0C8B96"/>
-                </a:solidFill>
-                <a:latin typeface="Segoe UI"/>
-              </a:rPr>
-              <a:t>•  </a:t>
-            </a:r>
-            <a:r>
-              <a:rPr sz="1800" b="0" i="0">
-                <a:solidFill>
-                  <a:srgbClr val="25323A"/>
-                </a:solidFill>
-                <a:latin typeface="Segoe UI"/>
-              </a:rPr>
-              <a:t>Turn incident waves </a:t>
-            </a:r>
-            <a:r>
-              <a:rPr sz="1800" b="1" i="0">
-                <a:solidFill>
-                  <a:srgbClr val="25323A"/>
-                </a:solidFill>
-                <a:latin typeface="Segoe UI"/>
-              </a:rPr>
-              <a:t>off</a:t>
-            </a:r>
-            <a:r>
-              <a:rPr sz="1800" b="0" i="0">
-                <a:solidFill>
-                  <a:srgbClr val="25323A"/>
-                </a:solidFill>
-                <a:latin typeface="Segoe UI"/>
-              </a:rPr>
-              <a:t>. Force the body to oscillate in still water — one DOF at a time, at each ω.</a:t>
-            </a:r>
-          </a:p>
-          <a:p>
-            <a:pPr>
-              <a:spcBef>
-                <a:spcPts val="200"/>
-              </a:spcBef>
-              <a:spcAft>
-                <a:spcPts val="1200"/>
-              </a:spcAft>
-            </a:pPr>
-            <a:r>
-              <a:rPr sz="1800">
-                <a:solidFill>
-                  <a:srgbClr val="0C8B96"/>
-                </a:solidFill>
-                <a:latin typeface="Segoe UI"/>
-              </a:rPr>
-              <a:t>•  </a:t>
-            </a:r>
-            <a:r>
-              <a:rPr sz="1800" b="0" i="0">
-                <a:solidFill>
-                  <a:srgbClr val="25323A"/>
-                </a:solidFill>
-                <a:latin typeface="Segoe UI"/>
-              </a:rPr>
-              <a:t>It radiates its own waves; the reaction force has two pieces:</a:t>
-            </a:r>
-          </a:p>
-          <a:p>
-            <a:pPr lvl="1">
-              <a:spcBef>
-                <a:spcPts val="200"/>
-              </a:spcBef>
-              <a:spcAft>
-                <a:spcPts val="1200"/>
-              </a:spcAft>
-            </a:pPr>
-            <a:r>
-              <a:rPr sz="1800">
-                <a:solidFill>
-                  <a:srgbClr val="54636D"/>
-                </a:solidFill>
-                <a:latin typeface="Segoe UI"/>
-              </a:rPr>
-              <a:t>      –  </a:t>
-            </a:r>
-            <a:r>
-              <a:rPr sz="1600" b="1" i="0">
-                <a:solidFill>
-                  <a:srgbClr val="0A5560"/>
-                </a:solidFill>
-                <a:latin typeface="Segoe UI"/>
-              </a:rPr>
-              <a:t>Added mass A(ω)</a:t>
-            </a:r>
-            <a:r>
-              <a:rPr sz="1600" b="0" i="0">
-                <a:solidFill>
-                  <a:srgbClr val="25323A"/>
-                </a:solidFill>
-                <a:latin typeface="Segoe UI"/>
-              </a:rPr>
-              <a:t> — in phase with acceleration (virtual mass of entrained water).</a:t>
-            </a:r>
-          </a:p>
-          <a:p>
-            <a:pPr lvl="1">
-              <a:spcBef>
-                <a:spcPts val="200"/>
-              </a:spcBef>
-              <a:spcAft>
-                <a:spcPts val="1200"/>
-              </a:spcAft>
-            </a:pPr>
-            <a:r>
-              <a:rPr sz="1800">
-                <a:solidFill>
-                  <a:srgbClr val="54636D"/>
-                </a:solidFill>
-                <a:latin typeface="Segoe UI"/>
-              </a:rPr>
-              <a:t>      –  </a:t>
-            </a:r>
-            <a:r>
-              <a:rPr sz="1600" b="1" i="0">
-                <a:solidFill>
-                  <a:srgbClr val="0A5560"/>
-                </a:solidFill>
-                <a:latin typeface="Segoe UI"/>
-              </a:rPr>
-              <a:t>Radiation damping B(ω)</a:t>
-            </a:r>
-            <a:r>
-              <a:rPr sz="1600" b="0" i="0">
-                <a:solidFill>
-                  <a:srgbClr val="25323A"/>
-                </a:solidFill>
-                <a:latin typeface="Segoe UI"/>
-              </a:rPr>
-              <a:t> — in phase with velocity (energy carried off as radiated waves).</a:t>
-            </a:r>
-          </a:p>
-          <a:p>
-            <a:pPr>
-              <a:spcBef>
-                <a:spcPts val="200"/>
-              </a:spcBef>
-              <a:spcAft>
-                <a:spcPts val="1200"/>
-              </a:spcAft>
-            </a:pPr>
-            <a:r>
-              <a:rPr sz="1800">
-                <a:solidFill>
-                  <a:srgbClr val="0C8B96"/>
-                </a:solidFill>
-                <a:latin typeface="Segoe UI"/>
-              </a:rPr>
-              <a:t>•  </a:t>
-            </a:r>
-            <a:r>
-              <a:rPr sz="1800" b="0" i="0">
-                <a:solidFill>
-                  <a:srgbClr val="25323A"/>
-                </a:solidFill>
-                <a:latin typeface="Segoe UI"/>
-              </a:rPr>
-              <a:t>6×6 matrices per ω — captures cross-DOF coupling (e.g. heave → pitch).</a:t>
-            </a:r>
-          </a:p>
-          <a:p>
-            <a:pPr>
-              <a:spcBef>
-                <a:spcPts val="200"/>
-              </a:spcBef>
-              <a:spcAft>
-                <a:spcPts val="1200"/>
-              </a:spcAft>
-            </a:pPr>
-            <a:r>
-              <a:rPr sz="1800">
-                <a:solidFill>
-                  <a:srgbClr val="0C8B96"/>
-                </a:solidFill>
-                <a:latin typeface="Segoe UI"/>
-              </a:rPr>
-              <a:t>•  </a:t>
-            </a:r>
-            <a:r>
-              <a:rPr sz="1800" b="0" i="0">
-                <a:solidFill>
-                  <a:srgbClr val="25323A"/>
-                </a:solidFill>
-                <a:latin typeface="Segoe UI"/>
-              </a:rPr>
-              <a:t>→ This run produces the </a:t>
-            </a:r>
-            <a:r>
-              <a:rPr sz="1800" b="1" i="0">
-                <a:solidFill>
-                  <a:srgbClr val="25323A"/>
-                </a:solidFill>
-                <a:latin typeface="Segoe UI"/>
-              </a:rPr>
-              <a:t>A(ω) and B(ω)</a:t>
-            </a:r>
-            <a:r>
-              <a:rPr sz="1800" b="0" i="0">
-                <a:solidFill>
-                  <a:srgbClr val="25323A"/>
-                </a:solidFill>
-                <a:latin typeface="Segoe UI"/>
-              </a:rPr>
-              <a:t> curves.</a:t>
-            </a:r>
-          </a:p>
-        </p:txBody>
-      </p:sp>
+        </p:spPr>
+      </p:pic>
     </p:spTree>
   </p:cSld>
   <p:clrMapOvr>
@@ -4288,7 +5292,7 @@
                 </a:solidFill>
                 <a:latin typeface="Segoe UI"/>
               </a:rPr>
-              <a:t>SUB-PROBLEM ②</a:t>
+              <a:t>SUB-PROBLEM ①</a:t>
             </a:r>
           </a:p>
         </p:txBody>
@@ -4322,7 +5326,7 @@
                 </a:solidFill>
                 <a:latin typeface="Segoe UI"/>
               </a:rPr>
-              <a:t>Diffraction — “body as an obstacle”</a:t>
+              <a:t>Radiation — “body as a wavemaker”</a:t>
             </a:r>
           </a:p>
         </p:txBody>
@@ -4417,7 +5421,7 @@
                 </a:solidFill>
                 <a:latin typeface="Segoe UI"/>
               </a:rPr>
-              <a:t>Hold the body </a:t>
+              <a:t>Turn incident waves </a:t>
             </a:r>
             <a:r>
               <a:rPr sz="1800" b="1" i="0">
@@ -4426,7 +5430,7 @@
                 </a:solidFill>
                 <a:latin typeface="Segoe UI"/>
               </a:rPr>
-              <a:t>fixed</a:t>
+              <a:t>off</a:t>
             </a:r>
             <a:r>
               <a:rPr sz="1800" b="0" i="0">
@@ -4435,7 +5439,7 @@
                 </a:solidFill>
                 <a:latin typeface="Segoe UI"/>
               </a:rPr>
-              <a:t>. Let incident waves scatter off it.</a:t>
+              <a:t>. Force the body to oscillate in still water — one DOF at a time, at each ω.</a:t>
             </a:r>
           </a:p>
           <a:p>
@@ -4463,25 +5467,7 @@
                 </a:solidFill>
                 <a:latin typeface="Segoe UI"/>
               </a:rPr>
-              <a:t>Net wave-pressure force on the fixed hull = </a:t>
-            </a:r>
-            <a:r>
-              <a:rPr sz="1800" b="1" i="0">
-                <a:solidFill>
-                  <a:srgbClr val="0A5560"/>
-                </a:solidFill>
-                <a:latin typeface="Segoe UI"/>
-              </a:rPr>
-              <a:t>excitation force F_exc(ω, β)</a:t>
-            </a:r>
-            <a:r>
-              <a:rPr sz="1800" b="0" i="0">
-                <a:solidFill>
-                  <a:srgbClr val="25323A"/>
-                </a:solidFill>
-                <a:latin typeface="Segoe UI"/>
-              </a:rPr>
-              <a:t>  (β = wave heading):</a:t>
+              <a:t>It radiates its own waves; the reaction force has two pieces:</a:t>
             </a:r>
           </a:p>
           <a:p>
@@ -4505,11 +5491,11 @@
             <a:r>
               <a:rPr sz="1600" b="1" i="0">
                 <a:solidFill>
-                  <a:srgbClr val="25323A"/>
-                </a:solidFill>
-                <a:latin typeface="Segoe UI"/>
-              </a:rPr>
-              <a:t>Froude–Krylov</a:t>
+                  <a:srgbClr val="0A5560"/>
+                </a:solidFill>
+                <a:latin typeface="Segoe UI"/>
+              </a:rPr>
+              <a:t>Added mass A(ω)</a:t>
             </a:r>
             <a:r>
               <a:rPr sz="1600" b="0" i="0">
@@ -4518,7 +5504,7 @@
                 </a:solidFill>
                 <a:latin typeface="Segoe UI"/>
               </a:rPr>
-              <a:t> — force from the undisturbed incident-wave pressure.</a:t>
+              <a:t> — in phase with acceleration (virtual mass of entrained water).</a:t>
             </a:r>
           </a:p>
           <a:p>
@@ -4542,11 +5528,11 @@
             <a:r>
               <a:rPr sz="1600" b="1" i="0">
                 <a:solidFill>
-                  <a:srgbClr val="25323A"/>
-                </a:solidFill>
-                <a:latin typeface="Segoe UI"/>
-              </a:rPr>
-              <a:t>Diffraction</a:t>
+                  <a:srgbClr val="0A5560"/>
+                </a:solidFill>
+                <a:latin typeface="Segoe UI"/>
+              </a:rPr>
+              <a:t>Radiation damping B(ω)</a:t>
             </a:r>
             <a:r>
               <a:rPr sz="1600" b="0" i="0">
@@ -4555,7 +5541,7 @@
                 </a:solidFill>
                 <a:latin typeface="Segoe UI"/>
               </a:rPr>
-              <a:t> — correction because the body scatters the waves.</a:t>
+              <a:t> — in phase with velocity (energy carried off as radiated waves).</a:t>
             </a:r>
           </a:p>
           <a:p>
@@ -4583,25 +5569,7 @@
                 </a:solidFill>
                 <a:latin typeface="Segoe UI"/>
               </a:rPr>
-              <a:t>→ This run produces the wave forcing </a:t>
-            </a:r>
-            <a:r>
-              <a:rPr sz="1800" b="1" i="0">
-                <a:solidFill>
-                  <a:srgbClr val="25323A"/>
-                </a:solidFill>
-                <a:latin typeface="Segoe UI"/>
-              </a:rPr>
-              <a:t>F_exc(ω)</a:t>
-            </a:r>
-            <a:r>
-              <a:rPr sz="1800" b="0" i="0">
-                <a:solidFill>
-                  <a:srgbClr val="25323A"/>
-                </a:solidFill>
-                <a:latin typeface="Segoe UI"/>
-              </a:rPr>
-              <a:t> that drives the motion.</a:t>
+              <a:t>6×6 matrices per ω — captures cross-DOF coupling (e.g. heave → pitch).</a:t>
             </a:r>
           </a:p>
           <a:p>
@@ -4629,7 +5597,7 @@
                 </a:solidFill>
                 <a:latin typeface="Segoe UI"/>
               </a:rPr>
-              <a:t>Plus the hydrostatic stiffness </a:t>
+              <a:t>→ This run produces the </a:t>
             </a:r>
             <a:r>
               <a:rPr sz="1800" b="1" i="0">
@@ -4638,7 +5606,7 @@
                 </a:solidFill>
                 <a:latin typeface="Segoe UI"/>
               </a:rPr>
-              <a:t>C</a:t>
+              <a:t>A(ω) and B(ω)</a:t>
             </a:r>
             <a:r>
               <a:rPr sz="1800" b="0" i="0">
@@ -4647,7 +5615,7 @@
                 </a:solidFill>
                 <a:latin typeface="Segoe UI"/>
               </a:rPr>
-              <a:t> (buoyancy / waterplane) from the geometry.</a:t>
+              <a:t> curves.</a:t>
             </a:r>
           </a:p>
         </p:txBody>
@@ -4707,7 +5675,7 @@
                 </a:solidFill>
                 <a:latin typeface="Segoe UI"/>
               </a:rPr>
-              <a:t>THE BRIDGE</a:t>
+              <a:t>SUB-PROBLEM ②</a:t>
             </a:r>
           </a:p>
         </p:txBody>
@@ -4741,7 +5709,7 @@
                 </a:solidFill>
                 <a:latin typeface="Segoe UI"/>
               </a:rPr>
-              <a:t>From frequency domain to time-domain simulation</a:t>
+              <a:t>Diffraction — “body as an obstacle”</a:t>
             </a:r>
           </a:p>
         </p:txBody>
@@ -4798,7 +5766,7 @@
         </p:nvSpPr>
         <p:spPr>
           <a:xfrm>
-            <a:off x="777240" y="1737360"/>
+            <a:off x="777240" y="1828800"/>
             <a:ext cx="10698480" cy="4572000"/>
           </a:xfrm>
           <a:prstGeom prst="rect">
@@ -4817,7 +5785,7 @@
                 <a:spcPts val="200"/>
               </a:spcBef>
               <a:spcAft>
-                <a:spcPts val="600"/>
+                <a:spcPts val="1200"/>
               </a:spcAft>
             </a:pPr>
             <a:r>
@@ -4836,7 +5804,7 @@
                 </a:solidFill>
                 <a:latin typeface="Segoe UI"/>
               </a:rPr>
-              <a:t>A(ω), B(ω) can’t go straight into a time-stepper — a transient contains all frequencies at once. Bridge = the </a:t>
+              <a:t>Hold the body </a:t>
             </a:r>
             <a:r>
               <a:rPr sz="1800" b="1" i="0">
@@ -4845,7 +5813,7 @@
                 </a:solidFill>
                 <a:latin typeface="Segoe UI"/>
               </a:rPr>
-              <a:t>Cummins equation</a:t>
+              <a:t>fixed</a:t>
             </a:r>
             <a:r>
               <a:rPr sz="1800" b="0" i="0">
@@ -4854,118 +5822,16 @@
                 </a:solidFill>
                 <a:latin typeface="Segoe UI"/>
               </a:rPr>
-              <a:t>:</a:t>
-            </a:r>
-          </a:p>
-        </p:txBody>
-      </p:sp>
-      <p:sp>
-        <p:nvSpPr>
-          <p:cNvPr id="6" name="Rectangle 5"/>
-          <p:cNvSpPr/>
-          <p:nvPr/>
-        </p:nvSpPr>
-        <p:spPr>
-          <a:xfrm>
-            <a:off x="777240" y="2514600"/>
-            <a:ext cx="10607040" cy="1051560"/>
-          </a:xfrm>
-          <a:prstGeom prst="rect">
-            <a:avLst/>
-          </a:prstGeom>
-          <a:solidFill>
-            <a:srgbClr val="EEF6F7"/>
-          </a:solidFill>
-          <a:ln>
-            <a:noFill/>
-          </a:ln>
-          <a:effectLst/>
-        </p:spPr>
-        <p:style>
-          <a:lnRef idx="1">
-            <a:schemeClr val="accent1"/>
-          </a:lnRef>
-          <a:fillRef idx="3">
-            <a:schemeClr val="accent1"/>
-          </a:fillRef>
-          <a:effectRef idx="2">
-            <a:schemeClr val="accent1"/>
-          </a:effectRef>
-          <a:fontRef idx="minor">
-            <a:schemeClr val="lt1"/>
-          </a:fontRef>
-        </p:style>
-        <p:txBody>
-          <a:bodyPr rtlCol="0" anchor="ctr"/>
-          <a:lstStyle/>
-          <a:p>
-            <a:pPr algn="ctr"/>
-          </a:p>
-        </p:txBody>
-      </p:sp>
-      <p:sp>
-        <p:nvSpPr>
-          <p:cNvPr id="7" name="TextBox 6"/>
-          <p:cNvSpPr txBox="1"/>
-          <p:nvPr/>
-        </p:nvSpPr>
-        <p:spPr>
-          <a:xfrm>
-            <a:off x="914400" y="2651760"/>
-            <a:ext cx="10332720" cy="822960"/>
-          </a:xfrm>
-          <a:prstGeom prst="rect">
-            <a:avLst/>
-          </a:prstGeom>
-          <a:noFill/>
-        </p:spPr>
-        <p:txBody>
-          <a:bodyPr wrap="square" anchor="ctr">
-            <a:spAutoFit/>
-          </a:bodyPr>
-          <a:lstStyle/>
-          <a:p>
-            <a:pPr algn="ctr"/>
-            <a:r>
-              <a:rPr sz="2200" b="1">
-                <a:solidFill>
-                  <a:srgbClr val="25323A"/>
-                </a:solidFill>
-                <a:latin typeface="Cambria Math"/>
-              </a:rPr>
-              <a:t>(M + A∞) ẍ  +  ∫₀ᵗ K(t−τ) ẋ(τ) dτ  +  C x  =  F_exc(t)  +  F_drag(ẋ)</a:t>
-            </a:r>
-          </a:p>
-        </p:txBody>
-      </p:sp>
-      <p:sp>
-        <p:nvSpPr>
-          <p:cNvPr id="8" name="TextBox 7"/>
-          <p:cNvSpPr txBox="1"/>
-          <p:nvPr/>
-        </p:nvSpPr>
-        <p:spPr>
-          <a:xfrm>
-            <a:off x="777240" y="3749039"/>
-            <a:ext cx="10698480" cy="4572000"/>
-          </a:xfrm>
-          <a:prstGeom prst="rect">
-            <a:avLst/>
-          </a:prstGeom>
-          <a:noFill/>
-        </p:spPr>
-        <p:txBody>
-          <a:bodyPr wrap="square">
-            <a:spAutoFit/>
-          </a:bodyPr>
-          <a:lstStyle/>
+              <a:t>. Let incident waves scatter off it.</a:t>
+            </a:r>
+          </a:p>
           <a:p>
             <a:pPr>
               <a:spcBef>
                 <a:spcPts val="200"/>
               </a:spcBef>
               <a:spcAft>
-                <a:spcPts val="1000"/>
+                <a:spcPts val="1200"/>
               </a:spcAft>
             </a:pPr>
             <a:r>
@@ -4978,13 +5844,22 @@
               <a:t>•  </a:t>
             </a:r>
             <a:r>
+              <a:rPr sz="1800" b="0" i="0">
+                <a:solidFill>
+                  <a:srgbClr val="25323A"/>
+                </a:solidFill>
+                <a:latin typeface="Segoe UI"/>
+              </a:rPr>
+              <a:t>Net wave-pressure force on the fixed hull = </a:t>
+            </a:r>
+            <a:r>
               <a:rPr sz="1800" b="1" i="0">
                 <a:solidFill>
                   <a:srgbClr val="0A5560"/>
                 </a:solidFill>
                 <a:latin typeface="Segoe UI"/>
               </a:rPr>
-              <a:t>A∞</a:t>
+              <a:t>excitation force F_exc(ω, β)</a:t>
             </a:r>
             <a:r>
               <a:rPr sz="1800" b="0" i="0">
@@ -4993,7 +5868,81 @@
                 </a:solidFill>
                 <a:latin typeface="Segoe UI"/>
               </a:rPr>
-              <a:t> = infinite-frequency added mass.</a:t>
+              <a:t>  (β = wave heading):</a:t>
+            </a:r>
+          </a:p>
+          <a:p>
+            <a:pPr lvl="1">
+              <a:spcBef>
+                <a:spcPts val="200"/>
+              </a:spcBef>
+              <a:spcAft>
+                <a:spcPts val="1200"/>
+              </a:spcAft>
+            </a:pPr>
+            <a:r>
+              <a:rPr sz="1800">
+                <a:solidFill>
+                  <a:srgbClr val="54636D"/>
+                </a:solidFill>
+                <a:latin typeface="Segoe UI"/>
+              </a:rPr>
+              <a:t>      –  </a:t>
+            </a:r>
+            <a:r>
+              <a:rPr sz="1600" b="1" i="0">
+                <a:solidFill>
+                  <a:srgbClr val="25323A"/>
+                </a:solidFill>
+                <a:latin typeface="Segoe UI"/>
+              </a:rPr>
+              <a:t>Froude–Krylov</a:t>
+            </a:r>
+            <a:r>
+              <a:rPr sz="1600" b="0" i="0">
+                <a:solidFill>
+                  <a:srgbClr val="25323A"/>
+                </a:solidFill>
+                <a:latin typeface="Segoe UI"/>
+              </a:rPr>
+              <a:t> — force from the undisturbed incident-wave pressure.</a:t>
+            </a:r>
+          </a:p>
+          <a:p>
+            <a:pPr lvl="1">
+              <a:spcBef>
+                <a:spcPts val="200"/>
+              </a:spcBef>
+              <a:spcAft>
+                <a:spcPts val="1200"/>
+              </a:spcAft>
+            </a:pPr>
+            <a:r>
+              <a:rPr sz="1800">
+                <a:solidFill>
+                  <a:srgbClr val="54636D"/>
+                </a:solidFill>
+                <a:latin typeface="Segoe UI"/>
+              </a:rPr>
+              <a:t>      –  </a:t>
+            </a:r>
+            <a:r>
+              <a:rPr sz="1600" b="1" i="0">
+                <a:solidFill>
+                  <a:srgbClr val="25323A"/>
+                </a:solidFill>
+                <a:latin typeface="Segoe UI"/>
+              </a:rPr>
+              <a:t>Diffraction</a:t>
+            </a:r>
+            <a:r>
+              <a:rPr sz="1600" b="0" i="0">
+                <a:solidFill>
+                  <a:srgbClr val="25323A"/>
+                </a:solidFill>
+                <a:latin typeface="Segoe UI"/>
+              </a:rPr>
+              <a:t> — correction because the body scatters the waves.</a:t>
             </a:r>
           </a:p>
           <a:p>
@@ -5002,7 +5951,7 @@
                 <a:spcPts val="200"/>
               </a:spcBef>
               <a:spcAft>
-                <a:spcPts val="1000"/>
+                <a:spcPts val="1200"/>
               </a:spcAft>
             </a:pPr>
             <a:r>
@@ -5015,13 +5964,22 @@
               <a:t>•  </a:t>
             </a:r>
             <a:r>
+              <a:rPr sz="1800" b="0" i="0">
+                <a:solidFill>
+                  <a:srgbClr val="25323A"/>
+                </a:solidFill>
+                <a:latin typeface="Segoe UI"/>
+              </a:rPr>
+              <a:t>→ This run produces the wave forcing </a:t>
+            </a:r>
+            <a:r>
               <a:rPr sz="1800" b="1" i="0">
                 <a:solidFill>
-                  <a:srgbClr val="0A5560"/>
-                </a:solidFill>
-                <a:latin typeface="Segoe UI"/>
-              </a:rPr>
-              <a:t>K(t) = (2/π)∫ B(ω) cos(ωt) dω</a:t>
+                  <a:srgbClr val="25323A"/>
+                </a:solidFill>
+                <a:latin typeface="Segoe UI"/>
+              </a:rPr>
+              <a:t>F_exc(ω)</a:t>
             </a:r>
             <a:r>
               <a:rPr sz="1800" b="0" i="0">
@@ -5030,25 +5988,7 @@
                 </a:solidFill>
                 <a:latin typeface="Segoe UI"/>
               </a:rPr>
-              <a:t> — the retardation kernel = </a:t>
-            </a:r>
-            <a:r>
-              <a:rPr sz="1800" b="0" i="1">
-                <a:solidFill>
-                  <a:srgbClr val="25323A"/>
-                </a:solidFill>
-                <a:latin typeface="Segoe UI"/>
-              </a:rPr>
-              <a:t>fluid memory</a:t>
-            </a:r>
-            <a:r>
-              <a:rPr sz="1800" b="0" i="0">
-                <a:solidFill>
-                  <a:srgbClr val="25323A"/>
-                </a:solidFill>
-                <a:latin typeface="Segoe UI"/>
-              </a:rPr>
-              <a:t> of previously radiated waves.</a:t>
+              <a:t> that drives the motion.</a:t>
             </a:r>
           </a:p>
           <a:p>
@@ -5057,7 +5997,7 @@
                 <a:spcPts val="200"/>
               </a:spcBef>
               <a:spcAft>
-                <a:spcPts val="1000"/>
+                <a:spcPts val="1200"/>
               </a:spcAft>
             </a:pPr>
             <a:r>
@@ -5076,7 +6016,7 @@
                 </a:solidFill>
                 <a:latin typeface="Segoe UI"/>
               </a:rPr>
-              <a:t>Mapping:  </a:t>
+              <a:t>Plus the hydrostatic stiffness </a:t>
             </a:r>
             <a:r>
               <a:rPr sz="1800" b="1" i="0">
@@ -5085,7 +6025,7 @@
                 </a:solidFill>
                 <a:latin typeface="Segoe UI"/>
               </a:rPr>
-              <a:t>Radiation → A∞ + K(t)</a:t>
+              <a:t>C</a:t>
             </a:r>
             <a:r>
               <a:rPr sz="1800" b="0" i="0">
@@ -5094,43 +6034,7 @@
                 </a:solidFill>
                 <a:latin typeface="Segoe UI"/>
               </a:rPr>
-              <a:t>   ·   </a:t>
-            </a:r>
-            <a:r>
-              <a:rPr sz="1800" b="1" i="0">
-                <a:solidFill>
-                  <a:srgbClr val="25323A"/>
-                </a:solidFill>
-                <a:latin typeface="Segoe UI"/>
-              </a:rPr>
-              <a:t>Diffraction → F_exc</a:t>
-            </a:r>
-            <a:r>
-              <a:rPr sz="1800" b="0" i="0">
-                <a:solidFill>
-                  <a:srgbClr val="25323A"/>
-                </a:solidFill>
-                <a:latin typeface="Segoe UI"/>
-              </a:rPr>
-              <a:t>   ·   </a:t>
-            </a:r>
-            <a:r>
-              <a:rPr sz="1800" b="1" i="0">
-                <a:solidFill>
-                  <a:srgbClr val="25323A"/>
-                </a:solidFill>
-                <a:latin typeface="Segoe UI"/>
-              </a:rPr>
-              <a:t>Hydrostatics → C</a:t>
-            </a:r>
-            <a:r>
-              <a:rPr sz="1800" b="0" i="0">
-                <a:solidFill>
-                  <a:srgbClr val="25323A"/>
-                </a:solidFill>
-                <a:latin typeface="Segoe UI"/>
-              </a:rPr>
-              <a:t>.  FloatSim integrates this in time.</a:t>
+              <a:t> (buoyancy / waterplane) from the geometry.</a:t>
             </a:r>
           </a:p>
         </p:txBody>
@@ -5190,7 +6094,7 @@
                 </a:solidFill>
                 <a:latin typeface="Segoe UI"/>
               </a:rPr>
-              <a:t>CAVEATS</a:t>
+              <a:t>THE BRIDGE</a:t>
             </a:r>
           </a:p>
         </p:txBody>
@@ -5224,7 +6128,7 @@
                 </a:solidFill>
                 <a:latin typeface="Segoe UI"/>
               </a:rPr>
-              <a:t>Limits — and why the heave plate needs the tank</a:t>
+              <a:t>From frequency domain to time-domain simulation</a:t>
             </a:r>
           </a:p>
         </p:txBody>
@@ -5281,7 +6185,7 @@
         </p:nvSpPr>
         <p:spPr>
           <a:xfrm>
-            <a:off x="777240" y="1828800"/>
+            <a:off x="777240" y="1737360"/>
             <a:ext cx="10698480" cy="4572000"/>
           </a:xfrm>
           <a:prstGeom prst="rect">
@@ -5300,7 +6204,7 @@
                 <a:spcPts val="200"/>
               </a:spcBef>
               <a:spcAft>
-                <a:spcPts val="1100"/>
+                <a:spcPts val="600"/>
               </a:spcAft>
             </a:pPr>
             <a:r>
@@ -5319,7 +6223,7 @@
                 </a:solidFill>
                 <a:latin typeface="Segoe UI"/>
               </a:rPr>
-              <a:t>Potential flow is </a:t>
+              <a:t>A(ω), B(ω) can’t go straight into a time-stepper — a transient contains all frequencies at once. Bridge = the </a:t>
             </a:r>
             <a:r>
               <a:rPr sz="1800" b="1" i="0">
@@ -5328,7 +6232,7 @@
                 </a:solidFill>
                 <a:latin typeface="Segoe UI"/>
               </a:rPr>
-              <a:t>inviscid and linear</a:t>
+              <a:t>Cummins equation</a:t>
             </a:r>
             <a:r>
               <a:rPr sz="1800" b="0" i="0">
@@ -5337,126 +6241,118 @@
                 </a:solidFill>
                 <a:latin typeface="Segoe UI"/>
               </a:rPr>
-              <a:t>. Two consequences for us:</a:t>
-            </a:r>
-          </a:p>
-          <a:p>
-            <a:pPr lvl="1">
-              <a:spcBef>
-                <a:spcPts val="200"/>
-              </a:spcBef>
-              <a:spcAft>
-                <a:spcPts val="1100"/>
-              </a:spcAft>
-            </a:pPr>
-            <a:r>
-              <a:rPr sz="1800">
-                <a:solidFill>
-                  <a:srgbClr val="54636D"/>
-                </a:solidFill>
-                <a:latin typeface="Segoe UI"/>
-              </a:rPr>
-              <a:t>      –  </a:t>
-            </a:r>
-            <a:r>
-              <a:rPr sz="1600" b="1" i="0">
-                <a:solidFill>
-                  <a:srgbClr val="D1543A"/>
-                </a:solidFill>
-                <a:latin typeface="Segoe UI"/>
-              </a:rPr>
-              <a:t>No viscous drag in the BEM</a:t>
-            </a:r>
-            <a:r>
-              <a:rPr sz="1600" b="0" i="0">
-                <a:solidFill>
-                  <a:srgbClr val="25323A"/>
-                </a:solidFill>
-                <a:latin typeface="Segoe UI"/>
-              </a:rPr>
-              <a:t> → all quadratic / viscous damping is added separately as </a:t>
-            </a:r>
-            <a:r>
-              <a:rPr sz="1600" b="1" i="0">
-                <a:solidFill>
-                  <a:srgbClr val="25323A"/>
-                </a:solidFill>
-                <a:latin typeface="Segoe UI"/>
-              </a:rPr>
-              <a:t>Morison drag F_drag</a:t>
-            </a:r>
-            <a:r>
-              <a:rPr sz="1600" b="0" i="0">
-                <a:solidFill>
-                  <a:srgbClr val="25323A"/>
-                </a:solidFill>
-                <a:latin typeface="Segoe UI"/>
-              </a:rPr>
-              <a:t> — not from Capytaine.</a:t>
-            </a:r>
-          </a:p>
-          <a:p>
-            <a:pPr lvl="1">
-              <a:spcBef>
-                <a:spcPts val="200"/>
-              </a:spcBef>
-              <a:spcAft>
-                <a:spcPts val="1100"/>
-              </a:spcAft>
-            </a:pPr>
-            <a:r>
-              <a:rPr sz="1800">
-                <a:solidFill>
-                  <a:srgbClr val="54636D"/>
-                </a:solidFill>
-                <a:latin typeface="Segoe UI"/>
-              </a:rPr>
-              <a:t>      –  </a:t>
-            </a:r>
-            <a:r>
-              <a:rPr sz="1600" b="1" i="0">
-                <a:solidFill>
-                  <a:srgbClr val="D1543A"/>
-                </a:solidFill>
-                <a:latin typeface="Segoe UI"/>
-              </a:rPr>
-              <a:t>Panels treat every surface as solid</a:t>
-            </a:r>
-            <a:r>
-              <a:rPr sz="1600" b="0" i="0">
-                <a:solidFill>
-                  <a:srgbClr val="25323A"/>
-                </a:solidFill>
-                <a:latin typeface="Segoe UI"/>
-              </a:rPr>
-              <a:t> → </a:t>
-            </a:r>
-            <a:r>
-              <a:rPr sz="1600" b="1" i="0">
-                <a:solidFill>
-                  <a:srgbClr val="25323A"/>
-                </a:solidFill>
-                <a:latin typeface="Segoe UI"/>
-              </a:rPr>
-              <a:t>over-predicts added mass</a:t>
-            </a:r>
-            <a:r>
-              <a:rPr sz="1600" b="0" i="0">
-                <a:solidFill>
-                  <a:srgbClr val="25323A"/>
-                </a:solidFill>
-                <a:latin typeface="Segoe UI"/>
-              </a:rPr>
-              <a:t> for the open/perforated heave-plate frame (it blocks flow the real perforations pass).</a:t>
-            </a:r>
-          </a:p>
+              <a:t>:</a:t>
+            </a:r>
+          </a:p>
+        </p:txBody>
+      </p:sp>
+      <p:sp>
+        <p:nvSpPr>
+          <p:cNvPr id="6" name="Rectangle 5"/>
+          <p:cNvSpPr/>
+          <p:nvPr/>
+        </p:nvSpPr>
+        <p:spPr>
+          <a:xfrm>
+            <a:off x="777240" y="2514600"/>
+            <a:ext cx="10607040" cy="1051560"/>
+          </a:xfrm>
+          <a:prstGeom prst="rect">
+            <a:avLst/>
+          </a:prstGeom>
+          <a:solidFill>
+            <a:srgbClr val="EEF6F7"/>
+          </a:solidFill>
+          <a:ln>
+            <a:noFill/>
+          </a:ln>
+          <a:effectLst/>
+        </p:spPr>
+        <p:style>
+          <a:lnRef idx="1">
+            <a:schemeClr val="accent1"/>
+          </a:lnRef>
+          <a:fillRef idx="3">
+            <a:schemeClr val="accent1"/>
+          </a:fillRef>
+          <a:effectRef idx="2">
+            <a:schemeClr val="accent1"/>
+          </a:effectRef>
+          <a:fontRef idx="minor">
+            <a:schemeClr val="lt1"/>
+          </a:fontRef>
+        </p:style>
+        <p:txBody>
+          <a:bodyPr rtlCol="0" anchor="ctr"/>
+          <a:lstStyle/>
+          <a:p>
+            <a:pPr algn="ctr"/>
+          </a:p>
+        </p:txBody>
+      </p:sp>
+      <p:sp>
+        <p:nvSpPr>
+          <p:cNvPr id="7" name="TextBox 6"/>
+          <p:cNvSpPr txBox="1"/>
+          <p:nvPr/>
+        </p:nvSpPr>
+        <p:spPr>
+          <a:xfrm>
+            <a:off x="914400" y="2651760"/>
+            <a:ext cx="10332720" cy="822960"/>
+          </a:xfrm>
+          <a:prstGeom prst="rect">
+            <a:avLst/>
+          </a:prstGeom>
+          <a:noFill/>
+        </p:spPr>
+        <p:txBody>
+          <a:bodyPr wrap="square" anchor="ctr">
+            <a:spAutoFit/>
+          </a:bodyPr>
+          <a:lstStyle/>
+          <a:p>
+            <a:pPr algn="ctr"/>
+            <a:r>
+              <a:rPr sz="2200" b="1">
+                <a:solidFill>
+                  <a:srgbClr val="25323A"/>
+                </a:solidFill>
+                <a:latin typeface="Cambria Math"/>
+              </a:rPr>
+              <a:t>(M + A∞) ẍ  +  ∫₀ᵗ K(t−τ) ẋ(τ) dτ  +  C x  =  F_exc(t)  +  F_drag(ẋ)</a:t>
+            </a:r>
+          </a:p>
+        </p:txBody>
+      </p:sp>
+      <p:sp>
+        <p:nvSpPr>
+          <p:cNvPr id="8" name="TextBox 7"/>
+          <p:cNvSpPr txBox="1"/>
+          <p:nvPr/>
+        </p:nvSpPr>
+        <p:spPr>
+          <a:xfrm>
+            <a:off x="777240" y="3749039"/>
+            <a:ext cx="10698480" cy="4572000"/>
+          </a:xfrm>
+          <a:prstGeom prst="rect">
+            <a:avLst/>
+          </a:prstGeom>
+          <a:noFill/>
+        </p:spPr>
+        <p:txBody>
+          <a:bodyPr wrap="square">
+            <a:spAutoFit/>
+          </a:bodyPr>
+          <a:lstStyle/>
           <a:p>
             <a:pPr>
               <a:spcBef>
                 <a:spcPts val="200"/>
               </a:spcBef>
               <a:spcAft>
-                <a:spcPts val="1100"/>
+                <a:spcPts val="1000"/>
               </a:spcAft>
             </a:pPr>
             <a:r>
@@ -5469,105 +6365,159 @@
               <a:t>•  </a:t>
             </a:r>
             <a:r>
+              <a:rPr sz="1800" b="1" i="0">
+                <a:solidFill>
+                  <a:srgbClr val="0A5560"/>
+                </a:solidFill>
+                <a:latin typeface="Segoe UI"/>
+              </a:rPr>
+              <a:t>A∞</a:t>
+            </a:r>
+            <a:r>
               <a:rPr sz="1800" b="0" i="0">
                 <a:solidFill>
                   <a:srgbClr val="25323A"/>
                 </a:solidFill>
                 <a:latin typeface="Segoe UI"/>
               </a:rPr>
-              <a:t>Practical split for the OSU buoy:</a:t>
-            </a:r>
-          </a:p>
-          <a:p>
-            <a:pPr lvl="1">
+              <a:t> = infinite-frequency added mass.</a:t>
+            </a:r>
+          </a:p>
+          <a:p>
+            <a:pPr>
               <a:spcBef>
                 <a:spcPts val="200"/>
               </a:spcBef>
               <a:spcAft>
-                <a:spcPts val="1100"/>
+                <a:spcPts val="1000"/>
               </a:spcAft>
             </a:pPr>
             <a:r>
               <a:rPr sz="1800">
                 <a:solidFill>
-                  <a:srgbClr val="54636D"/>
-                </a:solidFill>
-                <a:latin typeface="Segoe UI"/>
-              </a:rPr>
-              <a:t>      –  </a:t>
-            </a:r>
-            <a:r>
-              <a:rPr sz="1600" b="1" i="0">
+                  <a:srgbClr val="0C8B96"/>
+                </a:solidFill>
+                <a:latin typeface="Segoe UI"/>
+              </a:rPr>
+              <a:t>•  </a:t>
+            </a:r>
+            <a:r>
+              <a:rPr sz="1800" b="1" i="0">
                 <a:solidFill>
                   <a:srgbClr val="0A5560"/>
                 </a:solidFill>
                 <a:latin typeface="Segoe UI"/>
               </a:rPr>
-              <a:t>Spar (6″ pipe)</a:t>
-            </a:r>
-            <a:r>
-              <a:rPr sz="1600" b="0" i="0">
-                <a:solidFill>
-                  <a:srgbClr val="25323A"/>
-                </a:solidFill>
-                <a:latin typeface="Segoe UI"/>
-              </a:rPr>
-              <a:t> — a clean cylinder → the BEM is reliable.</a:t>
-            </a:r>
-          </a:p>
-          <a:p>
-            <a:pPr lvl="1">
+              <a:t>K(t) = (2/π)∫ B(ω) cos(ωt) dω</a:t>
+            </a:r>
+            <a:r>
+              <a:rPr sz="1800" b="0" i="0">
+                <a:solidFill>
+                  <a:srgbClr val="25323A"/>
+                </a:solidFill>
+                <a:latin typeface="Segoe UI"/>
+              </a:rPr>
+              <a:t> — the retardation kernel = </a:t>
+            </a:r>
+            <a:r>
+              <a:rPr sz="1800" b="0" i="1">
+                <a:solidFill>
+                  <a:srgbClr val="25323A"/>
+                </a:solidFill>
+                <a:latin typeface="Segoe UI"/>
+              </a:rPr>
+              <a:t>fluid memory</a:t>
+            </a:r>
+            <a:r>
+              <a:rPr sz="1800" b="0" i="0">
+                <a:solidFill>
+                  <a:srgbClr val="25323A"/>
+                </a:solidFill>
+                <a:latin typeface="Segoe UI"/>
+              </a:rPr>
+              <a:t> of previously radiated waves.</a:t>
+            </a:r>
+          </a:p>
+          <a:p>
+            <a:pPr>
               <a:spcBef>
                 <a:spcPts val="200"/>
               </a:spcBef>
               <a:spcAft>
-                <a:spcPts val="1100"/>
+                <a:spcPts val="1000"/>
               </a:spcAft>
             </a:pPr>
             <a:r>
               <a:rPr sz="1800">
                 <a:solidFill>
-                  <a:srgbClr val="54636D"/>
-                </a:solidFill>
-                <a:latin typeface="Segoe UI"/>
-              </a:rPr>
-              <a:t>      –  </a:t>
-            </a:r>
-            <a:r>
-              <a:rPr sz="1600" b="1" i="0">
-                <a:solidFill>
-                  <a:srgbClr val="0A5560"/>
-                </a:solidFill>
-                <a:latin typeface="Segoe UI"/>
-              </a:rPr>
-              <a:t>Heave-plate / ballast frame</a:t>
-            </a:r>
-            <a:r>
-              <a:rPr sz="1600" b="0" i="0">
-                <a:solidFill>
-                  <a:srgbClr val="25323A"/>
-                </a:solidFill>
-                <a:latin typeface="Segoe UI"/>
-              </a:rPr>
-              <a:t> — A and B are BEM </a:t>
-            </a:r>
-            <a:r>
-              <a:rPr sz="1600" b="1" i="0">
-                <a:solidFill>
-                  <a:srgbClr val="25323A"/>
-                </a:solidFill>
-                <a:latin typeface="Segoe UI"/>
-              </a:rPr>
-              <a:t>stand-ins until the tank test measures them</a:t>
-            </a:r>
-            <a:r>
-              <a:rPr sz="1600" b="0" i="0">
-                <a:solidFill>
-                  <a:srgbClr val="25323A"/>
-                </a:solidFill>
-                <a:latin typeface="Segoe UI"/>
-              </a:rPr>
-              <a:t>.</a:t>
+                  <a:srgbClr val="0C8B96"/>
+                </a:solidFill>
+                <a:latin typeface="Segoe UI"/>
+              </a:rPr>
+              <a:t>•  </a:t>
+            </a:r>
+            <a:r>
+              <a:rPr sz="1800" b="0" i="0">
+                <a:solidFill>
+                  <a:srgbClr val="25323A"/>
+                </a:solidFill>
+                <a:latin typeface="Segoe UI"/>
+              </a:rPr>
+              <a:t>Mapping:  </a:t>
+            </a:r>
+            <a:r>
+              <a:rPr sz="1800" b="1" i="0">
+                <a:solidFill>
+                  <a:srgbClr val="25323A"/>
+                </a:solidFill>
+                <a:latin typeface="Segoe UI"/>
+              </a:rPr>
+              <a:t>Radiation → A∞ + K(t)</a:t>
+            </a:r>
+            <a:r>
+              <a:rPr sz="1800" b="0" i="0">
+                <a:solidFill>
+                  <a:srgbClr val="25323A"/>
+                </a:solidFill>
+                <a:latin typeface="Segoe UI"/>
+              </a:rPr>
+              <a:t>   ·   </a:t>
+            </a:r>
+            <a:r>
+              <a:rPr sz="1800" b="1" i="0">
+                <a:solidFill>
+                  <a:srgbClr val="25323A"/>
+                </a:solidFill>
+                <a:latin typeface="Segoe UI"/>
+              </a:rPr>
+              <a:t>Diffraction → F_exc</a:t>
+            </a:r>
+            <a:r>
+              <a:rPr sz="1800" b="0" i="0">
+                <a:solidFill>
+                  <a:srgbClr val="25323A"/>
+                </a:solidFill>
+                <a:latin typeface="Segoe UI"/>
+              </a:rPr>
+              <a:t>   ·   </a:t>
+            </a:r>
+            <a:r>
+              <a:rPr sz="1800" b="1" i="0">
+                <a:solidFill>
+                  <a:srgbClr val="25323A"/>
+                </a:solidFill>
+                <a:latin typeface="Segoe UI"/>
+              </a:rPr>
+              <a:t>Hydrostatics → C</a:t>
+            </a:r>
+            <a:r>
+              <a:rPr sz="1800" b="0" i="0">
+                <a:solidFill>
+                  <a:srgbClr val="25323A"/>
+                </a:solidFill>
+                <a:latin typeface="Segoe UI"/>
+              </a:rPr>
+              <a:t>.  FloatSim integrates this in time.</a:t>
             </a:r>
           </a:p>
         </p:txBody>
@@ -5627,7 +6577,7 @@
                 </a:solidFill>
                 <a:latin typeface="Segoe UI"/>
               </a:rPr>
-              <a:t>WHAT TO EXPECT</a:t>
+              <a:t>DIVISION OF LABOUR</a:t>
             </a:r>
           </a:p>
         </p:txBody>
@@ -5661,7 +6611,7 @@
                 </a:solidFill>
                 <a:latin typeface="Segoe UI"/>
               </a:rPr>
-              <a:t>Pre-test heave decay prediction</a:t>
+              <a:t>Who computes what — Capytaine vs FloatSim</a:t>
             </a:r>
           </a:p>
         </p:txBody>
@@ -5710,49 +6660,27 @@
           </a:p>
         </p:txBody>
       </p:sp>
-      <p:pic>
-        <p:nvPicPr>
-          <p:cNvPr id="5" name="Picture 4" descr="OSU_heave_decay_prediction.png"/>
-          <p:cNvPicPr>
-            <a:picLocks noChangeAspect="1"/>
-          </p:cNvPicPr>
-          <p:nvPr/>
-        </p:nvPicPr>
-        <p:blipFill>
-          <a:blip r:embed="rId2"/>
-          <a:stretch>
-            <a:fillRect/>
-          </a:stretch>
-        </p:blipFill>
-        <p:spPr>
-          <a:xfrm>
-            <a:off x="1051560" y="1691640"/>
-            <a:ext cx="10058400" cy="3923260"/>
-          </a:xfrm>
-          <a:prstGeom prst="rect">
-            <a:avLst/>
-          </a:prstGeom>
-        </p:spPr>
-      </p:pic>
-      <p:sp>
-        <p:nvSpPr>
-          <p:cNvPr id="6" name="Rectangle 5"/>
+      <p:sp>
+        <p:nvSpPr>
+          <p:cNvPr id="5" name="Rectangle 4"/>
           <p:cNvSpPr/>
           <p:nvPr/>
         </p:nvSpPr>
         <p:spPr>
           <a:xfrm>
-            <a:off x="777240" y="5806440"/>
-            <a:ext cx="10607040" cy="749808"/>
+            <a:off x="502920" y="1783080"/>
+            <a:ext cx="5029200" cy="4160520"/>
           </a:xfrm>
           <a:prstGeom prst="rect">
             <a:avLst/>
           </a:prstGeom>
           <a:solidFill>
-            <a:srgbClr val="EEF6F7"/>
+            <a:srgbClr val="F7FAFB"/>
           </a:solidFill>
-          <a:ln>
-            <a:noFill/>
+          <a:ln w="15875">
+            <a:solidFill>
+              <a:srgbClr val="0C8B96"/>
+            </a:solidFill>
           </a:ln>
           <a:effectLst/>
         </p:spPr>
@@ -5780,14 +6708,67 @@
       </p:sp>
       <p:sp>
         <p:nvSpPr>
+          <p:cNvPr id="6" name="Rectangle 5"/>
+          <p:cNvSpPr/>
+          <p:nvPr/>
+        </p:nvSpPr>
+        <p:spPr>
+          <a:xfrm>
+            <a:off x="502920" y="1783080"/>
+            <a:ext cx="5029200" cy="548640"/>
+          </a:xfrm>
+          <a:prstGeom prst="rect">
+            <a:avLst/>
+          </a:prstGeom>
+          <a:solidFill>
+            <a:srgbClr val="0C8B96"/>
+          </a:solidFill>
+          <a:ln>
+            <a:noFill/>
+          </a:ln>
+          <a:effectLst/>
+        </p:spPr>
+        <p:style>
+          <a:lnRef idx="1">
+            <a:schemeClr val="accent1"/>
+          </a:lnRef>
+          <a:fillRef idx="3">
+            <a:schemeClr val="accent1"/>
+          </a:fillRef>
+          <a:effectRef idx="2">
+            <a:schemeClr val="accent1"/>
+          </a:effectRef>
+          <a:fontRef idx="minor">
+            <a:schemeClr val="lt1"/>
+          </a:fontRef>
+        </p:style>
+        <p:txBody>
+          <a:bodyPr rtlCol="0" anchor="ctr"/>
+          <a:lstStyle/>
+          <a:p>
+            <a:pPr algn="ctr"/>
+            <a:r>
+              <a:rPr sz="1700" b="1">
+                <a:solidFill>
+                  <a:srgbClr val="FFFFFF"/>
+                </a:solidFill>
+                <a:latin typeface="Segoe UI"/>
+              </a:rPr>
+              <a:t>CAPYTAINE</a:t>
+            </a:r>
+          </a:p>
+        </p:txBody>
+      </p:sp>
+      <p:sp>
+        <p:nvSpPr>
           <p:cNvPr id="7" name="TextBox 6"/>
           <p:cNvSpPr txBox="1"/>
           <p:nvPr/>
         </p:nvSpPr>
         <p:spPr>
           <a:xfrm>
-            <a:off x="960120" y="5852160"/>
-            <a:ext cx="10241280" cy="658368"/>
+            <a:off x="502920" y="2313432"/>
+            <a:ext cx="5029200" cy="310896"/>
           </a:xfrm>
           <a:prstGeom prst="rect">
             <a:avLst/>
@@ -5795,6 +6776,645 @@
           <a:noFill/>
         </p:spPr>
         <p:txBody>
+          <a:bodyPr wrap="none">
+            <a:spAutoFit/>
+          </a:bodyPr>
+          <a:lstStyle/>
+          <a:p>
+            <a:pPr algn="ctr"/>
+            <a:r>
+              <a:rPr sz="1050" i="1">
+                <a:solidFill>
+                  <a:srgbClr val="54636D"/>
+                </a:solidFill>
+                <a:latin typeface="Segoe UI"/>
+              </a:rPr>
+              <a:t>run once · frequency domain · linear + inviscid</a:t>
+            </a:r>
+          </a:p>
+        </p:txBody>
+      </p:sp>
+      <p:sp>
+        <p:nvSpPr>
+          <p:cNvPr id="8" name="TextBox 7"/>
+          <p:cNvSpPr txBox="1"/>
+          <p:nvPr/>
+        </p:nvSpPr>
+        <p:spPr>
+          <a:xfrm>
+            <a:off x="758952" y="2715768"/>
+            <a:ext cx="4553712" cy="3108960"/>
+          </a:xfrm>
+          <a:prstGeom prst="rect">
+            <a:avLst/>
+          </a:prstGeom>
+          <a:noFill/>
+        </p:spPr>
+        <p:txBody>
+          <a:bodyPr wrap="square">
+            <a:spAutoFit/>
+          </a:bodyPr>
+          <a:lstStyle/>
+          <a:p>
+            <a:pPr>
+              <a:spcAft>
+                <a:spcPts val="600"/>
+              </a:spcAft>
+            </a:pPr>
+            <a:r>
+              <a:rPr sz="1300">
+                <a:solidFill>
+                  <a:srgbClr val="0C8B96"/>
+                </a:solidFill>
+                <a:latin typeface="Segoe UI"/>
+              </a:rPr>
+              <a:t>•  </a:t>
+            </a:r>
+            <a:r>
+              <a:rPr sz="1300" b="0" i="0">
+                <a:solidFill>
+                  <a:srgbClr val="25323A"/>
+                </a:solidFill>
+                <a:latin typeface="Segoe UI"/>
+              </a:rPr>
+              <a:t>Panel mesh of the wetted hull</a:t>
+            </a:r>
+          </a:p>
+          <a:p>
+            <a:pPr>
+              <a:spcAft>
+                <a:spcPts val="600"/>
+              </a:spcAft>
+            </a:pPr>
+            <a:r>
+              <a:rPr sz="1300">
+                <a:solidFill>
+                  <a:srgbClr val="0C8B96"/>
+                </a:solidFill>
+                <a:latin typeface="Segoe UI"/>
+              </a:rPr>
+              <a:t>•  </a:t>
+            </a:r>
+            <a:r>
+              <a:rPr sz="1300" b="0" i="0">
+                <a:solidFill>
+                  <a:srgbClr val="25323A"/>
+                </a:solidFill>
+                <a:latin typeface="Segoe UI"/>
+              </a:rPr>
+              <a:t>Radiation problem → A(ω), A∞ and B(ω)</a:t>
+            </a:r>
+          </a:p>
+          <a:p>
+            <a:pPr>
+              <a:spcAft>
+                <a:spcPts val="600"/>
+              </a:spcAft>
+            </a:pPr>
+            <a:r>
+              <a:rPr sz="1300">
+                <a:solidFill>
+                  <a:srgbClr val="0C8B96"/>
+                </a:solidFill>
+                <a:latin typeface="Segoe UI"/>
+              </a:rPr>
+              <a:t>•  </a:t>
+            </a:r>
+            <a:r>
+              <a:rPr sz="1300" b="0" i="0">
+                <a:solidFill>
+                  <a:srgbClr val="25323A"/>
+                </a:solidFill>
+                <a:latin typeface="Segoe UI"/>
+              </a:rPr>
+              <a:t>Diffraction problem → F_exc(ω, β)</a:t>
+            </a:r>
+          </a:p>
+          <a:p>
+            <a:pPr>
+              <a:spcAft>
+                <a:spcPts val="600"/>
+              </a:spcAft>
+            </a:pPr>
+            <a:r>
+              <a:rPr sz="1300">
+                <a:solidFill>
+                  <a:srgbClr val="0C8B96"/>
+                </a:solidFill>
+                <a:latin typeface="Segoe UI"/>
+              </a:rPr>
+              <a:t>•  </a:t>
+            </a:r>
+            <a:r>
+              <a:rPr sz="1300" b="0" i="0">
+                <a:solidFill>
+                  <a:srgbClr val="25323A"/>
+                </a:solidFill>
+                <a:latin typeface="Segoe UI"/>
+              </a:rPr>
+              <a:t>Hydrostatic stiffness C (buoyancy)</a:t>
+            </a:r>
+          </a:p>
+          <a:p>
+            <a:pPr>
+              <a:spcAft>
+                <a:spcPts val="200"/>
+              </a:spcAft>
+            </a:pPr>
+            <a:r>
+              <a:rPr sz="1300">
+                <a:solidFill>
+                  <a:srgbClr val="0C8B96"/>
+                </a:solidFill>
+                <a:latin typeface="Segoe UI"/>
+              </a:rPr>
+              <a:t>⇒  </a:t>
+            </a:r>
+            <a:r>
+              <a:rPr sz="1300" b="1" i="0">
+                <a:solidFill>
+                  <a:srgbClr val="0A5560"/>
+                </a:solidFill>
+                <a:latin typeface="Segoe UI"/>
+              </a:rPr>
+              <a:t>Outputs: hydrodynamic coefficients</a:t>
+            </a:r>
+          </a:p>
+        </p:txBody>
+      </p:sp>
+      <p:sp>
+        <p:nvSpPr>
+          <p:cNvPr id="9" name="Rectangle 8"/>
+          <p:cNvSpPr/>
+          <p:nvPr/>
+        </p:nvSpPr>
+        <p:spPr>
+          <a:xfrm>
+            <a:off x="6656832" y="1783080"/>
+            <a:ext cx="5029200" cy="4160520"/>
+          </a:xfrm>
+          <a:prstGeom prst="rect">
+            <a:avLst/>
+          </a:prstGeom>
+          <a:solidFill>
+            <a:srgbClr val="F7FAFB"/>
+          </a:solidFill>
+          <a:ln w="15875">
+            <a:solidFill>
+              <a:srgbClr val="0A5560"/>
+            </a:solidFill>
+          </a:ln>
+          <a:effectLst/>
+        </p:spPr>
+        <p:style>
+          <a:lnRef idx="1">
+            <a:schemeClr val="accent1"/>
+          </a:lnRef>
+          <a:fillRef idx="3">
+            <a:schemeClr val="accent1"/>
+          </a:fillRef>
+          <a:effectRef idx="2">
+            <a:schemeClr val="accent1"/>
+          </a:effectRef>
+          <a:fontRef idx="minor">
+            <a:schemeClr val="lt1"/>
+          </a:fontRef>
+        </p:style>
+        <p:txBody>
+          <a:bodyPr rtlCol="0" anchor="ctr"/>
+          <a:lstStyle/>
+          <a:p>
+            <a:pPr algn="ctr"/>
+          </a:p>
+        </p:txBody>
+      </p:sp>
+      <p:sp>
+        <p:nvSpPr>
+          <p:cNvPr id="10" name="Rectangle 9"/>
+          <p:cNvSpPr/>
+          <p:nvPr/>
+        </p:nvSpPr>
+        <p:spPr>
+          <a:xfrm>
+            <a:off x="6656832" y="1783080"/>
+            <a:ext cx="5029200" cy="548640"/>
+          </a:xfrm>
+          <a:prstGeom prst="rect">
+            <a:avLst/>
+          </a:prstGeom>
+          <a:solidFill>
+            <a:srgbClr val="0A5560"/>
+          </a:solidFill>
+          <a:ln>
+            <a:noFill/>
+          </a:ln>
+          <a:effectLst/>
+        </p:spPr>
+        <p:style>
+          <a:lnRef idx="1">
+            <a:schemeClr val="accent1"/>
+          </a:lnRef>
+          <a:fillRef idx="3">
+            <a:schemeClr val="accent1"/>
+          </a:fillRef>
+          <a:effectRef idx="2">
+            <a:schemeClr val="accent1"/>
+          </a:effectRef>
+          <a:fontRef idx="minor">
+            <a:schemeClr val="lt1"/>
+          </a:fontRef>
+        </p:style>
+        <p:txBody>
+          <a:bodyPr rtlCol="0" anchor="ctr"/>
+          <a:lstStyle/>
+          <a:p>
+            <a:pPr algn="ctr"/>
+            <a:r>
+              <a:rPr sz="1700" b="1">
+                <a:solidFill>
+                  <a:srgbClr val="FFFFFF"/>
+                </a:solidFill>
+                <a:latin typeface="Segoe UI"/>
+              </a:rPr>
+              <a:t>FLOATSIM</a:t>
+            </a:r>
+          </a:p>
+        </p:txBody>
+      </p:sp>
+      <p:sp>
+        <p:nvSpPr>
+          <p:cNvPr id="11" name="TextBox 10"/>
+          <p:cNvSpPr txBox="1"/>
+          <p:nvPr/>
+        </p:nvSpPr>
+        <p:spPr>
+          <a:xfrm>
+            <a:off x="6656832" y="2313432"/>
+            <a:ext cx="5029200" cy="310896"/>
+          </a:xfrm>
+          <a:prstGeom prst="rect">
+            <a:avLst/>
+          </a:prstGeom>
+          <a:noFill/>
+        </p:spPr>
+        <p:txBody>
+          <a:bodyPr wrap="none">
+            <a:spAutoFit/>
+          </a:bodyPr>
+          <a:lstStyle/>
+          <a:p>
+            <a:pPr algn="ctr"/>
+            <a:r>
+              <a:rPr sz="1050" i="1">
+                <a:solidFill>
+                  <a:srgbClr val="54636D"/>
+                </a:solidFill>
+                <a:latin typeface="Segoe UI"/>
+              </a:rPr>
+              <a:t>per simulation · time domain</a:t>
+            </a:r>
+          </a:p>
+        </p:txBody>
+      </p:sp>
+      <p:sp>
+        <p:nvSpPr>
+          <p:cNvPr id="12" name="TextBox 11"/>
+          <p:cNvSpPr txBox="1"/>
+          <p:nvPr/>
+        </p:nvSpPr>
+        <p:spPr>
+          <a:xfrm>
+            <a:off x="6912864" y="2715768"/>
+            <a:ext cx="4553712" cy="3108960"/>
+          </a:xfrm>
+          <a:prstGeom prst="rect">
+            <a:avLst/>
+          </a:prstGeom>
+          <a:noFill/>
+        </p:spPr>
+        <p:txBody>
+          <a:bodyPr wrap="square">
+            <a:spAutoFit/>
+          </a:bodyPr>
+          <a:lstStyle/>
+          <a:p>
+            <a:pPr>
+              <a:spcAft>
+                <a:spcPts val="600"/>
+              </a:spcAft>
+            </a:pPr>
+            <a:r>
+              <a:rPr sz="1300">
+                <a:solidFill>
+                  <a:srgbClr val="0A5560"/>
+                </a:solidFill>
+                <a:latin typeface="Segoe UI"/>
+              </a:rPr>
+              <a:t>•  </a:t>
+            </a:r>
+            <a:r>
+              <a:rPr sz="1300" b="0" i="0">
+                <a:solidFill>
+                  <a:srgbClr val="25323A"/>
+                </a:solidFill>
+                <a:latin typeface="Segoe UI"/>
+              </a:rPr>
+              <a:t>Retardation kernel K(t) from B(ω)</a:t>
+            </a:r>
+          </a:p>
+          <a:p>
+            <a:pPr>
+              <a:spcAft>
+                <a:spcPts val="600"/>
+              </a:spcAft>
+            </a:pPr>
+            <a:r>
+              <a:rPr sz="1300">
+                <a:solidFill>
+                  <a:srgbClr val="0A5560"/>
+                </a:solidFill>
+                <a:latin typeface="Segoe UI"/>
+              </a:rPr>
+              <a:t>•  </a:t>
+            </a:r>
+            <a:r>
+              <a:rPr sz="1300" b="0" i="0">
+                <a:solidFill>
+                  <a:srgbClr val="25323A"/>
+                </a:solidFill>
+                <a:latin typeface="Segoe UI"/>
+              </a:rPr>
+              <a:t>Body mass &amp; inertia M (structure)</a:t>
+            </a:r>
+          </a:p>
+          <a:p>
+            <a:pPr>
+              <a:spcAft>
+                <a:spcPts val="600"/>
+              </a:spcAft>
+            </a:pPr>
+            <a:r>
+              <a:rPr sz="1300">
+                <a:solidFill>
+                  <a:srgbClr val="0A5560"/>
+                </a:solidFill>
+                <a:latin typeface="Segoe UI"/>
+              </a:rPr>
+              <a:t>•  </a:t>
+            </a:r>
+            <a:r>
+              <a:rPr sz="1300" b="0" i="0">
+                <a:solidFill>
+                  <a:srgbClr val="25323A"/>
+                </a:solidFill>
+                <a:latin typeface="Segoe UI"/>
+              </a:rPr>
+              <a:t>Assemble (M+A∞), C + gravity m·g·z_G</a:t>
+            </a:r>
+          </a:p>
+          <a:p>
+            <a:pPr>
+              <a:spcAft>
+                <a:spcPts val="600"/>
+              </a:spcAft>
+            </a:pPr>
+            <a:r>
+              <a:rPr sz="1300">
+                <a:solidFill>
+                  <a:srgbClr val="0A5560"/>
+                </a:solidFill>
+                <a:latin typeface="Segoe UI"/>
+              </a:rPr>
+              <a:t>•  </a:t>
+            </a:r>
+            <a:r>
+              <a:rPr sz="1300" b="0" i="0">
+                <a:solidFill>
+                  <a:srgbClr val="D1543A"/>
+                </a:solidFill>
+                <a:latin typeface="Segoe UI"/>
+              </a:rPr>
+              <a:t>Viscous Morison drag F_drag — not in BEM</a:t>
+            </a:r>
+          </a:p>
+          <a:p>
+            <a:pPr>
+              <a:spcAft>
+                <a:spcPts val="600"/>
+              </a:spcAft>
+            </a:pPr>
+            <a:r>
+              <a:rPr sz="1300">
+                <a:solidFill>
+                  <a:srgbClr val="0A5560"/>
+                </a:solidFill>
+                <a:latin typeface="Segoe UI"/>
+              </a:rPr>
+              <a:t>•  </a:t>
+            </a:r>
+            <a:r>
+              <a:rPr sz="1300" b="0" i="0">
+                <a:solidFill>
+                  <a:srgbClr val="25323A"/>
+                </a:solidFill>
+                <a:latin typeface="Segoe UI"/>
+              </a:rPr>
+              <a:t>Static equilibrium solve</a:t>
+            </a:r>
+          </a:p>
+          <a:p>
+            <a:pPr>
+              <a:spcAft>
+                <a:spcPts val="600"/>
+              </a:spcAft>
+            </a:pPr>
+            <a:r>
+              <a:rPr sz="1300">
+                <a:solidFill>
+                  <a:srgbClr val="0A5560"/>
+                </a:solidFill>
+                <a:latin typeface="Segoe UI"/>
+              </a:rPr>
+              <a:t>•  </a:t>
+            </a:r>
+            <a:r>
+              <a:rPr sz="1300" b="0" i="0">
+                <a:solidFill>
+                  <a:srgbClr val="25323A"/>
+                </a:solidFill>
+                <a:latin typeface="Segoe UI"/>
+              </a:rPr>
+              <a:t>Time-integrate the Cummins EoM → x(t)</a:t>
+            </a:r>
+          </a:p>
+          <a:p>
+            <a:pPr>
+              <a:spcAft>
+                <a:spcPts val="200"/>
+              </a:spcAft>
+            </a:pPr>
+            <a:r>
+              <a:rPr sz="1300">
+                <a:solidFill>
+                  <a:srgbClr val="0A5560"/>
+                </a:solidFill>
+                <a:latin typeface="Segoe UI"/>
+              </a:rPr>
+              <a:t>⇒  </a:t>
+            </a:r>
+            <a:r>
+              <a:rPr sz="1300" b="1" i="0">
+                <a:solidFill>
+                  <a:srgbClr val="0A5560"/>
+                </a:solidFill>
+                <a:latin typeface="Segoe UI"/>
+              </a:rPr>
+              <a:t>Output: decay period T &amp; damping ζ</a:t>
+            </a:r>
+          </a:p>
+        </p:txBody>
+      </p:sp>
+      <p:sp>
+        <p:nvSpPr>
+          <p:cNvPr id="13" name="Right Arrow 12"/>
+          <p:cNvSpPr/>
+          <p:nvPr/>
+        </p:nvSpPr>
+        <p:spPr>
+          <a:xfrm>
+            <a:off x="5596128" y="3246120"/>
+            <a:ext cx="932688" cy="457200"/>
+          </a:xfrm>
+          <a:prstGeom prst="rightArrow">
+            <a:avLst/>
+          </a:prstGeom>
+          <a:solidFill>
+            <a:srgbClr val="54636D"/>
+          </a:solidFill>
+          <a:ln>
+            <a:noFill/>
+          </a:ln>
+          <a:effectLst/>
+        </p:spPr>
+        <p:style>
+          <a:lnRef idx="1">
+            <a:schemeClr val="accent1"/>
+          </a:lnRef>
+          <a:fillRef idx="3">
+            <a:schemeClr val="accent1"/>
+          </a:fillRef>
+          <a:effectRef idx="2">
+            <a:schemeClr val="accent1"/>
+          </a:effectRef>
+          <a:fontRef idx="minor">
+            <a:schemeClr val="lt1"/>
+          </a:fontRef>
+        </p:style>
+        <p:txBody>
+          <a:bodyPr rtlCol="0" anchor="ctr"/>
+          <a:lstStyle/>
+          <a:p>
+            <a:pPr algn="ctr"/>
+          </a:p>
+        </p:txBody>
+      </p:sp>
+      <p:sp>
+        <p:nvSpPr>
+          <p:cNvPr id="14" name="TextBox 13"/>
+          <p:cNvSpPr txBox="1"/>
+          <p:nvPr/>
+        </p:nvSpPr>
+        <p:spPr>
+          <a:xfrm>
+            <a:off x="5257800" y="3730752"/>
+            <a:ext cx="1600200" cy="640080"/>
+          </a:xfrm>
+          <a:prstGeom prst="rect">
+            <a:avLst/>
+          </a:prstGeom>
+          <a:noFill/>
+        </p:spPr>
+        <p:txBody>
+          <a:bodyPr wrap="none">
+            <a:spAutoFit/>
+          </a:bodyPr>
+          <a:lstStyle/>
+          <a:p>
+            <a:pPr algn="ctr"/>
+            <a:r>
+              <a:rPr sz="900">
+                <a:solidFill>
+                  <a:srgbClr val="54636D"/>
+                </a:solidFill>
+                <a:latin typeface="Consolas"/>
+              </a:rPr>
+              <a:t>capytaine_
+osu_buoy.nc</a:t>
+            </a:r>
+          </a:p>
+        </p:txBody>
+      </p:sp>
+      <p:sp>
+        <p:nvSpPr>
+          <p:cNvPr id="15" name="Rectangle 14"/>
+          <p:cNvSpPr/>
+          <p:nvPr/>
+        </p:nvSpPr>
+        <p:spPr>
+          <a:xfrm>
+            <a:off x="777240" y="6108192"/>
+            <a:ext cx="10927080" cy="566928"/>
+          </a:xfrm>
+          <a:prstGeom prst="rect">
+            <a:avLst/>
+          </a:prstGeom>
+          <a:solidFill>
+            <a:srgbClr val="EEF6F7"/>
+          </a:solidFill>
+          <a:ln>
+            <a:noFill/>
+          </a:ln>
+          <a:effectLst/>
+        </p:spPr>
+        <p:style>
+          <a:lnRef idx="1">
+            <a:schemeClr val="accent1"/>
+          </a:lnRef>
+          <a:fillRef idx="3">
+            <a:schemeClr val="accent1"/>
+          </a:fillRef>
+          <a:effectRef idx="2">
+            <a:schemeClr val="accent1"/>
+          </a:effectRef>
+          <a:fontRef idx="minor">
+            <a:schemeClr val="lt1"/>
+          </a:fontRef>
+        </p:style>
+        <p:txBody>
+          <a:bodyPr rtlCol="0" anchor="ctr"/>
+          <a:lstStyle/>
+          <a:p>
+            <a:pPr algn="ctr"/>
+          </a:p>
+        </p:txBody>
+      </p:sp>
+      <p:sp>
+        <p:nvSpPr>
+          <p:cNvPr id="16" name="TextBox 15"/>
+          <p:cNvSpPr txBox="1"/>
+          <p:nvPr/>
+        </p:nvSpPr>
+        <p:spPr>
+          <a:xfrm>
+            <a:off x="960120" y="6144768"/>
+            <a:ext cx="10515600" cy="493776"/>
+          </a:xfrm>
+          <a:prstGeom prst="rect">
+            <a:avLst/>
+          </a:prstGeom>
+          <a:noFill/>
+        </p:spPr>
+        <p:txBody>
           <a:bodyPr wrap="square" anchor="ctr">
             <a:spAutoFit/>
           </a:bodyPr>
@@ -5802,40 +7422,477 @@
           <a:p>
             <a:pPr algn="ctr"/>
             <a:r>
-              <a:rPr sz="1400" b="1">
+              <a:rPr sz="1250" b="1">
                 <a:solidFill>
                   <a:srgbClr val="0A5560"/>
                 </a:solidFill>
                 <a:latin typeface="Segoe UI"/>
               </a:rPr>
-              <a:t>Period is predictable → T ≈ 2.3–2.4 s</a:t>
-            </a:r>
-            <a:r>
-              <a:rPr sz="1400" b="0">
-                <a:solidFill>
-                  <a:srgbClr val="25323A"/>
-                </a:solidFill>
-                <a:latin typeface="Segoe UI"/>
-              </a:rPr>
-              <a:t>   (M, C₃₃ known; only plate added mass uncertain).   </a:t>
-            </a:r>
-            <a:r>
-              <a:rPr sz="1400" b="1">
+              <a:t>Capytaine = the hydrodynamic coefficients</a:t>
+            </a:r>
+            <a:r>
+              <a:rPr sz="1250" b="0">
+                <a:solidFill>
+                  <a:srgbClr val="25323A"/>
+                </a:solidFill>
+                <a:latin typeface="Segoe UI"/>
+              </a:rPr>
+              <a:t>   ·   </a:t>
+            </a:r>
+            <a:r>
+              <a:rPr sz="1250" b="1">
+                <a:solidFill>
+                  <a:srgbClr val="0A5560"/>
+                </a:solidFill>
+                <a:latin typeface="Segoe UI"/>
+              </a:rPr>
+              <a:t>FloatSim = the equation of motion in time</a:t>
+            </a:r>
+            <a:r>
+              <a:rPr sz="1250" b="0">
+                <a:solidFill>
+                  <a:srgbClr val="25323A"/>
+                </a:solidFill>
+                <a:latin typeface="Segoe UI"/>
+              </a:rPr>
+              <a:t>  (adds mass, viscous drag, mooring, equilibrium; converts B(ω)→K(t)).  Decay T and ζ are a FloatSim output.</a:t>
+            </a:r>
+          </a:p>
+        </p:txBody>
+      </p:sp>
+    </p:spTree>
+  </p:cSld>
+  <p:clrMapOvr>
+    <a:masterClrMapping/>
+  </p:clrMapOvr>
+</p:sld>
+</file>
+
+<file path=ppt/slides/slide9.xml><?xml version="1.0" encoding="utf-8"?>
+<p:sld xmlns:a="http://schemas.openxmlformats.org/drawingml/2006/main" xmlns:p="http://schemas.openxmlformats.org/presentationml/2006/main" xmlns:r="http://schemas.openxmlformats.org/officeDocument/2006/relationships">
+  <p:cSld>
+    <p:bg>
+      <p:bgPr>
+        <a:solidFill>
+          <a:srgbClr val="FFFFFF"/>
+        </a:solidFill>
+        <a:effectLst/>
+      </p:bgPr>
+    </p:bg>
+    <p:spTree>
+      <p:nvGrpSpPr>
+        <p:cNvPr id="1" name=""/>
+        <p:cNvGrpSpPr/>
+        <p:nvPr/>
+      </p:nvGrpSpPr>
+      <p:grpSpPr/>
+      <p:sp>
+        <p:nvSpPr>
+          <p:cNvPr id="2" name="TextBox 1"/>
+          <p:cNvSpPr txBox="1"/>
+          <p:nvPr/>
+        </p:nvSpPr>
+        <p:spPr>
+          <a:xfrm>
+            <a:off x="640080" y="384048"/>
+            <a:ext cx="10972800" cy="365760"/>
+          </a:xfrm>
+          <a:prstGeom prst="rect">
+            <a:avLst/>
+          </a:prstGeom>
+          <a:noFill/>
+        </p:spPr>
+        <p:txBody>
+          <a:bodyPr wrap="none">
+            <a:spAutoFit/>
+          </a:bodyPr>
+          <a:lstStyle/>
+          <a:p>
+            <a:r>
+              <a:rPr sz="1300" b="1">
+                <a:solidFill>
+                  <a:srgbClr val="0C8B96"/>
+                </a:solidFill>
+                <a:latin typeface="Segoe UI"/>
+              </a:rPr>
+              <a:t>CAVEATS</a:t>
+            </a:r>
+          </a:p>
+        </p:txBody>
+      </p:sp>
+      <p:sp>
+        <p:nvSpPr>
+          <p:cNvPr id="3" name="TextBox 2"/>
+          <p:cNvSpPr txBox="1"/>
+          <p:nvPr/>
+        </p:nvSpPr>
+        <p:spPr>
+          <a:xfrm>
+            <a:off x="640080" y="658368"/>
+            <a:ext cx="10972800" cy="822960"/>
+          </a:xfrm>
+          <a:prstGeom prst="rect">
+            <a:avLst/>
+          </a:prstGeom>
+          <a:noFill/>
+        </p:spPr>
+        <p:txBody>
+          <a:bodyPr wrap="none">
+            <a:spAutoFit/>
+          </a:bodyPr>
+          <a:lstStyle/>
+          <a:p>
+            <a:r>
+              <a:rPr sz="3000" b="1">
+                <a:solidFill>
+                  <a:srgbClr val="25323A"/>
+                </a:solidFill>
+                <a:latin typeface="Segoe UI"/>
+              </a:rPr>
+              <a:t>Limits — and why the heave plate needs the tank</a:t>
+            </a:r>
+          </a:p>
+        </p:txBody>
+      </p:sp>
+      <p:sp>
+        <p:nvSpPr>
+          <p:cNvPr id="4" name="Rectangle 3"/>
+          <p:cNvSpPr/>
+          <p:nvPr/>
+        </p:nvSpPr>
+        <p:spPr>
+          <a:xfrm>
+            <a:off x="658368" y="1444752"/>
+            <a:ext cx="2011680" cy="54864"/>
+          </a:xfrm>
+          <a:prstGeom prst="rect">
+            <a:avLst/>
+          </a:prstGeom>
+          <a:solidFill>
+            <a:srgbClr val="0C8B96"/>
+          </a:solidFill>
+          <a:ln>
+            <a:noFill/>
+          </a:ln>
+          <a:effectLst/>
+        </p:spPr>
+        <p:style>
+          <a:lnRef idx="1">
+            <a:schemeClr val="accent1"/>
+          </a:lnRef>
+          <a:fillRef idx="3">
+            <a:schemeClr val="accent1"/>
+          </a:fillRef>
+          <a:effectRef idx="2">
+            <a:schemeClr val="accent1"/>
+          </a:effectRef>
+          <a:fontRef idx="minor">
+            <a:schemeClr val="lt1"/>
+          </a:fontRef>
+        </p:style>
+        <p:txBody>
+          <a:bodyPr rtlCol="0" anchor="ctr"/>
+          <a:lstStyle/>
+          <a:p>
+            <a:pPr algn="ctr"/>
+          </a:p>
+        </p:txBody>
+      </p:sp>
+      <p:sp>
+        <p:nvSpPr>
+          <p:cNvPr id="5" name="TextBox 4"/>
+          <p:cNvSpPr txBox="1"/>
+          <p:nvPr/>
+        </p:nvSpPr>
+        <p:spPr>
+          <a:xfrm>
+            <a:off x="777240" y="1828800"/>
+            <a:ext cx="10698480" cy="4572000"/>
+          </a:xfrm>
+          <a:prstGeom prst="rect">
+            <a:avLst/>
+          </a:prstGeom>
+          <a:noFill/>
+        </p:spPr>
+        <p:txBody>
+          <a:bodyPr wrap="square">
+            <a:spAutoFit/>
+          </a:bodyPr>
+          <a:lstStyle/>
+          <a:p>
+            <a:pPr>
+              <a:spcBef>
+                <a:spcPts val="200"/>
+              </a:spcBef>
+              <a:spcAft>
+                <a:spcPts val="1100"/>
+              </a:spcAft>
+            </a:pPr>
+            <a:r>
+              <a:rPr sz="1800">
+                <a:solidFill>
+                  <a:srgbClr val="0C8B96"/>
+                </a:solidFill>
+                <a:latin typeface="Segoe UI"/>
+              </a:rPr>
+              <a:t>•  </a:t>
+            </a:r>
+            <a:r>
+              <a:rPr sz="1800" b="0" i="0">
+                <a:solidFill>
+                  <a:srgbClr val="25323A"/>
+                </a:solidFill>
+                <a:latin typeface="Segoe UI"/>
+              </a:rPr>
+              <a:t>Potential flow is </a:t>
+            </a:r>
+            <a:r>
+              <a:rPr sz="1800" b="1" i="0">
+                <a:solidFill>
+                  <a:srgbClr val="25323A"/>
+                </a:solidFill>
+                <a:latin typeface="Segoe UI"/>
+              </a:rPr>
+              <a:t>inviscid and linear</a:t>
+            </a:r>
+            <a:r>
+              <a:rPr sz="1800" b="0" i="0">
+                <a:solidFill>
+                  <a:srgbClr val="25323A"/>
+                </a:solidFill>
+                <a:latin typeface="Segoe UI"/>
+              </a:rPr>
+              <a:t>. Two consequences for us:</a:t>
+            </a:r>
+          </a:p>
+          <a:p>
+            <a:pPr lvl="1">
+              <a:spcBef>
+                <a:spcPts val="200"/>
+              </a:spcBef>
+              <a:spcAft>
+                <a:spcPts val="1100"/>
+              </a:spcAft>
+            </a:pPr>
+            <a:r>
+              <a:rPr sz="1800">
+                <a:solidFill>
+                  <a:srgbClr val="54636D"/>
+                </a:solidFill>
+                <a:latin typeface="Segoe UI"/>
+              </a:rPr>
+              <a:t>      –  </a:t>
+            </a:r>
+            <a:r>
+              <a:rPr sz="1600" b="1" i="0">
                 <a:solidFill>
                   <a:srgbClr val="D1543A"/>
                 </a:solidFill>
                 <a:latin typeface="Segoe UI"/>
               </a:rPr>
-              <a:t>Damping is the measurement</a:t>
-            </a:r>
-            <a:r>
-              <a:rPr sz="1400" b="0">
-                <a:solidFill>
-                  <a:srgbClr val="25323A"/>
-                </a:solidFill>
-                <a:latin typeface="Segoe UI"/>
-              </a:rPr>
-              <a:t>  → ζ₁ ≈ 8–15% at 100 mm.  Test pins: period→added mass, decay→drag Cd.</a:t>
+              <a:t>No viscous drag in the BEM</a:t>
+            </a:r>
+            <a:r>
+              <a:rPr sz="1600" b="0" i="0">
+                <a:solidFill>
+                  <a:srgbClr val="25323A"/>
+                </a:solidFill>
+                <a:latin typeface="Segoe UI"/>
+              </a:rPr>
+              <a:t> → all quadratic / viscous damping is added separately as </a:t>
+            </a:r>
+            <a:r>
+              <a:rPr sz="1600" b="1" i="0">
+                <a:solidFill>
+                  <a:srgbClr val="25323A"/>
+                </a:solidFill>
+                <a:latin typeface="Segoe UI"/>
+              </a:rPr>
+              <a:t>Morison drag F_drag</a:t>
+            </a:r>
+            <a:r>
+              <a:rPr sz="1600" b="0" i="0">
+                <a:solidFill>
+                  <a:srgbClr val="25323A"/>
+                </a:solidFill>
+                <a:latin typeface="Segoe UI"/>
+              </a:rPr>
+              <a:t> — not from Capytaine.</a:t>
+            </a:r>
+          </a:p>
+          <a:p>
+            <a:pPr lvl="1">
+              <a:spcBef>
+                <a:spcPts val="200"/>
+              </a:spcBef>
+              <a:spcAft>
+                <a:spcPts val="1100"/>
+              </a:spcAft>
+            </a:pPr>
+            <a:r>
+              <a:rPr sz="1800">
+                <a:solidFill>
+                  <a:srgbClr val="54636D"/>
+                </a:solidFill>
+                <a:latin typeface="Segoe UI"/>
+              </a:rPr>
+              <a:t>      –  </a:t>
+            </a:r>
+            <a:r>
+              <a:rPr sz="1600" b="1" i="0">
+                <a:solidFill>
+                  <a:srgbClr val="D1543A"/>
+                </a:solidFill>
+                <a:latin typeface="Segoe UI"/>
+              </a:rPr>
+              <a:t>Panels treat every surface as solid</a:t>
+            </a:r>
+            <a:r>
+              <a:rPr sz="1600" b="0" i="0">
+                <a:solidFill>
+                  <a:srgbClr val="25323A"/>
+                </a:solidFill>
+                <a:latin typeface="Segoe UI"/>
+              </a:rPr>
+              <a:t> → </a:t>
+            </a:r>
+            <a:r>
+              <a:rPr sz="1600" b="1" i="0">
+                <a:solidFill>
+                  <a:srgbClr val="25323A"/>
+                </a:solidFill>
+                <a:latin typeface="Segoe UI"/>
+              </a:rPr>
+              <a:t>over-predicts added mass</a:t>
+            </a:r>
+            <a:r>
+              <a:rPr sz="1600" b="0" i="0">
+                <a:solidFill>
+                  <a:srgbClr val="25323A"/>
+                </a:solidFill>
+                <a:latin typeface="Segoe UI"/>
+              </a:rPr>
+              <a:t> for the open/perforated heave-plate frame (it blocks flow the real perforations pass).</a:t>
+            </a:r>
+          </a:p>
+          <a:p>
+            <a:pPr>
+              <a:spcBef>
+                <a:spcPts val="200"/>
+              </a:spcBef>
+              <a:spcAft>
+                <a:spcPts val="1100"/>
+              </a:spcAft>
+            </a:pPr>
+            <a:r>
+              <a:rPr sz="1800">
+                <a:solidFill>
+                  <a:srgbClr val="0C8B96"/>
+                </a:solidFill>
+                <a:latin typeface="Segoe UI"/>
+              </a:rPr>
+              <a:t>•  </a:t>
+            </a:r>
+            <a:r>
+              <a:rPr sz="1800" b="0" i="0">
+                <a:solidFill>
+                  <a:srgbClr val="25323A"/>
+                </a:solidFill>
+                <a:latin typeface="Segoe UI"/>
+              </a:rPr>
+              <a:t>Practical split for the OSU buoy:</a:t>
+            </a:r>
+          </a:p>
+          <a:p>
+            <a:pPr lvl="1">
+              <a:spcBef>
+                <a:spcPts val="200"/>
+              </a:spcBef>
+              <a:spcAft>
+                <a:spcPts val="1100"/>
+              </a:spcAft>
+            </a:pPr>
+            <a:r>
+              <a:rPr sz="1800">
+                <a:solidFill>
+                  <a:srgbClr val="54636D"/>
+                </a:solidFill>
+                <a:latin typeface="Segoe UI"/>
+              </a:rPr>
+              <a:t>      –  </a:t>
+            </a:r>
+            <a:r>
+              <a:rPr sz="1600" b="1" i="0">
+                <a:solidFill>
+                  <a:srgbClr val="0A5560"/>
+                </a:solidFill>
+                <a:latin typeface="Segoe UI"/>
+              </a:rPr>
+              <a:t>Spar (6″ pipe)</a:t>
+            </a:r>
+            <a:r>
+              <a:rPr sz="1600" b="0" i="0">
+                <a:solidFill>
+                  <a:srgbClr val="25323A"/>
+                </a:solidFill>
+                <a:latin typeface="Segoe UI"/>
+              </a:rPr>
+              <a:t> — a clean cylinder → the BEM is reliable.</a:t>
+            </a:r>
+          </a:p>
+          <a:p>
+            <a:pPr lvl="1">
+              <a:spcBef>
+                <a:spcPts val="200"/>
+              </a:spcBef>
+              <a:spcAft>
+                <a:spcPts val="1100"/>
+              </a:spcAft>
+            </a:pPr>
+            <a:r>
+              <a:rPr sz="1800">
+                <a:solidFill>
+                  <a:srgbClr val="54636D"/>
+                </a:solidFill>
+                <a:latin typeface="Segoe UI"/>
+              </a:rPr>
+              <a:t>      –  </a:t>
+            </a:r>
+            <a:r>
+              <a:rPr sz="1600" b="1" i="0">
+                <a:solidFill>
+                  <a:srgbClr val="0A5560"/>
+                </a:solidFill>
+                <a:latin typeface="Segoe UI"/>
+              </a:rPr>
+              <a:t>Heave-plate / ballast frame</a:t>
+            </a:r>
+            <a:r>
+              <a:rPr sz="1600" b="0" i="0">
+                <a:solidFill>
+                  <a:srgbClr val="25323A"/>
+                </a:solidFill>
+                <a:latin typeface="Segoe UI"/>
+              </a:rPr>
+              <a:t> — A and B are BEM </a:t>
+            </a:r>
+            <a:r>
+              <a:rPr sz="1600" b="1" i="0">
+                <a:solidFill>
+                  <a:srgbClr val="25323A"/>
+                </a:solidFill>
+                <a:latin typeface="Segoe UI"/>
+              </a:rPr>
+              <a:t>stand-ins until the tank test measures them</a:t>
+            </a:r>
+            <a:r>
+              <a:rPr sz="1600" b="0" i="0">
+                <a:solidFill>
+                  <a:srgbClr val="25323A"/>
+                </a:solidFill>
+                <a:latin typeface="Segoe UI"/>
+              </a:rPr>
+              <a:t>.</a:t>
             </a:r>
           </a:p>
         </p:txBody>

--- a/studies/osu-test-buoy/Capytaine_analysis_OSU_buoy.pptx
+++ b/studies/osu-test-buoy/Capytaine_analysis_OSU_buoy.pptx
@@ -16,6 +16,9 @@
     <p:sldId id="264" r:id="rId15"/>
     <p:sldId id="265" r:id="rId16"/>
     <p:sldId id="266" r:id="rId17"/>
+    <p:sldId id="267" r:id="rId18"/>
+    <p:sldId id="268" r:id="rId19"/>
+    <p:sldId id="269" r:id="rId20"/>
   </p:sldIdLst>
   <p:sldSz cx="12191695" cy="6858000" type="screen4x3"/>
   <p:notesSz cx="6858000" cy="9144000"/>
@@ -4405,6 +4408,934 @@
 </p:sld>
 </file>
 
+<file path=ppt/slides/slide12.xml><?xml version="1.0" encoding="utf-8"?>
+<p:sld xmlns:a="http://schemas.openxmlformats.org/drawingml/2006/main" xmlns:p="http://schemas.openxmlformats.org/presentationml/2006/main" xmlns:r="http://schemas.openxmlformats.org/officeDocument/2006/relationships">
+  <p:cSld>
+    <p:bg>
+      <p:bgPr>
+        <a:solidFill>
+          <a:srgbClr val="FFFFFF"/>
+        </a:solidFill>
+        <a:effectLst/>
+      </p:bgPr>
+    </p:bg>
+    <p:spTree>
+      <p:nvGrpSpPr>
+        <p:cNvPr id="1" name=""/>
+        <p:cNvGrpSpPr/>
+        <p:nvPr/>
+      </p:nvGrpSpPr>
+      <p:grpSpPr/>
+      <p:sp>
+        <p:nvSpPr>
+          <p:cNvPr id="2" name="TextBox 1"/>
+          <p:cNvSpPr txBox="1"/>
+          <p:nvPr/>
+        </p:nvSpPr>
+        <p:spPr>
+          <a:xfrm>
+            <a:off x="640080" y="384048"/>
+            <a:ext cx="10972800" cy="365760"/>
+          </a:xfrm>
+          <a:prstGeom prst="rect">
+            <a:avLst/>
+          </a:prstGeom>
+          <a:noFill/>
+        </p:spPr>
+        <p:txBody>
+          <a:bodyPr wrap="none">
+            <a:spAutoFit/>
+          </a:bodyPr>
+          <a:lstStyle/>
+          <a:p>
+            <a:r>
+              <a:rPr sz="1300" b="1">
+                <a:solidFill>
+                  <a:srgbClr val="0C8B96"/>
+                </a:solidFill>
+                <a:latin typeface="Segoe UI"/>
+              </a:rPr>
+              <a:t>DESIGN STUDY</a:t>
+            </a:r>
+          </a:p>
+        </p:txBody>
+      </p:sp>
+      <p:sp>
+        <p:nvSpPr>
+          <p:cNvPr id="3" name="TextBox 2"/>
+          <p:cNvSpPr txBox="1"/>
+          <p:nvPr/>
+        </p:nvSpPr>
+        <p:spPr>
+          <a:xfrm>
+            <a:off x="640080" y="658368"/>
+            <a:ext cx="10972800" cy="822960"/>
+          </a:xfrm>
+          <a:prstGeom prst="rect">
+            <a:avLst/>
+          </a:prstGeom>
+          <a:noFill/>
+        </p:spPr>
+        <p:txBody>
+          <a:bodyPr wrap="none">
+            <a:spAutoFit/>
+          </a:bodyPr>
+          <a:lstStyle/>
+          <a:p>
+            <a:r>
+              <a:rPr sz="3000" b="1">
+                <a:solidFill>
+                  <a:srgbClr val="25323A"/>
+                </a:solidFill>
+                <a:latin typeface="Segoe UI"/>
+              </a:rPr>
+              <a:t>Where to put the heave plate? — pitch performance</a:t>
+            </a:r>
+          </a:p>
+        </p:txBody>
+      </p:sp>
+      <p:sp>
+        <p:nvSpPr>
+          <p:cNvPr id="4" name="Rectangle 3"/>
+          <p:cNvSpPr/>
+          <p:nvPr/>
+        </p:nvSpPr>
+        <p:spPr>
+          <a:xfrm>
+            <a:off x="658368" y="1444752"/>
+            <a:ext cx="2011680" cy="54864"/>
+          </a:xfrm>
+          <a:prstGeom prst="rect">
+            <a:avLst/>
+          </a:prstGeom>
+          <a:solidFill>
+            <a:srgbClr val="0C8B96"/>
+          </a:solidFill>
+          <a:ln>
+            <a:noFill/>
+          </a:ln>
+          <a:effectLst/>
+        </p:spPr>
+        <p:style>
+          <a:lnRef idx="1">
+            <a:schemeClr val="accent1"/>
+          </a:lnRef>
+          <a:fillRef idx="3">
+            <a:schemeClr val="accent1"/>
+          </a:fillRef>
+          <a:effectRef idx="2">
+            <a:schemeClr val="accent1"/>
+          </a:effectRef>
+          <a:fontRef idx="minor">
+            <a:schemeClr val="lt1"/>
+          </a:fontRef>
+        </p:style>
+        <p:txBody>
+          <a:bodyPr rtlCol="0" anchor="ctr"/>
+          <a:lstStyle/>
+          <a:p>
+            <a:pPr algn="ctr"/>
+          </a:p>
+        </p:txBody>
+      </p:sp>
+      <p:pic>
+        <p:nvPicPr>
+          <p:cNvPr id="5" name="Picture 4" descr="plate_depth_pitch_study.png"/>
+          <p:cNvPicPr>
+            <a:picLocks noChangeAspect="1"/>
+          </p:cNvPicPr>
+          <p:nvPr/>
+        </p:nvPicPr>
+        <p:blipFill>
+          <a:blip r:embed="rId2"/>
+          <a:stretch>
+            <a:fillRect/>
+          </a:stretch>
+        </p:blipFill>
+        <p:spPr>
+          <a:xfrm>
+            <a:off x="1298448" y="1554480"/>
+            <a:ext cx="9601200" cy="3857359"/>
+          </a:xfrm>
+          <a:prstGeom prst="rect">
+            <a:avLst/>
+          </a:prstGeom>
+        </p:spPr>
+      </p:pic>
+      <p:sp>
+        <p:nvSpPr>
+          <p:cNvPr id="6" name="Rectangle 5"/>
+          <p:cNvSpPr/>
+          <p:nvPr/>
+        </p:nvSpPr>
+        <p:spPr>
+          <a:xfrm>
+            <a:off x="777240" y="5943600"/>
+            <a:ext cx="10607040" cy="731520"/>
+          </a:xfrm>
+          <a:prstGeom prst="rect">
+            <a:avLst/>
+          </a:prstGeom>
+          <a:solidFill>
+            <a:srgbClr val="EEF6F7"/>
+          </a:solidFill>
+          <a:ln>
+            <a:noFill/>
+          </a:ln>
+          <a:effectLst/>
+        </p:spPr>
+        <p:style>
+          <a:lnRef idx="1">
+            <a:schemeClr val="accent1"/>
+          </a:lnRef>
+          <a:fillRef idx="3">
+            <a:schemeClr val="accent1"/>
+          </a:fillRef>
+          <a:effectRef idx="2">
+            <a:schemeClr val="accent1"/>
+          </a:effectRef>
+          <a:fontRef idx="minor">
+            <a:schemeClr val="lt1"/>
+          </a:fontRef>
+        </p:style>
+        <p:txBody>
+          <a:bodyPr rtlCol="0" anchor="ctr"/>
+          <a:lstStyle/>
+          <a:p>
+            <a:pPr algn="ctr"/>
+          </a:p>
+        </p:txBody>
+      </p:sp>
+      <p:sp>
+        <p:nvSpPr>
+          <p:cNvPr id="7" name="TextBox 6"/>
+          <p:cNvSpPr txBox="1"/>
+          <p:nvPr/>
+        </p:nvSpPr>
+        <p:spPr>
+          <a:xfrm>
+            <a:off x="960120" y="5980176"/>
+            <a:ext cx="10241280" cy="658368"/>
+          </a:xfrm>
+          <a:prstGeom prst="rect">
+            <a:avLst/>
+          </a:prstGeom>
+          <a:noFill/>
+        </p:spPr>
+        <p:txBody>
+          <a:bodyPr wrap="square" anchor="ctr">
+            <a:spAutoFit/>
+          </a:bodyPr>
+          <a:lstStyle/>
+          <a:p>
+            <a:pPr algn="ctr"/>
+            <a:r>
+              <a:rPr sz="1300" b="1">
+                <a:solidFill>
+                  <a:srgbClr val="0A5560"/>
+                </a:solidFill>
+                <a:latin typeface="Segoe UI"/>
+              </a:rPr>
+              <a:t>Plate depth barely moves pitch</a:t>
+            </a:r>
+            <a:r>
+              <a:rPr sz="1300" b="0">
+                <a:solidFill>
+                  <a:srgbClr val="25323A"/>
+                </a:solidFill>
+                <a:latin typeface="Segoe UI"/>
+              </a:rPr>
+              <a:t> (2.10 → 2.14 s over a 4× lever-arm change) or heave — an axial plate meets pitch EDGE-ON, so its broadside added mass &amp; drag (which dominate heave) hardly engage it.  </a:t>
+            </a:r>
+            <a:r>
+              <a:rPr sz="1300" b="1">
+                <a:solidFill>
+                  <a:srgbClr val="0A5560"/>
+                </a:solidFill>
+                <a:latin typeface="Segoe UI"/>
+              </a:rPr>
+              <a:t>Deck tilt is a ballast/CoG job, not a plate-depth job.</a:t>
+            </a:r>
+          </a:p>
+        </p:txBody>
+      </p:sp>
+    </p:spTree>
+  </p:cSld>
+  <p:clrMapOvr>
+    <a:masterClrMapping/>
+  </p:clrMapOvr>
+</p:sld>
+</file>
+
+<file path=ppt/slides/slide13.xml><?xml version="1.0" encoding="utf-8"?>
+<p:sld xmlns:a="http://schemas.openxmlformats.org/drawingml/2006/main" xmlns:p="http://schemas.openxmlformats.org/presentationml/2006/main" xmlns:r="http://schemas.openxmlformats.org/officeDocument/2006/relationships">
+  <p:cSld>
+    <p:bg>
+      <p:bgPr>
+        <a:solidFill>
+          <a:srgbClr val="FFFFFF"/>
+        </a:solidFill>
+        <a:effectLst/>
+      </p:bgPr>
+    </p:bg>
+    <p:spTree>
+      <p:nvGrpSpPr>
+        <p:cNvPr id="1" name=""/>
+        <p:cNvGrpSpPr/>
+        <p:nvPr/>
+      </p:nvGrpSpPr>
+      <p:grpSpPr/>
+      <p:sp>
+        <p:nvSpPr>
+          <p:cNvPr id="2" name="TextBox 1"/>
+          <p:cNvSpPr txBox="1"/>
+          <p:nvPr/>
+        </p:nvSpPr>
+        <p:spPr>
+          <a:xfrm>
+            <a:off x="640080" y="384048"/>
+            <a:ext cx="10972800" cy="365760"/>
+          </a:xfrm>
+          <a:prstGeom prst="rect">
+            <a:avLst/>
+          </a:prstGeom>
+          <a:noFill/>
+        </p:spPr>
+        <p:txBody>
+          <a:bodyPr wrap="none">
+            <a:spAutoFit/>
+          </a:bodyPr>
+          <a:lstStyle/>
+          <a:p>
+            <a:r>
+              <a:rPr sz="1300" b="1">
+                <a:solidFill>
+                  <a:srgbClr val="0C8B96"/>
+                </a:solidFill>
+                <a:latin typeface="Segoe UI"/>
+              </a:rPr>
+              <a:t>PLATFORM STUDY</a:t>
+            </a:r>
+          </a:p>
+        </p:txBody>
+      </p:sp>
+      <p:sp>
+        <p:nvSpPr>
+          <p:cNvPr id="3" name="TextBox 2"/>
+          <p:cNvSpPr txBox="1"/>
+          <p:nvPr/>
+        </p:nvSpPr>
+        <p:spPr>
+          <a:xfrm>
+            <a:off x="640080" y="658368"/>
+            <a:ext cx="10972800" cy="822960"/>
+          </a:xfrm>
+          <a:prstGeom prst="rect">
+            <a:avLst/>
+          </a:prstGeom>
+          <a:noFill/>
+        </p:spPr>
+        <p:txBody>
+          <a:bodyPr wrap="none">
+            <a:spAutoFit/>
+          </a:bodyPr>
+          <a:lstStyle/>
+          <a:p>
+            <a:r>
+              <a:rPr sz="3000" b="1">
+                <a:solidFill>
+                  <a:srgbClr val="25323A"/>
+                </a:solidFill>
+                <a:latin typeface="Segoe UI"/>
+              </a:rPr>
+              <a:t>Do the buoy gimbals help the platform? — pin vs rigid</a:t>
+            </a:r>
+          </a:p>
+        </p:txBody>
+      </p:sp>
+      <p:sp>
+        <p:nvSpPr>
+          <p:cNvPr id="4" name="Rectangle 3"/>
+          <p:cNvSpPr/>
+          <p:nvPr/>
+        </p:nvSpPr>
+        <p:spPr>
+          <a:xfrm>
+            <a:off x="658368" y="1444752"/>
+            <a:ext cx="2011680" cy="54864"/>
+          </a:xfrm>
+          <a:prstGeom prst="rect">
+            <a:avLst/>
+          </a:prstGeom>
+          <a:solidFill>
+            <a:srgbClr val="0C8B96"/>
+          </a:solidFill>
+          <a:ln>
+            <a:noFill/>
+          </a:ln>
+          <a:effectLst/>
+        </p:spPr>
+        <p:style>
+          <a:lnRef idx="1">
+            <a:schemeClr val="accent1"/>
+          </a:lnRef>
+          <a:fillRef idx="3">
+            <a:schemeClr val="accent1"/>
+          </a:fillRef>
+          <a:effectRef idx="2">
+            <a:schemeClr val="accent1"/>
+          </a:effectRef>
+          <a:fontRef idx="minor">
+            <a:schemeClr val="lt1"/>
+          </a:fontRef>
+        </p:style>
+        <p:txBody>
+          <a:bodyPr rtlCol="0" anchor="ctr"/>
+          <a:lstStyle/>
+          <a:p>
+            <a:pPr algn="ctr"/>
+          </a:p>
+        </p:txBody>
+      </p:sp>
+      <p:sp>
+        <p:nvSpPr>
+          <p:cNvPr id="5" name="TextBox 4"/>
+          <p:cNvSpPr txBox="1"/>
+          <p:nvPr/>
+        </p:nvSpPr>
+        <p:spPr>
+          <a:xfrm>
+            <a:off x="777240" y="1920240"/>
+            <a:ext cx="10698480" cy="4572000"/>
+          </a:xfrm>
+          <a:prstGeom prst="rect">
+            <a:avLst/>
+          </a:prstGeom>
+          <a:noFill/>
+        </p:spPr>
+        <p:txBody>
+          <a:bodyPr wrap="square">
+            <a:spAutoFit/>
+          </a:bodyPr>
+          <a:lstStyle/>
+          <a:p>
+            <a:pPr>
+              <a:spcBef>
+                <a:spcPts val="200"/>
+              </a:spcBef>
+              <a:spcAft>
+                <a:spcPts val="1200"/>
+              </a:spcAft>
+            </a:pPr>
+            <a:r>
+              <a:rPr sz="1800">
+                <a:solidFill>
+                  <a:srgbClr val="0C8B96"/>
+                </a:solidFill>
+                <a:latin typeface="Segoe UI"/>
+              </a:rPr>
+              <a:t>•  </a:t>
+            </a:r>
+            <a:r>
+              <a:rPr sz="1800" b="0" i="0">
+                <a:solidFill>
+                  <a:srgbClr val="25323A"/>
+                </a:solidFill>
+                <a:latin typeface="Segoe UI"/>
+              </a:rPr>
+              <a:t>Scaling up: 16 buoys on a shared platform — a </a:t>
+            </a:r>
+            <a:r>
+              <a:rPr sz="1800" b="1" i="0">
+                <a:solidFill>
+                  <a:srgbClr val="25323A"/>
+                </a:solidFill>
+                <a:latin typeface="Segoe UI"/>
+              </a:rPr>
+              <a:t>still, level deck</a:t>
+            </a:r>
+            <a:r>
+              <a:rPr sz="1800" b="0" i="0">
+                <a:solidFill>
+                  <a:srgbClr val="25323A"/>
+                </a:solidFill>
+                <a:latin typeface="Segoe UI"/>
+              </a:rPr>
+              <a:t> for rockets / datacenters / hotels.</a:t>
+            </a:r>
+          </a:p>
+          <a:p>
+            <a:pPr>
+              <a:spcBef>
+                <a:spcPts val="200"/>
+              </a:spcBef>
+              <a:spcAft>
+                <a:spcPts val="1200"/>
+              </a:spcAft>
+            </a:pPr>
+            <a:r>
+              <a:rPr sz="1800">
+                <a:solidFill>
+                  <a:srgbClr val="0C8B96"/>
+                </a:solidFill>
+                <a:latin typeface="Segoe UI"/>
+              </a:rPr>
+              <a:t>•  </a:t>
+            </a:r>
+            <a:r>
+              <a:rPr sz="1800" b="0" i="0">
+                <a:solidFill>
+                  <a:srgbClr val="25323A"/>
+                </a:solidFill>
+                <a:latin typeface="Segoe UI"/>
+              </a:rPr>
+              <a:t>Each buoy joins the platform through the </a:t>
+            </a:r>
+            <a:r>
+              <a:rPr sz="1800" b="1" i="0">
+                <a:solidFill>
+                  <a:srgbClr val="25323A"/>
+                </a:solidFill>
+                <a:latin typeface="Segoe UI"/>
+              </a:rPr>
+              <a:t>gimbal at its top</a:t>
+            </a:r>
+            <a:r>
+              <a:rPr sz="1800" b="0" i="0">
+                <a:solidFill>
+                  <a:srgbClr val="25323A"/>
+                </a:solidFill>
+                <a:latin typeface="Segoe UI"/>
+              </a:rPr>
+              <a:t> (a pin: roll/pitch free). Does that beat welding the assembly rigid?</a:t>
+            </a:r>
+          </a:p>
+          <a:p>
+            <a:pPr>
+              <a:spcBef>
+                <a:spcPts val="200"/>
+              </a:spcBef>
+              <a:spcAft>
+                <a:spcPts val="1200"/>
+              </a:spcAft>
+            </a:pPr>
+            <a:r>
+              <a:rPr sz="1800">
+                <a:solidFill>
+                  <a:srgbClr val="0C8B96"/>
+                </a:solidFill>
+                <a:latin typeface="Segoe UI"/>
+              </a:rPr>
+              <a:t>•  </a:t>
+            </a:r>
+            <a:r>
+              <a:rPr sz="1800" b="0" i="0">
+                <a:solidFill>
+                  <a:srgbClr val="25323A"/>
+                </a:solidFill>
+                <a:latin typeface="Segoe UI"/>
+              </a:rPr>
+              <a:t>Same 16-buoy deck, same hydro / drag / geometry — only the joint type changes:</a:t>
+            </a:r>
+          </a:p>
+          <a:p>
+            <a:pPr lvl="1">
+              <a:spcBef>
+                <a:spcPts val="200"/>
+              </a:spcBef>
+              <a:spcAft>
+                <a:spcPts val="1200"/>
+              </a:spcAft>
+            </a:pPr>
+            <a:r>
+              <a:rPr sz="1800">
+                <a:solidFill>
+                  <a:srgbClr val="54636D"/>
+                </a:solidFill>
+                <a:latin typeface="Segoe UI"/>
+              </a:rPr>
+              <a:t>      –  </a:t>
+            </a:r>
+            <a:r>
+              <a:rPr sz="1600" b="1" i="0">
+                <a:solidFill>
+                  <a:srgbClr val="0A5560"/>
+                </a:solidFill>
+                <a:latin typeface="Segoe UI"/>
+              </a:rPr>
+              <a:t>Articulated</a:t>
+            </a:r>
+            <a:r>
+              <a:rPr sz="1600" b="0" i="0">
+                <a:solidFill>
+                  <a:srgbClr val="25323A"/>
+                </a:solidFill>
+                <a:latin typeface="Segoe UI"/>
+              </a:rPr>
+              <a:t> — every joint a pin (the current design)</a:t>
+            </a:r>
+          </a:p>
+          <a:p>
+            <a:pPr lvl="1">
+              <a:spcBef>
+                <a:spcPts val="200"/>
+              </a:spcBef>
+              <a:spcAft>
+                <a:spcPts val="1200"/>
+              </a:spcAft>
+            </a:pPr>
+            <a:r>
+              <a:rPr sz="1800">
+                <a:solidFill>
+                  <a:srgbClr val="54636D"/>
+                </a:solidFill>
+                <a:latin typeface="Segoe UI"/>
+              </a:rPr>
+              <a:t>      –  </a:t>
+            </a:r>
+            <a:r>
+              <a:rPr sz="1600" b="1" i="0">
+                <a:solidFill>
+                  <a:srgbClr val="D1543A"/>
+                </a:solidFill>
+                <a:latin typeface="Segoe UI"/>
+              </a:rPr>
+              <a:t>Whole-chain rigid</a:t>
+            </a:r>
+            <a:r>
+              <a:rPr sz="1600" b="0" i="0">
+                <a:solidFill>
+                  <a:srgbClr val="25323A"/>
+                </a:solidFill>
+                <a:latin typeface="Segoe UI"/>
+              </a:rPr>
+              <a:t> — every joint welded → one rigid raft</a:t>
+            </a:r>
+          </a:p>
+          <a:p>
+            <a:pPr>
+              <a:spcBef>
+                <a:spcPts val="200"/>
+              </a:spcBef>
+              <a:spcAft>
+                <a:spcPts val="1200"/>
+              </a:spcAft>
+            </a:pPr>
+            <a:r>
+              <a:rPr sz="1800">
+                <a:solidFill>
+                  <a:srgbClr val="0C8B96"/>
+                </a:solidFill>
+                <a:latin typeface="Segoe UI"/>
+              </a:rPr>
+              <a:t>•  </a:t>
+            </a:r>
+            <a:r>
+              <a:rPr sz="1800" b="0" i="0">
+                <a:solidFill>
+                  <a:srgbClr val="25323A"/>
+                </a:solidFill>
+                <a:latin typeface="Segoe UI"/>
+              </a:rPr>
+              <a:t>Metrics: deck tilt (pitch), heave, and the moment carried at each buoy→platform joint.</a:t>
+            </a:r>
+          </a:p>
+        </p:txBody>
+      </p:sp>
+    </p:spTree>
+  </p:cSld>
+  <p:clrMapOvr>
+    <a:masterClrMapping/>
+  </p:clrMapOvr>
+</p:sld>
+</file>
+
+<file path=ppt/slides/slide14.xml><?xml version="1.0" encoding="utf-8"?>
+<p:sld xmlns:a="http://schemas.openxmlformats.org/drawingml/2006/main" xmlns:p="http://schemas.openxmlformats.org/presentationml/2006/main" xmlns:r="http://schemas.openxmlformats.org/officeDocument/2006/relationships">
+  <p:cSld>
+    <p:bg>
+      <p:bgPr>
+        <a:solidFill>
+          <a:srgbClr val="FFFFFF"/>
+        </a:solidFill>
+        <a:effectLst/>
+      </p:bgPr>
+    </p:bg>
+    <p:spTree>
+      <p:nvGrpSpPr>
+        <p:cNvPr id="1" name=""/>
+        <p:cNvGrpSpPr/>
+        <p:nvPr/>
+      </p:nvGrpSpPr>
+      <p:grpSpPr/>
+      <p:sp>
+        <p:nvSpPr>
+          <p:cNvPr id="2" name="TextBox 1"/>
+          <p:cNvSpPr txBox="1"/>
+          <p:nvPr/>
+        </p:nvSpPr>
+        <p:spPr>
+          <a:xfrm>
+            <a:off x="640080" y="384048"/>
+            <a:ext cx="10972800" cy="365760"/>
+          </a:xfrm>
+          <a:prstGeom prst="rect">
+            <a:avLst/>
+          </a:prstGeom>
+          <a:noFill/>
+        </p:spPr>
+        <p:txBody>
+          <a:bodyPr wrap="none">
+            <a:spAutoFit/>
+          </a:bodyPr>
+          <a:lstStyle/>
+          <a:p>
+            <a:r>
+              <a:rPr sz="1300" b="1">
+                <a:solidFill>
+                  <a:srgbClr val="0C8B96"/>
+                </a:solidFill>
+                <a:latin typeface="Segoe UI"/>
+              </a:rPr>
+              <a:t>PLATFORM STUDY</a:t>
+            </a:r>
+          </a:p>
+        </p:txBody>
+      </p:sp>
+      <p:sp>
+        <p:nvSpPr>
+          <p:cNvPr id="3" name="TextBox 2"/>
+          <p:cNvSpPr txBox="1"/>
+          <p:nvPr/>
+        </p:nvSpPr>
+        <p:spPr>
+          <a:xfrm>
+            <a:off x="640080" y="658368"/>
+            <a:ext cx="10972800" cy="822960"/>
+          </a:xfrm>
+          <a:prstGeom prst="rect">
+            <a:avLst/>
+          </a:prstGeom>
+          <a:noFill/>
+        </p:spPr>
+        <p:txBody>
+          <a:bodyPr wrap="none">
+            <a:spAutoFit/>
+          </a:bodyPr>
+          <a:lstStyle/>
+          <a:p>
+            <a:r>
+              <a:rPr sz="3000" b="1">
+                <a:solidFill>
+                  <a:srgbClr val="25323A"/>
+                </a:solidFill>
+                <a:latin typeface="Segoe UI"/>
+              </a:rPr>
+              <a:t>Pin vs rigid — the pin wins on every axis</a:t>
+            </a:r>
+          </a:p>
+        </p:txBody>
+      </p:sp>
+      <p:sp>
+        <p:nvSpPr>
+          <p:cNvPr id="4" name="Rectangle 3"/>
+          <p:cNvSpPr/>
+          <p:nvPr/>
+        </p:nvSpPr>
+        <p:spPr>
+          <a:xfrm>
+            <a:off x="658368" y="1444752"/>
+            <a:ext cx="2011680" cy="54864"/>
+          </a:xfrm>
+          <a:prstGeom prst="rect">
+            <a:avLst/>
+          </a:prstGeom>
+          <a:solidFill>
+            <a:srgbClr val="0C8B96"/>
+          </a:solidFill>
+          <a:ln>
+            <a:noFill/>
+          </a:ln>
+          <a:effectLst/>
+        </p:spPr>
+        <p:style>
+          <a:lnRef idx="1">
+            <a:schemeClr val="accent1"/>
+          </a:lnRef>
+          <a:fillRef idx="3">
+            <a:schemeClr val="accent1"/>
+          </a:fillRef>
+          <a:effectRef idx="2">
+            <a:schemeClr val="accent1"/>
+          </a:effectRef>
+          <a:fontRef idx="minor">
+            <a:schemeClr val="lt1"/>
+          </a:fontRef>
+        </p:style>
+        <p:txBody>
+          <a:bodyPr rtlCol="0" anchor="ctr"/>
+          <a:lstStyle/>
+          <a:p>
+            <a:pPr algn="ctr"/>
+          </a:p>
+        </p:txBody>
+      </p:sp>
+      <p:pic>
+        <p:nvPicPr>
+          <p:cNvPr id="5" name="Picture 4" descr="pvr_verdict.png"/>
+          <p:cNvPicPr>
+            <a:picLocks noChangeAspect="1"/>
+          </p:cNvPicPr>
+          <p:nvPr/>
+        </p:nvPicPr>
+        <p:blipFill>
+          <a:blip r:embed="rId2"/>
+          <a:stretch>
+            <a:fillRect/>
+          </a:stretch>
+        </p:blipFill>
+        <p:spPr>
+          <a:xfrm>
+            <a:off x="640080" y="1783080"/>
+            <a:ext cx="10972800" cy="3614624"/>
+          </a:xfrm>
+          <a:prstGeom prst="rect">
+            <a:avLst/>
+          </a:prstGeom>
+        </p:spPr>
+      </p:pic>
+      <p:sp>
+        <p:nvSpPr>
+          <p:cNvPr id="6" name="Rectangle 5"/>
+          <p:cNvSpPr/>
+          <p:nvPr/>
+        </p:nvSpPr>
+        <p:spPr>
+          <a:xfrm>
+            <a:off x="777240" y="5806440"/>
+            <a:ext cx="10607040" cy="749808"/>
+          </a:xfrm>
+          <a:prstGeom prst="rect">
+            <a:avLst/>
+          </a:prstGeom>
+          <a:solidFill>
+            <a:srgbClr val="EEF6F7"/>
+          </a:solidFill>
+          <a:ln>
+            <a:noFill/>
+          </a:ln>
+          <a:effectLst/>
+        </p:spPr>
+        <p:style>
+          <a:lnRef idx="1">
+            <a:schemeClr val="accent1"/>
+          </a:lnRef>
+          <a:fillRef idx="3">
+            <a:schemeClr val="accent1"/>
+          </a:fillRef>
+          <a:effectRef idx="2">
+            <a:schemeClr val="accent1"/>
+          </a:effectRef>
+          <a:fontRef idx="minor">
+            <a:schemeClr val="lt1"/>
+          </a:fontRef>
+        </p:style>
+        <p:txBody>
+          <a:bodyPr rtlCol="0" anchor="ctr"/>
+          <a:lstStyle/>
+          <a:p>
+            <a:pPr algn="ctr"/>
+          </a:p>
+        </p:txBody>
+      </p:sp>
+      <p:sp>
+        <p:nvSpPr>
+          <p:cNvPr id="7" name="TextBox 6"/>
+          <p:cNvSpPr txBox="1"/>
+          <p:nvPr/>
+        </p:nvSpPr>
+        <p:spPr>
+          <a:xfrm>
+            <a:off x="960120" y="5852160"/>
+            <a:ext cx="10241280" cy="658368"/>
+          </a:xfrm>
+          <a:prstGeom prst="rect">
+            <a:avLst/>
+          </a:prstGeom>
+          <a:noFill/>
+        </p:spPr>
+        <p:txBody>
+          <a:bodyPr wrap="square" anchor="ctr">
+            <a:spAutoFit/>
+          </a:bodyPr>
+          <a:lstStyle/>
+          <a:p>
+            <a:pPr algn="ctr"/>
+            <a:r>
+              <a:rPr sz="1300" b="1">
+                <a:solidFill>
+                  <a:srgbClr val="0A5560"/>
+                </a:solidFill>
+                <a:latin typeface="Segoe UI"/>
+              </a:rPr>
+              <a:t>Same heave</a:t>
+            </a:r>
+            <a:r>
+              <a:rPr sz="1300" b="0">
+                <a:solidFill>
+                  <a:srgbClr val="25323A"/>
+                </a:solidFill>
+                <a:latin typeface="Segoe UI"/>
+              </a:rPr>
+              <a:t>; the rigid raft tilts </a:t>
+            </a:r>
+            <a:r>
+              <a:rPr sz="1300" b="1">
+                <a:solidFill>
+                  <a:srgbClr val="D1543A"/>
+                </a:solidFill>
+                <a:latin typeface="Segoe UI"/>
+              </a:rPr>
+              <a:t>1.3–3.5× more</a:t>
+            </a:r>
+            <a:r>
+              <a:rPr sz="1300" b="0">
+                <a:solidFill>
+                  <a:srgbClr val="25323A"/>
+                </a:solidFill>
+                <a:latin typeface="Segoe UI"/>
+              </a:rPr>
+              <a:t>; and the pin carries </a:t>
+            </a:r>
+            <a:r>
+              <a:rPr sz="1300" b="1">
+                <a:solidFill>
+                  <a:srgbClr val="0A5560"/>
+                </a:solidFill>
+                <a:latin typeface="Segoe UI"/>
+              </a:rPr>
+              <a:t>~zero connection moment</a:t>
+            </a:r>
+            <a:r>
+              <a:rPr sz="1300" b="0">
+                <a:solidFill>
+                  <a:srgbClr val="25323A"/>
+                </a:solidFill>
+                <a:latin typeface="Segoe UI"/>
+              </a:rPr>
+              <a:t> vs the weld's hundreds of N·m/m. The gimbals absorb buoy tilt instead of dumping it into the deck.</a:t>
+            </a:r>
+          </a:p>
+        </p:txBody>
+      </p:sp>
+    </p:spTree>
+  </p:cSld>
+  <p:clrMapOvr>
+    <a:masterClrMapping/>
+  </p:clrMapOvr>
+</p:sld>
+</file>
+
 <file path=ppt/slides/slide2.xml><?xml version="1.0" encoding="utf-8"?>
 <p:sld xmlns:a="http://schemas.openxmlformats.org/drawingml/2006/main" xmlns:p="http://schemas.openxmlformats.org/presentationml/2006/main" xmlns:r="http://schemas.openxmlformats.org/officeDocument/2006/relationships">
   <p:cSld>

--- a/studies/osu-test-buoy/Capytaine_analysis_OSU_buoy.pptx
+++ b/studies/osu-test-buoy/Capytaine_analysis_OSU_buoy.pptx
@@ -5,22 +5,26 @@
     <p:sldMasterId id="2147483648" r:id="rId1"/>
   </p:sldMasterIdLst>
   <p:sldIdLst>
-    <p:sldId id="256" r:id="rId7"/>
-    <p:sldId id="257" r:id="rId8"/>
-    <p:sldId id="258" r:id="rId9"/>
-    <p:sldId id="259" r:id="rId10"/>
-    <p:sldId id="260" r:id="rId11"/>
-    <p:sldId id="261" r:id="rId12"/>
-    <p:sldId id="262" r:id="rId13"/>
-    <p:sldId id="263" r:id="rId14"/>
-    <p:sldId id="264" r:id="rId15"/>
-    <p:sldId id="265" r:id="rId16"/>
-    <p:sldId id="266" r:id="rId17"/>
-    <p:sldId id="267" r:id="rId18"/>
-    <p:sldId id="268" r:id="rId19"/>
-    <p:sldId id="269" r:id="rId20"/>
+    <p:sldId id="256" r:id="rId2"/>
+    <p:sldId id="257" r:id="rId3"/>
+    <p:sldId id="258" r:id="rId4"/>
+    <p:sldId id="259" r:id="rId5"/>
+    <p:sldId id="260" r:id="rId6"/>
+    <p:sldId id="261" r:id="rId7"/>
+    <p:sldId id="262" r:id="rId8"/>
+    <p:sldId id="263" r:id="rId9"/>
+    <p:sldId id="264" r:id="rId10"/>
+    <p:sldId id="265" r:id="rId11"/>
+    <p:sldId id="266" r:id="rId12"/>
+    <p:sldId id="269" r:id="rId13"/>
+    <p:sldId id="270" r:id="rId14"/>
+    <p:sldId id="267" r:id="rId15"/>
+    <p:sldId id="268" r:id="rId16"/>
+    <p:sldId id="271" r:id="rId17"/>
+    <p:sldId id="272" r:id="rId18"/>
+    <p:sldId id="273" r:id="rId19"/>
   </p:sldIdLst>
-  <p:sldSz cx="12191695" cy="6858000" type="screen4x3"/>
+  <p:sldSz cx="12192000" cy="6858000"/>
   <p:notesSz cx="6858000" cy="9144000"/>
   <p:defaultTextStyle>
     <a:defPPr>
@@ -117,7 +121,51 @@
       </a:defRPr>
     </a:lvl9pPr>
   </p:defaultTextStyle>
+  <p:extLst>
+    <p:ext uri="{EFAFB233-063F-42B5-8137-9DF3F51BA10A}">
+      <p15:sldGuideLst xmlns:p15="http://schemas.microsoft.com/office/powerpoint/2012/main">
+        <p15:guide id="1" orient="horz" pos="2160">
+          <p15:clr>
+            <a:srgbClr val="A4A3A4"/>
+          </p15:clr>
+        </p15:guide>
+        <p15:guide id="2" pos="2880">
+          <p15:clr>
+            <a:srgbClr val="A4A3A4"/>
+          </p15:clr>
+        </p15:guide>
+      </p15:sldGuideLst>
+    </p:ext>
+  </p:extLst>
 </p:presentation>
+</file>
+
+<file path=ppt/changesInfos/changesInfo1.xml><?xml version="1.0" encoding="utf-8"?>
+<pc:chgInfo xmlns:a="http://schemas.openxmlformats.org/drawingml/2006/main" xmlns:r="http://schemas.openxmlformats.org/officeDocument/2006/relationships" xmlns:ac="http://schemas.microsoft.com/office/drawing/2013/main/command" xmlns:pc="http://schemas.microsoft.com/office/powerpoint/2013/main/command">
+  <pc:docChgLst>
+    <pc:chgData name="XABIER LOPEZ" userId="ea38421b3c6b4430" providerId="LiveId" clId="{8CA916A7-9F62-4E0A-9195-0AF40AA34857}"/>
+    <pc:docChg chg="modSld sldOrd">
+      <pc:chgData name="XABIER LOPEZ" userId="ea38421b3c6b4430" providerId="LiveId" clId="{8CA916A7-9F62-4E0A-9195-0AF40AA34857}" dt="2026-09-06T13:37:34.866" v="1"/>
+      <pc:docMkLst>
+        <pc:docMk/>
+      </pc:docMkLst>
+      <pc:sldChg chg="ord">
+        <pc:chgData name="XABIER LOPEZ" userId="ea38421b3c6b4430" providerId="LiveId" clId="{8CA916A7-9F62-4E0A-9195-0AF40AA34857}" dt="2026-09-06T13:37:34.866" v="1"/>
+        <pc:sldMkLst>
+          <pc:docMk/>
+          <pc:sldMk cId="0" sldId="267"/>
+        </pc:sldMkLst>
+      </pc:sldChg>
+      <pc:sldChg chg="ord">
+        <pc:chgData name="XABIER LOPEZ" userId="ea38421b3c6b4430" providerId="LiveId" clId="{8CA916A7-9F62-4E0A-9195-0AF40AA34857}" dt="2026-09-06T13:37:34.866" v="1"/>
+        <pc:sldMkLst>
+          <pc:docMk/>
+          <pc:sldMk cId="0" sldId="268"/>
+        </pc:sldMkLst>
+      </pc:sldChg>
+    </pc:docChg>
+  </pc:docChgLst>
+</pc:chgInfo>
 </file>
 
 <file path=ppt/slideLayouts/slideLayout1.xml><?xml version="1.0" encoding="utf-8"?>
@@ -158,10 +206,9 @@
           <a:lstStyle/>
           <a:p>
             <a:r>
-              <a:rPr lang="en-US" smtClean="0"/>
+              <a:rPr lang="en-US"/>
               <a:t>Click to edit Master title style</a:t>
             </a:r>
-            <a:endParaRPr lang="en-US"/>
           </a:p>
         </p:txBody>
       </p:sp>
@@ -277,10 +324,9 @@
           </a:lstStyle>
           <a:p>
             <a:r>
-              <a:rPr lang="en-US" smtClean="0"/>
+              <a:rPr lang="en-US"/>
               <a:t>Click to edit Master subtitle style</a:t>
             </a:r>
-            <a:endParaRPr lang="en-US"/>
           </a:p>
         </p:txBody>
       </p:sp>
@@ -301,7 +347,7 @@
           <a:p>
             <a:fld id="{5BCAD085-E8A6-8845-BD4E-CB4CCA059FC4}" type="datetimeFigureOut">
               <a:rPr lang="en-US" smtClean="0"/>
-              <a:t>1/27/13</a:t>
+              <a:t>9/6/2026</a:t>
             </a:fld>
             <a:endParaRPr lang="en-US"/>
           </a:p>
@@ -395,10 +441,9 @@
           <a:lstStyle/>
           <a:p>
             <a:r>
-              <a:rPr lang="en-US" smtClean="0"/>
+              <a:rPr lang="en-US"/>
               <a:t>Click to edit Master title style</a:t>
             </a:r>
-            <a:endParaRPr lang="en-US"/>
           </a:p>
         </p:txBody>
       </p:sp>
@@ -419,38 +464,37 @@
           <a:p>
             <a:pPr lvl="0"/>
             <a:r>
-              <a:rPr lang="en-US" smtClean="0"/>
+              <a:rPr lang="en-US"/>
               <a:t>Click to edit Master text styles</a:t>
             </a:r>
           </a:p>
           <a:p>
             <a:pPr lvl="1"/>
             <a:r>
-              <a:rPr lang="en-US" smtClean="0"/>
+              <a:rPr lang="en-US"/>
               <a:t>Second level</a:t>
             </a:r>
           </a:p>
           <a:p>
             <a:pPr lvl="2"/>
             <a:r>
-              <a:rPr lang="en-US" smtClean="0"/>
+              <a:rPr lang="en-US"/>
               <a:t>Third level</a:t>
             </a:r>
           </a:p>
           <a:p>
             <a:pPr lvl="3"/>
             <a:r>
-              <a:rPr lang="en-US" smtClean="0"/>
+              <a:rPr lang="en-US"/>
               <a:t>Fourth level</a:t>
             </a:r>
           </a:p>
           <a:p>
             <a:pPr lvl="4"/>
             <a:r>
-              <a:rPr lang="en-US" smtClean="0"/>
+              <a:rPr lang="en-US"/>
               <a:t>Fifth level</a:t>
             </a:r>
-            <a:endParaRPr lang="en-US"/>
           </a:p>
         </p:txBody>
       </p:sp>
@@ -471,7 +515,7 @@
           <a:p>
             <a:fld id="{5BCAD085-E8A6-8845-BD4E-CB4CCA059FC4}" type="datetimeFigureOut">
               <a:rPr lang="en-US" smtClean="0"/>
-              <a:t>1/27/13</a:t>
+              <a:t>9/6/2026</a:t>
             </a:fld>
             <a:endParaRPr lang="en-US"/>
           </a:p>
@@ -570,10 +614,9 @@
           <a:lstStyle/>
           <a:p>
             <a:r>
-              <a:rPr lang="en-US" smtClean="0"/>
+              <a:rPr lang="en-US"/>
               <a:t>Click to edit Master title style</a:t>
             </a:r>
-            <a:endParaRPr lang="en-US"/>
           </a:p>
         </p:txBody>
       </p:sp>
@@ -599,38 +642,37 @@
           <a:p>
             <a:pPr lvl="0"/>
             <a:r>
-              <a:rPr lang="en-US" smtClean="0"/>
+              <a:rPr lang="en-US"/>
               <a:t>Click to edit Master text styles</a:t>
             </a:r>
           </a:p>
           <a:p>
             <a:pPr lvl="1"/>
             <a:r>
-              <a:rPr lang="en-US" smtClean="0"/>
+              <a:rPr lang="en-US"/>
               <a:t>Second level</a:t>
             </a:r>
           </a:p>
           <a:p>
             <a:pPr lvl="2"/>
             <a:r>
-              <a:rPr lang="en-US" smtClean="0"/>
+              <a:rPr lang="en-US"/>
               <a:t>Third level</a:t>
             </a:r>
           </a:p>
           <a:p>
             <a:pPr lvl="3"/>
             <a:r>
-              <a:rPr lang="en-US" smtClean="0"/>
+              <a:rPr lang="en-US"/>
               <a:t>Fourth level</a:t>
             </a:r>
           </a:p>
           <a:p>
             <a:pPr lvl="4"/>
             <a:r>
-              <a:rPr lang="en-US" smtClean="0"/>
+              <a:rPr lang="en-US"/>
               <a:t>Fifth level</a:t>
             </a:r>
-            <a:endParaRPr lang="en-US"/>
           </a:p>
         </p:txBody>
       </p:sp>
@@ -651,7 +693,7 @@
           <a:p>
             <a:fld id="{5BCAD085-E8A6-8845-BD4E-CB4CCA059FC4}" type="datetimeFigureOut">
               <a:rPr lang="en-US" smtClean="0"/>
-              <a:t>1/27/13</a:t>
+              <a:t>9/6/2026</a:t>
             </a:fld>
             <a:endParaRPr lang="en-US"/>
           </a:p>
@@ -745,10 +787,9 @@
           <a:lstStyle/>
           <a:p>
             <a:r>
-              <a:rPr lang="en-US" smtClean="0"/>
+              <a:rPr lang="en-US"/>
               <a:t>Click to edit Master title style</a:t>
             </a:r>
-            <a:endParaRPr lang="en-US"/>
           </a:p>
         </p:txBody>
       </p:sp>
@@ -769,38 +810,37 @@
           <a:p>
             <a:pPr lvl="0"/>
             <a:r>
-              <a:rPr lang="en-US" smtClean="0"/>
+              <a:rPr lang="en-US"/>
               <a:t>Click to edit Master text styles</a:t>
             </a:r>
           </a:p>
           <a:p>
             <a:pPr lvl="1"/>
             <a:r>
-              <a:rPr lang="en-US" smtClean="0"/>
+              <a:rPr lang="en-US"/>
               <a:t>Second level</a:t>
             </a:r>
           </a:p>
           <a:p>
             <a:pPr lvl="2"/>
             <a:r>
-              <a:rPr lang="en-US" smtClean="0"/>
+              <a:rPr lang="en-US"/>
               <a:t>Third level</a:t>
             </a:r>
           </a:p>
           <a:p>
             <a:pPr lvl="3"/>
             <a:r>
-              <a:rPr lang="en-US" smtClean="0"/>
+              <a:rPr lang="en-US"/>
               <a:t>Fourth level</a:t>
             </a:r>
           </a:p>
           <a:p>
             <a:pPr lvl="4"/>
             <a:r>
-              <a:rPr lang="en-US" smtClean="0"/>
+              <a:rPr lang="en-US"/>
               <a:t>Fifth level</a:t>
             </a:r>
-            <a:endParaRPr lang="en-US"/>
           </a:p>
         </p:txBody>
       </p:sp>
@@ -821,7 +861,7 @@
           <a:p>
             <a:fld id="{5BCAD085-E8A6-8845-BD4E-CB4CCA059FC4}" type="datetimeFigureOut">
               <a:rPr lang="en-US" smtClean="0"/>
-              <a:t>1/27/13</a:t>
+              <a:t>9/6/2026</a:t>
             </a:fld>
             <a:endParaRPr lang="en-US"/>
           </a:p>
@@ -924,10 +964,9 @@
           </a:lstStyle>
           <a:p>
             <a:r>
-              <a:rPr lang="en-US" smtClean="0"/>
+              <a:rPr lang="en-US"/>
               <a:t>Click to edit Master title style</a:t>
             </a:r>
-            <a:endParaRPr lang="en-US"/>
           </a:p>
         </p:txBody>
       </p:sp>
@@ -1044,7 +1083,7 @@
           <a:p>
             <a:pPr lvl="0"/>
             <a:r>
-              <a:rPr lang="en-US" smtClean="0"/>
+              <a:rPr lang="en-US"/>
               <a:t>Click to edit Master text styles</a:t>
             </a:r>
           </a:p>
@@ -1067,7 +1106,7 @@
           <a:p>
             <a:fld id="{5BCAD085-E8A6-8845-BD4E-CB4CCA059FC4}" type="datetimeFigureOut">
               <a:rPr lang="en-US" smtClean="0"/>
-              <a:t>1/27/13</a:t>
+              <a:t>9/6/2026</a:t>
             </a:fld>
             <a:endParaRPr lang="en-US"/>
           </a:p>
@@ -1161,10 +1200,9 @@
           <a:lstStyle/>
           <a:p>
             <a:r>
-              <a:rPr lang="en-US" smtClean="0"/>
+              <a:rPr lang="en-US"/>
               <a:t>Click to edit Master title style</a:t>
             </a:r>
-            <a:endParaRPr lang="en-US"/>
           </a:p>
         </p:txBody>
       </p:sp>
@@ -1218,38 +1256,37 @@
           <a:p>
             <a:pPr lvl="0"/>
             <a:r>
-              <a:rPr lang="en-US" smtClean="0"/>
+              <a:rPr lang="en-US"/>
               <a:t>Click to edit Master text styles</a:t>
             </a:r>
           </a:p>
           <a:p>
             <a:pPr lvl="1"/>
             <a:r>
-              <a:rPr lang="en-US" smtClean="0"/>
+              <a:rPr lang="en-US"/>
               <a:t>Second level</a:t>
             </a:r>
           </a:p>
           <a:p>
             <a:pPr lvl="2"/>
             <a:r>
-              <a:rPr lang="en-US" smtClean="0"/>
+              <a:rPr lang="en-US"/>
               <a:t>Third level</a:t>
             </a:r>
           </a:p>
           <a:p>
             <a:pPr lvl="3"/>
             <a:r>
-              <a:rPr lang="en-US" smtClean="0"/>
+              <a:rPr lang="en-US"/>
               <a:t>Fourth level</a:t>
             </a:r>
           </a:p>
           <a:p>
             <a:pPr lvl="4"/>
             <a:r>
-              <a:rPr lang="en-US" smtClean="0"/>
+              <a:rPr lang="en-US"/>
               <a:t>Fifth level</a:t>
             </a:r>
-            <a:endParaRPr lang="en-US"/>
           </a:p>
         </p:txBody>
       </p:sp>
@@ -1303,38 +1340,37 @@
           <a:p>
             <a:pPr lvl="0"/>
             <a:r>
-              <a:rPr lang="en-US" smtClean="0"/>
+              <a:rPr lang="en-US"/>
               <a:t>Click to edit Master text styles</a:t>
             </a:r>
           </a:p>
           <a:p>
             <a:pPr lvl="1"/>
             <a:r>
-              <a:rPr lang="en-US" smtClean="0"/>
+              <a:rPr lang="en-US"/>
               <a:t>Second level</a:t>
             </a:r>
           </a:p>
           <a:p>
             <a:pPr lvl="2"/>
             <a:r>
-              <a:rPr lang="en-US" smtClean="0"/>
+              <a:rPr lang="en-US"/>
               <a:t>Third level</a:t>
             </a:r>
           </a:p>
           <a:p>
             <a:pPr lvl="3"/>
             <a:r>
-              <a:rPr lang="en-US" smtClean="0"/>
+              <a:rPr lang="en-US"/>
               <a:t>Fourth level</a:t>
             </a:r>
           </a:p>
           <a:p>
             <a:pPr lvl="4"/>
             <a:r>
-              <a:rPr lang="en-US" smtClean="0"/>
+              <a:rPr lang="en-US"/>
               <a:t>Fifth level</a:t>
             </a:r>
-            <a:endParaRPr lang="en-US"/>
           </a:p>
         </p:txBody>
       </p:sp>
@@ -1355,7 +1391,7 @@
           <a:p>
             <a:fld id="{5BCAD085-E8A6-8845-BD4E-CB4CCA059FC4}" type="datetimeFigureOut">
               <a:rPr lang="en-US" smtClean="0"/>
-              <a:t>1/27/13</a:t>
+              <a:t>9/6/2026</a:t>
             </a:fld>
             <a:endParaRPr lang="en-US"/>
           </a:p>
@@ -1453,10 +1489,9 @@
           </a:lstStyle>
           <a:p>
             <a:r>
-              <a:rPr lang="en-US" smtClean="0"/>
+              <a:rPr lang="en-US"/>
               <a:t>Click to edit Master title style</a:t>
             </a:r>
-            <a:endParaRPr lang="en-US"/>
           </a:p>
         </p:txBody>
       </p:sp>
@@ -1519,7 +1554,7 @@
           <a:p>
             <a:pPr lvl="0"/>
             <a:r>
-              <a:rPr lang="en-US" smtClean="0"/>
+              <a:rPr lang="en-US"/>
               <a:t>Click to edit Master text styles</a:t>
             </a:r>
           </a:p>
@@ -1575,38 +1610,37 @@
           <a:p>
             <a:pPr lvl="0"/>
             <a:r>
-              <a:rPr lang="en-US" smtClean="0"/>
+              <a:rPr lang="en-US"/>
               <a:t>Click to edit Master text styles</a:t>
             </a:r>
           </a:p>
           <a:p>
             <a:pPr lvl="1"/>
             <a:r>
-              <a:rPr lang="en-US" smtClean="0"/>
+              <a:rPr lang="en-US"/>
               <a:t>Second level</a:t>
             </a:r>
           </a:p>
           <a:p>
             <a:pPr lvl="2"/>
             <a:r>
-              <a:rPr lang="en-US" smtClean="0"/>
+              <a:rPr lang="en-US"/>
               <a:t>Third level</a:t>
             </a:r>
           </a:p>
           <a:p>
             <a:pPr lvl="3"/>
             <a:r>
-              <a:rPr lang="en-US" smtClean="0"/>
+              <a:rPr lang="en-US"/>
               <a:t>Fourth level</a:t>
             </a:r>
           </a:p>
           <a:p>
             <a:pPr lvl="4"/>
             <a:r>
-              <a:rPr lang="en-US" smtClean="0"/>
+              <a:rPr lang="en-US"/>
               <a:t>Fifth level</a:t>
             </a:r>
-            <a:endParaRPr lang="en-US"/>
           </a:p>
         </p:txBody>
       </p:sp>
@@ -1669,7 +1703,7 @@
           <a:p>
             <a:pPr lvl="0"/>
             <a:r>
-              <a:rPr lang="en-US" smtClean="0"/>
+              <a:rPr lang="en-US"/>
               <a:t>Click to edit Master text styles</a:t>
             </a:r>
           </a:p>
@@ -1725,38 +1759,37 @@
           <a:p>
             <a:pPr lvl="0"/>
             <a:r>
-              <a:rPr lang="en-US" smtClean="0"/>
+              <a:rPr lang="en-US"/>
               <a:t>Click to edit Master text styles</a:t>
             </a:r>
           </a:p>
           <a:p>
             <a:pPr lvl="1"/>
             <a:r>
-              <a:rPr lang="en-US" smtClean="0"/>
+              <a:rPr lang="en-US"/>
               <a:t>Second level</a:t>
             </a:r>
           </a:p>
           <a:p>
             <a:pPr lvl="2"/>
             <a:r>
-              <a:rPr lang="en-US" smtClean="0"/>
+              <a:rPr lang="en-US"/>
               <a:t>Third level</a:t>
             </a:r>
           </a:p>
           <a:p>
             <a:pPr lvl="3"/>
             <a:r>
-              <a:rPr lang="en-US" smtClean="0"/>
+              <a:rPr lang="en-US"/>
               <a:t>Fourth level</a:t>
             </a:r>
           </a:p>
           <a:p>
             <a:pPr lvl="4"/>
             <a:r>
-              <a:rPr lang="en-US" smtClean="0"/>
+              <a:rPr lang="en-US"/>
               <a:t>Fifth level</a:t>
             </a:r>
-            <a:endParaRPr lang="en-US"/>
           </a:p>
         </p:txBody>
       </p:sp>
@@ -1777,7 +1810,7 @@
           <a:p>
             <a:fld id="{5BCAD085-E8A6-8845-BD4E-CB4CCA059FC4}" type="datetimeFigureOut">
               <a:rPr lang="en-US" smtClean="0"/>
-              <a:t>1/27/13</a:t>
+              <a:t>9/6/2026</a:t>
             </a:fld>
             <a:endParaRPr lang="en-US"/>
           </a:p>
@@ -1871,10 +1904,9 @@
           <a:lstStyle/>
           <a:p>
             <a:r>
-              <a:rPr lang="en-US" smtClean="0"/>
+              <a:rPr lang="en-US"/>
               <a:t>Click to edit Master title style</a:t>
             </a:r>
-            <a:endParaRPr lang="en-US"/>
           </a:p>
         </p:txBody>
       </p:sp>
@@ -1895,7 +1927,7 @@
           <a:p>
             <a:fld id="{5BCAD085-E8A6-8845-BD4E-CB4CCA059FC4}" type="datetimeFigureOut">
               <a:rPr lang="en-US" smtClean="0"/>
-              <a:t>1/27/13</a:t>
+              <a:t>9/6/2026</a:t>
             </a:fld>
             <a:endParaRPr lang="en-US"/>
           </a:p>
@@ -1990,7 +2022,7 @@
           <a:p>
             <a:fld id="{5BCAD085-E8A6-8845-BD4E-CB4CCA059FC4}" type="datetimeFigureOut">
               <a:rPr lang="en-US" smtClean="0"/>
-              <a:t>1/27/13</a:t>
+              <a:t>9/6/2026</a:t>
             </a:fld>
             <a:endParaRPr lang="en-US"/>
           </a:p>
@@ -2093,10 +2125,9 @@
           </a:lstStyle>
           <a:p>
             <a:r>
-              <a:rPr lang="en-US" smtClean="0"/>
+              <a:rPr lang="en-US"/>
               <a:t>Click to edit Master title style</a:t>
             </a:r>
-            <a:endParaRPr lang="en-US"/>
           </a:p>
         </p:txBody>
       </p:sp>
@@ -2150,38 +2181,37 @@
           <a:p>
             <a:pPr lvl="0"/>
             <a:r>
-              <a:rPr lang="en-US" smtClean="0"/>
+              <a:rPr lang="en-US"/>
               <a:t>Click to edit Master text styles</a:t>
             </a:r>
           </a:p>
           <a:p>
             <a:pPr lvl="1"/>
             <a:r>
-              <a:rPr lang="en-US" smtClean="0"/>
+              <a:rPr lang="en-US"/>
               <a:t>Second level</a:t>
             </a:r>
           </a:p>
           <a:p>
             <a:pPr lvl="2"/>
             <a:r>
-              <a:rPr lang="en-US" smtClean="0"/>
+              <a:rPr lang="en-US"/>
               <a:t>Third level</a:t>
             </a:r>
           </a:p>
           <a:p>
             <a:pPr lvl="3"/>
             <a:r>
-              <a:rPr lang="en-US" smtClean="0"/>
+              <a:rPr lang="en-US"/>
               <a:t>Fourth level</a:t>
             </a:r>
           </a:p>
           <a:p>
             <a:pPr lvl="4"/>
             <a:r>
-              <a:rPr lang="en-US" smtClean="0"/>
+              <a:rPr lang="en-US"/>
               <a:t>Fifth level</a:t>
             </a:r>
-            <a:endParaRPr lang="en-US"/>
           </a:p>
         </p:txBody>
       </p:sp>
@@ -2244,7 +2274,7 @@
           <a:p>
             <a:pPr lvl="0"/>
             <a:r>
-              <a:rPr lang="en-US" smtClean="0"/>
+              <a:rPr lang="en-US"/>
               <a:t>Click to edit Master text styles</a:t>
             </a:r>
           </a:p>
@@ -2267,7 +2297,7 @@
           <a:p>
             <a:fld id="{5BCAD085-E8A6-8845-BD4E-CB4CCA059FC4}" type="datetimeFigureOut">
               <a:rPr lang="en-US" smtClean="0"/>
-              <a:t>1/27/13</a:t>
+              <a:t>9/6/2026</a:t>
             </a:fld>
             <a:endParaRPr lang="en-US"/>
           </a:p>
@@ -2370,10 +2400,9 @@
           </a:lstStyle>
           <a:p>
             <a:r>
-              <a:rPr lang="en-US" smtClean="0"/>
+              <a:rPr lang="en-US"/>
               <a:t>Click to edit Master title style</a:t>
             </a:r>
-            <a:endParaRPr lang="en-US"/>
           </a:p>
         </p:txBody>
       </p:sp>
@@ -2497,7 +2526,7 @@
           <a:p>
             <a:pPr lvl="0"/>
             <a:r>
-              <a:rPr lang="en-US" smtClean="0"/>
+              <a:rPr lang="en-US"/>
               <a:t>Click to edit Master text styles</a:t>
             </a:r>
           </a:p>
@@ -2520,7 +2549,7 @@
           <a:p>
             <a:fld id="{5BCAD085-E8A6-8845-BD4E-CB4CCA059FC4}" type="datetimeFigureOut">
               <a:rPr lang="en-US" smtClean="0"/>
-              <a:t>1/27/13</a:t>
+              <a:t>9/6/2026</a:t>
             </a:fld>
             <a:endParaRPr lang="en-US"/>
           </a:p>
@@ -2629,10 +2658,9 @@
           <a:lstStyle/>
           <a:p>
             <a:r>
-              <a:rPr lang="en-US" smtClean="0"/>
+              <a:rPr lang="en-US"/>
               <a:t>Click to edit Master title style</a:t>
             </a:r>
-            <a:endParaRPr lang="en-US"/>
           </a:p>
         </p:txBody>
       </p:sp>
@@ -2663,38 +2691,37 @@
           <a:p>
             <a:pPr lvl="0"/>
             <a:r>
-              <a:rPr lang="en-US" smtClean="0"/>
+              <a:rPr lang="en-US"/>
               <a:t>Click to edit Master text styles</a:t>
             </a:r>
           </a:p>
           <a:p>
             <a:pPr lvl="1"/>
             <a:r>
-              <a:rPr lang="en-US" smtClean="0"/>
+              <a:rPr lang="en-US"/>
               <a:t>Second level</a:t>
             </a:r>
           </a:p>
           <a:p>
             <a:pPr lvl="2"/>
             <a:r>
-              <a:rPr lang="en-US" smtClean="0"/>
+              <a:rPr lang="en-US"/>
               <a:t>Third level</a:t>
             </a:r>
           </a:p>
           <a:p>
             <a:pPr lvl="3"/>
             <a:r>
-              <a:rPr lang="en-US" smtClean="0"/>
+              <a:rPr lang="en-US"/>
               <a:t>Fourth level</a:t>
             </a:r>
           </a:p>
           <a:p>
             <a:pPr lvl="4"/>
             <a:r>
-              <a:rPr lang="en-US" smtClean="0"/>
+              <a:rPr lang="en-US"/>
               <a:t>Fifth level</a:t>
             </a:r>
-            <a:endParaRPr lang="en-US"/>
           </a:p>
         </p:txBody>
       </p:sp>
@@ -2733,7 +2760,7 @@
           <a:p>
             <a:fld id="{5BCAD085-E8A6-8845-BD4E-CB4CCA059FC4}" type="datetimeFigureOut">
               <a:rPr lang="en-US" smtClean="0"/>
-              <a:t>1/27/13</a:t>
+              <a:t>9/6/2026</a:t>
             </a:fld>
             <a:endParaRPr lang="en-US"/>
           </a:p>
@@ -3092,7 +3119,7 @@
 </file>
 
 <file path=ppt/slides/slide1.xml><?xml version="1.0" encoding="utf-8"?>
-<p:sld xmlns:a="http://schemas.openxmlformats.org/drawingml/2006/main" xmlns:p="http://schemas.openxmlformats.org/presentationml/2006/main" xmlns:r="http://schemas.openxmlformats.org/officeDocument/2006/relationships">
+<p:sld xmlns:a="http://schemas.openxmlformats.org/drawingml/2006/main" xmlns:r="http://schemas.openxmlformats.org/officeDocument/2006/relationships" xmlns:p="http://schemas.openxmlformats.org/presentationml/2006/main">
   <p:cSld>
     <p:bg>
       <p:bgPr>
@@ -3108,7 +3135,14 @@
         <p:cNvGrpSpPr/>
         <p:nvPr/>
       </p:nvGrpSpPr>
-      <p:grpSpPr/>
+      <p:grpSpPr>
+        <a:xfrm>
+          <a:off x="0" y="0"/>
+          <a:ext cx="0" cy="0"/>
+          <a:chOff x="0" y="0"/>
+          <a:chExt cx="0" cy="0"/>
+        </a:xfrm>
+      </p:grpSpPr>
       <p:sp>
         <p:nvSpPr>
           <p:cNvPr id="2" name="Rectangle 1"/>
@@ -3150,6 +3184,7 @@
           <a:lstStyle/>
           <a:p>
             <a:pPr algn="ctr"/>
+            <a:endParaRPr/>
           </a:p>
         </p:txBody>
       </p:sp>
@@ -3194,6 +3229,7 @@
           <a:lstStyle/>
           <a:p>
             <a:pPr algn="ctr"/>
+            <a:endParaRPr/>
           </a:p>
         </p:txBody>
       </p:sp>
@@ -3302,7 +3338,7 @@
 </file>
 
 <file path=ppt/slides/slide10.xml><?xml version="1.0" encoding="utf-8"?>
-<p:sld xmlns:a="http://schemas.openxmlformats.org/drawingml/2006/main" xmlns:p="http://schemas.openxmlformats.org/presentationml/2006/main" xmlns:r="http://schemas.openxmlformats.org/officeDocument/2006/relationships">
+<p:sld xmlns:a="http://schemas.openxmlformats.org/drawingml/2006/main" xmlns:r="http://schemas.openxmlformats.org/officeDocument/2006/relationships" xmlns:p="http://schemas.openxmlformats.org/presentationml/2006/main">
   <p:cSld>
     <p:bg>
       <p:bgPr>
@@ -3318,7 +3354,14 @@
         <p:cNvGrpSpPr/>
         <p:nvPr/>
       </p:nvGrpSpPr>
-      <p:grpSpPr/>
+      <p:grpSpPr>
+        <a:xfrm>
+          <a:off x="0" y="0"/>
+          <a:ext cx="0" cy="0"/>
+          <a:chOff x="0" y="0"/>
+          <a:chExt cx="0" cy="0"/>
+        </a:xfrm>
+      </p:grpSpPr>
       <p:sp>
         <p:nvSpPr>
           <p:cNvPr id="2" name="TextBox 1"/>
@@ -3428,6 +3471,7 @@
           <a:lstStyle/>
           <a:p>
             <a:pPr algn="ctr"/>
+            <a:endParaRPr/>
           </a:p>
         </p:txBody>
       </p:sp>
@@ -3450,14 +3494,32 @@
                 <a:tableStyleId>{5C22544A-7EE6-4342-B048-85BDC9FD1C3A}</a:tableStyleId>
               </a:tblPr>
               <a:tblGrid>
-                <a:gridCol w="2788920"/>
-                <a:gridCol w="2148840"/>
-                <a:gridCol w="6263640"/>
+                <a:gridCol w="2788920">
+                  <a:extLst>
+                    <a:ext uri="{9D8B030D-6E8A-4147-A177-3AD203B41FA5}">
+                      <a16:colId xmlns:a16="http://schemas.microsoft.com/office/drawing/2014/main" val="20000"/>
+                    </a:ext>
+                  </a:extLst>
+                </a:gridCol>
+                <a:gridCol w="2148840">
+                  <a:extLst>
+                    <a:ext uri="{9D8B030D-6E8A-4147-A177-3AD203B41FA5}">
+                      <a16:colId xmlns:a16="http://schemas.microsoft.com/office/drawing/2014/main" val="20001"/>
+                    </a:ext>
+                  </a:extLst>
+                </a:gridCol>
+                <a:gridCol w="6263640">
+                  <a:extLst>
+                    <a:ext uri="{9D8B030D-6E8A-4147-A177-3AD203B41FA5}">
+                      <a16:colId xmlns:a16="http://schemas.microsoft.com/office/drawing/2014/main" val="20002"/>
+                    </a:ext>
+                  </a:extLst>
+                </a:gridCol>
               </a:tblGrid>
               <a:tr h="384048">
                 <a:tc>
                   <a:txBody>
-                    <a:bodyPr wrap="square"/>
+                    <a:bodyPr/>
                     <a:lstStyle/>
                     <a:p>
                       <a:pPr algn="l"/>
@@ -3472,7 +3534,7 @@
                       </a:r>
                     </a:p>
                   </a:txBody>
-                  <a:tcPr anchor="ctr" marL="88900" marR="63500" marT="25400" marB="25400">
+                  <a:tcPr marL="88900" marR="63500" marT="25400" marB="25400" anchor="ctr">
                     <a:solidFill>
                       <a:srgbClr val="0C8B96"/>
                     </a:solidFill>
@@ -3480,7 +3542,7 @@
                 </a:tc>
                 <a:tc>
                   <a:txBody>
-                    <a:bodyPr wrap="square"/>
+                    <a:bodyPr/>
                     <a:lstStyle/>
                     <a:p>
                       <a:pPr algn="ctr"/>
@@ -3495,7 +3557,7 @@
                       </a:r>
                     </a:p>
                   </a:txBody>
-                  <a:tcPr anchor="ctr" marL="88900" marR="63500" marT="25400" marB="25400">
+                  <a:tcPr marL="88900" marR="63500" marT="25400" marB="25400" anchor="ctr">
                     <a:solidFill>
                       <a:srgbClr val="0C8B96"/>
                     </a:solidFill>
@@ -3503,7 +3565,7 @@
                 </a:tc>
                 <a:tc>
                   <a:txBody>
-                    <a:bodyPr wrap="square"/>
+                    <a:bodyPr/>
                     <a:lstStyle/>
                     <a:p>
                       <a:pPr algn="l"/>
@@ -3518,17 +3580,22 @@
                       </a:r>
                     </a:p>
                   </a:txBody>
-                  <a:tcPr anchor="ctr" marL="88900" marR="63500" marT="25400" marB="25400">
+                  <a:tcPr marL="88900" marR="63500" marT="25400" marB="25400" anchor="ctr">
                     <a:solidFill>
                       <a:srgbClr val="0C8B96"/>
                     </a:solidFill>
                   </a:tcPr>
                 </a:tc>
+                <a:extLst>
+                  <a:ext uri="{0D108BD9-81ED-4DB2-BD59-A6C34878D82A}">
+                    <a16:rowId xmlns:a16="http://schemas.microsoft.com/office/drawing/2014/main" val="10000"/>
+                  </a:ext>
+                </a:extLst>
               </a:tr>
               <a:tr h="585216">
                 <a:tc>
                   <a:txBody>
-                    <a:bodyPr wrap="square"/>
+                    <a:bodyPr/>
                     <a:lstStyle/>
                     <a:p>
                       <a:pPr algn="l"/>
@@ -3561,7 +3628,7 @@
                       </a:r>
                     </a:p>
                   </a:txBody>
-                  <a:tcPr anchor="ctr" marL="88900" marR="63500" marT="25400" marB="25400">
+                  <a:tcPr marL="88900" marR="63500" marT="25400" marB="25400" anchor="ctr">
                     <a:solidFill>
                       <a:srgbClr val="F3F8F9"/>
                     </a:solidFill>
@@ -3569,7 +3636,7 @@
                 </a:tc>
                 <a:tc>
                   <a:txBody>
-                    <a:bodyPr wrap="square"/>
+                    <a:bodyPr/>
                     <a:lstStyle/>
                     <a:p>
                       <a:pPr algn="ctr"/>
@@ -3584,7 +3651,7 @@
                       </a:r>
                     </a:p>
                   </a:txBody>
-                  <a:tcPr anchor="ctr" marL="88900" marR="63500" marT="25400" marB="25400">
+                  <a:tcPr marL="88900" marR="63500" marT="25400" marB="25400" anchor="ctr">
                     <a:solidFill>
                       <a:srgbClr val="F3F8F9"/>
                     </a:solidFill>
@@ -3592,7 +3659,7 @@
                 </a:tc>
                 <a:tc>
                   <a:txBody>
-                    <a:bodyPr wrap="square"/>
+                    <a:bodyPr/>
                     <a:lstStyle/>
                     <a:p>
                       <a:pPr algn="l"/>
@@ -3616,17 +3683,22 @@
                       </a:r>
                     </a:p>
                   </a:txBody>
-                  <a:tcPr anchor="ctr" marL="88900" marR="63500" marT="25400" marB="25400">
+                  <a:tcPr marL="88900" marR="63500" marT="25400" marB="25400" anchor="ctr">
                     <a:solidFill>
                       <a:srgbClr val="F3F8F9"/>
                     </a:solidFill>
                   </a:tcPr>
                 </a:tc>
+                <a:extLst>
+                  <a:ext uri="{0D108BD9-81ED-4DB2-BD59-A6C34878D82A}">
+                    <a16:rowId xmlns:a16="http://schemas.microsoft.com/office/drawing/2014/main" val="10001"/>
+                  </a:ext>
+                </a:extLst>
               </a:tr>
               <a:tr h="585216">
                 <a:tc>
                   <a:txBody>
-                    <a:bodyPr wrap="square"/>
+                    <a:bodyPr/>
                     <a:lstStyle/>
                     <a:p>
                       <a:pPr algn="l"/>
@@ -3650,7 +3722,7 @@
                       </a:r>
                     </a:p>
                   </a:txBody>
-                  <a:tcPr anchor="ctr" marL="88900" marR="63500" marT="25400" marB="25400">
+                  <a:tcPr marL="88900" marR="63500" marT="25400" marB="25400" anchor="ctr">
                     <a:solidFill>
                       <a:srgbClr val="FFFFFF"/>
                     </a:solidFill>
@@ -3658,7 +3730,7 @@
                 </a:tc>
                 <a:tc>
                   <a:txBody>
-                    <a:bodyPr wrap="square"/>
+                    <a:bodyPr/>
                     <a:lstStyle/>
                     <a:p>
                       <a:pPr algn="ctr"/>
@@ -3673,7 +3745,7 @@
                       </a:r>
                     </a:p>
                   </a:txBody>
-                  <a:tcPr anchor="ctr" marL="88900" marR="63500" marT="25400" marB="25400">
+                  <a:tcPr marL="88900" marR="63500" marT="25400" marB="25400" anchor="ctr">
                     <a:solidFill>
                       <a:srgbClr val="FFFFFF"/>
                     </a:solidFill>
@@ -3681,7 +3753,7 @@
                 </a:tc>
                 <a:tc>
                   <a:txBody>
-                    <a:bodyPr wrap="square"/>
+                    <a:bodyPr/>
                     <a:lstStyle/>
                     <a:p>
                       <a:pPr algn="l"/>
@@ -3705,17 +3777,22 @@
                       </a:r>
                     </a:p>
                   </a:txBody>
-                  <a:tcPr anchor="ctr" marL="88900" marR="63500" marT="25400" marB="25400">
+                  <a:tcPr marL="88900" marR="63500" marT="25400" marB="25400" anchor="ctr">
                     <a:solidFill>
                       <a:srgbClr val="FFFFFF"/>
                     </a:solidFill>
                   </a:tcPr>
                 </a:tc>
+                <a:extLst>
+                  <a:ext uri="{0D108BD9-81ED-4DB2-BD59-A6C34878D82A}">
+                    <a16:rowId xmlns:a16="http://schemas.microsoft.com/office/drawing/2014/main" val="10002"/>
+                  </a:ext>
+                </a:extLst>
               </a:tr>
               <a:tr h="585216">
                 <a:tc>
                   <a:txBody>
-                    <a:bodyPr wrap="square"/>
+                    <a:bodyPr/>
                     <a:lstStyle/>
                     <a:p>
                       <a:pPr algn="l"/>
@@ -3739,7 +3816,7 @@
                       </a:r>
                     </a:p>
                   </a:txBody>
-                  <a:tcPr anchor="ctr" marL="88900" marR="63500" marT="25400" marB="25400">
+                  <a:tcPr marL="88900" marR="63500" marT="25400" marB="25400" anchor="ctr">
                     <a:solidFill>
                       <a:srgbClr val="F3F8F9"/>
                     </a:solidFill>
@@ -3747,7 +3824,7 @@
                 </a:tc>
                 <a:tc>
                   <a:txBody>
-                    <a:bodyPr wrap="square"/>
+                    <a:bodyPr/>
                     <a:lstStyle/>
                     <a:p>
                       <a:pPr algn="ctr"/>
@@ -3762,7 +3839,7 @@
                       </a:r>
                     </a:p>
                   </a:txBody>
-                  <a:tcPr anchor="ctr" marL="88900" marR="63500" marT="25400" marB="25400">
+                  <a:tcPr marL="88900" marR="63500" marT="25400" marB="25400" anchor="ctr">
                     <a:solidFill>
                       <a:srgbClr val="F3F8F9"/>
                     </a:solidFill>
@@ -3770,7 +3847,7 @@
                 </a:tc>
                 <a:tc>
                   <a:txBody>
-                    <a:bodyPr wrap="square"/>
+                    <a:bodyPr/>
                     <a:lstStyle/>
                     <a:p>
                       <a:pPr algn="l"/>
@@ -3785,17 +3862,22 @@
                       </a:r>
                     </a:p>
                   </a:txBody>
-                  <a:tcPr anchor="ctr" marL="88900" marR="63500" marT="25400" marB="25400">
+                  <a:tcPr marL="88900" marR="63500" marT="25400" marB="25400" anchor="ctr">
                     <a:solidFill>
                       <a:srgbClr val="F3F8F9"/>
                     </a:solidFill>
                   </a:tcPr>
                 </a:tc>
+                <a:extLst>
+                  <a:ext uri="{0D108BD9-81ED-4DB2-BD59-A6C34878D82A}">
+                    <a16:rowId xmlns:a16="http://schemas.microsoft.com/office/drawing/2014/main" val="10003"/>
+                  </a:ext>
+                </a:extLst>
               </a:tr>
               <a:tr h="585216">
                 <a:tc>
                   <a:txBody>
-                    <a:bodyPr wrap="square"/>
+                    <a:bodyPr/>
                     <a:lstStyle/>
                     <a:p>
                       <a:pPr algn="l"/>
@@ -3810,7 +3892,7 @@
                       </a:r>
                     </a:p>
                   </a:txBody>
-                  <a:tcPr anchor="ctr" marL="88900" marR="63500" marT="25400" marB="25400">
+                  <a:tcPr marL="88900" marR="63500" marT="25400" marB="25400" anchor="ctr">
                     <a:solidFill>
                       <a:srgbClr val="FFFFFF"/>
                     </a:solidFill>
@@ -3818,7 +3900,7 @@
                 </a:tc>
                 <a:tc>
                   <a:txBody>
-                    <a:bodyPr wrap="square"/>
+                    <a:bodyPr/>
                     <a:lstStyle/>
                     <a:p>
                       <a:pPr algn="ctr"/>
@@ -3833,7 +3915,7 @@
                       </a:r>
                     </a:p>
                   </a:txBody>
-                  <a:tcPr anchor="ctr" marL="88900" marR="63500" marT="25400" marB="25400">
+                  <a:tcPr marL="88900" marR="63500" marT="25400" marB="25400" anchor="ctr">
                     <a:solidFill>
                       <a:srgbClr val="FFFFFF"/>
                     </a:solidFill>
@@ -3841,7 +3923,7 @@
                 </a:tc>
                 <a:tc>
                   <a:txBody>
-                    <a:bodyPr wrap="square"/>
+                    <a:bodyPr/>
                     <a:lstStyle/>
                     <a:p>
                       <a:pPr algn="l"/>
@@ -3865,17 +3947,22 @@
                       </a:r>
                     </a:p>
                   </a:txBody>
-                  <a:tcPr anchor="ctr" marL="88900" marR="63500" marT="25400" marB="25400">
+                  <a:tcPr marL="88900" marR="63500" marT="25400" marB="25400" anchor="ctr">
                     <a:solidFill>
                       <a:srgbClr val="FFFFFF"/>
                     </a:solidFill>
                   </a:tcPr>
                 </a:tc>
+                <a:extLst>
+                  <a:ext uri="{0D108BD9-81ED-4DB2-BD59-A6C34878D82A}">
+                    <a16:rowId xmlns:a16="http://schemas.microsoft.com/office/drawing/2014/main" val="10004"/>
+                  </a:ext>
+                </a:extLst>
               </a:tr>
               <a:tr h="585216">
                 <a:tc>
                   <a:txBody>
-                    <a:bodyPr wrap="square"/>
+                    <a:bodyPr/>
                     <a:lstStyle/>
                     <a:p>
                       <a:pPr algn="l"/>
@@ -3890,7 +3977,7 @@
                       </a:r>
                     </a:p>
                   </a:txBody>
-                  <a:tcPr anchor="ctr" marL="88900" marR="63500" marT="25400" marB="25400">
+                  <a:tcPr marL="88900" marR="63500" marT="25400" marB="25400" anchor="ctr">
                     <a:solidFill>
                       <a:srgbClr val="F3F8F9"/>
                     </a:solidFill>
@@ -3898,7 +3985,7 @@
                 </a:tc>
                 <a:tc>
                   <a:txBody>
-                    <a:bodyPr wrap="square"/>
+                    <a:bodyPr/>
                     <a:lstStyle/>
                     <a:p>
                       <a:pPr algn="ctr"/>
@@ -3913,7 +4000,7 @@
                       </a:r>
                     </a:p>
                   </a:txBody>
-                  <a:tcPr anchor="ctr" marL="88900" marR="63500" marT="25400" marB="25400">
+                  <a:tcPr marL="88900" marR="63500" marT="25400" marB="25400" anchor="ctr">
                     <a:solidFill>
                       <a:srgbClr val="F3F8F9"/>
                     </a:solidFill>
@@ -3921,7 +4008,7 @@
                 </a:tc>
                 <a:tc>
                   <a:txBody>
-                    <a:bodyPr wrap="square"/>
+                    <a:bodyPr/>
                     <a:lstStyle/>
                     <a:p>
                       <a:pPr algn="l"/>
@@ -3936,17 +4023,22 @@
                       </a:r>
                     </a:p>
                   </a:txBody>
-                  <a:tcPr anchor="ctr" marL="88900" marR="63500" marT="25400" marB="25400">
+                  <a:tcPr marL="88900" marR="63500" marT="25400" marB="25400" anchor="ctr">
                     <a:solidFill>
                       <a:srgbClr val="F3F8F9"/>
                     </a:solidFill>
                   </a:tcPr>
                 </a:tc>
+                <a:extLst>
+                  <a:ext uri="{0D108BD9-81ED-4DB2-BD59-A6C34878D82A}">
+                    <a16:rowId xmlns:a16="http://schemas.microsoft.com/office/drawing/2014/main" val="10005"/>
+                  </a:ext>
+                </a:extLst>
               </a:tr>
               <a:tr h="585216">
                 <a:tc>
                   <a:txBody>
-                    <a:bodyPr wrap="square"/>
+                    <a:bodyPr/>
                     <a:lstStyle/>
                     <a:p>
                       <a:pPr algn="l"/>
@@ -3961,7 +4053,7 @@
                       </a:r>
                     </a:p>
                   </a:txBody>
-                  <a:tcPr anchor="ctr" marL="88900" marR="63500" marT="25400" marB="25400">
+                  <a:tcPr marL="88900" marR="63500" marT="25400" marB="25400" anchor="ctr">
                     <a:solidFill>
                       <a:srgbClr val="FFFFFF"/>
                     </a:solidFill>
@@ -3969,7 +4061,7 @@
                 </a:tc>
                 <a:tc>
                   <a:txBody>
-                    <a:bodyPr wrap="square"/>
+                    <a:bodyPr/>
                     <a:lstStyle/>
                     <a:p>
                       <a:pPr algn="ctr"/>
@@ -3984,7 +4076,7 @@
                       </a:r>
                     </a:p>
                   </a:txBody>
-                  <a:tcPr anchor="ctr" marL="88900" marR="63500" marT="25400" marB="25400">
+                  <a:tcPr marL="88900" marR="63500" marT="25400" marB="25400" anchor="ctr">
                     <a:solidFill>
                       <a:srgbClr val="FFFFFF"/>
                     </a:solidFill>
@@ -3992,7 +4084,7 @@
                 </a:tc>
                 <a:tc>
                   <a:txBody>
-                    <a:bodyPr wrap="square"/>
+                    <a:bodyPr/>
                     <a:lstStyle/>
                     <a:p>
                       <a:pPr algn="l"/>
@@ -4007,17 +4099,22 @@
                       </a:r>
                     </a:p>
                   </a:txBody>
-                  <a:tcPr anchor="ctr" marL="88900" marR="63500" marT="25400" marB="25400">
+                  <a:tcPr marL="88900" marR="63500" marT="25400" marB="25400" anchor="ctr">
                     <a:solidFill>
                       <a:srgbClr val="FFFFFF"/>
                     </a:solidFill>
                   </a:tcPr>
                 </a:tc>
+                <a:extLst>
+                  <a:ext uri="{0D108BD9-81ED-4DB2-BD59-A6C34878D82A}">
+                    <a16:rowId xmlns:a16="http://schemas.microsoft.com/office/drawing/2014/main" val="10006"/>
+                  </a:ext>
+                </a:extLst>
               </a:tr>
               <a:tr h="585216">
                 <a:tc>
                   <a:txBody>
-                    <a:bodyPr wrap="square"/>
+                    <a:bodyPr/>
                     <a:lstStyle/>
                     <a:p>
                       <a:pPr algn="l"/>
@@ -4032,7 +4129,7 @@
                       </a:r>
                     </a:p>
                   </a:txBody>
-                  <a:tcPr anchor="ctr" marL="88900" marR="63500" marT="25400" marB="25400">
+                  <a:tcPr marL="88900" marR="63500" marT="25400" marB="25400" anchor="ctr">
                     <a:solidFill>
                       <a:srgbClr val="F3F8F9"/>
                     </a:solidFill>
@@ -4040,7 +4137,7 @@
                 </a:tc>
                 <a:tc>
                   <a:txBody>
-                    <a:bodyPr wrap="square"/>
+                    <a:bodyPr/>
                     <a:lstStyle/>
                     <a:p>
                       <a:pPr algn="ctr"/>
@@ -4055,7 +4152,7 @@
                       </a:r>
                     </a:p>
                   </a:txBody>
-                  <a:tcPr anchor="ctr" marL="88900" marR="63500" marT="25400" marB="25400">
+                  <a:tcPr marL="88900" marR="63500" marT="25400" marB="25400" anchor="ctr">
                     <a:solidFill>
                       <a:srgbClr val="F3F8F9"/>
                     </a:solidFill>
@@ -4063,7 +4160,7 @@
                 </a:tc>
                 <a:tc>
                   <a:txBody>
-                    <a:bodyPr wrap="square"/>
+                    <a:bodyPr/>
                     <a:lstStyle/>
                     <a:p>
                       <a:pPr algn="l"/>
@@ -4078,12 +4175,17 @@
                       </a:r>
                     </a:p>
                   </a:txBody>
-                  <a:tcPr anchor="ctr" marL="88900" marR="63500" marT="25400" marB="25400">
+                  <a:tcPr marL="88900" marR="63500" marT="25400" marB="25400" anchor="ctr">
                     <a:solidFill>
                       <a:srgbClr val="F3F8F9"/>
                     </a:solidFill>
                   </a:tcPr>
                 </a:tc>
+                <a:extLst>
+                  <a:ext uri="{0D108BD9-81ED-4DB2-BD59-A6C34878D82A}">
+                    <a16:rowId xmlns:a16="http://schemas.microsoft.com/office/drawing/2014/main" val="10007"/>
+                  </a:ext>
+                </a:extLst>
               </a:tr>
             </a:tbl>
           </a:graphicData>
@@ -4141,7 +4243,7 @@
 </file>
 
 <file path=ppt/slides/slide11.xml><?xml version="1.0" encoding="utf-8"?>
-<p:sld xmlns:a="http://schemas.openxmlformats.org/drawingml/2006/main" xmlns:p="http://schemas.openxmlformats.org/presentationml/2006/main" xmlns:r="http://schemas.openxmlformats.org/officeDocument/2006/relationships">
+<p:sld xmlns:a="http://schemas.openxmlformats.org/drawingml/2006/main" xmlns:r="http://schemas.openxmlformats.org/officeDocument/2006/relationships" xmlns:p="http://schemas.openxmlformats.org/presentationml/2006/main">
   <p:cSld>
     <p:bg>
       <p:bgPr>
@@ -4157,7 +4259,14 @@
         <p:cNvGrpSpPr/>
         <p:nvPr/>
       </p:nvGrpSpPr>
-      <p:grpSpPr/>
+      <p:grpSpPr>
+        <a:xfrm>
+          <a:off x="0" y="0"/>
+          <a:ext cx="0" cy="0"/>
+          <a:chOff x="0" y="0"/>
+          <a:chExt cx="0" cy="0"/>
+        </a:xfrm>
+      </p:grpSpPr>
       <p:sp>
         <p:nvSpPr>
           <p:cNvPr id="2" name="TextBox 1"/>
@@ -4267,6 +4376,7 @@
           <a:lstStyle/>
           <a:p>
             <a:pPr algn="ctr"/>
+            <a:endParaRPr/>
           </a:p>
         </p:txBody>
       </p:sp>
@@ -4335,6 +4445,7 @@
           <a:lstStyle/>
           <a:p>
             <a:pPr algn="ctr"/>
+            <a:endParaRPr/>
           </a:p>
         </p:txBody>
       </p:sp>
@@ -4409,7 +4520,7 @@
 </file>
 
 <file path=ppt/slides/slide12.xml><?xml version="1.0" encoding="utf-8"?>
-<p:sld xmlns:a="http://schemas.openxmlformats.org/drawingml/2006/main" xmlns:p="http://schemas.openxmlformats.org/presentationml/2006/main" xmlns:r="http://schemas.openxmlformats.org/officeDocument/2006/relationships">
+<p:sld xmlns:a="http://schemas.openxmlformats.org/drawingml/2006/main" xmlns:r="http://schemas.openxmlformats.org/officeDocument/2006/relationships" xmlns:p="http://schemas.openxmlformats.org/presentationml/2006/main">
   <p:cSld>
     <p:bg>
       <p:bgPr>
@@ -4425,7 +4536,14 @@
         <p:cNvGrpSpPr/>
         <p:nvPr/>
       </p:nvGrpSpPr>
-      <p:grpSpPr/>
+      <p:grpSpPr>
+        <a:xfrm>
+          <a:off x="0" y="0"/>
+          <a:ext cx="0" cy="0"/>
+          <a:chOff x="0" y="0"/>
+          <a:chExt cx="0" cy="0"/>
+        </a:xfrm>
+      </p:grpSpPr>
       <p:sp>
         <p:nvSpPr>
           <p:cNvPr id="2" name="TextBox 1"/>
@@ -4455,7 +4573,7 @@
                 </a:solidFill>
                 <a:latin typeface="Segoe UI"/>
               </a:rPr>
-              <a:t>DESIGN STUDY</a:t>
+              <a:t>VALIDATION</a:t>
             </a:r>
           </a:p>
         </p:txBody>
@@ -4489,7 +4607,7 @@
                 </a:solidFill>
                 <a:latin typeface="Segoe UI"/>
               </a:rPr>
-              <a:t>Where to put the heave plate? — pitch performance</a:t>
+              <a:t>Field heave-decay test — a first real-world check</a:t>
             </a:r>
           </a:p>
         </p:txBody>
@@ -4535,12 +4653,13 @@
           <a:lstStyle/>
           <a:p>
             <a:pPr algn="ctr"/>
+            <a:endParaRPr/>
           </a:p>
         </p:txBody>
       </p:sp>
       <p:pic>
         <p:nvPicPr>
-          <p:cNvPr id="5" name="Picture 4" descr="plate_depth_pitch_study.png"/>
+          <p:cNvPr id="5" name="Picture 4" descr="OSU_field_heave_decay.png"/>
           <p:cNvPicPr>
             <a:picLocks noChangeAspect="1"/>
           </p:cNvPicPr>
@@ -4554,8 +4673,8 @@
         </p:blipFill>
         <p:spPr>
           <a:xfrm>
-            <a:off x="1298448" y="1554480"/>
-            <a:ext cx="9601200" cy="3857359"/>
+            <a:off x="1051560" y="1572768"/>
+            <a:ext cx="10058400" cy="4526280"/>
           </a:xfrm>
           <a:prstGeom prst="rect">
             <a:avLst/>
@@ -4571,7 +4690,7 @@
         <p:spPr>
           <a:xfrm>
             <a:off x="777240" y="5943600"/>
-            <a:ext cx="10607040" cy="731520"/>
+            <a:ext cx="10607040" cy="749808"/>
           </a:xfrm>
           <a:prstGeom prst="rect">
             <a:avLst/>
@@ -4603,6 +4722,7 @@
           <a:lstStyle/>
           <a:p>
             <a:pPr algn="ctr"/>
+            <a:endParaRPr/>
           </a:p>
         </p:txBody>
       </p:sp>
@@ -4630,31 +4750,31 @@
           <a:p>
             <a:pPr algn="ctr"/>
             <a:r>
-              <a:rPr sz="1300" b="1">
+              <a:rPr sz="1250" b="1">
                 <a:solidFill>
                   <a:srgbClr val="0A5560"/>
                 </a:solidFill>
                 <a:latin typeface="Segoe UI"/>
               </a:rPr>
-              <a:t>Plate depth barely moves pitch</a:t>
-            </a:r>
-            <a:r>
-              <a:rPr sz="1300" b="0">
-                <a:solidFill>
-                  <a:srgbClr val="25323A"/>
-                </a:solidFill>
-                <a:latin typeface="Segoe UI"/>
-              </a:rPr>
-              <a:t> (2.10 → 2.14 s over a 4× lever-arm change) or heave — an axial plate meets pitch EDGE-ON, so its broadside added mass &amp; drag (which dominate heave) hardly engage it.  </a:t>
-            </a:r>
-            <a:r>
-              <a:rPr sz="1300" b="1">
+              <a:t>Non-official handheld video</a:t>
+            </a:r>
+            <a:r>
+              <a:rPr sz="1250" b="0">
+                <a:solidFill>
+                  <a:srgbClr val="25323A"/>
+                </a:solidFill>
+                <a:latin typeface="Segoe UI"/>
+              </a:rPr>
+              <a:t>, motion-tracked frame-by-frame; the camera pan (~95 px ≫ the heave) is removed by referencing the fixed horizon. Buoy released ≈9.3 s, then rings down — heavily damped, so ~1½ cycles resolve.  </a:t>
+            </a:r>
+            <a:r>
+              <a:rPr sz="1250" b="1">
                 <a:solidFill>
                   <a:srgbClr val="0A5560"/>
                 </a:solidFill>
                 <a:latin typeface="Segoe UI"/>
               </a:rPr>
-              <a:t>Deck tilt is a ballast/CoG job, not a plate-depth job.</a:t>
+              <a:t>Period &amp; damping are scale-free.</a:t>
             </a:r>
           </a:p>
         </p:txBody>
@@ -4668,7 +4788,7 @@
 </file>
 
 <file path=ppt/slides/slide13.xml><?xml version="1.0" encoding="utf-8"?>
-<p:sld xmlns:a="http://schemas.openxmlformats.org/drawingml/2006/main" xmlns:p="http://schemas.openxmlformats.org/presentationml/2006/main" xmlns:r="http://schemas.openxmlformats.org/officeDocument/2006/relationships">
+<p:sld xmlns:a="http://schemas.openxmlformats.org/drawingml/2006/main" xmlns:r="http://schemas.openxmlformats.org/officeDocument/2006/relationships" xmlns:p="http://schemas.openxmlformats.org/presentationml/2006/main">
   <p:cSld>
     <p:bg>
       <p:bgPr>
@@ -4684,7 +4804,14 @@
         <p:cNvGrpSpPr/>
         <p:nvPr/>
       </p:nvGrpSpPr>
-      <p:grpSpPr/>
+      <p:grpSpPr>
+        <a:xfrm>
+          <a:off x="0" y="0"/>
+          <a:ext cx="0" cy="0"/>
+          <a:chOff x="0" y="0"/>
+          <a:chExt cx="0" cy="0"/>
+        </a:xfrm>
+      </p:grpSpPr>
       <p:sp>
         <p:nvSpPr>
           <p:cNvPr id="2" name="TextBox 1"/>
@@ -4714,7 +4841,7 @@
                 </a:solidFill>
                 <a:latin typeface="Segoe UI"/>
               </a:rPr>
-              <a:t>PLATFORM STUDY</a:t>
+              <a:t>VALIDATION</a:t>
             </a:r>
           </a:p>
         </p:txBody>
@@ -4748,7 +4875,7 @@
                 </a:solidFill>
                 <a:latin typeface="Segoe UI"/>
               </a:rPr>
-              <a:t>Do the buoy gimbals help the platform? — pin vs rigid</a:t>
+              <a:t>Model vs field test — period &amp; damping match</a:t>
             </a:r>
           </a:p>
         </p:txBody>
@@ -4794,19 +4921,458 @@
           <a:lstStyle/>
           <a:p>
             <a:pPr algn="ctr"/>
-          </a:p>
-        </p:txBody>
-      </p:sp>
-      <p:sp>
-        <p:nvSpPr>
-          <p:cNvPr id="5" name="TextBox 4"/>
+            <a:endParaRPr/>
+          </a:p>
+        </p:txBody>
+      </p:sp>
+      <p:graphicFrame>
+        <p:nvGraphicFramePr>
+          <p:cNvPr id="5" name="Table 4"/>
+          <p:cNvGraphicFramePr>
+            <a:graphicFrameLocks noGrp="1"/>
+          </p:cNvGraphicFramePr>
+          <p:nvPr/>
+        </p:nvGraphicFramePr>
+        <p:xfrm>
+          <a:off x="640080" y="1783080"/>
+          <a:ext cx="10927080" cy="1664208"/>
+        </p:xfrm>
+        <a:graphic>
+          <a:graphicData uri="http://schemas.openxmlformats.org/drawingml/2006/table">
+            <a:tbl>
+              <a:tblPr>
+                <a:tableStyleId>{5C22544A-7EE6-4342-B048-85BDC9FD1C3A}</a:tableStyleId>
+              </a:tblPr>
+              <a:tblGrid>
+                <a:gridCol w="2880360">
+                  <a:extLst>
+                    <a:ext uri="{9D8B030D-6E8A-4147-A177-3AD203B41FA5}">
+                      <a16:colId xmlns:a16="http://schemas.microsoft.com/office/drawing/2014/main" val="20000"/>
+                    </a:ext>
+                  </a:extLst>
+                </a:gridCol>
+                <a:gridCol w="2743200">
+                  <a:extLst>
+                    <a:ext uri="{9D8B030D-6E8A-4147-A177-3AD203B41FA5}">
+                      <a16:colId xmlns:a16="http://schemas.microsoft.com/office/drawing/2014/main" val="20001"/>
+                    </a:ext>
+                  </a:extLst>
+                </a:gridCol>
+                <a:gridCol w="2743200">
+                  <a:extLst>
+                    <a:ext uri="{9D8B030D-6E8A-4147-A177-3AD203B41FA5}">
+                      <a16:colId xmlns:a16="http://schemas.microsoft.com/office/drawing/2014/main" val="20002"/>
+                    </a:ext>
+                  </a:extLst>
+                </a:gridCol>
+                <a:gridCol w="2560320">
+                  <a:extLst>
+                    <a:ext uri="{9D8B030D-6E8A-4147-A177-3AD203B41FA5}">
+                      <a16:colId xmlns:a16="http://schemas.microsoft.com/office/drawing/2014/main" val="20003"/>
+                    </a:ext>
+                  </a:extLst>
+                </a:gridCol>
+              </a:tblGrid>
+              <a:tr h="384048">
+                <a:tc>
+                  <a:txBody>
+                    <a:bodyPr/>
+                    <a:lstStyle/>
+                    <a:p>
+                      <a:pPr algn="l"/>
+                      <a:r>
+                        <a:rPr sz="1300" b="1" i="0">
+                          <a:solidFill>
+                            <a:srgbClr val="FFFFFF"/>
+                          </a:solidFill>
+                          <a:latin typeface="Segoe UI"/>
+                        </a:rPr>
+                        <a:t>Quantity</a:t>
+                      </a:r>
+                    </a:p>
+                  </a:txBody>
+                  <a:tcPr marL="88900" marR="63500" marT="25400" marB="25400" anchor="ctr">
+                    <a:solidFill>
+                      <a:srgbClr val="0C8B96"/>
+                    </a:solidFill>
+                  </a:tcPr>
+                </a:tc>
+                <a:tc>
+                  <a:txBody>
+                    <a:bodyPr/>
+                    <a:lstStyle/>
+                    <a:p>
+                      <a:pPr algn="ctr"/>
+                      <a:r>
+                        <a:rPr sz="1300" b="1" i="0">
+                          <a:solidFill>
+                            <a:srgbClr val="FFFFFF"/>
+                          </a:solidFill>
+                          <a:latin typeface="Segoe UI"/>
+                        </a:rPr>
+                        <a:t>Model (FloatSim / Capytaine)</a:t>
+                      </a:r>
+                    </a:p>
+                  </a:txBody>
+                  <a:tcPr marL="88900" marR="63500" marT="25400" marB="25400" anchor="ctr">
+                    <a:solidFill>
+                      <a:srgbClr val="0C8B96"/>
+                    </a:solidFill>
+                  </a:tcPr>
+                </a:tc>
+                <a:tc>
+                  <a:txBody>
+                    <a:bodyPr/>
+                    <a:lstStyle/>
+                    <a:p>
+                      <a:pPr algn="ctr"/>
+                      <a:r>
+                        <a:rPr sz="1300" b="1" i="0">
+                          <a:solidFill>
+                            <a:srgbClr val="FFFFFF"/>
+                          </a:solidFill>
+                          <a:latin typeface="Segoe UI"/>
+                        </a:rPr>
+                        <a:t>Field video</a:t>
+                      </a:r>
+                    </a:p>
+                  </a:txBody>
+                  <a:tcPr marL="88900" marR="63500" marT="25400" marB="25400" anchor="ctr">
+                    <a:solidFill>
+                      <a:srgbClr val="0C8B96"/>
+                    </a:solidFill>
+                  </a:tcPr>
+                </a:tc>
+                <a:tc>
+                  <a:txBody>
+                    <a:bodyPr/>
+                    <a:lstStyle/>
+                    <a:p>
+                      <a:pPr algn="l"/>
+                      <a:r>
+                        <a:rPr sz="1300" b="1" i="0">
+                          <a:solidFill>
+                            <a:srgbClr val="FFFFFF"/>
+                          </a:solidFill>
+                          <a:latin typeface="Segoe UI"/>
+                        </a:rPr>
+                        <a:t>How measured</a:t>
+                      </a:r>
+                    </a:p>
+                  </a:txBody>
+                  <a:tcPr marL="88900" marR="63500" marT="25400" marB="25400" anchor="ctr">
+                    <a:solidFill>
+                      <a:srgbClr val="0C8B96"/>
+                    </a:solidFill>
+                  </a:tcPr>
+                </a:tc>
+                <a:extLst>
+                  <a:ext uri="{0D108BD9-81ED-4DB2-BD59-A6C34878D82A}">
+                    <a16:rowId xmlns:a16="http://schemas.microsoft.com/office/drawing/2014/main" val="10000"/>
+                  </a:ext>
+                </a:extLst>
+              </a:tr>
+              <a:tr h="640080">
+                <a:tc>
+                  <a:txBody>
+                    <a:bodyPr/>
+                    <a:lstStyle/>
+                    <a:p>
+                      <a:pPr algn="l"/>
+                      <a:r>
+                        <a:rPr sz="1400" b="1" i="0">
+                          <a:solidFill>
+                            <a:srgbClr val="25323A"/>
+                          </a:solidFill>
+                          <a:latin typeface="Segoe UI"/>
+                        </a:rPr>
+                        <a:t>Heave period  T</a:t>
+                      </a:r>
+                    </a:p>
+                  </a:txBody>
+                  <a:tcPr marL="88900" marR="63500" marT="25400" marB="25400" anchor="ctr">
+                    <a:solidFill>
+                      <a:srgbClr val="F3F8F9"/>
+                    </a:solidFill>
+                  </a:tcPr>
+                </a:tc>
+                <a:tc>
+                  <a:txBody>
+                    <a:bodyPr/>
+                    <a:lstStyle/>
+                    <a:p>
+                      <a:pPr algn="ctr"/>
+                      <a:r>
+                        <a:rPr sz="1500" b="1" i="0">
+                          <a:solidFill>
+                            <a:srgbClr val="25323A"/>
+                          </a:solidFill>
+                          <a:latin typeface="Segoe UI"/>
+                        </a:rPr>
+                        <a:t>2.52 s</a:t>
+                      </a:r>
+                    </a:p>
+                  </a:txBody>
+                  <a:tcPr marL="88900" marR="63500" marT="25400" marB="25400" anchor="ctr">
+                    <a:solidFill>
+                      <a:srgbClr val="F3F8F9"/>
+                    </a:solidFill>
+                  </a:tcPr>
+                </a:tc>
+                <a:tc>
+                  <a:txBody>
+                    <a:bodyPr/>
+                    <a:lstStyle/>
+                    <a:p>
+                      <a:pPr algn="ctr"/>
+                      <a:r>
+                        <a:rPr sz="1500" b="1" i="0">
+                          <a:solidFill>
+                            <a:srgbClr val="0A5560"/>
+                          </a:solidFill>
+                          <a:latin typeface="Segoe UI"/>
+                        </a:rPr>
+                        <a:t>≈ 2.50 s</a:t>
+                      </a:r>
+                    </a:p>
+                  </a:txBody>
+                  <a:tcPr marL="88900" marR="63500" marT="25400" marB="25400" anchor="ctr">
+                    <a:solidFill>
+                      <a:srgbClr val="F3F8F9"/>
+                    </a:solidFill>
+                  </a:tcPr>
+                </a:tc>
+                <a:tc>
+                  <a:txBody>
+                    <a:bodyPr/>
+                    <a:lstStyle/>
+                    <a:p>
+                      <a:pPr algn="l"/>
+                      <a:r>
+                        <a:rPr sz="1100" b="0" i="0">
+                          <a:solidFill>
+                            <a:srgbClr val="25323A"/>
+                          </a:solidFill>
+                          <a:latin typeface="Segoe UI"/>
+                        </a:rPr>
+                        <a:t>max→max 2.50; half-periods ×2 = 2.47 &amp; 2.53 s</a:t>
+                      </a:r>
+                    </a:p>
+                  </a:txBody>
+                  <a:tcPr marL="88900" marR="63500" marT="25400" marB="25400" anchor="ctr">
+                    <a:solidFill>
+                      <a:srgbClr val="F3F8F9"/>
+                    </a:solidFill>
+                  </a:tcPr>
+                </a:tc>
+                <a:extLst>
+                  <a:ext uri="{0D108BD9-81ED-4DB2-BD59-A6C34878D82A}">
+                    <a16:rowId xmlns:a16="http://schemas.microsoft.com/office/drawing/2014/main" val="10001"/>
+                  </a:ext>
+                </a:extLst>
+              </a:tr>
+              <a:tr h="640080">
+                <a:tc>
+                  <a:txBody>
+                    <a:bodyPr/>
+                    <a:lstStyle/>
+                    <a:p>
+                      <a:pPr algn="l"/>
+                      <a:r>
+                        <a:rPr sz="1400" b="1" i="0">
+                          <a:solidFill>
+                            <a:srgbClr val="25323A"/>
+                          </a:solidFill>
+                          <a:latin typeface="Segoe UI"/>
+                        </a:rPr>
+                        <a:t>Heave damping  ζ</a:t>
+                      </a:r>
+                    </a:p>
+                  </a:txBody>
+                  <a:tcPr marL="88900" marR="63500" marT="25400" marB="25400" anchor="ctr">
+                    <a:solidFill>
+                      <a:srgbClr val="FFFFFF"/>
+                    </a:solidFill>
+                  </a:tcPr>
+                </a:tc>
+                <a:tc>
+                  <a:txBody>
+                    <a:bodyPr/>
+                    <a:lstStyle/>
+                    <a:p>
+                      <a:pPr algn="ctr"/>
+                      <a:r>
+                        <a:rPr sz="1500" b="1" i="0">
+                          <a:solidFill>
+                            <a:srgbClr val="25323A"/>
+                          </a:solidFill>
+                          <a:latin typeface="Segoe UI"/>
+                        </a:rPr>
+                        <a:t>8–15 %</a:t>
+                      </a:r>
+                    </a:p>
+                  </a:txBody>
+                  <a:tcPr marL="88900" marR="63500" marT="25400" marB="25400" anchor="ctr">
+                    <a:solidFill>
+                      <a:srgbClr val="FFFFFF"/>
+                    </a:solidFill>
+                  </a:tcPr>
+                </a:tc>
+                <a:tc>
+                  <a:txBody>
+                    <a:bodyPr/>
+                    <a:lstStyle/>
+                    <a:p>
+                      <a:pPr algn="ctr"/>
+                      <a:r>
+                        <a:rPr sz="1500" b="1" i="0">
+                          <a:solidFill>
+                            <a:srgbClr val="0A5560"/>
+                          </a:solidFill>
+                          <a:latin typeface="Segoe UI"/>
+                        </a:rPr>
+                        <a:t>≈ 12–13 %</a:t>
+                      </a:r>
+                    </a:p>
+                  </a:txBody>
+                  <a:tcPr marL="88900" marR="63500" marT="25400" marB="25400" anchor="ctr">
+                    <a:solidFill>
+                      <a:srgbClr val="FFFFFF"/>
+                    </a:solidFill>
+                  </a:tcPr>
+                </a:tc>
+                <a:tc>
+                  <a:txBody>
+                    <a:bodyPr/>
+                    <a:lstStyle/>
+                    <a:p>
+                      <a:pPr algn="l"/>
+                      <a:r>
+                        <a:rPr sz="1100" b="0" i="0">
+                          <a:solidFill>
+                            <a:srgbClr val="25323A"/>
+                          </a:solidFill>
+                          <a:latin typeface="Segoe UI"/>
+                        </a:rPr>
+                        <a:t>log-dec: two maxima → 13 %; max→min half-cycle → 12 %</a:t>
+                      </a:r>
+                    </a:p>
+                  </a:txBody>
+                  <a:tcPr marL="88900" marR="63500" marT="25400" marB="25400" anchor="ctr">
+                    <a:solidFill>
+                      <a:srgbClr val="FFFFFF"/>
+                    </a:solidFill>
+                  </a:tcPr>
+                </a:tc>
+                <a:extLst>
+                  <a:ext uri="{0D108BD9-81ED-4DB2-BD59-A6C34878D82A}">
+                    <a16:rowId xmlns:a16="http://schemas.microsoft.com/office/drawing/2014/main" val="10002"/>
+                  </a:ext>
+                </a:extLst>
+              </a:tr>
+            </a:tbl>
+          </a:graphicData>
+        </a:graphic>
+      </p:graphicFrame>
+      <p:sp>
+        <p:nvSpPr>
+          <p:cNvPr id="6" name="Rectangle 5"/>
+          <p:cNvSpPr/>
+          <p:nvPr/>
+        </p:nvSpPr>
+        <p:spPr>
+          <a:xfrm>
+            <a:off x="640080" y="3794760"/>
+            <a:ext cx="10927080" cy="658368"/>
+          </a:xfrm>
+          <a:prstGeom prst="rect">
+            <a:avLst/>
+          </a:prstGeom>
+          <a:solidFill>
+            <a:srgbClr val="EEF6F7"/>
+          </a:solidFill>
+          <a:ln>
+            <a:noFill/>
+          </a:ln>
+          <a:effectLst/>
+        </p:spPr>
+        <p:style>
+          <a:lnRef idx="1">
+            <a:schemeClr val="accent1"/>
+          </a:lnRef>
+          <a:fillRef idx="3">
+            <a:schemeClr val="accent1"/>
+          </a:fillRef>
+          <a:effectRef idx="2">
+            <a:schemeClr val="accent1"/>
+          </a:effectRef>
+          <a:fontRef idx="minor">
+            <a:schemeClr val="lt1"/>
+          </a:fontRef>
+        </p:style>
+        <p:txBody>
+          <a:bodyPr rtlCol="0" anchor="ctr"/>
+          <a:lstStyle/>
+          <a:p>
+            <a:pPr algn="ctr"/>
+            <a:endParaRPr/>
+          </a:p>
+        </p:txBody>
+      </p:sp>
+      <p:sp>
+        <p:nvSpPr>
+          <p:cNvPr id="7" name="TextBox 6"/>
           <p:cNvSpPr txBox="1"/>
           <p:nvPr/>
         </p:nvSpPr>
         <p:spPr>
           <a:xfrm>
-            <a:off x="777240" y="1920240"/>
-            <a:ext cx="10698480" cy="4572000"/>
+            <a:off x="822960" y="3831336"/>
+            <a:ext cx="10561320" cy="585216"/>
+          </a:xfrm>
+          <a:prstGeom prst="rect">
+            <a:avLst/>
+          </a:prstGeom>
+          <a:noFill/>
+        </p:spPr>
+        <p:txBody>
+          <a:bodyPr wrap="square" anchor="ctr">
+            <a:spAutoFit/>
+          </a:bodyPr>
+          <a:lstStyle/>
+          <a:p>
+            <a:pPr algn="ctr"/>
+            <a:r>
+              <a:rPr sz="1500" b="1">
+                <a:solidFill>
+                  <a:srgbClr val="0A5560"/>
+                </a:solidFill>
+                <a:latin typeface="Segoe UI"/>
+              </a:rPr>
+              <a:t>Both match</a:t>
+            </a:r>
+            <a:r>
+              <a:rPr sz="1500" b="0">
+                <a:solidFill>
+                  <a:srgbClr val="25323A"/>
+                </a:solidFill>
+                <a:latin typeface="Segoe UI"/>
+              </a:rPr>
+              <a:t> — period within ~1 % of the simulation, damping inside the predicted band. A first independent, real-world corroboration of the heave model.</a:t>
+            </a:r>
+          </a:p>
+        </p:txBody>
+      </p:sp>
+      <p:sp>
+        <p:nvSpPr>
+          <p:cNvPr id="8" name="TextBox 7"/>
+          <p:cNvSpPr txBox="1"/>
+          <p:nvPr/>
+        </p:nvSpPr>
+        <p:spPr>
+          <a:xfrm>
+            <a:off x="777240" y="4617720"/>
+            <a:ext cx="10881360" cy="4572000"/>
           </a:xfrm>
           <a:prstGeom prst="rect">
             <a:avLst/>
@@ -4824,11 +5390,11 @@
                 <a:spcPts val="200"/>
               </a:spcBef>
               <a:spcAft>
-                <a:spcPts val="1200"/>
+                <a:spcPts val="900"/>
               </a:spcAft>
             </a:pPr>
             <a:r>
-              <a:rPr sz="1800">
+              <a:rPr sz="1400">
                 <a:solidFill>
                   <a:srgbClr val="0C8B96"/>
                 </a:solidFill>
@@ -4837,31 +5403,40 @@
               <a:t>•  </a:t>
             </a:r>
             <a:r>
-              <a:rPr sz="1800" b="0" i="0">
-                <a:solidFill>
-                  <a:srgbClr val="25323A"/>
-                </a:solidFill>
-                <a:latin typeface="Segoe UI"/>
-              </a:rPr>
-              <a:t>Scaling up: 16 buoys on a shared platform — a </a:t>
-            </a:r>
-            <a:r>
-              <a:rPr sz="1800" b="1" i="0">
-                <a:solidFill>
-                  <a:srgbClr val="25323A"/>
-                </a:solidFill>
-                <a:latin typeface="Segoe UI"/>
-              </a:rPr>
-              <a:t>still, level deck</a:t>
-            </a:r>
-            <a:r>
-              <a:rPr sz="1800" b="0" i="0">
-                <a:solidFill>
-                  <a:srgbClr val="25323A"/>
-                </a:solidFill>
-                <a:latin typeface="Segoe UI"/>
-              </a:rPr>
-              <a:t> for rockets / datacenters / hotels.</a:t>
+              <a:rPr sz="1400" b="1" i="0">
+                <a:solidFill>
+                  <a:srgbClr val="D1543A"/>
+                </a:solidFill>
+                <a:latin typeface="Segoe UI"/>
+              </a:rPr>
+              <a:t>Large release (~14 cm first swing)</a:t>
+            </a:r>
+            <a:r>
+              <a:rPr sz="1400" b="0" i="0">
+                <a:solidFill>
+                  <a:srgbClr val="25323A"/>
+                </a:solidFill>
+                <a:latin typeface="Segoe UI"/>
+              </a:rPr>
+              <a:t> → first-cycle Morison quadratic drag is high, so ζ sits at the </a:t>
+            </a:r>
+            <a:r>
+              <a:rPr sz="1400" b="1" i="0">
+                <a:solidFill>
+                  <a:srgbClr val="25323A"/>
+                </a:solidFill>
+                <a:latin typeface="Segoe UI"/>
+              </a:rPr>
+              <a:t>upper end</a:t>
+            </a:r>
+            <a:r>
+              <a:rPr sz="1400" b="0" i="0">
+                <a:solidFill>
+                  <a:srgbClr val="25323A"/>
+                </a:solidFill>
+                <a:latin typeface="Segoe UI"/>
+              </a:rPr>
+              <a:t> of the 8–15 % band; it should fall on smaller cycles.</a:t>
             </a:r>
           </a:p>
           <a:p>
@@ -4870,11 +5445,11 @@
                 <a:spcPts val="200"/>
               </a:spcBef>
               <a:spcAft>
-                <a:spcPts val="1200"/>
+                <a:spcPts val="900"/>
               </a:spcAft>
             </a:pPr>
             <a:r>
-              <a:rPr sz="1800">
+              <a:rPr sz="1400">
                 <a:solidFill>
                   <a:srgbClr val="0C8B96"/>
                 </a:solidFill>
@@ -4883,31 +5458,31 @@
               <a:t>•  </a:t>
             </a:r>
             <a:r>
-              <a:rPr sz="1800" b="0" i="0">
-                <a:solidFill>
-                  <a:srgbClr val="25323A"/>
-                </a:solidFill>
-                <a:latin typeface="Segoe UI"/>
-              </a:rPr>
-              <a:t>Each buoy joins the platform through the </a:t>
-            </a:r>
-            <a:r>
-              <a:rPr sz="1800" b="1" i="0">
-                <a:solidFill>
-                  <a:srgbClr val="25323A"/>
-                </a:solidFill>
-                <a:latin typeface="Segoe UI"/>
-              </a:rPr>
-              <a:t>gimbal at its top</a:t>
-            </a:r>
-            <a:r>
-              <a:rPr sz="1800" b="0" i="0">
-                <a:solidFill>
-                  <a:srgbClr val="25323A"/>
-                </a:solidFill>
-                <a:latin typeface="Segoe UI"/>
-              </a:rPr>
-              <a:t> (a pin: roll/pitch free). Does that beat welding the assembly rigid?</a:t>
+              <a:rPr sz="1400" b="0" i="0">
+                <a:solidFill>
+                  <a:srgbClr val="25323A"/>
+                </a:solidFill>
+                <a:latin typeface="Segoe UI"/>
+              </a:rPr>
+              <a:t>The analytic hand-estimate on the prior slide (2.3–2.4 s) low-bracketed the plate added mass; the </a:t>
+            </a:r>
+            <a:r>
+              <a:rPr sz="1400" b="1" i="0">
+                <a:solidFill>
+                  <a:srgbClr val="0A5560"/>
+                </a:solidFill>
+                <a:latin typeface="Segoe UI"/>
+              </a:rPr>
+              <a:t>full decay sim gives 2.52 s</a:t>
+            </a:r>
+            <a:r>
+              <a:rPr sz="1400" b="0" i="0">
+                <a:solidFill>
+                  <a:srgbClr val="25323A"/>
+                </a:solidFill>
+                <a:latin typeface="Segoe UI"/>
+              </a:rPr>
+              <a:t> — which the test confirms.</a:t>
             </a:r>
           </a:p>
           <a:p>
@@ -4916,11 +5491,11 @@
                 <a:spcPts val="200"/>
               </a:spcBef>
               <a:spcAft>
-                <a:spcPts val="1200"/>
+                <a:spcPts val="900"/>
               </a:spcAft>
             </a:pPr>
             <a:r>
-              <a:rPr sz="1800">
+              <a:rPr sz="1400">
                 <a:solidFill>
                   <a:srgbClr val="0C8B96"/>
                 </a:solidFill>
@@ -4929,115 +5504,22 @@
               <a:t>•  </a:t>
             </a:r>
             <a:r>
-              <a:rPr sz="1800" b="0" i="0">
-                <a:solidFill>
-                  <a:srgbClr val="25323A"/>
-                </a:solidFill>
-                <a:latin typeface="Segoe UI"/>
-              </a:rPr>
-              <a:t>Same 16-buoy deck, same hydro / drag / geometry — only the joint type changes:</a:t>
-            </a:r>
-          </a:p>
-          <a:p>
-            <a:pPr lvl="1">
-              <a:spcBef>
-                <a:spcPts val="200"/>
-              </a:spcBef>
-              <a:spcAft>
-                <a:spcPts val="1200"/>
-              </a:spcAft>
-            </a:pPr>
-            <a:r>
-              <a:rPr sz="1800">
-                <a:solidFill>
-                  <a:srgbClr val="54636D"/>
-                </a:solidFill>
-                <a:latin typeface="Segoe UI"/>
-              </a:rPr>
-              <a:t>      –  </a:t>
-            </a:r>
-            <a:r>
-              <a:rPr sz="1600" b="1" i="0">
-                <a:solidFill>
-                  <a:srgbClr val="0A5560"/>
-                </a:solidFill>
-                <a:latin typeface="Segoe UI"/>
-              </a:rPr>
-              <a:t>Articulated</a:t>
-            </a:r>
-            <a:r>
-              <a:rPr sz="1600" b="0" i="0">
-                <a:solidFill>
-                  <a:srgbClr val="25323A"/>
-                </a:solidFill>
-                <a:latin typeface="Segoe UI"/>
-              </a:rPr>
-              <a:t> — every joint a pin (the current design)</a:t>
-            </a:r>
-          </a:p>
-          <a:p>
-            <a:pPr lvl="1">
-              <a:spcBef>
-                <a:spcPts val="200"/>
-              </a:spcBef>
-              <a:spcAft>
-                <a:spcPts val="1200"/>
-              </a:spcAft>
-            </a:pPr>
-            <a:r>
-              <a:rPr sz="1800">
-                <a:solidFill>
-                  <a:srgbClr val="54636D"/>
-                </a:solidFill>
-                <a:latin typeface="Segoe UI"/>
-              </a:rPr>
-              <a:t>      –  </a:t>
-            </a:r>
-            <a:r>
-              <a:rPr sz="1600" b="1" i="0">
+              <a:rPr sz="1400" b="1" i="0">
                 <a:solidFill>
                   <a:srgbClr val="D1543A"/>
                 </a:solidFill>
                 <a:latin typeface="Segoe UI"/>
               </a:rPr>
-              <a:t>Whole-chain rigid</a:t>
-            </a:r>
-            <a:r>
-              <a:rPr sz="1600" b="0" i="0">
-                <a:solidFill>
-                  <a:srgbClr val="25323A"/>
-                </a:solidFill>
-                <a:latin typeface="Segoe UI"/>
-              </a:rPr>
-              <a:t> — every joint welded → one rigid raft</a:t>
-            </a:r>
-          </a:p>
-          <a:p>
-            <a:pPr>
-              <a:spcBef>
-                <a:spcPts val="200"/>
-              </a:spcBef>
-              <a:spcAft>
-                <a:spcPts val="1200"/>
-              </a:spcAft>
-            </a:pPr>
-            <a:r>
-              <a:rPr sz="1800">
-                <a:solidFill>
-                  <a:srgbClr val="0C8B96"/>
-                </a:solidFill>
-                <a:latin typeface="Segoe UI"/>
-              </a:rPr>
-              <a:t>•  </a:t>
-            </a:r>
-            <a:r>
-              <a:rPr sz="1800" b="0" i="0">
-                <a:solidFill>
-                  <a:srgbClr val="25323A"/>
-                </a:solidFill>
-                <a:latin typeface="Segoe UI"/>
-              </a:rPr>
-              <a:t>Metrics: deck tilt (pitch), heave, and the moment carried at each buoy→platform joint.</a:t>
+              <a:t>Still non-official &amp; handheld</a:t>
+            </a:r>
+            <a:r>
+              <a:rPr sz="1400" b="0" i="0">
+                <a:solidFill>
+                  <a:srgbClr val="25323A"/>
+                </a:solidFill>
+                <a:latin typeface="Segoe UI"/>
+              </a:rPr>
+              <a:t> — the instrumented tank test remains the source of truth for the perforated plate's added-mass / drag split.</a:t>
             </a:r>
           </a:p>
         </p:txBody>
@@ -5051,7 +5533,7 @@
 </file>
 
 <file path=ppt/slides/slide14.xml><?xml version="1.0" encoding="utf-8"?>
-<p:sld xmlns:a="http://schemas.openxmlformats.org/drawingml/2006/main" xmlns:p="http://schemas.openxmlformats.org/presentationml/2006/main" xmlns:r="http://schemas.openxmlformats.org/officeDocument/2006/relationships">
+<p:sld xmlns:a="http://schemas.openxmlformats.org/drawingml/2006/main" xmlns:r="http://schemas.openxmlformats.org/officeDocument/2006/relationships" xmlns:p="http://schemas.openxmlformats.org/presentationml/2006/main">
   <p:cSld>
     <p:bg>
       <p:bgPr>
@@ -5067,7 +5549,14 @@
         <p:cNvGrpSpPr/>
         <p:nvPr/>
       </p:nvGrpSpPr>
-      <p:grpSpPr/>
+      <p:grpSpPr>
+        <a:xfrm>
+          <a:off x="0" y="0"/>
+          <a:ext cx="0" cy="0"/>
+          <a:chOff x="0" y="0"/>
+          <a:chExt cx="0" cy="0"/>
+        </a:xfrm>
+      </p:grpSpPr>
       <p:sp>
         <p:nvSpPr>
           <p:cNvPr id="2" name="TextBox 1"/>
@@ -5097,7 +5586,7 @@
                 </a:solidFill>
                 <a:latin typeface="Segoe UI"/>
               </a:rPr>
-              <a:t>PLATFORM STUDY</a:t>
+              <a:t>THE PHYSICS ①</a:t>
             </a:r>
           </a:p>
         </p:txBody>
@@ -5131,7 +5620,7 @@
                 </a:solidFill>
                 <a:latin typeface="Segoe UI"/>
               </a:rPr>
-              <a:t>Pin vs rigid — the pin wins on every axis</a:t>
+              <a:t>Where does T = 2.5 s come from? — first, without added mass</a:t>
             </a:r>
           </a:p>
         </p:txBody>
@@ -5177,33 +5666,180 @@
           <a:lstStyle/>
           <a:p>
             <a:pPr algn="ctr"/>
-          </a:p>
-        </p:txBody>
-      </p:sp>
-      <p:pic>
-        <p:nvPicPr>
-          <p:cNvPr id="5" name="Picture 4" descr="pvr_verdict.png"/>
-          <p:cNvPicPr>
-            <a:picLocks noChangeAspect="1"/>
-          </p:cNvPicPr>
+            <a:endParaRPr/>
+          </a:p>
+        </p:txBody>
+      </p:sp>
+      <p:sp>
+        <p:nvSpPr>
+          <p:cNvPr id="5" name="TextBox 4"/>
+          <p:cNvSpPr txBox="1"/>
           <p:nvPr/>
-        </p:nvPicPr>
-        <p:blipFill>
-          <a:blip r:embed="rId2"/>
-          <a:stretch>
-            <a:fillRect/>
-          </a:stretch>
-        </p:blipFill>
-        <p:spPr>
-          <a:xfrm>
-            <a:off x="640080" y="1783080"/>
-            <a:ext cx="10972800" cy="3614624"/>
+        </p:nvSpPr>
+        <p:spPr>
+          <a:xfrm>
+            <a:off x="777240" y="1783080"/>
+            <a:ext cx="10698480" cy="4572000"/>
           </a:xfrm>
           <a:prstGeom prst="rect">
             <a:avLst/>
           </a:prstGeom>
-        </p:spPr>
-      </p:pic>
+          <a:noFill/>
+        </p:spPr>
+        <p:txBody>
+          <a:bodyPr wrap="square">
+            <a:spAutoFit/>
+          </a:bodyPr>
+          <a:lstStyle/>
+          <a:p>
+            <a:pPr>
+              <a:spcBef>
+                <a:spcPts val="200"/>
+              </a:spcBef>
+              <a:spcAft>
+                <a:spcPts val="1300"/>
+              </a:spcAft>
+            </a:pPr>
+            <a:r>
+              <a:rPr sz="1800">
+                <a:solidFill>
+                  <a:srgbClr val="0C8B96"/>
+                </a:solidFill>
+                <a:latin typeface="Segoe UI"/>
+              </a:rPr>
+              <a:t>•  </a:t>
+            </a:r>
+            <a:r>
+              <a:rPr sz="1800" b="1" i="0">
+                <a:solidFill>
+                  <a:srgbClr val="25323A"/>
+                </a:solidFill>
+                <a:latin typeface="Segoe UI"/>
+              </a:rPr>
+              <a:t>Heave is a one-DOF oscillator</a:t>
+            </a:r>
+            <a:r>
+              <a:rPr sz="1800" b="0" i="0">
+                <a:solidFill>
+                  <a:srgbClr val="25323A"/>
+                </a:solidFill>
+                <a:latin typeface="Segoe UI"/>
+              </a:rPr>
+              <a:t> — the buoy bobs vertically on the </a:t>
+            </a:r>
+            <a:r>
+              <a:rPr sz="1800" b="1" i="0">
+                <a:solidFill>
+                  <a:srgbClr val="0A5560"/>
+                </a:solidFill>
+                <a:latin typeface="Segoe UI"/>
+              </a:rPr>
+              <a:t>waterplane buoyancy spring</a:t>
+            </a:r>
+            <a:r>
+              <a:rPr sz="1800" b="0" i="0">
+                <a:solidFill>
+                  <a:srgbClr val="25323A"/>
+                </a:solidFill>
+                <a:latin typeface="Segoe UI"/>
+              </a:rPr>
+              <a:t>.</a:t>
+            </a:r>
+          </a:p>
+          <a:p>
+            <a:pPr>
+              <a:spcBef>
+                <a:spcPts val="200"/>
+              </a:spcBef>
+              <a:spcAft>
+                <a:spcPts val="1300"/>
+              </a:spcAft>
+            </a:pPr>
+            <a:r>
+              <a:rPr sz="1800">
+                <a:solidFill>
+                  <a:srgbClr val="0C8B96"/>
+                </a:solidFill>
+                <a:latin typeface="Segoe UI"/>
+              </a:rPr>
+              <a:t>•  </a:t>
+            </a:r>
+            <a:r>
+              <a:rPr sz="1800" b="0" i="0">
+                <a:solidFill>
+                  <a:srgbClr val="25323A"/>
+                </a:solidFill>
+                <a:latin typeface="Segoe UI"/>
+              </a:rPr>
+              <a:t>Stiffness </a:t>
+            </a:r>
+            <a:r>
+              <a:rPr sz="1800" b="1" i="0">
+                <a:solidFill>
+                  <a:srgbClr val="0A5560"/>
+                </a:solidFill>
+                <a:latin typeface="Segoe UI"/>
+              </a:rPr>
+              <a:t>C₃₃ = ρ g A_wp</a:t>
+            </a:r>
+            <a:r>
+              <a:rPr sz="1800" b="0" i="0">
+                <a:solidFill>
+                  <a:srgbClr val="25323A"/>
+                </a:solidFill>
+                <a:latin typeface="Segoe UI"/>
+              </a:rPr>
+              <a:t>: the restoring buoyancy per metre of submergence (A_wp = 6″ spar waterplane area).</a:t>
+            </a:r>
+          </a:p>
+          <a:p>
+            <a:pPr>
+              <a:spcBef>
+                <a:spcPts val="200"/>
+              </a:spcBef>
+              <a:spcAft>
+                <a:spcPts val="1300"/>
+              </a:spcAft>
+            </a:pPr>
+            <a:r>
+              <a:rPr sz="1800">
+                <a:solidFill>
+                  <a:srgbClr val="0C8B96"/>
+                </a:solidFill>
+                <a:latin typeface="Segoe UI"/>
+              </a:rPr>
+              <a:t>•  </a:t>
+            </a:r>
+            <a:r>
+              <a:rPr sz="1800" b="0" i="0">
+                <a:solidFill>
+                  <a:srgbClr val="25323A"/>
+                </a:solidFill>
+                <a:latin typeface="Segoe UI"/>
+              </a:rPr>
+              <a:t>The naive “dry” period uses the </a:t>
+            </a:r>
+            <a:r>
+              <a:rPr sz="1800" b="1" i="0">
+                <a:solidFill>
+                  <a:srgbClr val="25323A"/>
+                </a:solidFill>
+                <a:latin typeface="Segoe UI"/>
+              </a:rPr>
+              <a:t>structural mass M alone</a:t>
+            </a:r>
+            <a:r>
+              <a:rPr sz="1800" b="0" i="0">
+                <a:solidFill>
+                  <a:srgbClr val="25323A"/>
+                </a:solidFill>
+                <a:latin typeface="Segoe UI"/>
+              </a:rPr>
+              <a:t> — no water entrained:</a:t>
+            </a:r>
+          </a:p>
+        </p:txBody>
+      </p:sp>
       <p:sp>
         <p:nvSpPr>
           <p:cNvPr id="6" name="Rectangle 5"/>
@@ -5212,8 +5848,8 @@
         </p:nvSpPr>
         <p:spPr>
           <a:xfrm>
-            <a:off x="777240" y="5806440"/>
-            <a:ext cx="10607040" cy="749808"/>
+            <a:off x="3429000" y="3246120"/>
+            <a:ext cx="5349240" cy="932688"/>
           </a:xfrm>
           <a:prstGeom prst="rect">
             <a:avLst/>
@@ -5245,6 +5881,7 @@
           <a:lstStyle/>
           <a:p>
             <a:pPr algn="ctr"/>
+            <a:endParaRPr/>
           </a:p>
         </p:txBody>
       </p:sp>
@@ -5256,8 +5893,8 @@
         </p:nvSpPr>
         <p:spPr>
           <a:xfrm>
-            <a:off x="960120" y="5852160"/>
-            <a:ext cx="10241280" cy="658368"/>
+            <a:off x="3429000" y="3346704"/>
+            <a:ext cx="5349240" cy="731520"/>
           </a:xfrm>
           <a:prstGeom prst="rect">
             <a:avLst/>
@@ -5272,58 +5909,182 @@
           <a:p>
             <a:pPr algn="ctr"/>
             <a:r>
-              <a:rPr sz="1300" b="1">
+              <a:rPr sz="2600" b="1">
+                <a:solidFill>
+                  <a:srgbClr val="25323A"/>
+                </a:solidFill>
+                <a:latin typeface="Cambria Math"/>
+              </a:rPr>
+              <a:t>T₀ = 2π √( M / C₃₃ )</a:t>
+            </a:r>
+          </a:p>
+        </p:txBody>
+      </p:sp>
+      <p:sp>
+        <p:nvSpPr>
+          <p:cNvPr id="8" name="TextBox 7"/>
+          <p:cNvSpPr txBox="1"/>
+          <p:nvPr/>
+        </p:nvSpPr>
+        <p:spPr>
+          <a:xfrm>
+            <a:off x="777240" y="4370832"/>
+            <a:ext cx="10607040" cy="502920"/>
+          </a:xfrm>
+          <a:prstGeom prst="rect">
+            <a:avLst/>
+          </a:prstGeom>
+          <a:noFill/>
+        </p:spPr>
+        <p:txBody>
+          <a:bodyPr wrap="square">
+            <a:spAutoFit/>
+          </a:bodyPr>
+          <a:lstStyle/>
+          <a:p>
+            <a:pPr algn="ctr"/>
+            <a:r>
+              <a:rPr sz="1700" b="1">
+                <a:solidFill>
+                  <a:srgbClr val="25323A"/>
+                </a:solidFill>
+                <a:latin typeface="Segoe UI"/>
+              </a:rPr>
+              <a:t>M = 21.52 kg        C₃₃ = 194.5 N/m</a:t>
+            </a:r>
+            <a:r>
+              <a:rPr sz="1700" b="0">
+                <a:solidFill>
+                  <a:srgbClr val="25323A"/>
+                </a:solidFill>
+                <a:latin typeface="Segoe UI"/>
+              </a:rPr>
+              <a:t>        →        </a:t>
+            </a:r>
+            <a:r>
+              <a:rPr sz="2000" b="1">
                 <a:solidFill>
                   <a:srgbClr val="0A5560"/>
                 </a:solidFill>
                 <a:latin typeface="Segoe UI"/>
               </a:rPr>
-              <a:t>Same heave</a:t>
-            </a:r>
-            <a:r>
-              <a:rPr sz="1300" b="0">
-                <a:solidFill>
-                  <a:srgbClr val="25323A"/>
-                </a:solidFill>
-                <a:latin typeface="Segoe UI"/>
-              </a:rPr>
-              <a:t>; the rigid raft tilts </a:t>
-            </a:r>
-            <a:r>
-              <a:rPr sz="1300" b="1">
+              <a:t>T₀ = 2.09 s</a:t>
+            </a:r>
+          </a:p>
+        </p:txBody>
+      </p:sp>
+      <p:sp>
+        <p:nvSpPr>
+          <p:cNvPr id="9" name="Rectangle 8"/>
+          <p:cNvSpPr/>
+          <p:nvPr/>
+        </p:nvSpPr>
+        <p:spPr>
+          <a:xfrm>
+            <a:off x="777240" y="5138928"/>
+            <a:ext cx="10607040" cy="1024128"/>
+          </a:xfrm>
+          <a:prstGeom prst="rect">
+            <a:avLst/>
+          </a:prstGeom>
+          <a:solidFill>
+            <a:srgbClr val="EEF6F7"/>
+          </a:solidFill>
+          <a:ln>
+            <a:noFill/>
+          </a:ln>
+          <a:effectLst/>
+        </p:spPr>
+        <p:style>
+          <a:lnRef idx="1">
+            <a:schemeClr val="accent1"/>
+          </a:lnRef>
+          <a:fillRef idx="3">
+            <a:schemeClr val="accent1"/>
+          </a:fillRef>
+          <a:effectRef idx="2">
+            <a:schemeClr val="accent1"/>
+          </a:effectRef>
+          <a:fontRef idx="minor">
+            <a:schemeClr val="lt1"/>
+          </a:fontRef>
+        </p:style>
+        <p:txBody>
+          <a:bodyPr rtlCol="0" anchor="ctr"/>
+          <a:lstStyle/>
+          <a:p>
+            <a:pPr algn="ctr"/>
+            <a:endParaRPr/>
+          </a:p>
+        </p:txBody>
+      </p:sp>
+      <p:sp>
+        <p:nvSpPr>
+          <p:cNvPr id="10" name="TextBox 9"/>
+          <p:cNvSpPr txBox="1"/>
+          <p:nvPr/>
+        </p:nvSpPr>
+        <p:spPr>
+          <a:xfrm>
+            <a:off x="1005840" y="5230368"/>
+            <a:ext cx="10149840" cy="859536"/>
+          </a:xfrm>
+          <a:prstGeom prst="rect">
+            <a:avLst/>
+          </a:prstGeom>
+          <a:noFill/>
+        </p:spPr>
+        <p:txBody>
+          <a:bodyPr wrap="square" anchor="ctr">
+            <a:spAutoFit/>
+          </a:bodyPr>
+          <a:lstStyle/>
+          <a:p>
+            <a:pPr algn="ctr"/>
+            <a:r>
+              <a:rPr sz="1500" b="0">
+                <a:solidFill>
+                  <a:srgbClr val="25323A"/>
+                </a:solidFill>
+                <a:latin typeface="Segoe UI"/>
+              </a:rPr>
+              <a:t>But the field test measured 2.50 s. </a:t>
+            </a:r>
+            <a:r>
+              <a:rPr sz="1500" b="1">
                 <a:solidFill>
                   <a:srgbClr val="D1543A"/>
                 </a:solidFill>
                 <a:latin typeface="Segoe UI"/>
               </a:rPr>
-              <a:t>1.3–3.5× more</a:t>
-            </a:r>
-            <a:r>
-              <a:rPr sz="1300" b="0">
-                <a:solidFill>
-                  <a:srgbClr val="25323A"/>
-                </a:solidFill>
-                <a:latin typeface="Segoe UI"/>
-              </a:rPr>
-              <a:t>; and the pin carries </a:t>
-            </a:r>
-            <a:r>
-              <a:rPr sz="1300" b="1">
-                <a:solidFill>
-                  <a:srgbClr val="0A5560"/>
-                </a:solidFill>
-                <a:latin typeface="Segoe UI"/>
-              </a:rPr>
-              <a:t>~zero connection moment</a:t>
-            </a:r>
-            <a:r>
-              <a:rPr sz="1300" b="0">
-                <a:solidFill>
-                  <a:srgbClr val="25323A"/>
-                </a:solidFill>
-                <a:latin typeface="Segoe UI"/>
-              </a:rPr>
-              <a:t> vs the weld's hundreds of N·m/m. The gimbals absorb buoy tilt instead of dumping it into the deck.</a:t>
+              <a:t>The buoy behaves ~45% heavier than its structure</a:t>
+            </a:r>
+            <a:r>
+              <a:rPr sz="1500" b="0">
+                <a:solidFill>
+                  <a:srgbClr val="25323A"/>
+                </a:solidFill>
+                <a:latin typeface="Segoe UI"/>
+              </a:rPr>
+              <a:t> — it drags a slug of water with it as it accelerates. That missing inertia is </a:t>
+            </a:r>
+            <a:r>
+              <a:rPr sz="1500" b="1">
+                <a:solidFill>
+                  <a:srgbClr val="D1543A"/>
+                </a:solidFill>
+                <a:latin typeface="Segoe UI"/>
+              </a:rPr>
+              <a:t>added mass</a:t>
+            </a:r>
+            <a:r>
+              <a:rPr sz="1500" b="0">
+                <a:solidFill>
+                  <a:srgbClr val="25323A"/>
+                </a:solidFill>
+                <a:latin typeface="Segoe UI"/>
+              </a:rPr>
+              <a:t>.</a:t>
             </a:r>
           </a:p>
         </p:txBody>
@@ -5336,8 +6097,8 @@
 </p:sld>
 </file>
 
-<file path=ppt/slides/slide2.xml><?xml version="1.0" encoding="utf-8"?>
-<p:sld xmlns:a="http://schemas.openxmlformats.org/drawingml/2006/main" xmlns:p="http://schemas.openxmlformats.org/presentationml/2006/main" xmlns:r="http://schemas.openxmlformats.org/officeDocument/2006/relationships">
+<file path=ppt/slides/slide15.xml><?xml version="1.0" encoding="utf-8"?>
+<p:sld xmlns:a="http://schemas.openxmlformats.org/drawingml/2006/main" xmlns:r="http://schemas.openxmlformats.org/officeDocument/2006/relationships" xmlns:p="http://schemas.openxmlformats.org/presentationml/2006/main">
   <p:cSld>
     <p:bg>
       <p:bgPr>
@@ -5353,7 +6114,14 @@
         <p:cNvGrpSpPr/>
         <p:nvPr/>
       </p:nvGrpSpPr>
-      <p:grpSpPr/>
+      <p:grpSpPr>
+        <a:xfrm>
+          <a:off x="0" y="0"/>
+          <a:ext cx="0" cy="0"/>
+          <a:chOff x="0" y="0"/>
+          <a:chExt cx="0" cy="0"/>
+        </a:xfrm>
+      </p:grpSpPr>
       <p:sp>
         <p:nvSpPr>
           <p:cNvPr id="2" name="TextBox 1"/>
@@ -5383,7 +6151,7 @@
                 </a:solidFill>
                 <a:latin typeface="Segoe UI"/>
               </a:rPr>
-              <a:t>THE TOOL</a:t>
+              <a:t>THE PHYSICS ②</a:t>
             </a:r>
           </a:p>
         </p:txBody>
@@ -5417,7 +6185,7 @@
                 </a:solidFill>
                 <a:latin typeface="Segoe UI"/>
               </a:rPr>
-              <a:t>What Capytaine computes</a:t>
+              <a:t>Added mass — how Capytaine computes it, and how it sets T</a:t>
             </a:r>
           </a:p>
         </p:txBody>
@@ -5463,19 +6231,120 @@
           <a:lstStyle/>
           <a:p>
             <a:pPr algn="ctr"/>
-          </a:p>
-        </p:txBody>
-      </p:sp>
-      <p:sp>
-        <p:nvSpPr>
-          <p:cNvPr id="5" name="TextBox 4"/>
+            <a:endParaRPr/>
+          </a:p>
+        </p:txBody>
+      </p:sp>
+      <p:sp>
+        <p:nvSpPr>
+          <p:cNvPr id="5" name="Rectangle 4"/>
+          <p:cNvSpPr/>
+          <p:nvPr/>
+        </p:nvSpPr>
+        <p:spPr>
+          <a:xfrm>
+            <a:off x="502920" y="1737360"/>
+            <a:ext cx="5532120" cy="3913632"/>
+          </a:xfrm>
+          <a:prstGeom prst="rect">
+            <a:avLst/>
+          </a:prstGeom>
+          <a:solidFill>
+            <a:srgbClr val="F7FAFB"/>
+          </a:solidFill>
+          <a:ln w="15875">
+            <a:solidFill>
+              <a:srgbClr val="0C8B96"/>
+            </a:solidFill>
+          </a:ln>
+          <a:effectLst/>
+        </p:spPr>
+        <p:style>
+          <a:lnRef idx="1">
+            <a:schemeClr val="accent1"/>
+          </a:lnRef>
+          <a:fillRef idx="3">
+            <a:schemeClr val="accent1"/>
+          </a:fillRef>
+          <a:effectRef idx="2">
+            <a:schemeClr val="accent1"/>
+          </a:effectRef>
+          <a:fontRef idx="minor">
+            <a:schemeClr val="lt1"/>
+          </a:fontRef>
+        </p:style>
+        <p:txBody>
+          <a:bodyPr rtlCol="0" anchor="ctr"/>
+          <a:lstStyle/>
+          <a:p>
+            <a:pPr algn="ctr"/>
+            <a:endParaRPr/>
+          </a:p>
+        </p:txBody>
+      </p:sp>
+      <p:sp>
+        <p:nvSpPr>
+          <p:cNvPr id="6" name="Rectangle 5"/>
+          <p:cNvSpPr/>
+          <p:nvPr/>
+        </p:nvSpPr>
+        <p:spPr>
+          <a:xfrm>
+            <a:off x="502920" y="1737360"/>
+            <a:ext cx="5532120" cy="548640"/>
+          </a:xfrm>
+          <a:prstGeom prst="rect">
+            <a:avLst/>
+          </a:prstGeom>
+          <a:solidFill>
+            <a:srgbClr val="0C8B96"/>
+          </a:solidFill>
+          <a:ln>
+            <a:noFill/>
+          </a:ln>
+          <a:effectLst/>
+        </p:spPr>
+        <p:style>
+          <a:lnRef idx="1">
+            <a:schemeClr val="accent1"/>
+          </a:lnRef>
+          <a:fillRef idx="3">
+            <a:schemeClr val="accent1"/>
+          </a:fillRef>
+          <a:effectRef idx="2">
+            <a:schemeClr val="accent1"/>
+          </a:effectRef>
+          <a:fontRef idx="minor">
+            <a:schemeClr val="lt1"/>
+          </a:fontRef>
+        </p:style>
+        <p:txBody>
+          <a:bodyPr rtlCol="0" anchor="ctr"/>
+          <a:lstStyle/>
+          <a:p>
+            <a:pPr algn="ctr"/>
+            <a:r>
+              <a:rPr sz="1700" b="1">
+                <a:solidFill>
+                  <a:srgbClr val="FFFFFF"/>
+                </a:solidFill>
+                <a:latin typeface="Segoe UI"/>
+              </a:rPr>
+              <a:t>HOW CAPYTAINE COMPUTES A</a:t>
+            </a:r>
+          </a:p>
+        </p:txBody>
+      </p:sp>
+      <p:sp>
+        <p:nvSpPr>
+          <p:cNvPr id="7" name="TextBox 6"/>
           <p:cNvSpPr txBox="1"/>
           <p:nvPr/>
         </p:nvSpPr>
         <p:spPr>
           <a:xfrm>
-            <a:off x="777240" y="1828800"/>
-            <a:ext cx="10698480" cy="4572000"/>
+            <a:off x="502920" y="2267712"/>
+            <a:ext cx="5532120" cy="310896"/>
           </a:xfrm>
           <a:prstGeom prst="rect">
             <a:avLst/>
@@ -5483,21 +6352,53 @@
           <a:noFill/>
         </p:spPr>
         <p:txBody>
+          <a:bodyPr wrap="none">
+            <a:spAutoFit/>
+          </a:bodyPr>
+          <a:lstStyle/>
+          <a:p>
+            <a:pPr algn="ctr"/>
+            <a:r>
+              <a:rPr sz="1050" i="1">
+                <a:solidFill>
+                  <a:srgbClr val="54636D"/>
+                </a:solidFill>
+                <a:latin typeface="Segoe UI"/>
+              </a:rPr>
+              <a:t>radiation problem · one run · per frequency ω</a:t>
+            </a:r>
+          </a:p>
+        </p:txBody>
+      </p:sp>
+      <p:sp>
+        <p:nvSpPr>
+          <p:cNvPr id="8" name="TextBox 7"/>
+          <p:cNvSpPr txBox="1"/>
+          <p:nvPr/>
+        </p:nvSpPr>
+        <p:spPr>
+          <a:xfrm>
+            <a:off x="758952" y="2670048"/>
+            <a:ext cx="5056631" cy="2862072"/>
+          </a:xfrm>
+          <a:prstGeom prst="rect">
+            <a:avLst/>
+          </a:prstGeom>
+          <a:noFill/>
+        </p:spPr>
+        <p:txBody>
           <a:bodyPr wrap="square">
             <a:spAutoFit/>
           </a:bodyPr>
           <a:lstStyle/>
           <a:p>
             <a:pPr>
-              <a:spcBef>
-                <a:spcPts val="200"/>
-              </a:spcBef>
               <a:spcAft>
-                <a:spcPts val="1200"/>
+                <a:spcPts val="600"/>
               </a:spcAft>
             </a:pPr>
             <a:r>
-              <a:rPr sz="1800">
+              <a:rPr sz="1300">
                 <a:solidFill>
                   <a:srgbClr val="0C8B96"/>
                 </a:solidFill>
@@ -5506,44 +6407,23 @@
               <a:t>•  </a:t>
             </a:r>
             <a:r>
-              <a:rPr sz="1800" b="0" i="0">
-                <a:solidFill>
-                  <a:srgbClr val="25323A"/>
-                </a:solidFill>
-                <a:latin typeface="Segoe UI"/>
-              </a:rPr>
-              <a:t>Boundary-element (panel) solver for </a:t>
-            </a:r>
-            <a:r>
-              <a:rPr sz="1800" b="1" i="0">
-                <a:solidFill>
-                  <a:srgbClr val="25323A"/>
-                </a:solidFill>
-                <a:latin typeface="Segoe UI"/>
-              </a:rPr>
-              <a:t>linear potential-flow hydrodynamics</a:t>
-            </a:r>
-            <a:r>
-              <a:rPr sz="1800" b="0" i="0">
-                <a:solidFill>
-                  <a:srgbClr val="25323A"/>
-                </a:solidFill>
-                <a:latin typeface="Segoe UI"/>
-              </a:rPr>
-              <a:t>.</a:t>
+              <a:rPr sz="1300" b="0" i="0">
+                <a:solidFill>
+                  <a:srgbClr val="25323A"/>
+                </a:solidFill>
+                <a:latin typeface="Segoe UI"/>
+              </a:rPr>
+              <a:t>Force the hull to oscillate in still water at ω (heave DOF, no incoming waves).</a:t>
             </a:r>
           </a:p>
           <a:p>
             <a:pPr>
-              <a:spcBef>
-                <a:spcPts val="200"/>
-              </a:spcBef>
               <a:spcAft>
-                <a:spcPts val="1200"/>
+                <a:spcPts val="600"/>
               </a:spcAft>
             </a:pPr>
             <a:r>
-              <a:rPr sz="1800">
+              <a:rPr sz="1300">
                 <a:solidFill>
                   <a:srgbClr val="0C8B96"/>
                 </a:solidFill>
@@ -5552,26 +6432,23 @@
               <a:t>•  </a:t>
             </a:r>
             <a:r>
-              <a:rPr sz="1800" b="0" i="0">
-                <a:solidFill>
-                  <a:srgbClr val="25323A"/>
-                </a:solidFill>
-                <a:latin typeface="Segoe UI"/>
-              </a:rPr>
-              <a:t>In: the wetted hull as a mesh of panels.  Out: the flow (velocity potential φ) around it in regular waves at each frequency ω.</a:t>
+              <a:rPr sz="1300" b="0" i="0">
+                <a:solidFill>
+                  <a:srgbClr val="25323A"/>
+                </a:solidFill>
+                <a:latin typeface="Segoe UI"/>
+              </a:rPr>
+              <a:t>Integrate the flow pressure over the hull → the hydrodynamic reaction force.</a:t>
             </a:r>
           </a:p>
           <a:p>
             <a:pPr>
-              <a:spcBef>
-                <a:spcPts val="200"/>
-              </a:spcBef>
               <a:spcAft>
-                <a:spcPts val="1200"/>
+                <a:spcPts val="600"/>
               </a:spcAft>
             </a:pPr>
             <a:r>
-              <a:rPr sz="1800">
+              <a:rPr sz="1300">
                 <a:solidFill>
                   <a:srgbClr val="0C8B96"/>
                 </a:solidFill>
@@ -5580,151 +6457,510 @@
               <a:t>•  </a:t>
             </a:r>
             <a:r>
-              <a:rPr sz="1800" b="0" i="0">
-                <a:solidFill>
-                  <a:srgbClr val="25323A"/>
-                </a:solidFill>
-                <a:latin typeface="Segoe UI"/>
-              </a:rPr>
-              <a:t>“Potential flow” = </a:t>
-            </a:r>
-            <a:r>
-              <a:rPr sz="1800" b="1" i="0">
-                <a:solidFill>
-                  <a:srgbClr val="0A5560"/>
-                </a:solidFill>
-                <a:latin typeface="Segoe UI"/>
-              </a:rPr>
-              <a:t>inviscid, irrotational, small (linear)</a:t>
-            </a:r>
-            <a:r>
-              <a:rPr sz="1800" b="0" i="0">
-                <a:solidFill>
-                  <a:srgbClr val="25323A"/>
-                </a:solidFill>
-                <a:latin typeface="Segoe UI"/>
-              </a:rPr>
-              <a:t> waves &amp; motions — the one assumption that sets both the outputs and the limits.</a:t>
+              <a:rPr sz="1300" b="1" i="0">
+                <a:solidFill>
+                  <a:srgbClr val="25323A"/>
+                </a:solidFill>
+                <a:latin typeface="Segoe UI"/>
+              </a:rPr>
+              <a:t>Split that force by phase:</a:t>
             </a:r>
           </a:p>
           <a:p>
             <a:pPr>
-              <a:spcBef>
-                <a:spcPts val="200"/>
-              </a:spcBef>
               <a:spcAft>
-                <a:spcPts val="1200"/>
+                <a:spcPts val="600"/>
               </a:spcAft>
             </a:pPr>
             <a:r>
-              <a:rPr sz="1800">
+              <a:rPr sz="1300">
                 <a:solidFill>
                   <a:srgbClr val="0C8B96"/>
                 </a:solidFill>
                 <a:latin typeface="Segoe UI"/>
               </a:rPr>
-              <a:t>•  </a:t>
-            </a:r>
-            <a:r>
-              <a:rPr sz="1800" b="0" i="0">
-                <a:solidFill>
-                  <a:srgbClr val="25323A"/>
-                </a:solidFill>
-                <a:latin typeface="Segoe UI"/>
-              </a:rPr>
-              <a:t>Key idea — </a:t>
-            </a:r>
-            <a:r>
-              <a:rPr sz="1800" b="1" i="0">
-                <a:solidFill>
-                  <a:srgbClr val="25323A"/>
-                </a:solidFill>
-                <a:latin typeface="Segoe UI"/>
-              </a:rPr>
-              <a:t>superposition</a:t>
-            </a:r>
-            <a:r>
-              <a:rPr sz="1800" b="0" i="0">
-                <a:solidFill>
-                  <a:srgbClr val="25323A"/>
-                </a:solidFill>
-                <a:latin typeface="Segoe UI"/>
-              </a:rPr>
-              <a:t>: the wave-body problem splits into two sub-problems, solved separately and added:</a:t>
-            </a:r>
-          </a:p>
-          <a:p>
-            <a:pPr lvl="1">
-              <a:spcBef>
-                <a:spcPts val="200"/>
-              </a:spcBef>
+              <a:t>    – </a:t>
+            </a:r>
+            <a:r>
+              <a:rPr sz="1300" b="0" i="0">
+                <a:solidFill>
+                  <a:srgbClr val="0A5560"/>
+                </a:solidFill>
+                <a:latin typeface="Segoe UI"/>
+              </a:rPr>
+              <a:t>∝ acceleration  →  added mass A(ω)</a:t>
+            </a:r>
+          </a:p>
+          <a:p>
+            <a:pPr>
               <a:spcAft>
-                <a:spcPts val="1200"/>
+                <a:spcPts val="600"/>
               </a:spcAft>
             </a:pPr>
             <a:r>
-              <a:rPr sz="1800">
+              <a:rPr sz="1300">
+                <a:solidFill>
+                  <a:srgbClr val="0C8B96"/>
+                </a:solidFill>
+                <a:latin typeface="Segoe UI"/>
+              </a:rPr>
+              <a:t>    – </a:t>
+            </a:r>
+            <a:r>
+              <a:rPr sz="1300" b="0" i="0">
                 <a:solidFill>
                   <a:srgbClr val="54636D"/>
                 </a:solidFill>
                 <a:latin typeface="Segoe UI"/>
               </a:rPr>
-              <a:t>      –  </a:t>
-            </a:r>
-            <a:r>
-              <a:rPr sz="1600" b="1" i="0">
-                <a:solidFill>
-                  <a:srgbClr val="0A5560"/>
-                </a:solidFill>
-                <a:latin typeface="Segoe UI"/>
-              </a:rPr>
-              <a:t>Radiation</a:t>
-            </a:r>
-            <a:r>
-              <a:rPr sz="1600" b="0" i="0">
-                <a:solidFill>
-                  <a:srgbClr val="25323A"/>
-                </a:solidFill>
-                <a:latin typeface="Segoe UI"/>
-              </a:rPr>
-              <a:t> — the body wavemaking in still water</a:t>
-            </a:r>
-          </a:p>
-          <a:p>
-            <a:pPr lvl="1">
-              <a:spcBef>
-                <a:spcPts val="200"/>
-              </a:spcBef>
+              <a:t>∝ velocity  →  radiation damping B(ω)</a:t>
+            </a:r>
+          </a:p>
+          <a:p>
+            <a:pPr>
               <a:spcAft>
-                <a:spcPts val="1200"/>
+                <a:spcPts val="600"/>
               </a:spcAft>
             </a:pPr>
             <a:r>
-              <a:rPr sz="1800">
+              <a:rPr sz="1300">
+                <a:solidFill>
+                  <a:srgbClr val="0C8B96"/>
+                </a:solidFill>
+                <a:latin typeface="Segoe UI"/>
+              </a:rPr>
+              <a:t>⇒  </a:t>
+            </a:r>
+            <a:r>
+              <a:rPr sz="1300" b="1" i="0">
+                <a:solidFill>
+                  <a:srgbClr val="25323A"/>
+                </a:solidFill>
+                <a:latin typeface="Segoe UI"/>
+              </a:rPr>
+              <a:t>F_rad = −A(ω)·ẍ − B(ω)·ẋ</a:t>
+            </a:r>
+          </a:p>
+          <a:p>
+            <a:pPr>
+              <a:spcAft>
+                <a:spcPts val="600"/>
+              </a:spcAft>
+            </a:pPr>
+            <a:r>
+              <a:rPr sz="1300">
+                <a:solidFill>
+                  <a:srgbClr val="0C8B96"/>
+                </a:solidFill>
+                <a:latin typeface="Segoe UI"/>
+              </a:rPr>
+              <a:t>⇒  </a:t>
+            </a:r>
+            <a:r>
+              <a:rPr sz="1300" b="1" i="0">
+                <a:solidFill>
+                  <a:srgbClr val="0A5560"/>
+                </a:solidFill>
+                <a:latin typeface="Segoe UI"/>
+              </a:rPr>
+              <a:t>A∞ (ω→∞ limit) = 9.7 kg ≈ 45% of M — mostly the broad plate.</a:t>
+            </a:r>
+          </a:p>
+        </p:txBody>
+      </p:sp>
+      <p:sp>
+        <p:nvSpPr>
+          <p:cNvPr id="9" name="Rectangle 8"/>
+          <p:cNvSpPr/>
+          <p:nvPr/>
+        </p:nvSpPr>
+        <p:spPr>
+          <a:xfrm>
+            <a:off x="6153912" y="1737360"/>
+            <a:ext cx="5532120" cy="3913632"/>
+          </a:xfrm>
+          <a:prstGeom prst="rect">
+            <a:avLst/>
+          </a:prstGeom>
+          <a:solidFill>
+            <a:srgbClr val="F7FAFB"/>
+          </a:solidFill>
+          <a:ln w="15875">
+            <a:solidFill>
+              <a:srgbClr val="0A5560"/>
+            </a:solidFill>
+          </a:ln>
+          <a:effectLst/>
+        </p:spPr>
+        <p:style>
+          <a:lnRef idx="1">
+            <a:schemeClr val="accent1"/>
+          </a:lnRef>
+          <a:fillRef idx="3">
+            <a:schemeClr val="accent1"/>
+          </a:fillRef>
+          <a:effectRef idx="2">
+            <a:schemeClr val="accent1"/>
+          </a:effectRef>
+          <a:fontRef idx="minor">
+            <a:schemeClr val="lt1"/>
+          </a:fontRef>
+        </p:style>
+        <p:txBody>
+          <a:bodyPr rtlCol="0" anchor="ctr"/>
+          <a:lstStyle/>
+          <a:p>
+            <a:pPr algn="ctr"/>
+            <a:endParaRPr/>
+          </a:p>
+        </p:txBody>
+      </p:sp>
+      <p:sp>
+        <p:nvSpPr>
+          <p:cNvPr id="10" name="Rectangle 9"/>
+          <p:cNvSpPr/>
+          <p:nvPr/>
+        </p:nvSpPr>
+        <p:spPr>
+          <a:xfrm>
+            <a:off x="6153912" y="1737360"/>
+            <a:ext cx="5532120" cy="548640"/>
+          </a:xfrm>
+          <a:prstGeom prst="rect">
+            <a:avLst/>
+          </a:prstGeom>
+          <a:solidFill>
+            <a:srgbClr val="0A5560"/>
+          </a:solidFill>
+          <a:ln>
+            <a:noFill/>
+          </a:ln>
+          <a:effectLst/>
+        </p:spPr>
+        <p:style>
+          <a:lnRef idx="1">
+            <a:schemeClr val="accent1"/>
+          </a:lnRef>
+          <a:fillRef idx="3">
+            <a:schemeClr val="accent1"/>
+          </a:fillRef>
+          <a:effectRef idx="2">
+            <a:schemeClr val="accent1"/>
+          </a:effectRef>
+          <a:fontRef idx="minor">
+            <a:schemeClr val="lt1"/>
+          </a:fontRef>
+        </p:style>
+        <p:txBody>
+          <a:bodyPr rtlCol="0" anchor="ctr"/>
+          <a:lstStyle/>
+          <a:p>
+            <a:pPr algn="ctr"/>
+            <a:r>
+              <a:rPr sz="1700" b="1">
+                <a:solidFill>
+                  <a:srgbClr val="FFFFFF"/>
+                </a:solidFill>
+                <a:latin typeface="Segoe UI"/>
+              </a:rPr>
+              <a:t>HOW A SETS THE PERIOD</a:t>
+            </a:r>
+          </a:p>
+        </p:txBody>
+      </p:sp>
+      <p:sp>
+        <p:nvSpPr>
+          <p:cNvPr id="11" name="TextBox 10"/>
+          <p:cNvSpPr txBox="1"/>
+          <p:nvPr/>
+        </p:nvSpPr>
+        <p:spPr>
+          <a:xfrm>
+            <a:off x="6153912" y="2267712"/>
+            <a:ext cx="5532120" cy="310896"/>
+          </a:xfrm>
+          <a:prstGeom prst="rect">
+            <a:avLst/>
+          </a:prstGeom>
+          <a:noFill/>
+        </p:spPr>
+        <p:txBody>
+          <a:bodyPr wrap="none">
+            <a:spAutoFit/>
+          </a:bodyPr>
+          <a:lstStyle/>
+          <a:p>
+            <a:pPr algn="ctr"/>
+            <a:r>
+              <a:rPr sz="1050" i="1">
                 <a:solidFill>
                   <a:srgbClr val="54636D"/>
                 </a:solidFill>
                 <a:latin typeface="Segoe UI"/>
               </a:rPr>
-              <a:t>      –  </a:t>
-            </a:r>
-            <a:r>
-              <a:rPr sz="1600" b="1" i="0">
+              <a:t>extra inertia → longer period</a:t>
+            </a:r>
+          </a:p>
+        </p:txBody>
+      </p:sp>
+      <p:sp>
+        <p:nvSpPr>
+          <p:cNvPr id="12" name="TextBox 11"/>
+          <p:cNvSpPr txBox="1"/>
+          <p:nvPr/>
+        </p:nvSpPr>
+        <p:spPr>
+          <a:xfrm>
+            <a:off x="6409944" y="2670048"/>
+            <a:ext cx="5056631" cy="2862072"/>
+          </a:xfrm>
+          <a:prstGeom prst="rect">
+            <a:avLst/>
+          </a:prstGeom>
+          <a:noFill/>
+        </p:spPr>
+        <p:txBody>
+          <a:bodyPr wrap="square">
+            <a:spAutoFit/>
+          </a:bodyPr>
+          <a:lstStyle/>
+          <a:p>
+            <a:pPr>
+              <a:spcAft>
+                <a:spcPts val="600"/>
+              </a:spcAft>
+            </a:pPr>
+            <a:r>
+              <a:rPr sz="1300">
                 <a:solidFill>
                   <a:srgbClr val="0A5560"/>
                 </a:solidFill>
                 <a:latin typeface="Segoe UI"/>
               </a:rPr>
-              <a:t>Diffraction</a:t>
-            </a:r>
-            <a:r>
-              <a:rPr sz="1600" b="0" i="0">
-                <a:solidFill>
-                  <a:srgbClr val="25323A"/>
-                </a:solidFill>
-                <a:latin typeface="Segoe UI"/>
-              </a:rPr>
-              <a:t> — the body held fixed under incoming waves</a:t>
+              <a:t>•  </a:t>
+            </a:r>
+            <a:r>
+              <a:rPr sz="1300" b="0" i="0">
+                <a:solidFill>
+                  <a:srgbClr val="25323A"/>
+                </a:solidFill>
+                <a:latin typeface="Segoe UI"/>
+              </a:rPr>
+              <a:t>Add A to the mass in the same oscillator:</a:t>
+            </a:r>
+          </a:p>
+          <a:p>
+            <a:pPr>
+              <a:spcAft>
+                <a:spcPts val="600"/>
+              </a:spcAft>
+            </a:pPr>
+            <a:r>
+              <a:rPr sz="1300">
+                <a:solidFill>
+                  <a:srgbClr val="0A5560"/>
+                </a:solidFill>
+                <a:latin typeface="Segoe UI"/>
+              </a:rPr>
+              <a:t>•  </a:t>
+            </a:r>
+            <a:r>
+              <a:rPr sz="1300" b="1" i="0">
+                <a:solidFill>
+                  <a:srgbClr val="0A5560"/>
+                </a:solidFill>
+                <a:latin typeface="Segoe UI"/>
+              </a:rPr>
+              <a:t>T = 2π √( (M + A) / C₃₃ )</a:t>
+            </a:r>
+          </a:p>
+          <a:p>
+            <a:pPr>
+              <a:spcAft>
+                <a:spcPts val="600"/>
+              </a:spcAft>
+            </a:pPr>
+            <a:r>
+              <a:rPr sz="1300">
+                <a:solidFill>
+                  <a:srgbClr val="0A5560"/>
+                </a:solidFill>
+                <a:latin typeface="Segoe UI"/>
+              </a:rPr>
+              <a:t>•  </a:t>
+            </a:r>
+            <a:r>
+              <a:rPr sz="1300" b="0" i="0">
+                <a:solidFill>
+                  <a:srgbClr val="25323A"/>
+                </a:solidFill>
+                <a:latin typeface="Segoe UI"/>
+              </a:rPr>
+              <a:t>Period-stretch factor = √((M+A)/M)</a:t>
+            </a:r>
+          </a:p>
+          <a:p>
+            <a:pPr>
+              <a:spcAft>
+                <a:spcPts val="600"/>
+              </a:spcAft>
+            </a:pPr>
+            <a:r>
+              <a:rPr sz="1300">
+                <a:solidFill>
+                  <a:srgbClr val="0A5560"/>
+                </a:solidFill>
+                <a:latin typeface="Segoe UI"/>
+              </a:rPr>
+              <a:t>•  </a:t>
+            </a:r>
+            <a:r>
+              <a:rPr sz="1300" b="1" i="0">
+                <a:solidFill>
+                  <a:srgbClr val="25323A"/>
+                </a:solidFill>
+                <a:latin typeface="Segoe UI"/>
+              </a:rPr>
+              <a:t>= √(31.2 / 21.5) = 1.205</a:t>
+            </a:r>
+          </a:p>
+          <a:p>
+            <a:pPr>
+              <a:spcAft>
+                <a:spcPts val="600"/>
+              </a:spcAft>
+            </a:pPr>
+            <a:r>
+              <a:rPr sz="1300">
+                <a:solidFill>
+                  <a:srgbClr val="0A5560"/>
+                </a:solidFill>
+                <a:latin typeface="Segoe UI"/>
+              </a:rPr>
+              <a:t>⇒  </a:t>
+            </a:r>
+            <a:r>
+              <a:rPr sz="1300" b="1" i="0">
+                <a:solidFill>
+                  <a:srgbClr val="0A5560"/>
+                </a:solidFill>
+                <a:latin typeface="Segoe UI"/>
+              </a:rPr>
+              <a:t>2.09 s  ×  1.205  =  2.52 s</a:t>
+            </a:r>
+          </a:p>
+          <a:p>
+            <a:pPr>
+              <a:spcAft>
+                <a:spcPts val="600"/>
+              </a:spcAft>
+            </a:pPr>
+            <a:r>
+              <a:rPr sz="1300">
+                <a:solidFill>
+                  <a:srgbClr val="0A5560"/>
+                </a:solidFill>
+                <a:latin typeface="Segoe UI"/>
+              </a:rPr>
+              <a:t>•  </a:t>
+            </a:r>
+            <a:r>
+              <a:rPr sz="1300" b="0" i="1">
+                <a:solidFill>
+                  <a:srgbClr val="25323A"/>
+                </a:solidFill>
+                <a:latin typeface="Segoe UI"/>
+              </a:rPr>
+              <a:t>Heave inertia is ~45% water — A moves the period; C₃₃ is known, so the period is a clean prediction, the damping is the measurement.</a:t>
+            </a:r>
+          </a:p>
+        </p:txBody>
+      </p:sp>
+      <p:sp>
+        <p:nvSpPr>
+          <p:cNvPr id="13" name="Rectangle 12"/>
+          <p:cNvSpPr/>
+          <p:nvPr/>
+        </p:nvSpPr>
+        <p:spPr>
+          <a:xfrm>
+            <a:off x="777240" y="5852160"/>
+            <a:ext cx="10927080" cy="713232"/>
+          </a:xfrm>
+          <a:prstGeom prst="rect">
+            <a:avLst/>
+          </a:prstGeom>
+          <a:solidFill>
+            <a:srgbClr val="EEF6F7"/>
+          </a:solidFill>
+          <a:ln>
+            <a:noFill/>
+          </a:ln>
+          <a:effectLst/>
+        </p:spPr>
+        <p:style>
+          <a:lnRef idx="1">
+            <a:schemeClr val="accent1"/>
+          </a:lnRef>
+          <a:fillRef idx="3">
+            <a:schemeClr val="accent1"/>
+          </a:fillRef>
+          <a:effectRef idx="2">
+            <a:schemeClr val="accent1"/>
+          </a:effectRef>
+          <a:fontRef idx="minor">
+            <a:schemeClr val="lt1"/>
+          </a:fontRef>
+        </p:style>
+        <p:txBody>
+          <a:bodyPr rtlCol="0" anchor="ctr"/>
+          <a:lstStyle/>
+          <a:p>
+            <a:pPr algn="ctr"/>
+            <a:endParaRPr/>
+          </a:p>
+        </p:txBody>
+      </p:sp>
+      <p:sp>
+        <p:nvSpPr>
+          <p:cNvPr id="14" name="TextBox 13"/>
+          <p:cNvSpPr txBox="1"/>
+          <p:nvPr/>
+        </p:nvSpPr>
+        <p:spPr>
+          <a:xfrm>
+            <a:off x="1005840" y="5888736"/>
+            <a:ext cx="10515600" cy="640080"/>
+          </a:xfrm>
+          <a:prstGeom prst="rect">
+            <a:avLst/>
+          </a:prstGeom>
+          <a:noFill/>
+        </p:spPr>
+        <p:txBody>
+          <a:bodyPr wrap="square" anchor="ctr">
+            <a:spAutoFit/>
+          </a:bodyPr>
+          <a:lstStyle/>
+          <a:p>
+            <a:pPr algn="ctr"/>
+            <a:r>
+              <a:rPr sz="1300" b="1">
+                <a:solidFill>
+                  <a:srgbClr val="0A5560"/>
+                </a:solidFill>
+                <a:latin typeface="Segoe UI"/>
+              </a:rPr>
+              <a:t>The field test (2.50 s) lands on the WET period 2.52 s</a:t>
+            </a:r>
+            <a:r>
+              <a:rPr sz="1300" b="0">
+                <a:solidFill>
+                  <a:srgbClr val="25323A"/>
+                </a:solidFill>
+                <a:latin typeface="Segoe UI"/>
+              </a:rPr>
+              <a:t> — not the dry 2.09 s. Direct evidence the entrained-water added mass (~9.7 kg) is real and correctly sized.</a:t>
             </a:r>
           </a:p>
         </p:txBody>
@@ -5737,8 +6973,8 @@
 </p:sld>
 </file>
 
-<file path=ppt/slides/slide3.xml><?xml version="1.0" encoding="utf-8"?>
-<p:sld xmlns:a="http://schemas.openxmlformats.org/drawingml/2006/main" xmlns:p="http://schemas.openxmlformats.org/presentationml/2006/main" xmlns:r="http://schemas.openxmlformats.org/officeDocument/2006/relationships">
+<file path=ppt/slides/slide16.xml><?xml version="1.0" encoding="utf-8"?>
+<p:sld xmlns:a="http://schemas.openxmlformats.org/drawingml/2006/main" xmlns:r="http://schemas.openxmlformats.org/officeDocument/2006/relationships" xmlns:p="http://schemas.openxmlformats.org/presentationml/2006/main">
   <p:cSld>
     <p:bg>
       <p:bgPr>
@@ -5754,7 +6990,14 @@
         <p:cNvGrpSpPr/>
         <p:nvPr/>
       </p:nvGrpSpPr>
-      <p:grpSpPr/>
+      <p:grpSpPr>
+        <a:xfrm>
+          <a:off x="0" y="0"/>
+          <a:ext cx="0" cy="0"/>
+          <a:chOff x="0" y="0"/>
+          <a:chExt cx="0" cy="0"/>
+        </a:xfrm>
+      </p:grpSpPr>
       <p:sp>
         <p:nvSpPr>
           <p:cNvPr id="2" name="TextBox 1"/>
@@ -5784,7 +7027,7 @@
                 </a:solidFill>
                 <a:latin typeface="Segoe UI"/>
               </a:rPr>
-              <a:t>THE MODEL</a:t>
+              <a:t>DESIGN STUDY</a:t>
             </a:r>
           </a:p>
         </p:txBody>
@@ -5818,7 +7061,7 @@
                 </a:solidFill>
                 <a:latin typeface="Segoe UI"/>
               </a:rPr>
-              <a:t>The mesh we solve on</a:t>
+              <a:t>Where to put the heave plate? — pitch performance</a:t>
             </a:r>
           </a:p>
         </p:txBody>
@@ -5864,12 +7107,13 @@
           <a:lstStyle/>
           <a:p>
             <a:pPr algn="ctr"/>
+            <a:endParaRPr/>
           </a:p>
         </p:txBody>
       </p:sp>
       <p:pic>
         <p:nvPicPr>
-          <p:cNvPr id="5" name="Picture 4" descr="OSU_buoy_mesh_capytaine.png"/>
+          <p:cNvPr id="5" name="Picture 4" descr="plate_depth_pitch_study.png"/>
           <p:cNvPicPr>
             <a:picLocks noChangeAspect="1"/>
           </p:cNvPicPr>
@@ -5883,8 +7127,8 @@
         </p:blipFill>
         <p:spPr>
           <a:xfrm>
-            <a:off x="3063240" y="1371600"/>
-            <a:ext cx="6881071" cy="4553712"/>
+            <a:off x="1298448" y="1554480"/>
+            <a:ext cx="9601200" cy="3857359"/>
           </a:xfrm>
           <a:prstGeom prst="rect">
             <a:avLst/>
@@ -5899,8 +7143,8 @@
         </p:nvSpPr>
         <p:spPr>
           <a:xfrm>
-            <a:off x="777240" y="6035040"/>
-            <a:ext cx="10607040" cy="640080"/>
+            <a:off x="777240" y="5943600"/>
+            <a:ext cx="10607040" cy="731520"/>
           </a:xfrm>
           <a:prstGeom prst="rect">
             <a:avLst/>
@@ -5932,6 +7176,7 @@
           <a:lstStyle/>
           <a:p>
             <a:pPr algn="ctr"/>
+            <a:endParaRPr/>
           </a:p>
         </p:txBody>
       </p:sp>
@@ -5943,8 +7188,8 @@
         </p:nvSpPr>
         <p:spPr>
           <a:xfrm>
-            <a:off x="960120" y="6071616"/>
-            <a:ext cx="10241280" cy="566928"/>
+            <a:off x="960120" y="5980176"/>
+            <a:ext cx="10241280" cy="658368"/>
           </a:xfrm>
           <a:prstGeom prst="rect">
             <a:avLst/>
@@ -5959,13 +7204,22 @@
           <a:p>
             <a:pPr algn="ctr"/>
             <a:r>
+              <a:rPr sz="1300" b="1">
+                <a:solidFill>
+                  <a:srgbClr val="0A5560"/>
+                </a:solidFill>
+                <a:latin typeface="Segoe UI"/>
+              </a:rPr>
+              <a:t>Plate depth barely moves pitch</a:t>
+            </a:r>
+            <a:r>
               <a:rPr sz="1300" b="0">
                 <a:solidFill>
                   <a:srgbClr val="25323A"/>
                 </a:solidFill>
                 <a:latin typeface="Segoe UI"/>
               </a:rPr>
-              <a:t>6″ spar cylinder + a </a:t>
+              <a:t> (2.10 → 2.14 s over a 4× lever-arm change) or heave — an axial plate meets pitch EDGE-ON, so its broadside added mass &amp; drag (which dominate heave) hardly engage it.  </a:t>
             </a:r>
             <a:r>
               <a:rPr sz="1300" b="1">
@@ -5974,34 +7228,7 @@
                 </a:solidFill>
                 <a:latin typeface="Segoe UI"/>
               </a:rPr>
-              <a:t>placeholder solid equal-area disc</a:t>
-            </a:r>
-            <a:r>
-              <a:rPr sz="1300" b="0">
-                <a:solidFill>
-                  <a:srgbClr val="25323A"/>
-                </a:solidFill>
-                <a:latin typeface="Segoe UI"/>
-              </a:rPr>
-              <a:t> for the perforated heave plate.  Capytaine meshes the </a:t>
-            </a:r>
-            <a:r>
-              <a:rPr sz="1300" b="1">
-                <a:solidFill>
-                  <a:srgbClr val="25323A"/>
-                </a:solidFill>
-                <a:latin typeface="Segoe UI"/>
-              </a:rPr>
-              <a:t>wetted part (z &lt; 0, 3408 panels)</a:t>
-            </a:r>
-            <a:r>
-              <a:rPr sz="1300" b="0">
-                <a:solidFill>
-                  <a:srgbClr val="25323A"/>
-                </a:solidFill>
-                <a:latin typeface="Segoe UI"/>
-              </a:rPr>
-              <a:t>; the plate’s real hydro comes from the tank.</a:t>
+              <a:t>Deck tilt is a ballast/CoG job, not a plate-depth job.</a:t>
             </a:r>
           </a:p>
         </p:txBody>
@@ -6014,8 +7241,8 @@
 </p:sld>
 </file>
 
-<file path=ppt/slides/slide4.xml><?xml version="1.0" encoding="utf-8"?>
-<p:sld xmlns:a="http://schemas.openxmlformats.org/drawingml/2006/main" xmlns:p="http://schemas.openxmlformats.org/presentationml/2006/main" xmlns:r="http://schemas.openxmlformats.org/officeDocument/2006/relationships">
+<file path=ppt/slides/slide17.xml><?xml version="1.0" encoding="utf-8"?>
+<p:sld xmlns:a="http://schemas.openxmlformats.org/drawingml/2006/main" xmlns:r="http://schemas.openxmlformats.org/officeDocument/2006/relationships" xmlns:p="http://schemas.openxmlformats.org/presentationml/2006/main">
   <p:cSld>
     <p:bg>
       <p:bgPr>
@@ -6031,7 +7258,14 @@
         <p:cNvGrpSpPr/>
         <p:nvPr/>
       </p:nvGrpSpPr>
-      <p:grpSpPr/>
+      <p:grpSpPr>
+        <a:xfrm>
+          <a:off x="0" y="0"/>
+          <a:ext cx="0" cy="0"/>
+          <a:chOff x="0" y="0"/>
+          <a:chExt cx="0" cy="0"/>
+        </a:xfrm>
+      </p:grpSpPr>
       <p:sp>
         <p:nvSpPr>
           <p:cNvPr id="2" name="TextBox 1"/>
@@ -6061,7 +7295,7 @@
                 </a:solidFill>
                 <a:latin typeface="Segoe UI"/>
               </a:rPr>
-              <a:t>OVERVIEW</a:t>
+              <a:t>PLATFORM STUDY</a:t>
             </a:r>
           </a:p>
         </p:txBody>
@@ -6095,7 +7329,7 @@
                 </a:solidFill>
                 <a:latin typeface="Segoe UI"/>
               </a:rPr>
-              <a:t>The two sub-problems — and how they combine</a:t>
+              <a:t>Do the buoy gimbals help the platform? — pin vs rigid</a:t>
             </a:r>
           </a:p>
         </p:txBody>
@@ -6141,33 +7375,255 @@
           <a:lstStyle/>
           <a:p>
             <a:pPr algn="ctr"/>
-          </a:p>
-        </p:txBody>
-      </p:sp>
-      <p:pic>
-        <p:nvPicPr>
-          <p:cNvPr id="5" name="Picture 4" descr="Capytaine_explained.png"/>
-          <p:cNvPicPr>
-            <a:picLocks noChangeAspect="1"/>
-          </p:cNvPicPr>
+            <a:endParaRPr/>
+          </a:p>
+        </p:txBody>
+      </p:sp>
+      <p:sp>
+        <p:nvSpPr>
+          <p:cNvPr id="5" name="TextBox 4"/>
+          <p:cNvSpPr txBox="1"/>
           <p:nvPr/>
-        </p:nvPicPr>
-        <p:blipFill>
-          <a:blip r:embed="rId2"/>
-          <a:stretch>
-            <a:fillRect/>
-          </a:stretch>
-        </p:blipFill>
-        <p:spPr>
-          <a:xfrm>
-            <a:off x="1600200" y="1691640"/>
-            <a:ext cx="7848985" cy="4754880"/>
+        </p:nvSpPr>
+        <p:spPr>
+          <a:xfrm>
+            <a:off x="777240" y="1920240"/>
+            <a:ext cx="10698480" cy="4572000"/>
           </a:xfrm>
           <a:prstGeom prst="rect">
             <a:avLst/>
           </a:prstGeom>
-        </p:spPr>
-      </p:pic>
+          <a:noFill/>
+        </p:spPr>
+        <p:txBody>
+          <a:bodyPr wrap="square">
+            <a:spAutoFit/>
+          </a:bodyPr>
+          <a:lstStyle/>
+          <a:p>
+            <a:pPr>
+              <a:spcBef>
+                <a:spcPts val="200"/>
+              </a:spcBef>
+              <a:spcAft>
+                <a:spcPts val="1200"/>
+              </a:spcAft>
+            </a:pPr>
+            <a:r>
+              <a:rPr sz="1800">
+                <a:solidFill>
+                  <a:srgbClr val="0C8B96"/>
+                </a:solidFill>
+                <a:latin typeface="Segoe UI"/>
+              </a:rPr>
+              <a:t>•  </a:t>
+            </a:r>
+            <a:r>
+              <a:rPr sz="1800" b="0" i="0">
+                <a:solidFill>
+                  <a:srgbClr val="25323A"/>
+                </a:solidFill>
+                <a:latin typeface="Segoe UI"/>
+              </a:rPr>
+              <a:t>Scaling up: 16 buoys on a shared platform — a </a:t>
+            </a:r>
+            <a:r>
+              <a:rPr sz="1800" b="1" i="0">
+                <a:solidFill>
+                  <a:srgbClr val="25323A"/>
+                </a:solidFill>
+                <a:latin typeface="Segoe UI"/>
+              </a:rPr>
+              <a:t>still, level deck</a:t>
+            </a:r>
+            <a:r>
+              <a:rPr sz="1800" b="0" i="0">
+                <a:solidFill>
+                  <a:srgbClr val="25323A"/>
+                </a:solidFill>
+                <a:latin typeface="Segoe UI"/>
+              </a:rPr>
+              <a:t> for rockets / datacenters / hotels.</a:t>
+            </a:r>
+          </a:p>
+          <a:p>
+            <a:pPr>
+              <a:spcBef>
+                <a:spcPts val="200"/>
+              </a:spcBef>
+              <a:spcAft>
+                <a:spcPts val="1200"/>
+              </a:spcAft>
+            </a:pPr>
+            <a:r>
+              <a:rPr sz="1800">
+                <a:solidFill>
+                  <a:srgbClr val="0C8B96"/>
+                </a:solidFill>
+                <a:latin typeface="Segoe UI"/>
+              </a:rPr>
+              <a:t>•  </a:t>
+            </a:r>
+            <a:r>
+              <a:rPr sz="1800" b="0" i="0">
+                <a:solidFill>
+                  <a:srgbClr val="25323A"/>
+                </a:solidFill>
+                <a:latin typeface="Segoe UI"/>
+              </a:rPr>
+              <a:t>Each buoy joins the platform through the </a:t>
+            </a:r>
+            <a:r>
+              <a:rPr sz="1800" b="1" i="0">
+                <a:solidFill>
+                  <a:srgbClr val="25323A"/>
+                </a:solidFill>
+                <a:latin typeface="Segoe UI"/>
+              </a:rPr>
+              <a:t>gimbal at its top</a:t>
+            </a:r>
+            <a:r>
+              <a:rPr sz="1800" b="0" i="0">
+                <a:solidFill>
+                  <a:srgbClr val="25323A"/>
+                </a:solidFill>
+                <a:latin typeface="Segoe UI"/>
+              </a:rPr>
+              <a:t> (a pin: roll/pitch free). Does that beat welding the assembly rigid?</a:t>
+            </a:r>
+          </a:p>
+          <a:p>
+            <a:pPr>
+              <a:spcBef>
+                <a:spcPts val="200"/>
+              </a:spcBef>
+              <a:spcAft>
+                <a:spcPts val="1200"/>
+              </a:spcAft>
+            </a:pPr>
+            <a:r>
+              <a:rPr sz="1800">
+                <a:solidFill>
+                  <a:srgbClr val="0C8B96"/>
+                </a:solidFill>
+                <a:latin typeface="Segoe UI"/>
+              </a:rPr>
+              <a:t>•  </a:t>
+            </a:r>
+            <a:r>
+              <a:rPr sz="1800" b="0" i="0">
+                <a:solidFill>
+                  <a:srgbClr val="25323A"/>
+                </a:solidFill>
+                <a:latin typeface="Segoe UI"/>
+              </a:rPr>
+              <a:t>Same 16-buoy deck, same hydro / drag / geometry — only the joint type changes:</a:t>
+            </a:r>
+          </a:p>
+          <a:p>
+            <a:pPr lvl="1">
+              <a:spcBef>
+                <a:spcPts val="200"/>
+              </a:spcBef>
+              <a:spcAft>
+                <a:spcPts val="1200"/>
+              </a:spcAft>
+            </a:pPr>
+            <a:r>
+              <a:rPr sz="1800">
+                <a:solidFill>
+                  <a:srgbClr val="54636D"/>
+                </a:solidFill>
+                <a:latin typeface="Segoe UI"/>
+              </a:rPr>
+              <a:t>      –  </a:t>
+            </a:r>
+            <a:r>
+              <a:rPr sz="1600" b="1" i="0">
+                <a:solidFill>
+                  <a:srgbClr val="0A5560"/>
+                </a:solidFill>
+                <a:latin typeface="Segoe UI"/>
+              </a:rPr>
+              <a:t>Articulated</a:t>
+            </a:r>
+            <a:r>
+              <a:rPr sz="1600" b="0" i="0">
+                <a:solidFill>
+                  <a:srgbClr val="25323A"/>
+                </a:solidFill>
+                <a:latin typeface="Segoe UI"/>
+              </a:rPr>
+              <a:t> — every joint a pin (the current design)</a:t>
+            </a:r>
+          </a:p>
+          <a:p>
+            <a:pPr lvl="1">
+              <a:spcBef>
+                <a:spcPts val="200"/>
+              </a:spcBef>
+              <a:spcAft>
+                <a:spcPts val="1200"/>
+              </a:spcAft>
+            </a:pPr>
+            <a:r>
+              <a:rPr sz="1800">
+                <a:solidFill>
+                  <a:srgbClr val="54636D"/>
+                </a:solidFill>
+                <a:latin typeface="Segoe UI"/>
+              </a:rPr>
+              <a:t>      –  </a:t>
+            </a:r>
+            <a:r>
+              <a:rPr sz="1600" b="1" i="0">
+                <a:solidFill>
+                  <a:srgbClr val="D1543A"/>
+                </a:solidFill>
+                <a:latin typeface="Segoe UI"/>
+              </a:rPr>
+              <a:t>Whole-chain rigid</a:t>
+            </a:r>
+            <a:r>
+              <a:rPr sz="1600" b="0" i="0">
+                <a:solidFill>
+                  <a:srgbClr val="25323A"/>
+                </a:solidFill>
+                <a:latin typeface="Segoe UI"/>
+              </a:rPr>
+              <a:t> — every joint welded → one rigid raft</a:t>
+            </a:r>
+          </a:p>
+          <a:p>
+            <a:pPr>
+              <a:spcBef>
+                <a:spcPts val="200"/>
+              </a:spcBef>
+              <a:spcAft>
+                <a:spcPts val="1200"/>
+              </a:spcAft>
+            </a:pPr>
+            <a:r>
+              <a:rPr sz="1800">
+                <a:solidFill>
+                  <a:srgbClr val="0C8B96"/>
+                </a:solidFill>
+                <a:latin typeface="Segoe UI"/>
+              </a:rPr>
+              <a:t>•  </a:t>
+            </a:r>
+            <a:r>
+              <a:rPr sz="1800" b="0" i="0">
+                <a:solidFill>
+                  <a:srgbClr val="25323A"/>
+                </a:solidFill>
+                <a:latin typeface="Segoe UI"/>
+              </a:rPr>
+              <a:t>Metrics: deck tilt (pitch), heave, and the moment carried at each buoy→platform joint.</a:t>
+            </a:r>
+          </a:p>
+        </p:txBody>
+      </p:sp>
     </p:spTree>
   </p:cSld>
   <p:clrMapOvr>
@@ -6176,8 +7632,8 @@
 </p:sld>
 </file>
 
-<file path=ppt/slides/slide5.xml><?xml version="1.0" encoding="utf-8"?>
-<p:sld xmlns:a="http://schemas.openxmlformats.org/drawingml/2006/main" xmlns:p="http://schemas.openxmlformats.org/presentationml/2006/main" xmlns:r="http://schemas.openxmlformats.org/officeDocument/2006/relationships">
+<file path=ppt/slides/slide18.xml><?xml version="1.0" encoding="utf-8"?>
+<p:sld xmlns:a="http://schemas.openxmlformats.org/drawingml/2006/main" xmlns:r="http://schemas.openxmlformats.org/officeDocument/2006/relationships" xmlns:p="http://schemas.openxmlformats.org/presentationml/2006/main">
   <p:cSld>
     <p:bg>
       <p:bgPr>
@@ -6193,7 +7649,14 @@
         <p:cNvGrpSpPr/>
         <p:nvPr/>
       </p:nvGrpSpPr>
-      <p:grpSpPr/>
+      <p:grpSpPr>
+        <a:xfrm>
+          <a:off x="0" y="0"/>
+          <a:ext cx="0" cy="0"/>
+          <a:chOff x="0" y="0"/>
+          <a:chExt cx="0" cy="0"/>
+        </a:xfrm>
+      </p:grpSpPr>
       <p:sp>
         <p:nvSpPr>
           <p:cNvPr id="2" name="TextBox 1"/>
@@ -6223,7 +7686,7 @@
                 </a:solidFill>
                 <a:latin typeface="Segoe UI"/>
               </a:rPr>
-              <a:t>SUB-PROBLEM ①</a:t>
+              <a:t>PLATFORM STUDY</a:t>
             </a:r>
           </a:p>
         </p:txBody>
@@ -6257,7 +7720,7 @@
                 </a:solidFill>
                 <a:latin typeface="Segoe UI"/>
               </a:rPr>
-              <a:t>Radiation — “body as a wavemaker”</a:t>
+              <a:t>Pin vs rigid — the pin wins on every axis</a:t>
             </a:r>
           </a:p>
         </p:txBody>
@@ -6303,19 +7766,89 @@
           <a:lstStyle/>
           <a:p>
             <a:pPr algn="ctr"/>
-          </a:p>
-        </p:txBody>
-      </p:sp>
-      <p:sp>
-        <p:nvSpPr>
-          <p:cNvPr id="5" name="TextBox 4"/>
+            <a:endParaRPr/>
+          </a:p>
+        </p:txBody>
+      </p:sp>
+      <p:pic>
+        <p:nvPicPr>
+          <p:cNvPr id="5" name="Picture 4" descr="pvr_verdict.png"/>
+          <p:cNvPicPr>
+            <a:picLocks noChangeAspect="1"/>
+          </p:cNvPicPr>
+          <p:nvPr/>
+        </p:nvPicPr>
+        <p:blipFill>
+          <a:blip r:embed="rId2"/>
+          <a:stretch>
+            <a:fillRect/>
+          </a:stretch>
+        </p:blipFill>
+        <p:spPr>
+          <a:xfrm>
+            <a:off x="640080" y="1783080"/>
+            <a:ext cx="10972800" cy="3614624"/>
+          </a:xfrm>
+          <a:prstGeom prst="rect">
+            <a:avLst/>
+          </a:prstGeom>
+        </p:spPr>
+      </p:pic>
+      <p:sp>
+        <p:nvSpPr>
+          <p:cNvPr id="6" name="Rectangle 5"/>
+          <p:cNvSpPr/>
+          <p:nvPr/>
+        </p:nvSpPr>
+        <p:spPr>
+          <a:xfrm>
+            <a:off x="777240" y="5806440"/>
+            <a:ext cx="10607040" cy="749808"/>
+          </a:xfrm>
+          <a:prstGeom prst="rect">
+            <a:avLst/>
+          </a:prstGeom>
+          <a:solidFill>
+            <a:srgbClr val="EEF6F7"/>
+          </a:solidFill>
+          <a:ln>
+            <a:noFill/>
+          </a:ln>
+          <a:effectLst/>
+        </p:spPr>
+        <p:style>
+          <a:lnRef idx="1">
+            <a:schemeClr val="accent1"/>
+          </a:lnRef>
+          <a:fillRef idx="3">
+            <a:schemeClr val="accent1"/>
+          </a:fillRef>
+          <a:effectRef idx="2">
+            <a:schemeClr val="accent1"/>
+          </a:effectRef>
+          <a:fontRef idx="minor">
+            <a:schemeClr val="lt1"/>
+          </a:fontRef>
+        </p:style>
+        <p:txBody>
+          <a:bodyPr rtlCol="0" anchor="ctr"/>
+          <a:lstStyle/>
+          <a:p>
+            <a:pPr algn="ctr"/>
+            <a:endParaRPr/>
+          </a:p>
+        </p:txBody>
+      </p:sp>
+      <p:sp>
+        <p:nvSpPr>
+          <p:cNvPr id="7" name="TextBox 6"/>
           <p:cNvSpPr txBox="1"/>
           <p:nvPr/>
         </p:nvSpPr>
         <p:spPr>
           <a:xfrm>
-            <a:off x="777240" y="1828800"/>
-            <a:ext cx="10698480" cy="4572000"/>
+            <a:off x="960120" y="5852160"/>
+            <a:ext cx="10241280" cy="658368"/>
           </a:xfrm>
           <a:prstGeom prst="rect">
             <a:avLst/>
@@ -6323,230 +7856,65 @@
           <a:noFill/>
         </p:spPr>
         <p:txBody>
-          <a:bodyPr wrap="square">
+          <a:bodyPr wrap="square" anchor="ctr">
             <a:spAutoFit/>
           </a:bodyPr>
           <a:lstStyle/>
           <a:p>
-            <a:pPr>
-              <a:spcBef>
-                <a:spcPts val="200"/>
-              </a:spcBef>
-              <a:spcAft>
-                <a:spcPts val="1200"/>
-              </a:spcAft>
-            </a:pPr>
-            <a:r>
-              <a:rPr sz="1800">
-                <a:solidFill>
-                  <a:srgbClr val="0C8B96"/>
-                </a:solidFill>
-                <a:latin typeface="Segoe UI"/>
-              </a:rPr>
-              <a:t>•  </a:t>
-            </a:r>
-            <a:r>
-              <a:rPr sz="1800" b="0" i="0">
-                <a:solidFill>
-                  <a:srgbClr val="25323A"/>
-                </a:solidFill>
-                <a:latin typeface="Segoe UI"/>
-              </a:rPr>
-              <a:t>Turn incident waves </a:t>
-            </a:r>
-            <a:r>
-              <a:rPr sz="1800" b="1" i="0">
-                <a:solidFill>
-                  <a:srgbClr val="25323A"/>
-                </a:solidFill>
-                <a:latin typeface="Segoe UI"/>
-              </a:rPr>
-              <a:t>off</a:t>
-            </a:r>
-            <a:r>
-              <a:rPr sz="1800" b="0" i="0">
-                <a:solidFill>
-                  <a:srgbClr val="25323A"/>
-                </a:solidFill>
-                <a:latin typeface="Segoe UI"/>
-              </a:rPr>
-              <a:t>. Force the body to oscillate in still water — one DOF at a time, at each ω.</a:t>
-            </a:r>
-          </a:p>
-          <a:p>
-            <a:pPr>
-              <a:spcBef>
-                <a:spcPts val="200"/>
-              </a:spcBef>
-              <a:spcAft>
-                <a:spcPts val="1200"/>
-              </a:spcAft>
-            </a:pPr>
-            <a:r>
-              <a:rPr sz="1800">
-                <a:solidFill>
-                  <a:srgbClr val="0C8B96"/>
-                </a:solidFill>
-                <a:latin typeface="Segoe UI"/>
-              </a:rPr>
-              <a:t>•  </a:t>
-            </a:r>
-            <a:r>
-              <a:rPr sz="1800" b="0" i="0">
-                <a:solidFill>
-                  <a:srgbClr val="25323A"/>
-                </a:solidFill>
-                <a:latin typeface="Segoe UI"/>
-              </a:rPr>
-              <a:t>It radiates its own waves; the reaction force has two pieces:</a:t>
-            </a:r>
-          </a:p>
-          <a:p>
-            <a:pPr lvl="1">
-              <a:spcBef>
-                <a:spcPts val="200"/>
-              </a:spcBef>
-              <a:spcAft>
-                <a:spcPts val="1200"/>
-              </a:spcAft>
-            </a:pPr>
-            <a:r>
-              <a:rPr sz="1800">
-                <a:solidFill>
-                  <a:srgbClr val="54636D"/>
-                </a:solidFill>
-                <a:latin typeface="Segoe UI"/>
-              </a:rPr>
-              <a:t>      –  </a:t>
-            </a:r>
-            <a:r>
-              <a:rPr sz="1600" b="1" i="0">
+            <a:pPr algn="ctr"/>
+            <a:r>
+              <a:rPr sz="1300" b="1">
                 <a:solidFill>
                   <a:srgbClr val="0A5560"/>
                 </a:solidFill>
                 <a:latin typeface="Segoe UI"/>
               </a:rPr>
-              <a:t>Added mass A(ω)</a:t>
-            </a:r>
-            <a:r>
-              <a:rPr sz="1600" b="0" i="0">
-                <a:solidFill>
-                  <a:srgbClr val="25323A"/>
-                </a:solidFill>
-                <a:latin typeface="Segoe UI"/>
-              </a:rPr>
-              <a:t> — in phase with acceleration (virtual mass of entrained water).</a:t>
-            </a:r>
-          </a:p>
-          <a:p>
-            <a:pPr lvl="1">
-              <a:spcBef>
-                <a:spcPts val="200"/>
-              </a:spcBef>
-              <a:spcAft>
-                <a:spcPts val="1200"/>
-              </a:spcAft>
-            </a:pPr>
-            <a:r>
-              <a:rPr sz="1800">
-                <a:solidFill>
-                  <a:srgbClr val="54636D"/>
-                </a:solidFill>
-                <a:latin typeface="Segoe UI"/>
-              </a:rPr>
-              <a:t>      –  </a:t>
-            </a:r>
-            <a:r>
-              <a:rPr sz="1600" b="1" i="0">
+              <a:t>Same heave</a:t>
+            </a:r>
+            <a:r>
+              <a:rPr sz="1300" b="0">
+                <a:solidFill>
+                  <a:srgbClr val="25323A"/>
+                </a:solidFill>
+                <a:latin typeface="Segoe UI"/>
+              </a:rPr>
+              <a:t>; the rigid raft tilts </a:t>
+            </a:r>
+            <a:r>
+              <a:rPr sz="1300" b="1">
+                <a:solidFill>
+                  <a:srgbClr val="D1543A"/>
+                </a:solidFill>
+                <a:latin typeface="Segoe UI"/>
+              </a:rPr>
+              <a:t>1.3–3.5× more</a:t>
+            </a:r>
+            <a:r>
+              <a:rPr sz="1300" b="0">
+                <a:solidFill>
+                  <a:srgbClr val="25323A"/>
+                </a:solidFill>
+                <a:latin typeface="Segoe UI"/>
+              </a:rPr>
+              <a:t>; and the pin carries </a:t>
+            </a:r>
+            <a:r>
+              <a:rPr sz="1300" b="1">
                 <a:solidFill>
                   <a:srgbClr val="0A5560"/>
                 </a:solidFill>
                 <a:latin typeface="Segoe UI"/>
               </a:rPr>
-              <a:t>Radiation damping B(ω)</a:t>
-            </a:r>
-            <a:r>
-              <a:rPr sz="1600" b="0" i="0">
-                <a:solidFill>
-                  <a:srgbClr val="25323A"/>
-                </a:solidFill>
-                <a:latin typeface="Segoe UI"/>
-              </a:rPr>
-              <a:t> — in phase with velocity (energy carried off as radiated waves).</a:t>
-            </a:r>
-          </a:p>
-          <a:p>
-            <a:pPr>
-              <a:spcBef>
-                <a:spcPts val="200"/>
-              </a:spcBef>
-              <a:spcAft>
-                <a:spcPts val="1200"/>
-              </a:spcAft>
-            </a:pPr>
-            <a:r>
-              <a:rPr sz="1800">
-                <a:solidFill>
-                  <a:srgbClr val="0C8B96"/>
-                </a:solidFill>
-                <a:latin typeface="Segoe UI"/>
-              </a:rPr>
-              <a:t>•  </a:t>
-            </a:r>
-            <a:r>
-              <a:rPr sz="1800" b="0" i="0">
-                <a:solidFill>
-                  <a:srgbClr val="25323A"/>
-                </a:solidFill>
-                <a:latin typeface="Segoe UI"/>
-              </a:rPr>
-              <a:t>6×6 matrices per ω — captures cross-DOF coupling (e.g. heave → pitch).</a:t>
-            </a:r>
-          </a:p>
-          <a:p>
-            <a:pPr>
-              <a:spcBef>
-                <a:spcPts val="200"/>
-              </a:spcBef>
-              <a:spcAft>
-                <a:spcPts val="1200"/>
-              </a:spcAft>
-            </a:pPr>
-            <a:r>
-              <a:rPr sz="1800">
-                <a:solidFill>
-                  <a:srgbClr val="0C8B96"/>
-                </a:solidFill>
-                <a:latin typeface="Segoe UI"/>
-              </a:rPr>
-              <a:t>•  </a:t>
-            </a:r>
-            <a:r>
-              <a:rPr sz="1800" b="0" i="0">
-                <a:solidFill>
-                  <a:srgbClr val="25323A"/>
-                </a:solidFill>
-                <a:latin typeface="Segoe UI"/>
-              </a:rPr>
-              <a:t>→ This run produces the </a:t>
-            </a:r>
-            <a:r>
-              <a:rPr sz="1800" b="1" i="0">
-                <a:solidFill>
-                  <a:srgbClr val="25323A"/>
-                </a:solidFill>
-                <a:latin typeface="Segoe UI"/>
-              </a:rPr>
-              <a:t>A(ω) and B(ω)</a:t>
-            </a:r>
-            <a:r>
-              <a:rPr sz="1800" b="0" i="0">
-                <a:solidFill>
-                  <a:srgbClr val="25323A"/>
-                </a:solidFill>
-                <a:latin typeface="Segoe UI"/>
-              </a:rPr>
-              <a:t> curves.</a:t>
+              <a:t>~zero connection moment</a:t>
+            </a:r>
+            <a:r>
+              <a:rPr sz="1300" b="0">
+                <a:solidFill>
+                  <a:srgbClr val="25323A"/>
+                </a:solidFill>
+                <a:latin typeface="Segoe UI"/>
+              </a:rPr>
+              <a:t> vs the weld's hundreds of N·m/m. The gimbals absorb buoy tilt instead of dumping it into the deck.</a:t>
             </a:r>
           </a:p>
         </p:txBody>
@@ -6559,8 +7927,8 @@
 </p:sld>
 </file>
 
-<file path=ppt/slides/slide6.xml><?xml version="1.0" encoding="utf-8"?>
-<p:sld xmlns:a="http://schemas.openxmlformats.org/drawingml/2006/main" xmlns:p="http://schemas.openxmlformats.org/presentationml/2006/main" xmlns:r="http://schemas.openxmlformats.org/officeDocument/2006/relationships">
+<file path=ppt/slides/slide2.xml><?xml version="1.0" encoding="utf-8"?>
+<p:sld xmlns:a="http://schemas.openxmlformats.org/drawingml/2006/main" xmlns:r="http://schemas.openxmlformats.org/officeDocument/2006/relationships" xmlns:p="http://schemas.openxmlformats.org/presentationml/2006/main">
   <p:cSld>
     <p:bg>
       <p:bgPr>
@@ -6576,7 +7944,14 @@
         <p:cNvGrpSpPr/>
         <p:nvPr/>
       </p:nvGrpSpPr>
-      <p:grpSpPr/>
+      <p:grpSpPr>
+        <a:xfrm>
+          <a:off x="0" y="0"/>
+          <a:ext cx="0" cy="0"/>
+          <a:chOff x="0" y="0"/>
+          <a:chExt cx="0" cy="0"/>
+        </a:xfrm>
+      </p:grpSpPr>
       <p:sp>
         <p:nvSpPr>
           <p:cNvPr id="2" name="TextBox 1"/>
@@ -6606,7 +7981,7 @@
                 </a:solidFill>
                 <a:latin typeface="Segoe UI"/>
               </a:rPr>
-              <a:t>SUB-PROBLEM ②</a:t>
+              <a:t>THE TOOL</a:t>
             </a:r>
           </a:p>
         </p:txBody>
@@ -6640,7 +8015,7 @@
                 </a:solidFill>
                 <a:latin typeface="Segoe UI"/>
               </a:rPr>
-              <a:t>Diffraction — “body as an obstacle”</a:t>
+              <a:t>What Capytaine computes</a:t>
             </a:r>
           </a:p>
         </p:txBody>
@@ -6686,6 +8061,7 @@
           <a:lstStyle/>
           <a:p>
             <a:pPr algn="ctr"/>
+            <a:endParaRPr/>
           </a:p>
         </p:txBody>
       </p:sp>
@@ -6735,7 +8111,7 @@
                 </a:solidFill>
                 <a:latin typeface="Segoe UI"/>
               </a:rPr>
-              <a:t>Hold the body </a:t>
+              <a:t>Boundary-element (panel) solver for </a:t>
             </a:r>
             <a:r>
               <a:rPr sz="1800" b="1" i="0">
@@ -6744,7 +8120,7 @@
                 </a:solidFill>
                 <a:latin typeface="Segoe UI"/>
               </a:rPr>
-              <a:t>fixed</a:t>
+              <a:t>linear potential-flow hydrodynamics</a:t>
             </a:r>
             <a:r>
               <a:rPr sz="1800" b="0" i="0">
@@ -6753,7 +8129,7 @@
                 </a:solidFill>
                 <a:latin typeface="Segoe UI"/>
               </a:rPr>
-              <a:t>. Let incident waves scatter off it.</a:t>
+              <a:t>.</a:t>
             </a:r>
           </a:p>
           <a:p>
@@ -6781,7 +8157,35 @@
                 </a:solidFill>
                 <a:latin typeface="Segoe UI"/>
               </a:rPr>
-              <a:t>Net wave-pressure force on the fixed hull = </a:t>
+              <a:t>In: the wetted hull as a mesh of panels.  Out: the flow (velocity potential φ) around it in regular waves at each frequency ω.</a:t>
+            </a:r>
+          </a:p>
+          <a:p>
+            <a:pPr>
+              <a:spcBef>
+                <a:spcPts val="200"/>
+              </a:spcBef>
+              <a:spcAft>
+                <a:spcPts val="1200"/>
+              </a:spcAft>
+            </a:pPr>
+            <a:r>
+              <a:rPr sz="1800">
+                <a:solidFill>
+                  <a:srgbClr val="0C8B96"/>
+                </a:solidFill>
+                <a:latin typeface="Segoe UI"/>
+              </a:rPr>
+              <a:t>•  </a:t>
+            </a:r>
+            <a:r>
+              <a:rPr sz="1800" b="0" i="0">
+                <a:solidFill>
+                  <a:srgbClr val="25323A"/>
+                </a:solidFill>
+                <a:latin typeface="Segoe UI"/>
+              </a:rPr>
+              <a:t>“Potential flow” = </a:t>
             </a:r>
             <a:r>
               <a:rPr sz="1800" b="1" i="0">
@@ -6790,7 +8194,7 @@
                 </a:solidFill>
                 <a:latin typeface="Segoe UI"/>
               </a:rPr>
-              <a:t>excitation force F_exc(ω, β)</a:t>
+              <a:t>inviscid, irrotational, small (linear)</a:t>
             </a:r>
             <a:r>
               <a:rPr sz="1800" b="0" i="0">
@@ -6799,7 +8203,53 @@
                 </a:solidFill>
                 <a:latin typeface="Segoe UI"/>
               </a:rPr>
-              <a:t>  (β = wave heading):</a:t>
+              <a:t> waves &amp; motions — the one assumption that sets both the outputs and the limits.</a:t>
+            </a:r>
+          </a:p>
+          <a:p>
+            <a:pPr>
+              <a:spcBef>
+                <a:spcPts val="200"/>
+              </a:spcBef>
+              <a:spcAft>
+                <a:spcPts val="1200"/>
+              </a:spcAft>
+            </a:pPr>
+            <a:r>
+              <a:rPr sz="1800">
+                <a:solidFill>
+                  <a:srgbClr val="0C8B96"/>
+                </a:solidFill>
+                <a:latin typeface="Segoe UI"/>
+              </a:rPr>
+              <a:t>•  </a:t>
+            </a:r>
+            <a:r>
+              <a:rPr sz="1800" b="0" i="0">
+                <a:solidFill>
+                  <a:srgbClr val="25323A"/>
+                </a:solidFill>
+                <a:latin typeface="Segoe UI"/>
+              </a:rPr>
+              <a:t>Key idea — </a:t>
+            </a:r>
+            <a:r>
+              <a:rPr sz="1800" b="1" i="0">
+                <a:solidFill>
+                  <a:srgbClr val="25323A"/>
+                </a:solidFill>
+                <a:latin typeface="Segoe UI"/>
+              </a:rPr>
+              <a:t>superposition</a:t>
+            </a:r>
+            <a:r>
+              <a:rPr sz="1800" b="0" i="0">
+                <a:solidFill>
+                  <a:srgbClr val="25323A"/>
+                </a:solidFill>
+                <a:latin typeface="Segoe UI"/>
+              </a:rPr>
+              <a:t>: the wave-body problem splits into two sub-problems, solved separately and added:</a:t>
             </a:r>
           </a:p>
           <a:p>
@@ -6823,11 +8273,11 @@
             <a:r>
               <a:rPr sz="1600" b="1" i="0">
                 <a:solidFill>
-                  <a:srgbClr val="25323A"/>
-                </a:solidFill>
-                <a:latin typeface="Segoe UI"/>
-              </a:rPr>
-              <a:t>Froude–Krylov</a:t>
+                  <a:srgbClr val="0A5560"/>
+                </a:solidFill>
+                <a:latin typeface="Segoe UI"/>
+              </a:rPr>
+              <a:t>Radiation</a:t>
             </a:r>
             <a:r>
               <a:rPr sz="1600" b="0" i="0">
@@ -6836,7 +8286,7 @@
                 </a:solidFill>
                 <a:latin typeface="Segoe UI"/>
               </a:rPr>
-              <a:t> — force from the undisturbed incident-wave pressure.</a:t>
+              <a:t> — the body wavemaking in still water</a:t>
             </a:r>
           </a:p>
           <a:p>
@@ -6860,7 +8310,7 @@
             <a:r>
               <a:rPr sz="1600" b="1" i="0">
                 <a:solidFill>
-                  <a:srgbClr val="25323A"/>
+                  <a:srgbClr val="0A5560"/>
                 </a:solidFill>
                 <a:latin typeface="Segoe UI"/>
               </a:rPr>
@@ -6873,99 +8323,7 @@
                 </a:solidFill>
                 <a:latin typeface="Segoe UI"/>
               </a:rPr>
-              <a:t> — correction because the body scatters the waves.</a:t>
-            </a:r>
-          </a:p>
-          <a:p>
-            <a:pPr>
-              <a:spcBef>
-                <a:spcPts val="200"/>
-              </a:spcBef>
-              <a:spcAft>
-                <a:spcPts val="1200"/>
-              </a:spcAft>
-            </a:pPr>
-            <a:r>
-              <a:rPr sz="1800">
-                <a:solidFill>
-                  <a:srgbClr val="0C8B96"/>
-                </a:solidFill>
-                <a:latin typeface="Segoe UI"/>
-              </a:rPr>
-              <a:t>•  </a:t>
-            </a:r>
-            <a:r>
-              <a:rPr sz="1800" b="0" i="0">
-                <a:solidFill>
-                  <a:srgbClr val="25323A"/>
-                </a:solidFill>
-                <a:latin typeface="Segoe UI"/>
-              </a:rPr>
-              <a:t>→ This run produces the wave forcing </a:t>
-            </a:r>
-            <a:r>
-              <a:rPr sz="1800" b="1" i="0">
-                <a:solidFill>
-                  <a:srgbClr val="25323A"/>
-                </a:solidFill>
-                <a:latin typeface="Segoe UI"/>
-              </a:rPr>
-              <a:t>F_exc(ω)</a:t>
-            </a:r>
-            <a:r>
-              <a:rPr sz="1800" b="0" i="0">
-                <a:solidFill>
-                  <a:srgbClr val="25323A"/>
-                </a:solidFill>
-                <a:latin typeface="Segoe UI"/>
-              </a:rPr>
-              <a:t> that drives the motion.</a:t>
-            </a:r>
-          </a:p>
-          <a:p>
-            <a:pPr>
-              <a:spcBef>
-                <a:spcPts val="200"/>
-              </a:spcBef>
-              <a:spcAft>
-                <a:spcPts val="1200"/>
-              </a:spcAft>
-            </a:pPr>
-            <a:r>
-              <a:rPr sz="1800">
-                <a:solidFill>
-                  <a:srgbClr val="0C8B96"/>
-                </a:solidFill>
-                <a:latin typeface="Segoe UI"/>
-              </a:rPr>
-              <a:t>•  </a:t>
-            </a:r>
-            <a:r>
-              <a:rPr sz="1800" b="0" i="0">
-                <a:solidFill>
-                  <a:srgbClr val="25323A"/>
-                </a:solidFill>
-                <a:latin typeface="Segoe UI"/>
-              </a:rPr>
-              <a:t>Plus the hydrostatic stiffness </a:t>
-            </a:r>
-            <a:r>
-              <a:rPr sz="1800" b="1" i="0">
-                <a:solidFill>
-                  <a:srgbClr val="25323A"/>
-                </a:solidFill>
-                <a:latin typeface="Segoe UI"/>
-              </a:rPr>
-              <a:t>C</a:t>
-            </a:r>
-            <a:r>
-              <a:rPr sz="1800" b="0" i="0">
-                <a:solidFill>
-                  <a:srgbClr val="25323A"/>
-                </a:solidFill>
-                <a:latin typeface="Segoe UI"/>
-              </a:rPr>
-              <a:t> (buoyancy / waterplane) from the geometry.</a:t>
+              <a:t> — the body held fixed under incoming waves</a:t>
             </a:r>
           </a:p>
         </p:txBody>
@@ -6978,8 +8336,8 @@
 </p:sld>
 </file>
 
-<file path=ppt/slides/slide7.xml><?xml version="1.0" encoding="utf-8"?>
-<p:sld xmlns:a="http://schemas.openxmlformats.org/drawingml/2006/main" xmlns:p="http://schemas.openxmlformats.org/presentationml/2006/main" xmlns:r="http://schemas.openxmlformats.org/officeDocument/2006/relationships">
+<file path=ppt/slides/slide3.xml><?xml version="1.0" encoding="utf-8"?>
+<p:sld xmlns:a="http://schemas.openxmlformats.org/drawingml/2006/main" xmlns:r="http://schemas.openxmlformats.org/officeDocument/2006/relationships" xmlns:p="http://schemas.openxmlformats.org/presentationml/2006/main">
   <p:cSld>
     <p:bg>
       <p:bgPr>
@@ -6995,7 +8353,14 @@
         <p:cNvGrpSpPr/>
         <p:nvPr/>
       </p:nvGrpSpPr>
-      <p:grpSpPr/>
+      <p:grpSpPr>
+        <a:xfrm>
+          <a:off x="0" y="0"/>
+          <a:ext cx="0" cy="0"/>
+          <a:chOff x="0" y="0"/>
+          <a:chExt cx="0" cy="0"/>
+        </a:xfrm>
+      </p:grpSpPr>
       <p:sp>
         <p:nvSpPr>
           <p:cNvPr id="2" name="TextBox 1"/>
@@ -7025,7 +8390,7 @@
                 </a:solidFill>
                 <a:latin typeface="Segoe UI"/>
               </a:rPr>
-              <a:t>THE BRIDGE</a:t>
+              <a:t>THE MODEL</a:t>
             </a:r>
           </a:p>
         </p:txBody>
@@ -7059,7 +8424,7 @@
                 </a:solidFill>
                 <a:latin typeface="Segoe UI"/>
               </a:rPr>
-              <a:t>From frequency domain to time-domain simulation</a:t>
+              <a:t>The mesh we solve on</a:t>
             </a:r>
           </a:p>
         </p:txBody>
@@ -7105,78 +8470,34 @@
           <a:lstStyle/>
           <a:p>
             <a:pPr algn="ctr"/>
-          </a:p>
-        </p:txBody>
-      </p:sp>
-      <p:sp>
-        <p:nvSpPr>
-          <p:cNvPr id="5" name="TextBox 4"/>
-          <p:cNvSpPr txBox="1"/>
+            <a:endParaRPr/>
+          </a:p>
+        </p:txBody>
+      </p:sp>
+      <p:pic>
+        <p:nvPicPr>
+          <p:cNvPr id="5" name="Picture 4" descr="OSU_buoy_mesh_capytaine.png"/>
+          <p:cNvPicPr>
+            <a:picLocks noChangeAspect="1"/>
+          </p:cNvPicPr>
           <p:nvPr/>
-        </p:nvSpPr>
-        <p:spPr>
-          <a:xfrm>
-            <a:off x="777240" y="1737360"/>
-            <a:ext cx="10698480" cy="4572000"/>
+        </p:nvPicPr>
+        <p:blipFill>
+          <a:blip r:embed="rId2"/>
+          <a:stretch>
+            <a:fillRect/>
+          </a:stretch>
+        </p:blipFill>
+        <p:spPr>
+          <a:xfrm>
+            <a:off x="3063240" y="1371600"/>
+            <a:ext cx="6881071" cy="4553712"/>
           </a:xfrm>
           <a:prstGeom prst="rect">
             <a:avLst/>
           </a:prstGeom>
-          <a:noFill/>
-        </p:spPr>
-        <p:txBody>
-          <a:bodyPr wrap="square">
-            <a:spAutoFit/>
-          </a:bodyPr>
-          <a:lstStyle/>
-          <a:p>
-            <a:pPr>
-              <a:spcBef>
-                <a:spcPts val="200"/>
-              </a:spcBef>
-              <a:spcAft>
-                <a:spcPts val="600"/>
-              </a:spcAft>
-            </a:pPr>
-            <a:r>
-              <a:rPr sz="1800">
-                <a:solidFill>
-                  <a:srgbClr val="0C8B96"/>
-                </a:solidFill>
-                <a:latin typeface="Segoe UI"/>
-              </a:rPr>
-              <a:t>•  </a:t>
-            </a:r>
-            <a:r>
-              <a:rPr sz="1800" b="0" i="0">
-                <a:solidFill>
-                  <a:srgbClr val="25323A"/>
-                </a:solidFill>
-                <a:latin typeface="Segoe UI"/>
-              </a:rPr>
-              <a:t>A(ω), B(ω) can’t go straight into a time-stepper — a transient contains all frequencies at once. Bridge = the </a:t>
-            </a:r>
-            <a:r>
-              <a:rPr sz="1800" b="1" i="0">
-                <a:solidFill>
-                  <a:srgbClr val="25323A"/>
-                </a:solidFill>
-                <a:latin typeface="Segoe UI"/>
-              </a:rPr>
-              <a:t>Cummins equation</a:t>
-            </a:r>
-            <a:r>
-              <a:rPr sz="1800" b="0" i="0">
-                <a:solidFill>
-                  <a:srgbClr val="25323A"/>
-                </a:solidFill>
-                <a:latin typeface="Segoe UI"/>
-              </a:rPr>
-              <a:t>:</a:t>
-            </a:r>
-          </a:p>
-        </p:txBody>
-      </p:sp>
+        </p:spPr>
+      </p:pic>
       <p:sp>
         <p:nvSpPr>
           <p:cNvPr id="6" name="Rectangle 5"/>
@@ -7185,8 +8506,8 @@
         </p:nvSpPr>
         <p:spPr>
           <a:xfrm>
-            <a:off x="777240" y="2514600"/>
-            <a:ext cx="10607040" cy="1051560"/>
+            <a:off x="777240" y="6035040"/>
+            <a:ext cx="10607040" cy="640080"/>
           </a:xfrm>
           <a:prstGeom prst="rect">
             <a:avLst/>
@@ -7218,6 +8539,7 @@
           <a:lstStyle/>
           <a:p>
             <a:pPr algn="ctr"/>
+            <a:endParaRPr/>
           </a:p>
         </p:txBody>
       </p:sp>
@@ -7229,8 +8551,8 @@
         </p:nvSpPr>
         <p:spPr>
           <a:xfrm>
-            <a:off x="914400" y="2651760"/>
-            <a:ext cx="10332720" cy="822960"/>
+            <a:off x="960120" y="6071616"/>
+            <a:ext cx="10241280" cy="566928"/>
           </a:xfrm>
           <a:prstGeom prst="rect">
             <a:avLst/>
@@ -7245,210 +8567,49 @@
           <a:p>
             <a:pPr algn="ctr"/>
             <a:r>
-              <a:rPr sz="2200" b="1">
-                <a:solidFill>
-                  <a:srgbClr val="25323A"/>
-                </a:solidFill>
-                <a:latin typeface="Cambria Math"/>
-              </a:rPr>
-              <a:t>(M + A∞) ẍ  +  ∫₀ᵗ K(t−τ) ẋ(τ) dτ  +  C x  =  F_exc(t)  +  F_drag(ẋ)</a:t>
-            </a:r>
-          </a:p>
-        </p:txBody>
-      </p:sp>
-      <p:sp>
-        <p:nvSpPr>
-          <p:cNvPr id="8" name="TextBox 7"/>
-          <p:cNvSpPr txBox="1"/>
-          <p:nvPr/>
-        </p:nvSpPr>
-        <p:spPr>
-          <a:xfrm>
-            <a:off x="777240" y="3749039"/>
-            <a:ext cx="10698480" cy="4572000"/>
-          </a:xfrm>
-          <a:prstGeom prst="rect">
-            <a:avLst/>
-          </a:prstGeom>
-          <a:noFill/>
-        </p:spPr>
-        <p:txBody>
-          <a:bodyPr wrap="square">
-            <a:spAutoFit/>
-          </a:bodyPr>
-          <a:lstStyle/>
-          <a:p>
-            <a:pPr>
-              <a:spcBef>
-                <a:spcPts val="200"/>
-              </a:spcBef>
-              <a:spcAft>
-                <a:spcPts val="1000"/>
-              </a:spcAft>
-            </a:pPr>
-            <a:r>
-              <a:rPr sz="1800">
-                <a:solidFill>
-                  <a:srgbClr val="0C8B96"/>
-                </a:solidFill>
-                <a:latin typeface="Segoe UI"/>
-              </a:rPr>
-              <a:t>•  </a:t>
-            </a:r>
-            <a:r>
-              <a:rPr sz="1800" b="1" i="0">
+              <a:rPr sz="1300" b="0">
+                <a:solidFill>
+                  <a:srgbClr val="25323A"/>
+                </a:solidFill>
+                <a:latin typeface="Segoe UI"/>
+              </a:rPr>
+              <a:t>6″ spar cylinder + a </a:t>
+            </a:r>
+            <a:r>
+              <a:rPr sz="1300" b="1">
                 <a:solidFill>
                   <a:srgbClr val="0A5560"/>
                 </a:solidFill>
                 <a:latin typeface="Segoe UI"/>
               </a:rPr>
-              <a:t>A∞</a:t>
-            </a:r>
-            <a:r>
-              <a:rPr sz="1800" b="0" i="0">
-                <a:solidFill>
-                  <a:srgbClr val="25323A"/>
-                </a:solidFill>
-                <a:latin typeface="Segoe UI"/>
-              </a:rPr>
-              <a:t> = infinite-frequency added mass.</a:t>
-            </a:r>
-          </a:p>
-          <a:p>
-            <a:pPr>
-              <a:spcBef>
-                <a:spcPts val="200"/>
-              </a:spcBef>
-              <a:spcAft>
-                <a:spcPts val="1000"/>
-              </a:spcAft>
-            </a:pPr>
-            <a:r>
-              <a:rPr sz="1800">
-                <a:solidFill>
-                  <a:srgbClr val="0C8B96"/>
-                </a:solidFill>
-                <a:latin typeface="Segoe UI"/>
-              </a:rPr>
-              <a:t>•  </a:t>
-            </a:r>
-            <a:r>
-              <a:rPr sz="1800" b="1" i="0">
-                <a:solidFill>
-                  <a:srgbClr val="0A5560"/>
-                </a:solidFill>
-                <a:latin typeface="Segoe UI"/>
-              </a:rPr>
-              <a:t>K(t) = (2/π)∫ B(ω) cos(ωt) dω</a:t>
-            </a:r>
-            <a:r>
-              <a:rPr sz="1800" b="0" i="0">
-                <a:solidFill>
-                  <a:srgbClr val="25323A"/>
-                </a:solidFill>
-                <a:latin typeface="Segoe UI"/>
-              </a:rPr>
-              <a:t> — the retardation kernel = </a:t>
-            </a:r>
-            <a:r>
-              <a:rPr sz="1800" b="0" i="1">
-                <a:solidFill>
-                  <a:srgbClr val="25323A"/>
-                </a:solidFill>
-                <a:latin typeface="Segoe UI"/>
-              </a:rPr>
-              <a:t>fluid memory</a:t>
-            </a:r>
-            <a:r>
-              <a:rPr sz="1800" b="0" i="0">
-                <a:solidFill>
-                  <a:srgbClr val="25323A"/>
-                </a:solidFill>
-                <a:latin typeface="Segoe UI"/>
-              </a:rPr>
-              <a:t> of previously radiated waves.</a:t>
-            </a:r>
-          </a:p>
-          <a:p>
-            <a:pPr>
-              <a:spcBef>
-                <a:spcPts val="200"/>
-              </a:spcBef>
-              <a:spcAft>
-                <a:spcPts val="1000"/>
-              </a:spcAft>
-            </a:pPr>
-            <a:r>
-              <a:rPr sz="1800">
-                <a:solidFill>
-                  <a:srgbClr val="0C8B96"/>
-                </a:solidFill>
-                <a:latin typeface="Segoe UI"/>
-              </a:rPr>
-              <a:t>•  </a:t>
-            </a:r>
-            <a:r>
-              <a:rPr sz="1800" b="0" i="0">
-                <a:solidFill>
-                  <a:srgbClr val="25323A"/>
-                </a:solidFill>
-                <a:latin typeface="Segoe UI"/>
-              </a:rPr>
-              <a:t>Mapping:  </a:t>
-            </a:r>
-            <a:r>
-              <a:rPr sz="1800" b="1" i="0">
-                <a:solidFill>
-                  <a:srgbClr val="25323A"/>
-                </a:solidFill>
-                <a:latin typeface="Segoe UI"/>
-              </a:rPr>
-              <a:t>Radiation → A∞ + K(t)</a:t>
-            </a:r>
-            <a:r>
-              <a:rPr sz="1800" b="0" i="0">
-                <a:solidFill>
-                  <a:srgbClr val="25323A"/>
-                </a:solidFill>
-                <a:latin typeface="Segoe UI"/>
-              </a:rPr>
-              <a:t>   ·   </a:t>
-            </a:r>
-            <a:r>
-              <a:rPr sz="1800" b="1" i="0">
-                <a:solidFill>
-                  <a:srgbClr val="25323A"/>
-                </a:solidFill>
-                <a:latin typeface="Segoe UI"/>
-              </a:rPr>
-              <a:t>Diffraction → F_exc</a:t>
-            </a:r>
-            <a:r>
-              <a:rPr sz="1800" b="0" i="0">
-                <a:solidFill>
-                  <a:srgbClr val="25323A"/>
-                </a:solidFill>
-                <a:latin typeface="Segoe UI"/>
-              </a:rPr>
-              <a:t>   ·   </a:t>
-            </a:r>
-            <a:r>
-              <a:rPr sz="1800" b="1" i="0">
-                <a:solidFill>
-                  <a:srgbClr val="25323A"/>
-                </a:solidFill>
-                <a:latin typeface="Segoe UI"/>
-              </a:rPr>
-              <a:t>Hydrostatics → C</a:t>
-            </a:r>
-            <a:r>
-              <a:rPr sz="1800" b="0" i="0">
-                <a:solidFill>
-                  <a:srgbClr val="25323A"/>
-                </a:solidFill>
-                <a:latin typeface="Segoe UI"/>
-              </a:rPr>
-              <a:t>.  FloatSim integrates this in time.</a:t>
+              <a:t>placeholder solid equal-area disc</a:t>
+            </a:r>
+            <a:r>
+              <a:rPr sz="1300" b="0">
+                <a:solidFill>
+                  <a:srgbClr val="25323A"/>
+                </a:solidFill>
+                <a:latin typeface="Segoe UI"/>
+              </a:rPr>
+              <a:t> for the perforated heave plate.  Capytaine meshes the </a:t>
+            </a:r>
+            <a:r>
+              <a:rPr sz="1300" b="1">
+                <a:solidFill>
+                  <a:srgbClr val="25323A"/>
+                </a:solidFill>
+                <a:latin typeface="Segoe UI"/>
+              </a:rPr>
+              <a:t>wetted part (z &lt; 0, 3408 panels)</a:t>
+            </a:r>
+            <a:r>
+              <a:rPr sz="1300" b="0">
+                <a:solidFill>
+                  <a:srgbClr val="25323A"/>
+                </a:solidFill>
+                <a:latin typeface="Segoe UI"/>
+              </a:rPr>
+              <a:t>; the plate’s real hydro comes from the tank.</a:t>
             </a:r>
           </a:p>
         </p:txBody>
@@ -7461,8 +8622,8 @@
 </p:sld>
 </file>
 
-<file path=ppt/slides/slide8.xml><?xml version="1.0" encoding="utf-8"?>
-<p:sld xmlns:a="http://schemas.openxmlformats.org/drawingml/2006/main" xmlns:p="http://schemas.openxmlformats.org/presentationml/2006/main" xmlns:r="http://schemas.openxmlformats.org/officeDocument/2006/relationships">
+<file path=ppt/slides/slide4.xml><?xml version="1.0" encoding="utf-8"?>
+<p:sld xmlns:a="http://schemas.openxmlformats.org/drawingml/2006/main" xmlns:r="http://schemas.openxmlformats.org/officeDocument/2006/relationships" xmlns:p="http://schemas.openxmlformats.org/presentationml/2006/main">
   <p:cSld>
     <p:bg>
       <p:bgPr>
@@ -7478,7 +8639,14 @@
         <p:cNvGrpSpPr/>
         <p:nvPr/>
       </p:nvGrpSpPr>
-      <p:grpSpPr/>
+      <p:grpSpPr>
+        <a:xfrm>
+          <a:off x="0" y="0"/>
+          <a:ext cx="0" cy="0"/>
+          <a:chOff x="0" y="0"/>
+          <a:chExt cx="0" cy="0"/>
+        </a:xfrm>
+      </p:grpSpPr>
       <p:sp>
         <p:nvSpPr>
           <p:cNvPr id="2" name="TextBox 1"/>
@@ -7508,7 +8676,7 @@
                 </a:solidFill>
                 <a:latin typeface="Segoe UI"/>
               </a:rPr>
-              <a:t>DIVISION OF LABOUR</a:t>
+              <a:t>OVERVIEW</a:t>
             </a:r>
           </a:p>
         </p:txBody>
@@ -7542,7 +8710,7 @@
                 </a:solidFill>
                 <a:latin typeface="Segoe UI"/>
               </a:rPr>
-              <a:t>Who computes what — Capytaine vs FloatSim</a:t>
+              <a:t>The two sub-problems — and how they combine</a:t>
             </a:r>
           </a:p>
         </p:txBody>
@@ -7588,809 +8756,34 @@
           <a:lstStyle/>
           <a:p>
             <a:pPr algn="ctr"/>
-          </a:p>
-        </p:txBody>
-      </p:sp>
-      <p:sp>
-        <p:nvSpPr>
-          <p:cNvPr id="5" name="Rectangle 4"/>
-          <p:cNvSpPr/>
+            <a:endParaRPr/>
+          </a:p>
+        </p:txBody>
+      </p:sp>
+      <p:pic>
+        <p:nvPicPr>
+          <p:cNvPr id="5" name="Picture 4" descr="Capytaine_explained.png"/>
+          <p:cNvPicPr>
+            <a:picLocks noChangeAspect="1"/>
+          </p:cNvPicPr>
           <p:nvPr/>
-        </p:nvSpPr>
-        <p:spPr>
-          <a:xfrm>
-            <a:off x="502920" y="1783080"/>
-            <a:ext cx="5029200" cy="4160520"/>
+        </p:nvPicPr>
+        <p:blipFill>
+          <a:blip r:embed="rId2"/>
+          <a:stretch>
+            <a:fillRect/>
+          </a:stretch>
+        </p:blipFill>
+        <p:spPr>
+          <a:xfrm>
+            <a:off x="1600200" y="1691640"/>
+            <a:ext cx="7848985" cy="4754880"/>
           </a:xfrm>
           <a:prstGeom prst="rect">
             <a:avLst/>
           </a:prstGeom>
-          <a:solidFill>
-            <a:srgbClr val="F7FAFB"/>
-          </a:solidFill>
-          <a:ln w="15875">
-            <a:solidFill>
-              <a:srgbClr val="0C8B96"/>
-            </a:solidFill>
-          </a:ln>
-          <a:effectLst/>
-        </p:spPr>
-        <p:style>
-          <a:lnRef idx="1">
-            <a:schemeClr val="accent1"/>
-          </a:lnRef>
-          <a:fillRef idx="3">
-            <a:schemeClr val="accent1"/>
-          </a:fillRef>
-          <a:effectRef idx="2">
-            <a:schemeClr val="accent1"/>
-          </a:effectRef>
-          <a:fontRef idx="minor">
-            <a:schemeClr val="lt1"/>
-          </a:fontRef>
-        </p:style>
-        <p:txBody>
-          <a:bodyPr rtlCol="0" anchor="ctr"/>
-          <a:lstStyle/>
-          <a:p>
-            <a:pPr algn="ctr"/>
-          </a:p>
-        </p:txBody>
-      </p:sp>
-      <p:sp>
-        <p:nvSpPr>
-          <p:cNvPr id="6" name="Rectangle 5"/>
-          <p:cNvSpPr/>
-          <p:nvPr/>
-        </p:nvSpPr>
-        <p:spPr>
-          <a:xfrm>
-            <a:off x="502920" y="1783080"/>
-            <a:ext cx="5029200" cy="548640"/>
-          </a:xfrm>
-          <a:prstGeom prst="rect">
-            <a:avLst/>
-          </a:prstGeom>
-          <a:solidFill>
-            <a:srgbClr val="0C8B96"/>
-          </a:solidFill>
-          <a:ln>
-            <a:noFill/>
-          </a:ln>
-          <a:effectLst/>
-        </p:spPr>
-        <p:style>
-          <a:lnRef idx="1">
-            <a:schemeClr val="accent1"/>
-          </a:lnRef>
-          <a:fillRef idx="3">
-            <a:schemeClr val="accent1"/>
-          </a:fillRef>
-          <a:effectRef idx="2">
-            <a:schemeClr val="accent1"/>
-          </a:effectRef>
-          <a:fontRef idx="minor">
-            <a:schemeClr val="lt1"/>
-          </a:fontRef>
-        </p:style>
-        <p:txBody>
-          <a:bodyPr rtlCol="0" anchor="ctr"/>
-          <a:lstStyle/>
-          <a:p>
-            <a:pPr algn="ctr"/>
-            <a:r>
-              <a:rPr sz="1700" b="1">
-                <a:solidFill>
-                  <a:srgbClr val="FFFFFF"/>
-                </a:solidFill>
-                <a:latin typeface="Segoe UI"/>
-              </a:rPr>
-              <a:t>CAPYTAINE</a:t>
-            </a:r>
-          </a:p>
-        </p:txBody>
-      </p:sp>
-      <p:sp>
-        <p:nvSpPr>
-          <p:cNvPr id="7" name="TextBox 6"/>
-          <p:cNvSpPr txBox="1"/>
-          <p:nvPr/>
-        </p:nvSpPr>
-        <p:spPr>
-          <a:xfrm>
-            <a:off x="502920" y="2313432"/>
-            <a:ext cx="5029200" cy="310896"/>
-          </a:xfrm>
-          <a:prstGeom prst="rect">
-            <a:avLst/>
-          </a:prstGeom>
-          <a:noFill/>
-        </p:spPr>
-        <p:txBody>
-          <a:bodyPr wrap="none">
-            <a:spAutoFit/>
-          </a:bodyPr>
-          <a:lstStyle/>
-          <a:p>
-            <a:pPr algn="ctr"/>
-            <a:r>
-              <a:rPr sz="1050" i="1">
-                <a:solidFill>
-                  <a:srgbClr val="54636D"/>
-                </a:solidFill>
-                <a:latin typeface="Segoe UI"/>
-              </a:rPr>
-              <a:t>run once · frequency domain · linear + inviscid</a:t>
-            </a:r>
-          </a:p>
-        </p:txBody>
-      </p:sp>
-      <p:sp>
-        <p:nvSpPr>
-          <p:cNvPr id="8" name="TextBox 7"/>
-          <p:cNvSpPr txBox="1"/>
-          <p:nvPr/>
-        </p:nvSpPr>
-        <p:spPr>
-          <a:xfrm>
-            <a:off x="758952" y="2715768"/>
-            <a:ext cx="4553712" cy="3108960"/>
-          </a:xfrm>
-          <a:prstGeom prst="rect">
-            <a:avLst/>
-          </a:prstGeom>
-          <a:noFill/>
-        </p:spPr>
-        <p:txBody>
-          <a:bodyPr wrap="square">
-            <a:spAutoFit/>
-          </a:bodyPr>
-          <a:lstStyle/>
-          <a:p>
-            <a:pPr>
-              <a:spcAft>
-                <a:spcPts val="600"/>
-              </a:spcAft>
-            </a:pPr>
-            <a:r>
-              <a:rPr sz="1300">
-                <a:solidFill>
-                  <a:srgbClr val="0C8B96"/>
-                </a:solidFill>
-                <a:latin typeface="Segoe UI"/>
-              </a:rPr>
-              <a:t>•  </a:t>
-            </a:r>
-            <a:r>
-              <a:rPr sz="1300" b="0" i="0">
-                <a:solidFill>
-                  <a:srgbClr val="25323A"/>
-                </a:solidFill>
-                <a:latin typeface="Segoe UI"/>
-              </a:rPr>
-              <a:t>Panel mesh of the wetted hull</a:t>
-            </a:r>
-          </a:p>
-          <a:p>
-            <a:pPr>
-              <a:spcAft>
-                <a:spcPts val="600"/>
-              </a:spcAft>
-            </a:pPr>
-            <a:r>
-              <a:rPr sz="1300">
-                <a:solidFill>
-                  <a:srgbClr val="0C8B96"/>
-                </a:solidFill>
-                <a:latin typeface="Segoe UI"/>
-              </a:rPr>
-              <a:t>•  </a:t>
-            </a:r>
-            <a:r>
-              <a:rPr sz="1300" b="0" i="0">
-                <a:solidFill>
-                  <a:srgbClr val="25323A"/>
-                </a:solidFill>
-                <a:latin typeface="Segoe UI"/>
-              </a:rPr>
-              <a:t>Radiation problem → A(ω), A∞ and B(ω)</a:t>
-            </a:r>
-          </a:p>
-          <a:p>
-            <a:pPr>
-              <a:spcAft>
-                <a:spcPts val="600"/>
-              </a:spcAft>
-            </a:pPr>
-            <a:r>
-              <a:rPr sz="1300">
-                <a:solidFill>
-                  <a:srgbClr val="0C8B96"/>
-                </a:solidFill>
-                <a:latin typeface="Segoe UI"/>
-              </a:rPr>
-              <a:t>•  </a:t>
-            </a:r>
-            <a:r>
-              <a:rPr sz="1300" b="0" i="0">
-                <a:solidFill>
-                  <a:srgbClr val="25323A"/>
-                </a:solidFill>
-                <a:latin typeface="Segoe UI"/>
-              </a:rPr>
-              <a:t>Diffraction problem → F_exc(ω, β)</a:t>
-            </a:r>
-          </a:p>
-          <a:p>
-            <a:pPr>
-              <a:spcAft>
-                <a:spcPts val="600"/>
-              </a:spcAft>
-            </a:pPr>
-            <a:r>
-              <a:rPr sz="1300">
-                <a:solidFill>
-                  <a:srgbClr val="0C8B96"/>
-                </a:solidFill>
-                <a:latin typeface="Segoe UI"/>
-              </a:rPr>
-              <a:t>•  </a:t>
-            </a:r>
-            <a:r>
-              <a:rPr sz="1300" b="0" i="0">
-                <a:solidFill>
-                  <a:srgbClr val="25323A"/>
-                </a:solidFill>
-                <a:latin typeface="Segoe UI"/>
-              </a:rPr>
-              <a:t>Hydrostatic stiffness C (buoyancy)</a:t>
-            </a:r>
-          </a:p>
-          <a:p>
-            <a:pPr>
-              <a:spcAft>
-                <a:spcPts val="200"/>
-              </a:spcAft>
-            </a:pPr>
-            <a:r>
-              <a:rPr sz="1300">
-                <a:solidFill>
-                  <a:srgbClr val="0C8B96"/>
-                </a:solidFill>
-                <a:latin typeface="Segoe UI"/>
-              </a:rPr>
-              <a:t>⇒  </a:t>
-            </a:r>
-            <a:r>
-              <a:rPr sz="1300" b="1" i="0">
-                <a:solidFill>
-                  <a:srgbClr val="0A5560"/>
-                </a:solidFill>
-                <a:latin typeface="Segoe UI"/>
-              </a:rPr>
-              <a:t>Outputs: hydrodynamic coefficients</a:t>
-            </a:r>
-          </a:p>
-        </p:txBody>
-      </p:sp>
-      <p:sp>
-        <p:nvSpPr>
-          <p:cNvPr id="9" name="Rectangle 8"/>
-          <p:cNvSpPr/>
-          <p:nvPr/>
-        </p:nvSpPr>
-        <p:spPr>
-          <a:xfrm>
-            <a:off x="6656832" y="1783080"/>
-            <a:ext cx="5029200" cy="4160520"/>
-          </a:xfrm>
-          <a:prstGeom prst="rect">
-            <a:avLst/>
-          </a:prstGeom>
-          <a:solidFill>
-            <a:srgbClr val="F7FAFB"/>
-          </a:solidFill>
-          <a:ln w="15875">
-            <a:solidFill>
-              <a:srgbClr val="0A5560"/>
-            </a:solidFill>
-          </a:ln>
-          <a:effectLst/>
-        </p:spPr>
-        <p:style>
-          <a:lnRef idx="1">
-            <a:schemeClr val="accent1"/>
-          </a:lnRef>
-          <a:fillRef idx="3">
-            <a:schemeClr val="accent1"/>
-          </a:fillRef>
-          <a:effectRef idx="2">
-            <a:schemeClr val="accent1"/>
-          </a:effectRef>
-          <a:fontRef idx="minor">
-            <a:schemeClr val="lt1"/>
-          </a:fontRef>
-        </p:style>
-        <p:txBody>
-          <a:bodyPr rtlCol="0" anchor="ctr"/>
-          <a:lstStyle/>
-          <a:p>
-            <a:pPr algn="ctr"/>
-          </a:p>
-        </p:txBody>
-      </p:sp>
-      <p:sp>
-        <p:nvSpPr>
-          <p:cNvPr id="10" name="Rectangle 9"/>
-          <p:cNvSpPr/>
-          <p:nvPr/>
-        </p:nvSpPr>
-        <p:spPr>
-          <a:xfrm>
-            <a:off x="6656832" y="1783080"/>
-            <a:ext cx="5029200" cy="548640"/>
-          </a:xfrm>
-          <a:prstGeom prst="rect">
-            <a:avLst/>
-          </a:prstGeom>
-          <a:solidFill>
-            <a:srgbClr val="0A5560"/>
-          </a:solidFill>
-          <a:ln>
-            <a:noFill/>
-          </a:ln>
-          <a:effectLst/>
-        </p:spPr>
-        <p:style>
-          <a:lnRef idx="1">
-            <a:schemeClr val="accent1"/>
-          </a:lnRef>
-          <a:fillRef idx="3">
-            <a:schemeClr val="accent1"/>
-          </a:fillRef>
-          <a:effectRef idx="2">
-            <a:schemeClr val="accent1"/>
-          </a:effectRef>
-          <a:fontRef idx="minor">
-            <a:schemeClr val="lt1"/>
-          </a:fontRef>
-        </p:style>
-        <p:txBody>
-          <a:bodyPr rtlCol="0" anchor="ctr"/>
-          <a:lstStyle/>
-          <a:p>
-            <a:pPr algn="ctr"/>
-            <a:r>
-              <a:rPr sz="1700" b="1">
-                <a:solidFill>
-                  <a:srgbClr val="FFFFFF"/>
-                </a:solidFill>
-                <a:latin typeface="Segoe UI"/>
-              </a:rPr>
-              <a:t>FLOATSIM</a:t>
-            </a:r>
-          </a:p>
-        </p:txBody>
-      </p:sp>
-      <p:sp>
-        <p:nvSpPr>
-          <p:cNvPr id="11" name="TextBox 10"/>
-          <p:cNvSpPr txBox="1"/>
-          <p:nvPr/>
-        </p:nvSpPr>
-        <p:spPr>
-          <a:xfrm>
-            <a:off x="6656832" y="2313432"/>
-            <a:ext cx="5029200" cy="310896"/>
-          </a:xfrm>
-          <a:prstGeom prst="rect">
-            <a:avLst/>
-          </a:prstGeom>
-          <a:noFill/>
-        </p:spPr>
-        <p:txBody>
-          <a:bodyPr wrap="none">
-            <a:spAutoFit/>
-          </a:bodyPr>
-          <a:lstStyle/>
-          <a:p>
-            <a:pPr algn="ctr"/>
-            <a:r>
-              <a:rPr sz="1050" i="1">
-                <a:solidFill>
-                  <a:srgbClr val="54636D"/>
-                </a:solidFill>
-                <a:latin typeface="Segoe UI"/>
-              </a:rPr>
-              <a:t>per simulation · time domain</a:t>
-            </a:r>
-          </a:p>
-        </p:txBody>
-      </p:sp>
-      <p:sp>
-        <p:nvSpPr>
-          <p:cNvPr id="12" name="TextBox 11"/>
-          <p:cNvSpPr txBox="1"/>
-          <p:nvPr/>
-        </p:nvSpPr>
-        <p:spPr>
-          <a:xfrm>
-            <a:off x="6912864" y="2715768"/>
-            <a:ext cx="4553712" cy="3108960"/>
-          </a:xfrm>
-          <a:prstGeom prst="rect">
-            <a:avLst/>
-          </a:prstGeom>
-          <a:noFill/>
-        </p:spPr>
-        <p:txBody>
-          <a:bodyPr wrap="square">
-            <a:spAutoFit/>
-          </a:bodyPr>
-          <a:lstStyle/>
-          <a:p>
-            <a:pPr>
-              <a:spcAft>
-                <a:spcPts val="600"/>
-              </a:spcAft>
-            </a:pPr>
-            <a:r>
-              <a:rPr sz="1300">
-                <a:solidFill>
-                  <a:srgbClr val="0A5560"/>
-                </a:solidFill>
-                <a:latin typeface="Segoe UI"/>
-              </a:rPr>
-              <a:t>•  </a:t>
-            </a:r>
-            <a:r>
-              <a:rPr sz="1300" b="0" i="0">
-                <a:solidFill>
-                  <a:srgbClr val="25323A"/>
-                </a:solidFill>
-                <a:latin typeface="Segoe UI"/>
-              </a:rPr>
-              <a:t>Retardation kernel K(t) from B(ω)</a:t>
-            </a:r>
-          </a:p>
-          <a:p>
-            <a:pPr>
-              <a:spcAft>
-                <a:spcPts val="600"/>
-              </a:spcAft>
-            </a:pPr>
-            <a:r>
-              <a:rPr sz="1300">
-                <a:solidFill>
-                  <a:srgbClr val="0A5560"/>
-                </a:solidFill>
-                <a:latin typeface="Segoe UI"/>
-              </a:rPr>
-              <a:t>•  </a:t>
-            </a:r>
-            <a:r>
-              <a:rPr sz="1300" b="0" i="0">
-                <a:solidFill>
-                  <a:srgbClr val="25323A"/>
-                </a:solidFill>
-                <a:latin typeface="Segoe UI"/>
-              </a:rPr>
-              <a:t>Body mass &amp; inertia M (structure)</a:t>
-            </a:r>
-          </a:p>
-          <a:p>
-            <a:pPr>
-              <a:spcAft>
-                <a:spcPts val="600"/>
-              </a:spcAft>
-            </a:pPr>
-            <a:r>
-              <a:rPr sz="1300">
-                <a:solidFill>
-                  <a:srgbClr val="0A5560"/>
-                </a:solidFill>
-                <a:latin typeface="Segoe UI"/>
-              </a:rPr>
-              <a:t>•  </a:t>
-            </a:r>
-            <a:r>
-              <a:rPr sz="1300" b="0" i="0">
-                <a:solidFill>
-                  <a:srgbClr val="25323A"/>
-                </a:solidFill>
-                <a:latin typeface="Segoe UI"/>
-              </a:rPr>
-              <a:t>Assemble (M+A∞), C + gravity m·g·z_G</a:t>
-            </a:r>
-          </a:p>
-          <a:p>
-            <a:pPr>
-              <a:spcAft>
-                <a:spcPts val="600"/>
-              </a:spcAft>
-            </a:pPr>
-            <a:r>
-              <a:rPr sz="1300">
-                <a:solidFill>
-                  <a:srgbClr val="0A5560"/>
-                </a:solidFill>
-                <a:latin typeface="Segoe UI"/>
-              </a:rPr>
-              <a:t>•  </a:t>
-            </a:r>
-            <a:r>
-              <a:rPr sz="1300" b="0" i="0">
-                <a:solidFill>
-                  <a:srgbClr val="D1543A"/>
-                </a:solidFill>
-                <a:latin typeface="Segoe UI"/>
-              </a:rPr>
-              <a:t>Viscous Morison drag F_drag — not in BEM</a:t>
-            </a:r>
-          </a:p>
-          <a:p>
-            <a:pPr>
-              <a:spcAft>
-                <a:spcPts val="600"/>
-              </a:spcAft>
-            </a:pPr>
-            <a:r>
-              <a:rPr sz="1300">
-                <a:solidFill>
-                  <a:srgbClr val="0A5560"/>
-                </a:solidFill>
-                <a:latin typeface="Segoe UI"/>
-              </a:rPr>
-              <a:t>•  </a:t>
-            </a:r>
-            <a:r>
-              <a:rPr sz="1300" b="0" i="0">
-                <a:solidFill>
-                  <a:srgbClr val="25323A"/>
-                </a:solidFill>
-                <a:latin typeface="Segoe UI"/>
-              </a:rPr>
-              <a:t>Static equilibrium solve</a:t>
-            </a:r>
-          </a:p>
-          <a:p>
-            <a:pPr>
-              <a:spcAft>
-                <a:spcPts val="600"/>
-              </a:spcAft>
-            </a:pPr>
-            <a:r>
-              <a:rPr sz="1300">
-                <a:solidFill>
-                  <a:srgbClr val="0A5560"/>
-                </a:solidFill>
-                <a:latin typeface="Segoe UI"/>
-              </a:rPr>
-              <a:t>•  </a:t>
-            </a:r>
-            <a:r>
-              <a:rPr sz="1300" b="0" i="0">
-                <a:solidFill>
-                  <a:srgbClr val="25323A"/>
-                </a:solidFill>
-                <a:latin typeface="Segoe UI"/>
-              </a:rPr>
-              <a:t>Time-integrate the Cummins EoM → x(t)</a:t>
-            </a:r>
-          </a:p>
-          <a:p>
-            <a:pPr>
-              <a:spcAft>
-                <a:spcPts val="200"/>
-              </a:spcAft>
-            </a:pPr>
-            <a:r>
-              <a:rPr sz="1300">
-                <a:solidFill>
-                  <a:srgbClr val="0A5560"/>
-                </a:solidFill>
-                <a:latin typeface="Segoe UI"/>
-              </a:rPr>
-              <a:t>⇒  </a:t>
-            </a:r>
-            <a:r>
-              <a:rPr sz="1300" b="1" i="0">
-                <a:solidFill>
-                  <a:srgbClr val="0A5560"/>
-                </a:solidFill>
-                <a:latin typeface="Segoe UI"/>
-              </a:rPr>
-              <a:t>Output: decay period T &amp; damping ζ</a:t>
-            </a:r>
-          </a:p>
-        </p:txBody>
-      </p:sp>
-      <p:sp>
-        <p:nvSpPr>
-          <p:cNvPr id="13" name="Right Arrow 12"/>
-          <p:cNvSpPr/>
-          <p:nvPr/>
-        </p:nvSpPr>
-        <p:spPr>
-          <a:xfrm>
-            <a:off x="5596128" y="3246120"/>
-            <a:ext cx="932688" cy="457200"/>
-          </a:xfrm>
-          <a:prstGeom prst="rightArrow">
-            <a:avLst/>
-          </a:prstGeom>
-          <a:solidFill>
-            <a:srgbClr val="54636D"/>
-          </a:solidFill>
-          <a:ln>
-            <a:noFill/>
-          </a:ln>
-          <a:effectLst/>
-        </p:spPr>
-        <p:style>
-          <a:lnRef idx="1">
-            <a:schemeClr val="accent1"/>
-          </a:lnRef>
-          <a:fillRef idx="3">
-            <a:schemeClr val="accent1"/>
-          </a:fillRef>
-          <a:effectRef idx="2">
-            <a:schemeClr val="accent1"/>
-          </a:effectRef>
-          <a:fontRef idx="minor">
-            <a:schemeClr val="lt1"/>
-          </a:fontRef>
-        </p:style>
-        <p:txBody>
-          <a:bodyPr rtlCol="0" anchor="ctr"/>
-          <a:lstStyle/>
-          <a:p>
-            <a:pPr algn="ctr"/>
-          </a:p>
-        </p:txBody>
-      </p:sp>
-      <p:sp>
-        <p:nvSpPr>
-          <p:cNvPr id="14" name="TextBox 13"/>
-          <p:cNvSpPr txBox="1"/>
-          <p:nvPr/>
-        </p:nvSpPr>
-        <p:spPr>
-          <a:xfrm>
-            <a:off x="5257800" y="3730752"/>
-            <a:ext cx="1600200" cy="640080"/>
-          </a:xfrm>
-          <a:prstGeom prst="rect">
-            <a:avLst/>
-          </a:prstGeom>
-          <a:noFill/>
-        </p:spPr>
-        <p:txBody>
-          <a:bodyPr wrap="none">
-            <a:spAutoFit/>
-          </a:bodyPr>
-          <a:lstStyle/>
-          <a:p>
-            <a:pPr algn="ctr"/>
-            <a:r>
-              <a:rPr sz="900">
-                <a:solidFill>
-                  <a:srgbClr val="54636D"/>
-                </a:solidFill>
-                <a:latin typeface="Consolas"/>
-              </a:rPr>
-              <a:t>capytaine_
-osu_buoy.nc</a:t>
-            </a:r>
-          </a:p>
-        </p:txBody>
-      </p:sp>
-      <p:sp>
-        <p:nvSpPr>
-          <p:cNvPr id="15" name="Rectangle 14"/>
-          <p:cNvSpPr/>
-          <p:nvPr/>
-        </p:nvSpPr>
-        <p:spPr>
-          <a:xfrm>
-            <a:off x="777240" y="6108192"/>
-            <a:ext cx="10927080" cy="566928"/>
-          </a:xfrm>
-          <a:prstGeom prst="rect">
-            <a:avLst/>
-          </a:prstGeom>
-          <a:solidFill>
-            <a:srgbClr val="EEF6F7"/>
-          </a:solidFill>
-          <a:ln>
-            <a:noFill/>
-          </a:ln>
-          <a:effectLst/>
-        </p:spPr>
-        <p:style>
-          <a:lnRef idx="1">
-            <a:schemeClr val="accent1"/>
-          </a:lnRef>
-          <a:fillRef idx="3">
-            <a:schemeClr val="accent1"/>
-          </a:fillRef>
-          <a:effectRef idx="2">
-            <a:schemeClr val="accent1"/>
-          </a:effectRef>
-          <a:fontRef idx="minor">
-            <a:schemeClr val="lt1"/>
-          </a:fontRef>
-        </p:style>
-        <p:txBody>
-          <a:bodyPr rtlCol="0" anchor="ctr"/>
-          <a:lstStyle/>
-          <a:p>
-            <a:pPr algn="ctr"/>
-          </a:p>
-        </p:txBody>
-      </p:sp>
-      <p:sp>
-        <p:nvSpPr>
-          <p:cNvPr id="16" name="TextBox 15"/>
-          <p:cNvSpPr txBox="1"/>
-          <p:nvPr/>
-        </p:nvSpPr>
-        <p:spPr>
-          <a:xfrm>
-            <a:off x="960120" y="6144768"/>
-            <a:ext cx="10515600" cy="493776"/>
-          </a:xfrm>
-          <a:prstGeom prst="rect">
-            <a:avLst/>
-          </a:prstGeom>
-          <a:noFill/>
-        </p:spPr>
-        <p:txBody>
-          <a:bodyPr wrap="square" anchor="ctr">
-            <a:spAutoFit/>
-          </a:bodyPr>
-          <a:lstStyle/>
-          <a:p>
-            <a:pPr algn="ctr"/>
-            <a:r>
-              <a:rPr sz="1250" b="1">
-                <a:solidFill>
-                  <a:srgbClr val="0A5560"/>
-                </a:solidFill>
-                <a:latin typeface="Segoe UI"/>
-              </a:rPr>
-              <a:t>Capytaine = the hydrodynamic coefficients</a:t>
-            </a:r>
-            <a:r>
-              <a:rPr sz="1250" b="0">
-                <a:solidFill>
-                  <a:srgbClr val="25323A"/>
-                </a:solidFill>
-                <a:latin typeface="Segoe UI"/>
-              </a:rPr>
-              <a:t>   ·   </a:t>
-            </a:r>
-            <a:r>
-              <a:rPr sz="1250" b="1">
-                <a:solidFill>
-                  <a:srgbClr val="0A5560"/>
-                </a:solidFill>
-                <a:latin typeface="Segoe UI"/>
-              </a:rPr>
-              <a:t>FloatSim = the equation of motion in time</a:t>
-            </a:r>
-            <a:r>
-              <a:rPr sz="1250" b="0">
-                <a:solidFill>
-                  <a:srgbClr val="25323A"/>
-                </a:solidFill>
-                <a:latin typeface="Segoe UI"/>
-              </a:rPr>
-              <a:t>  (adds mass, viscous drag, mooring, equilibrium; converts B(ω)→K(t)).  Decay T and ζ are a FloatSim output.</a:t>
-            </a:r>
-          </a:p>
-        </p:txBody>
-      </p:sp>
+        </p:spPr>
+      </p:pic>
     </p:spTree>
   </p:cSld>
   <p:clrMapOvr>
@@ -8399,8 +8792,8 @@
 </p:sld>
 </file>
 
-<file path=ppt/slides/slide9.xml><?xml version="1.0" encoding="utf-8"?>
-<p:sld xmlns:a="http://schemas.openxmlformats.org/drawingml/2006/main" xmlns:p="http://schemas.openxmlformats.org/presentationml/2006/main" xmlns:r="http://schemas.openxmlformats.org/officeDocument/2006/relationships">
+<file path=ppt/slides/slide5.xml><?xml version="1.0" encoding="utf-8"?>
+<p:sld xmlns:a="http://schemas.openxmlformats.org/drawingml/2006/main" xmlns:r="http://schemas.openxmlformats.org/officeDocument/2006/relationships" xmlns:p="http://schemas.openxmlformats.org/presentationml/2006/main">
   <p:cSld>
     <p:bg>
       <p:bgPr>
@@ -8416,7 +8809,14 @@
         <p:cNvGrpSpPr/>
         <p:nvPr/>
       </p:nvGrpSpPr>
-      <p:grpSpPr/>
+      <p:grpSpPr>
+        <a:xfrm>
+          <a:off x="0" y="0"/>
+          <a:ext cx="0" cy="0"/>
+          <a:chOff x="0" y="0"/>
+          <a:chExt cx="0" cy="0"/>
+        </a:xfrm>
+      </p:grpSpPr>
       <p:sp>
         <p:nvSpPr>
           <p:cNvPr id="2" name="TextBox 1"/>
@@ -8446,7 +8846,7 @@
                 </a:solidFill>
                 <a:latin typeface="Segoe UI"/>
               </a:rPr>
-              <a:t>CAVEATS</a:t>
+              <a:t>SUB-PROBLEM ①</a:t>
             </a:r>
           </a:p>
         </p:txBody>
@@ -8480,7 +8880,7 @@
                 </a:solidFill>
                 <a:latin typeface="Segoe UI"/>
               </a:rPr>
-              <a:t>Limits — and why the heave plate needs the tank</a:t>
+              <a:t>Radiation — “body as a wavemaker”</a:t>
             </a:r>
           </a:p>
         </p:txBody>
@@ -8526,6 +8926,2267 @@
           <a:lstStyle/>
           <a:p>
             <a:pPr algn="ctr"/>
+            <a:endParaRPr/>
+          </a:p>
+        </p:txBody>
+      </p:sp>
+      <p:sp>
+        <p:nvSpPr>
+          <p:cNvPr id="5" name="TextBox 4"/>
+          <p:cNvSpPr txBox="1"/>
+          <p:nvPr/>
+        </p:nvSpPr>
+        <p:spPr>
+          <a:xfrm>
+            <a:off x="777240" y="1828800"/>
+            <a:ext cx="10698480" cy="4572000"/>
+          </a:xfrm>
+          <a:prstGeom prst="rect">
+            <a:avLst/>
+          </a:prstGeom>
+          <a:noFill/>
+        </p:spPr>
+        <p:txBody>
+          <a:bodyPr wrap="square">
+            <a:spAutoFit/>
+          </a:bodyPr>
+          <a:lstStyle/>
+          <a:p>
+            <a:pPr>
+              <a:spcBef>
+                <a:spcPts val="200"/>
+              </a:spcBef>
+              <a:spcAft>
+                <a:spcPts val="1200"/>
+              </a:spcAft>
+            </a:pPr>
+            <a:r>
+              <a:rPr sz="1800">
+                <a:solidFill>
+                  <a:srgbClr val="0C8B96"/>
+                </a:solidFill>
+                <a:latin typeface="Segoe UI"/>
+              </a:rPr>
+              <a:t>•  </a:t>
+            </a:r>
+            <a:r>
+              <a:rPr sz="1800" b="0" i="0">
+                <a:solidFill>
+                  <a:srgbClr val="25323A"/>
+                </a:solidFill>
+                <a:latin typeface="Segoe UI"/>
+              </a:rPr>
+              <a:t>Turn incident waves </a:t>
+            </a:r>
+            <a:r>
+              <a:rPr sz="1800" b="1" i="0">
+                <a:solidFill>
+                  <a:srgbClr val="25323A"/>
+                </a:solidFill>
+                <a:latin typeface="Segoe UI"/>
+              </a:rPr>
+              <a:t>off</a:t>
+            </a:r>
+            <a:r>
+              <a:rPr sz="1800" b="0" i="0">
+                <a:solidFill>
+                  <a:srgbClr val="25323A"/>
+                </a:solidFill>
+                <a:latin typeface="Segoe UI"/>
+              </a:rPr>
+              <a:t>. Force the body to oscillate in still water — one DOF at a time, at each ω.</a:t>
+            </a:r>
+          </a:p>
+          <a:p>
+            <a:pPr>
+              <a:spcBef>
+                <a:spcPts val="200"/>
+              </a:spcBef>
+              <a:spcAft>
+                <a:spcPts val="1200"/>
+              </a:spcAft>
+            </a:pPr>
+            <a:r>
+              <a:rPr sz="1800">
+                <a:solidFill>
+                  <a:srgbClr val="0C8B96"/>
+                </a:solidFill>
+                <a:latin typeface="Segoe UI"/>
+              </a:rPr>
+              <a:t>•  </a:t>
+            </a:r>
+            <a:r>
+              <a:rPr sz="1800" b="0" i="0">
+                <a:solidFill>
+                  <a:srgbClr val="25323A"/>
+                </a:solidFill>
+                <a:latin typeface="Segoe UI"/>
+              </a:rPr>
+              <a:t>It radiates its own waves; the reaction force has two pieces:</a:t>
+            </a:r>
+          </a:p>
+          <a:p>
+            <a:pPr lvl="1">
+              <a:spcBef>
+                <a:spcPts val="200"/>
+              </a:spcBef>
+              <a:spcAft>
+                <a:spcPts val="1200"/>
+              </a:spcAft>
+            </a:pPr>
+            <a:r>
+              <a:rPr sz="1800">
+                <a:solidFill>
+                  <a:srgbClr val="54636D"/>
+                </a:solidFill>
+                <a:latin typeface="Segoe UI"/>
+              </a:rPr>
+              <a:t>      –  </a:t>
+            </a:r>
+            <a:r>
+              <a:rPr sz="1600" b="1" i="0">
+                <a:solidFill>
+                  <a:srgbClr val="0A5560"/>
+                </a:solidFill>
+                <a:latin typeface="Segoe UI"/>
+              </a:rPr>
+              <a:t>Added mass A(ω)</a:t>
+            </a:r>
+            <a:r>
+              <a:rPr sz="1600" b="0" i="0">
+                <a:solidFill>
+                  <a:srgbClr val="25323A"/>
+                </a:solidFill>
+                <a:latin typeface="Segoe UI"/>
+              </a:rPr>
+              <a:t> — in phase with acceleration (virtual mass of entrained water).</a:t>
+            </a:r>
+          </a:p>
+          <a:p>
+            <a:pPr lvl="1">
+              <a:spcBef>
+                <a:spcPts val="200"/>
+              </a:spcBef>
+              <a:spcAft>
+                <a:spcPts val="1200"/>
+              </a:spcAft>
+            </a:pPr>
+            <a:r>
+              <a:rPr sz="1800">
+                <a:solidFill>
+                  <a:srgbClr val="54636D"/>
+                </a:solidFill>
+                <a:latin typeface="Segoe UI"/>
+              </a:rPr>
+              <a:t>      –  </a:t>
+            </a:r>
+            <a:r>
+              <a:rPr sz="1600" b="1" i="0">
+                <a:solidFill>
+                  <a:srgbClr val="0A5560"/>
+                </a:solidFill>
+                <a:latin typeface="Segoe UI"/>
+              </a:rPr>
+              <a:t>Radiation damping B(ω)</a:t>
+            </a:r>
+            <a:r>
+              <a:rPr sz="1600" b="0" i="0">
+                <a:solidFill>
+                  <a:srgbClr val="25323A"/>
+                </a:solidFill>
+                <a:latin typeface="Segoe UI"/>
+              </a:rPr>
+              <a:t> — in phase with velocity (energy carried off as radiated waves).</a:t>
+            </a:r>
+          </a:p>
+          <a:p>
+            <a:pPr>
+              <a:spcBef>
+                <a:spcPts val="200"/>
+              </a:spcBef>
+              <a:spcAft>
+                <a:spcPts val="1200"/>
+              </a:spcAft>
+            </a:pPr>
+            <a:r>
+              <a:rPr sz="1800">
+                <a:solidFill>
+                  <a:srgbClr val="0C8B96"/>
+                </a:solidFill>
+                <a:latin typeface="Segoe UI"/>
+              </a:rPr>
+              <a:t>•  </a:t>
+            </a:r>
+            <a:r>
+              <a:rPr sz="1800" b="0" i="0">
+                <a:solidFill>
+                  <a:srgbClr val="25323A"/>
+                </a:solidFill>
+                <a:latin typeface="Segoe UI"/>
+              </a:rPr>
+              <a:t>6×6 matrices per ω — captures cross-DOF coupling (e.g. heave → pitch).</a:t>
+            </a:r>
+          </a:p>
+          <a:p>
+            <a:pPr>
+              <a:spcBef>
+                <a:spcPts val="200"/>
+              </a:spcBef>
+              <a:spcAft>
+                <a:spcPts val="1200"/>
+              </a:spcAft>
+            </a:pPr>
+            <a:r>
+              <a:rPr sz="1800">
+                <a:solidFill>
+                  <a:srgbClr val="0C8B96"/>
+                </a:solidFill>
+                <a:latin typeface="Segoe UI"/>
+              </a:rPr>
+              <a:t>•  </a:t>
+            </a:r>
+            <a:r>
+              <a:rPr sz="1800" b="0" i="0">
+                <a:solidFill>
+                  <a:srgbClr val="25323A"/>
+                </a:solidFill>
+                <a:latin typeface="Segoe UI"/>
+              </a:rPr>
+              <a:t>→ This run produces the </a:t>
+            </a:r>
+            <a:r>
+              <a:rPr sz="1800" b="1" i="0">
+                <a:solidFill>
+                  <a:srgbClr val="25323A"/>
+                </a:solidFill>
+                <a:latin typeface="Segoe UI"/>
+              </a:rPr>
+              <a:t>A(ω) and B(ω)</a:t>
+            </a:r>
+            <a:r>
+              <a:rPr sz="1800" b="0" i="0">
+                <a:solidFill>
+                  <a:srgbClr val="25323A"/>
+                </a:solidFill>
+                <a:latin typeface="Segoe UI"/>
+              </a:rPr>
+              <a:t> curves.</a:t>
+            </a:r>
+          </a:p>
+        </p:txBody>
+      </p:sp>
+    </p:spTree>
+  </p:cSld>
+  <p:clrMapOvr>
+    <a:masterClrMapping/>
+  </p:clrMapOvr>
+</p:sld>
+</file>
+
+<file path=ppt/slides/slide6.xml><?xml version="1.0" encoding="utf-8"?>
+<p:sld xmlns:a="http://schemas.openxmlformats.org/drawingml/2006/main" xmlns:r="http://schemas.openxmlformats.org/officeDocument/2006/relationships" xmlns:p="http://schemas.openxmlformats.org/presentationml/2006/main">
+  <p:cSld>
+    <p:bg>
+      <p:bgPr>
+        <a:solidFill>
+          <a:srgbClr val="FFFFFF"/>
+        </a:solidFill>
+        <a:effectLst/>
+      </p:bgPr>
+    </p:bg>
+    <p:spTree>
+      <p:nvGrpSpPr>
+        <p:cNvPr id="1" name=""/>
+        <p:cNvGrpSpPr/>
+        <p:nvPr/>
+      </p:nvGrpSpPr>
+      <p:grpSpPr>
+        <a:xfrm>
+          <a:off x="0" y="0"/>
+          <a:ext cx="0" cy="0"/>
+          <a:chOff x="0" y="0"/>
+          <a:chExt cx="0" cy="0"/>
+        </a:xfrm>
+      </p:grpSpPr>
+      <p:sp>
+        <p:nvSpPr>
+          <p:cNvPr id="2" name="TextBox 1"/>
+          <p:cNvSpPr txBox="1"/>
+          <p:nvPr/>
+        </p:nvSpPr>
+        <p:spPr>
+          <a:xfrm>
+            <a:off x="640080" y="384048"/>
+            <a:ext cx="10972800" cy="365760"/>
+          </a:xfrm>
+          <a:prstGeom prst="rect">
+            <a:avLst/>
+          </a:prstGeom>
+          <a:noFill/>
+        </p:spPr>
+        <p:txBody>
+          <a:bodyPr wrap="none">
+            <a:spAutoFit/>
+          </a:bodyPr>
+          <a:lstStyle/>
+          <a:p>
+            <a:r>
+              <a:rPr sz="1300" b="1">
+                <a:solidFill>
+                  <a:srgbClr val="0C8B96"/>
+                </a:solidFill>
+                <a:latin typeface="Segoe UI"/>
+              </a:rPr>
+              <a:t>SUB-PROBLEM ②</a:t>
+            </a:r>
+          </a:p>
+        </p:txBody>
+      </p:sp>
+      <p:sp>
+        <p:nvSpPr>
+          <p:cNvPr id="3" name="TextBox 2"/>
+          <p:cNvSpPr txBox="1"/>
+          <p:nvPr/>
+        </p:nvSpPr>
+        <p:spPr>
+          <a:xfrm>
+            <a:off x="640080" y="658368"/>
+            <a:ext cx="10972800" cy="822960"/>
+          </a:xfrm>
+          <a:prstGeom prst="rect">
+            <a:avLst/>
+          </a:prstGeom>
+          <a:noFill/>
+        </p:spPr>
+        <p:txBody>
+          <a:bodyPr wrap="none">
+            <a:spAutoFit/>
+          </a:bodyPr>
+          <a:lstStyle/>
+          <a:p>
+            <a:r>
+              <a:rPr sz="3000" b="1">
+                <a:solidFill>
+                  <a:srgbClr val="25323A"/>
+                </a:solidFill>
+                <a:latin typeface="Segoe UI"/>
+              </a:rPr>
+              <a:t>Diffraction — “body as an obstacle”</a:t>
+            </a:r>
+          </a:p>
+        </p:txBody>
+      </p:sp>
+      <p:sp>
+        <p:nvSpPr>
+          <p:cNvPr id="4" name="Rectangle 3"/>
+          <p:cNvSpPr/>
+          <p:nvPr/>
+        </p:nvSpPr>
+        <p:spPr>
+          <a:xfrm>
+            <a:off x="658368" y="1444752"/>
+            <a:ext cx="2011680" cy="54864"/>
+          </a:xfrm>
+          <a:prstGeom prst="rect">
+            <a:avLst/>
+          </a:prstGeom>
+          <a:solidFill>
+            <a:srgbClr val="0C8B96"/>
+          </a:solidFill>
+          <a:ln>
+            <a:noFill/>
+          </a:ln>
+          <a:effectLst/>
+        </p:spPr>
+        <p:style>
+          <a:lnRef idx="1">
+            <a:schemeClr val="accent1"/>
+          </a:lnRef>
+          <a:fillRef idx="3">
+            <a:schemeClr val="accent1"/>
+          </a:fillRef>
+          <a:effectRef idx="2">
+            <a:schemeClr val="accent1"/>
+          </a:effectRef>
+          <a:fontRef idx="minor">
+            <a:schemeClr val="lt1"/>
+          </a:fontRef>
+        </p:style>
+        <p:txBody>
+          <a:bodyPr rtlCol="0" anchor="ctr"/>
+          <a:lstStyle/>
+          <a:p>
+            <a:pPr algn="ctr"/>
+            <a:endParaRPr/>
+          </a:p>
+        </p:txBody>
+      </p:sp>
+      <p:sp>
+        <p:nvSpPr>
+          <p:cNvPr id="5" name="TextBox 4"/>
+          <p:cNvSpPr txBox="1"/>
+          <p:nvPr/>
+        </p:nvSpPr>
+        <p:spPr>
+          <a:xfrm>
+            <a:off x="777240" y="1828800"/>
+            <a:ext cx="10698480" cy="4572000"/>
+          </a:xfrm>
+          <a:prstGeom prst="rect">
+            <a:avLst/>
+          </a:prstGeom>
+          <a:noFill/>
+        </p:spPr>
+        <p:txBody>
+          <a:bodyPr wrap="square">
+            <a:spAutoFit/>
+          </a:bodyPr>
+          <a:lstStyle/>
+          <a:p>
+            <a:pPr>
+              <a:spcBef>
+                <a:spcPts val="200"/>
+              </a:spcBef>
+              <a:spcAft>
+                <a:spcPts val="1200"/>
+              </a:spcAft>
+            </a:pPr>
+            <a:r>
+              <a:rPr sz="1800">
+                <a:solidFill>
+                  <a:srgbClr val="0C8B96"/>
+                </a:solidFill>
+                <a:latin typeface="Segoe UI"/>
+              </a:rPr>
+              <a:t>•  </a:t>
+            </a:r>
+            <a:r>
+              <a:rPr sz="1800" b="0" i="0">
+                <a:solidFill>
+                  <a:srgbClr val="25323A"/>
+                </a:solidFill>
+                <a:latin typeface="Segoe UI"/>
+              </a:rPr>
+              <a:t>Hold the body </a:t>
+            </a:r>
+            <a:r>
+              <a:rPr sz="1800" b="1" i="0">
+                <a:solidFill>
+                  <a:srgbClr val="25323A"/>
+                </a:solidFill>
+                <a:latin typeface="Segoe UI"/>
+              </a:rPr>
+              <a:t>fixed</a:t>
+            </a:r>
+            <a:r>
+              <a:rPr sz="1800" b="0" i="0">
+                <a:solidFill>
+                  <a:srgbClr val="25323A"/>
+                </a:solidFill>
+                <a:latin typeface="Segoe UI"/>
+              </a:rPr>
+              <a:t>. Let incident waves scatter off it.</a:t>
+            </a:r>
+          </a:p>
+          <a:p>
+            <a:pPr>
+              <a:spcBef>
+                <a:spcPts val="200"/>
+              </a:spcBef>
+              <a:spcAft>
+                <a:spcPts val="1200"/>
+              </a:spcAft>
+            </a:pPr>
+            <a:r>
+              <a:rPr sz="1800">
+                <a:solidFill>
+                  <a:srgbClr val="0C8B96"/>
+                </a:solidFill>
+                <a:latin typeface="Segoe UI"/>
+              </a:rPr>
+              <a:t>•  </a:t>
+            </a:r>
+            <a:r>
+              <a:rPr sz="1800" b="0" i="0">
+                <a:solidFill>
+                  <a:srgbClr val="25323A"/>
+                </a:solidFill>
+                <a:latin typeface="Segoe UI"/>
+              </a:rPr>
+              <a:t>Net wave-pressure force on the fixed hull = </a:t>
+            </a:r>
+            <a:r>
+              <a:rPr sz="1800" b="1" i="0">
+                <a:solidFill>
+                  <a:srgbClr val="0A5560"/>
+                </a:solidFill>
+                <a:latin typeface="Segoe UI"/>
+              </a:rPr>
+              <a:t>excitation force F_exc(ω, β)</a:t>
+            </a:r>
+            <a:r>
+              <a:rPr sz="1800" b="0" i="0">
+                <a:solidFill>
+                  <a:srgbClr val="25323A"/>
+                </a:solidFill>
+                <a:latin typeface="Segoe UI"/>
+              </a:rPr>
+              <a:t>  (β = wave heading):</a:t>
+            </a:r>
+          </a:p>
+          <a:p>
+            <a:pPr lvl="1">
+              <a:spcBef>
+                <a:spcPts val="200"/>
+              </a:spcBef>
+              <a:spcAft>
+                <a:spcPts val="1200"/>
+              </a:spcAft>
+            </a:pPr>
+            <a:r>
+              <a:rPr sz="1800">
+                <a:solidFill>
+                  <a:srgbClr val="54636D"/>
+                </a:solidFill>
+                <a:latin typeface="Segoe UI"/>
+              </a:rPr>
+              <a:t>      –  </a:t>
+            </a:r>
+            <a:r>
+              <a:rPr sz="1600" b="1" i="0">
+                <a:solidFill>
+                  <a:srgbClr val="25323A"/>
+                </a:solidFill>
+                <a:latin typeface="Segoe UI"/>
+              </a:rPr>
+              <a:t>Froude–Krylov</a:t>
+            </a:r>
+            <a:r>
+              <a:rPr sz="1600" b="0" i="0">
+                <a:solidFill>
+                  <a:srgbClr val="25323A"/>
+                </a:solidFill>
+                <a:latin typeface="Segoe UI"/>
+              </a:rPr>
+              <a:t> — force from the undisturbed incident-wave pressure.</a:t>
+            </a:r>
+          </a:p>
+          <a:p>
+            <a:pPr lvl="1">
+              <a:spcBef>
+                <a:spcPts val="200"/>
+              </a:spcBef>
+              <a:spcAft>
+                <a:spcPts val="1200"/>
+              </a:spcAft>
+            </a:pPr>
+            <a:r>
+              <a:rPr sz="1800">
+                <a:solidFill>
+                  <a:srgbClr val="54636D"/>
+                </a:solidFill>
+                <a:latin typeface="Segoe UI"/>
+              </a:rPr>
+              <a:t>      –  </a:t>
+            </a:r>
+            <a:r>
+              <a:rPr sz="1600" b="1" i="0">
+                <a:solidFill>
+                  <a:srgbClr val="25323A"/>
+                </a:solidFill>
+                <a:latin typeface="Segoe UI"/>
+              </a:rPr>
+              <a:t>Diffraction</a:t>
+            </a:r>
+            <a:r>
+              <a:rPr sz="1600" b="0" i="0">
+                <a:solidFill>
+                  <a:srgbClr val="25323A"/>
+                </a:solidFill>
+                <a:latin typeface="Segoe UI"/>
+              </a:rPr>
+              <a:t> — correction because the body scatters the waves.</a:t>
+            </a:r>
+          </a:p>
+          <a:p>
+            <a:pPr>
+              <a:spcBef>
+                <a:spcPts val="200"/>
+              </a:spcBef>
+              <a:spcAft>
+                <a:spcPts val="1200"/>
+              </a:spcAft>
+            </a:pPr>
+            <a:r>
+              <a:rPr sz="1800">
+                <a:solidFill>
+                  <a:srgbClr val="0C8B96"/>
+                </a:solidFill>
+                <a:latin typeface="Segoe UI"/>
+              </a:rPr>
+              <a:t>•  </a:t>
+            </a:r>
+            <a:r>
+              <a:rPr sz="1800" b="0" i="0">
+                <a:solidFill>
+                  <a:srgbClr val="25323A"/>
+                </a:solidFill>
+                <a:latin typeface="Segoe UI"/>
+              </a:rPr>
+              <a:t>→ This run produces the wave forcing </a:t>
+            </a:r>
+            <a:r>
+              <a:rPr sz="1800" b="1" i="0">
+                <a:solidFill>
+                  <a:srgbClr val="25323A"/>
+                </a:solidFill>
+                <a:latin typeface="Segoe UI"/>
+              </a:rPr>
+              <a:t>F_exc(ω)</a:t>
+            </a:r>
+            <a:r>
+              <a:rPr sz="1800" b="0" i="0">
+                <a:solidFill>
+                  <a:srgbClr val="25323A"/>
+                </a:solidFill>
+                <a:latin typeface="Segoe UI"/>
+              </a:rPr>
+              <a:t> that drives the motion.</a:t>
+            </a:r>
+          </a:p>
+          <a:p>
+            <a:pPr>
+              <a:spcBef>
+                <a:spcPts val="200"/>
+              </a:spcBef>
+              <a:spcAft>
+                <a:spcPts val="1200"/>
+              </a:spcAft>
+            </a:pPr>
+            <a:r>
+              <a:rPr sz="1800">
+                <a:solidFill>
+                  <a:srgbClr val="0C8B96"/>
+                </a:solidFill>
+                <a:latin typeface="Segoe UI"/>
+              </a:rPr>
+              <a:t>•  </a:t>
+            </a:r>
+            <a:r>
+              <a:rPr sz="1800" b="0" i="0">
+                <a:solidFill>
+                  <a:srgbClr val="25323A"/>
+                </a:solidFill>
+                <a:latin typeface="Segoe UI"/>
+              </a:rPr>
+              <a:t>Plus the hydrostatic stiffness </a:t>
+            </a:r>
+            <a:r>
+              <a:rPr sz="1800" b="1" i="0">
+                <a:solidFill>
+                  <a:srgbClr val="25323A"/>
+                </a:solidFill>
+                <a:latin typeface="Segoe UI"/>
+              </a:rPr>
+              <a:t>C</a:t>
+            </a:r>
+            <a:r>
+              <a:rPr sz="1800" b="0" i="0">
+                <a:solidFill>
+                  <a:srgbClr val="25323A"/>
+                </a:solidFill>
+                <a:latin typeface="Segoe UI"/>
+              </a:rPr>
+              <a:t> (buoyancy / waterplane) from the geometry.</a:t>
+            </a:r>
+          </a:p>
+        </p:txBody>
+      </p:sp>
+    </p:spTree>
+  </p:cSld>
+  <p:clrMapOvr>
+    <a:masterClrMapping/>
+  </p:clrMapOvr>
+</p:sld>
+</file>
+
+<file path=ppt/slides/slide7.xml><?xml version="1.0" encoding="utf-8"?>
+<p:sld xmlns:a="http://schemas.openxmlformats.org/drawingml/2006/main" xmlns:r="http://schemas.openxmlformats.org/officeDocument/2006/relationships" xmlns:p="http://schemas.openxmlformats.org/presentationml/2006/main">
+  <p:cSld>
+    <p:bg>
+      <p:bgPr>
+        <a:solidFill>
+          <a:srgbClr val="FFFFFF"/>
+        </a:solidFill>
+        <a:effectLst/>
+      </p:bgPr>
+    </p:bg>
+    <p:spTree>
+      <p:nvGrpSpPr>
+        <p:cNvPr id="1" name=""/>
+        <p:cNvGrpSpPr/>
+        <p:nvPr/>
+      </p:nvGrpSpPr>
+      <p:grpSpPr>
+        <a:xfrm>
+          <a:off x="0" y="0"/>
+          <a:ext cx="0" cy="0"/>
+          <a:chOff x="0" y="0"/>
+          <a:chExt cx="0" cy="0"/>
+        </a:xfrm>
+      </p:grpSpPr>
+      <p:sp>
+        <p:nvSpPr>
+          <p:cNvPr id="2" name="TextBox 1"/>
+          <p:cNvSpPr txBox="1"/>
+          <p:nvPr/>
+        </p:nvSpPr>
+        <p:spPr>
+          <a:xfrm>
+            <a:off x="640080" y="384048"/>
+            <a:ext cx="10972800" cy="365760"/>
+          </a:xfrm>
+          <a:prstGeom prst="rect">
+            <a:avLst/>
+          </a:prstGeom>
+          <a:noFill/>
+        </p:spPr>
+        <p:txBody>
+          <a:bodyPr wrap="none">
+            <a:spAutoFit/>
+          </a:bodyPr>
+          <a:lstStyle/>
+          <a:p>
+            <a:r>
+              <a:rPr sz="1300" b="1">
+                <a:solidFill>
+                  <a:srgbClr val="0C8B96"/>
+                </a:solidFill>
+                <a:latin typeface="Segoe UI"/>
+              </a:rPr>
+              <a:t>THE BRIDGE</a:t>
+            </a:r>
+          </a:p>
+        </p:txBody>
+      </p:sp>
+      <p:sp>
+        <p:nvSpPr>
+          <p:cNvPr id="3" name="TextBox 2"/>
+          <p:cNvSpPr txBox="1"/>
+          <p:nvPr/>
+        </p:nvSpPr>
+        <p:spPr>
+          <a:xfrm>
+            <a:off x="640080" y="658368"/>
+            <a:ext cx="10972800" cy="822960"/>
+          </a:xfrm>
+          <a:prstGeom prst="rect">
+            <a:avLst/>
+          </a:prstGeom>
+          <a:noFill/>
+        </p:spPr>
+        <p:txBody>
+          <a:bodyPr wrap="none">
+            <a:spAutoFit/>
+          </a:bodyPr>
+          <a:lstStyle/>
+          <a:p>
+            <a:r>
+              <a:rPr sz="3000" b="1">
+                <a:solidFill>
+                  <a:srgbClr val="25323A"/>
+                </a:solidFill>
+                <a:latin typeface="Segoe UI"/>
+              </a:rPr>
+              <a:t>From frequency domain to time-domain simulation</a:t>
+            </a:r>
+          </a:p>
+        </p:txBody>
+      </p:sp>
+      <p:sp>
+        <p:nvSpPr>
+          <p:cNvPr id="4" name="Rectangle 3"/>
+          <p:cNvSpPr/>
+          <p:nvPr/>
+        </p:nvSpPr>
+        <p:spPr>
+          <a:xfrm>
+            <a:off x="658368" y="1444752"/>
+            <a:ext cx="2011680" cy="54864"/>
+          </a:xfrm>
+          <a:prstGeom prst="rect">
+            <a:avLst/>
+          </a:prstGeom>
+          <a:solidFill>
+            <a:srgbClr val="0C8B96"/>
+          </a:solidFill>
+          <a:ln>
+            <a:noFill/>
+          </a:ln>
+          <a:effectLst/>
+        </p:spPr>
+        <p:style>
+          <a:lnRef idx="1">
+            <a:schemeClr val="accent1"/>
+          </a:lnRef>
+          <a:fillRef idx="3">
+            <a:schemeClr val="accent1"/>
+          </a:fillRef>
+          <a:effectRef idx="2">
+            <a:schemeClr val="accent1"/>
+          </a:effectRef>
+          <a:fontRef idx="minor">
+            <a:schemeClr val="lt1"/>
+          </a:fontRef>
+        </p:style>
+        <p:txBody>
+          <a:bodyPr rtlCol="0" anchor="ctr"/>
+          <a:lstStyle/>
+          <a:p>
+            <a:pPr algn="ctr"/>
+            <a:endParaRPr/>
+          </a:p>
+        </p:txBody>
+      </p:sp>
+      <p:sp>
+        <p:nvSpPr>
+          <p:cNvPr id="5" name="TextBox 4"/>
+          <p:cNvSpPr txBox="1"/>
+          <p:nvPr/>
+        </p:nvSpPr>
+        <p:spPr>
+          <a:xfrm>
+            <a:off x="777240" y="1737360"/>
+            <a:ext cx="10698480" cy="4572000"/>
+          </a:xfrm>
+          <a:prstGeom prst="rect">
+            <a:avLst/>
+          </a:prstGeom>
+          <a:noFill/>
+        </p:spPr>
+        <p:txBody>
+          <a:bodyPr wrap="square">
+            <a:spAutoFit/>
+          </a:bodyPr>
+          <a:lstStyle/>
+          <a:p>
+            <a:pPr>
+              <a:spcBef>
+                <a:spcPts val="200"/>
+              </a:spcBef>
+              <a:spcAft>
+                <a:spcPts val="600"/>
+              </a:spcAft>
+            </a:pPr>
+            <a:r>
+              <a:rPr sz="1800">
+                <a:solidFill>
+                  <a:srgbClr val="0C8B96"/>
+                </a:solidFill>
+                <a:latin typeface="Segoe UI"/>
+              </a:rPr>
+              <a:t>•  </a:t>
+            </a:r>
+            <a:r>
+              <a:rPr sz="1800" b="0" i="0">
+                <a:solidFill>
+                  <a:srgbClr val="25323A"/>
+                </a:solidFill>
+                <a:latin typeface="Segoe UI"/>
+              </a:rPr>
+              <a:t>A(ω), B(ω) can’t go straight into a time-stepper — a transient contains all frequencies at once. Bridge = the </a:t>
+            </a:r>
+            <a:r>
+              <a:rPr sz="1800" b="1" i="0">
+                <a:solidFill>
+                  <a:srgbClr val="25323A"/>
+                </a:solidFill>
+                <a:latin typeface="Segoe UI"/>
+              </a:rPr>
+              <a:t>Cummins equation</a:t>
+            </a:r>
+            <a:r>
+              <a:rPr sz="1800" b="0" i="0">
+                <a:solidFill>
+                  <a:srgbClr val="25323A"/>
+                </a:solidFill>
+                <a:latin typeface="Segoe UI"/>
+              </a:rPr>
+              <a:t>:</a:t>
+            </a:r>
+          </a:p>
+        </p:txBody>
+      </p:sp>
+      <p:sp>
+        <p:nvSpPr>
+          <p:cNvPr id="6" name="Rectangle 5"/>
+          <p:cNvSpPr/>
+          <p:nvPr/>
+        </p:nvSpPr>
+        <p:spPr>
+          <a:xfrm>
+            <a:off x="777240" y="2514600"/>
+            <a:ext cx="10607040" cy="1051560"/>
+          </a:xfrm>
+          <a:prstGeom prst="rect">
+            <a:avLst/>
+          </a:prstGeom>
+          <a:solidFill>
+            <a:srgbClr val="EEF6F7"/>
+          </a:solidFill>
+          <a:ln>
+            <a:noFill/>
+          </a:ln>
+          <a:effectLst/>
+        </p:spPr>
+        <p:style>
+          <a:lnRef idx="1">
+            <a:schemeClr val="accent1"/>
+          </a:lnRef>
+          <a:fillRef idx="3">
+            <a:schemeClr val="accent1"/>
+          </a:fillRef>
+          <a:effectRef idx="2">
+            <a:schemeClr val="accent1"/>
+          </a:effectRef>
+          <a:fontRef idx="minor">
+            <a:schemeClr val="lt1"/>
+          </a:fontRef>
+        </p:style>
+        <p:txBody>
+          <a:bodyPr rtlCol="0" anchor="ctr"/>
+          <a:lstStyle/>
+          <a:p>
+            <a:pPr algn="ctr"/>
+            <a:endParaRPr/>
+          </a:p>
+        </p:txBody>
+      </p:sp>
+      <p:sp>
+        <p:nvSpPr>
+          <p:cNvPr id="7" name="TextBox 6"/>
+          <p:cNvSpPr txBox="1"/>
+          <p:nvPr/>
+        </p:nvSpPr>
+        <p:spPr>
+          <a:xfrm>
+            <a:off x="914400" y="2651760"/>
+            <a:ext cx="10332720" cy="822960"/>
+          </a:xfrm>
+          <a:prstGeom prst="rect">
+            <a:avLst/>
+          </a:prstGeom>
+          <a:noFill/>
+        </p:spPr>
+        <p:txBody>
+          <a:bodyPr wrap="square" anchor="ctr">
+            <a:spAutoFit/>
+          </a:bodyPr>
+          <a:lstStyle/>
+          <a:p>
+            <a:pPr algn="ctr"/>
+            <a:r>
+              <a:rPr sz="2200" b="1">
+                <a:solidFill>
+                  <a:srgbClr val="25323A"/>
+                </a:solidFill>
+                <a:latin typeface="Cambria Math"/>
+              </a:rPr>
+              <a:t>(M + A∞) ẍ  +  ∫₀ᵗ K(t−τ) ẋ(τ) dτ  +  C x  =  F_exc(t)  +  F_drag(ẋ)</a:t>
+            </a:r>
+          </a:p>
+        </p:txBody>
+      </p:sp>
+      <p:sp>
+        <p:nvSpPr>
+          <p:cNvPr id="8" name="TextBox 7"/>
+          <p:cNvSpPr txBox="1"/>
+          <p:nvPr/>
+        </p:nvSpPr>
+        <p:spPr>
+          <a:xfrm>
+            <a:off x="777240" y="3749039"/>
+            <a:ext cx="10698480" cy="4572000"/>
+          </a:xfrm>
+          <a:prstGeom prst="rect">
+            <a:avLst/>
+          </a:prstGeom>
+          <a:noFill/>
+        </p:spPr>
+        <p:txBody>
+          <a:bodyPr wrap="square">
+            <a:spAutoFit/>
+          </a:bodyPr>
+          <a:lstStyle/>
+          <a:p>
+            <a:pPr>
+              <a:spcBef>
+                <a:spcPts val="200"/>
+              </a:spcBef>
+              <a:spcAft>
+                <a:spcPts val="1000"/>
+              </a:spcAft>
+            </a:pPr>
+            <a:r>
+              <a:rPr sz="1800">
+                <a:solidFill>
+                  <a:srgbClr val="0C8B96"/>
+                </a:solidFill>
+                <a:latin typeface="Segoe UI"/>
+              </a:rPr>
+              <a:t>•  </a:t>
+            </a:r>
+            <a:r>
+              <a:rPr sz="1800" b="1" i="0">
+                <a:solidFill>
+                  <a:srgbClr val="0A5560"/>
+                </a:solidFill>
+                <a:latin typeface="Segoe UI"/>
+              </a:rPr>
+              <a:t>A∞</a:t>
+            </a:r>
+            <a:r>
+              <a:rPr sz="1800" b="0" i="0">
+                <a:solidFill>
+                  <a:srgbClr val="25323A"/>
+                </a:solidFill>
+                <a:latin typeface="Segoe UI"/>
+              </a:rPr>
+              <a:t> = infinite-frequency added mass.</a:t>
+            </a:r>
+          </a:p>
+          <a:p>
+            <a:pPr>
+              <a:spcBef>
+                <a:spcPts val="200"/>
+              </a:spcBef>
+              <a:spcAft>
+                <a:spcPts val="1000"/>
+              </a:spcAft>
+            </a:pPr>
+            <a:r>
+              <a:rPr sz="1800">
+                <a:solidFill>
+                  <a:srgbClr val="0C8B96"/>
+                </a:solidFill>
+                <a:latin typeface="Segoe UI"/>
+              </a:rPr>
+              <a:t>•  </a:t>
+            </a:r>
+            <a:r>
+              <a:rPr sz="1800" b="1" i="0">
+                <a:solidFill>
+                  <a:srgbClr val="0A5560"/>
+                </a:solidFill>
+                <a:latin typeface="Segoe UI"/>
+              </a:rPr>
+              <a:t>K(t) = (2/π)∫ B(ω) cos(ωt) dω</a:t>
+            </a:r>
+            <a:r>
+              <a:rPr sz="1800" b="0" i="0">
+                <a:solidFill>
+                  <a:srgbClr val="25323A"/>
+                </a:solidFill>
+                <a:latin typeface="Segoe UI"/>
+              </a:rPr>
+              <a:t> — the retardation kernel = </a:t>
+            </a:r>
+            <a:r>
+              <a:rPr sz="1800" b="0" i="1">
+                <a:solidFill>
+                  <a:srgbClr val="25323A"/>
+                </a:solidFill>
+                <a:latin typeface="Segoe UI"/>
+              </a:rPr>
+              <a:t>fluid memory</a:t>
+            </a:r>
+            <a:r>
+              <a:rPr sz="1800" b="0" i="0">
+                <a:solidFill>
+                  <a:srgbClr val="25323A"/>
+                </a:solidFill>
+                <a:latin typeface="Segoe UI"/>
+              </a:rPr>
+              <a:t> of previously radiated waves.</a:t>
+            </a:r>
+          </a:p>
+          <a:p>
+            <a:pPr>
+              <a:spcBef>
+                <a:spcPts val="200"/>
+              </a:spcBef>
+              <a:spcAft>
+                <a:spcPts val="1000"/>
+              </a:spcAft>
+            </a:pPr>
+            <a:r>
+              <a:rPr sz="1800">
+                <a:solidFill>
+                  <a:srgbClr val="0C8B96"/>
+                </a:solidFill>
+                <a:latin typeface="Segoe UI"/>
+              </a:rPr>
+              <a:t>•  </a:t>
+            </a:r>
+            <a:r>
+              <a:rPr sz="1800" b="0" i="0">
+                <a:solidFill>
+                  <a:srgbClr val="25323A"/>
+                </a:solidFill>
+                <a:latin typeface="Segoe UI"/>
+              </a:rPr>
+              <a:t>Mapping:  </a:t>
+            </a:r>
+            <a:r>
+              <a:rPr sz="1800" b="1" i="0">
+                <a:solidFill>
+                  <a:srgbClr val="25323A"/>
+                </a:solidFill>
+                <a:latin typeface="Segoe UI"/>
+              </a:rPr>
+              <a:t>Radiation → A∞ + K(t)</a:t>
+            </a:r>
+            <a:r>
+              <a:rPr sz="1800" b="0" i="0">
+                <a:solidFill>
+                  <a:srgbClr val="25323A"/>
+                </a:solidFill>
+                <a:latin typeface="Segoe UI"/>
+              </a:rPr>
+              <a:t>   ·   </a:t>
+            </a:r>
+            <a:r>
+              <a:rPr sz="1800" b="1" i="0">
+                <a:solidFill>
+                  <a:srgbClr val="25323A"/>
+                </a:solidFill>
+                <a:latin typeface="Segoe UI"/>
+              </a:rPr>
+              <a:t>Diffraction → F_exc</a:t>
+            </a:r>
+            <a:r>
+              <a:rPr sz="1800" b="0" i="0">
+                <a:solidFill>
+                  <a:srgbClr val="25323A"/>
+                </a:solidFill>
+                <a:latin typeface="Segoe UI"/>
+              </a:rPr>
+              <a:t>   ·   </a:t>
+            </a:r>
+            <a:r>
+              <a:rPr sz="1800" b="1" i="0">
+                <a:solidFill>
+                  <a:srgbClr val="25323A"/>
+                </a:solidFill>
+                <a:latin typeface="Segoe UI"/>
+              </a:rPr>
+              <a:t>Hydrostatics → C</a:t>
+            </a:r>
+            <a:r>
+              <a:rPr sz="1800" b="0" i="0">
+                <a:solidFill>
+                  <a:srgbClr val="25323A"/>
+                </a:solidFill>
+                <a:latin typeface="Segoe UI"/>
+              </a:rPr>
+              <a:t>.  FloatSim integrates this in time.</a:t>
+            </a:r>
+          </a:p>
+        </p:txBody>
+      </p:sp>
+    </p:spTree>
+  </p:cSld>
+  <p:clrMapOvr>
+    <a:masterClrMapping/>
+  </p:clrMapOvr>
+</p:sld>
+</file>
+
+<file path=ppt/slides/slide8.xml><?xml version="1.0" encoding="utf-8"?>
+<p:sld xmlns:a="http://schemas.openxmlformats.org/drawingml/2006/main" xmlns:r="http://schemas.openxmlformats.org/officeDocument/2006/relationships" xmlns:p="http://schemas.openxmlformats.org/presentationml/2006/main">
+  <p:cSld>
+    <p:bg>
+      <p:bgPr>
+        <a:solidFill>
+          <a:srgbClr val="FFFFFF"/>
+        </a:solidFill>
+        <a:effectLst/>
+      </p:bgPr>
+    </p:bg>
+    <p:spTree>
+      <p:nvGrpSpPr>
+        <p:cNvPr id="1" name=""/>
+        <p:cNvGrpSpPr/>
+        <p:nvPr/>
+      </p:nvGrpSpPr>
+      <p:grpSpPr>
+        <a:xfrm>
+          <a:off x="0" y="0"/>
+          <a:ext cx="0" cy="0"/>
+          <a:chOff x="0" y="0"/>
+          <a:chExt cx="0" cy="0"/>
+        </a:xfrm>
+      </p:grpSpPr>
+      <p:sp>
+        <p:nvSpPr>
+          <p:cNvPr id="2" name="TextBox 1"/>
+          <p:cNvSpPr txBox="1"/>
+          <p:nvPr/>
+        </p:nvSpPr>
+        <p:spPr>
+          <a:xfrm>
+            <a:off x="640080" y="384048"/>
+            <a:ext cx="10972800" cy="365760"/>
+          </a:xfrm>
+          <a:prstGeom prst="rect">
+            <a:avLst/>
+          </a:prstGeom>
+          <a:noFill/>
+        </p:spPr>
+        <p:txBody>
+          <a:bodyPr wrap="none">
+            <a:spAutoFit/>
+          </a:bodyPr>
+          <a:lstStyle/>
+          <a:p>
+            <a:r>
+              <a:rPr sz="1300" b="1">
+                <a:solidFill>
+                  <a:srgbClr val="0C8B96"/>
+                </a:solidFill>
+                <a:latin typeface="Segoe UI"/>
+              </a:rPr>
+              <a:t>DIVISION OF LABOUR</a:t>
+            </a:r>
+          </a:p>
+        </p:txBody>
+      </p:sp>
+      <p:sp>
+        <p:nvSpPr>
+          <p:cNvPr id="3" name="TextBox 2"/>
+          <p:cNvSpPr txBox="1"/>
+          <p:nvPr/>
+        </p:nvSpPr>
+        <p:spPr>
+          <a:xfrm>
+            <a:off x="640080" y="658368"/>
+            <a:ext cx="10972800" cy="822960"/>
+          </a:xfrm>
+          <a:prstGeom prst="rect">
+            <a:avLst/>
+          </a:prstGeom>
+          <a:noFill/>
+        </p:spPr>
+        <p:txBody>
+          <a:bodyPr wrap="none">
+            <a:spAutoFit/>
+          </a:bodyPr>
+          <a:lstStyle/>
+          <a:p>
+            <a:r>
+              <a:rPr sz="3000" b="1">
+                <a:solidFill>
+                  <a:srgbClr val="25323A"/>
+                </a:solidFill>
+                <a:latin typeface="Segoe UI"/>
+              </a:rPr>
+              <a:t>Who computes what — Capytaine vs FloatSim</a:t>
+            </a:r>
+          </a:p>
+        </p:txBody>
+      </p:sp>
+      <p:sp>
+        <p:nvSpPr>
+          <p:cNvPr id="4" name="Rectangle 3"/>
+          <p:cNvSpPr/>
+          <p:nvPr/>
+        </p:nvSpPr>
+        <p:spPr>
+          <a:xfrm>
+            <a:off x="658368" y="1444752"/>
+            <a:ext cx="2011680" cy="54864"/>
+          </a:xfrm>
+          <a:prstGeom prst="rect">
+            <a:avLst/>
+          </a:prstGeom>
+          <a:solidFill>
+            <a:srgbClr val="0C8B96"/>
+          </a:solidFill>
+          <a:ln>
+            <a:noFill/>
+          </a:ln>
+          <a:effectLst/>
+        </p:spPr>
+        <p:style>
+          <a:lnRef idx="1">
+            <a:schemeClr val="accent1"/>
+          </a:lnRef>
+          <a:fillRef idx="3">
+            <a:schemeClr val="accent1"/>
+          </a:fillRef>
+          <a:effectRef idx="2">
+            <a:schemeClr val="accent1"/>
+          </a:effectRef>
+          <a:fontRef idx="minor">
+            <a:schemeClr val="lt1"/>
+          </a:fontRef>
+        </p:style>
+        <p:txBody>
+          <a:bodyPr rtlCol="0" anchor="ctr"/>
+          <a:lstStyle/>
+          <a:p>
+            <a:pPr algn="ctr"/>
+            <a:endParaRPr/>
+          </a:p>
+        </p:txBody>
+      </p:sp>
+      <p:sp>
+        <p:nvSpPr>
+          <p:cNvPr id="5" name="Rectangle 4"/>
+          <p:cNvSpPr/>
+          <p:nvPr/>
+        </p:nvSpPr>
+        <p:spPr>
+          <a:xfrm>
+            <a:off x="502920" y="1783080"/>
+            <a:ext cx="5029200" cy="4160520"/>
+          </a:xfrm>
+          <a:prstGeom prst="rect">
+            <a:avLst/>
+          </a:prstGeom>
+          <a:solidFill>
+            <a:srgbClr val="F7FAFB"/>
+          </a:solidFill>
+          <a:ln w="15875">
+            <a:solidFill>
+              <a:srgbClr val="0C8B96"/>
+            </a:solidFill>
+          </a:ln>
+          <a:effectLst/>
+        </p:spPr>
+        <p:style>
+          <a:lnRef idx="1">
+            <a:schemeClr val="accent1"/>
+          </a:lnRef>
+          <a:fillRef idx="3">
+            <a:schemeClr val="accent1"/>
+          </a:fillRef>
+          <a:effectRef idx="2">
+            <a:schemeClr val="accent1"/>
+          </a:effectRef>
+          <a:fontRef idx="minor">
+            <a:schemeClr val="lt1"/>
+          </a:fontRef>
+        </p:style>
+        <p:txBody>
+          <a:bodyPr rtlCol="0" anchor="ctr"/>
+          <a:lstStyle/>
+          <a:p>
+            <a:pPr algn="ctr"/>
+            <a:endParaRPr/>
+          </a:p>
+        </p:txBody>
+      </p:sp>
+      <p:sp>
+        <p:nvSpPr>
+          <p:cNvPr id="6" name="Rectangle 5"/>
+          <p:cNvSpPr/>
+          <p:nvPr/>
+        </p:nvSpPr>
+        <p:spPr>
+          <a:xfrm>
+            <a:off x="502920" y="1783080"/>
+            <a:ext cx="5029200" cy="548640"/>
+          </a:xfrm>
+          <a:prstGeom prst="rect">
+            <a:avLst/>
+          </a:prstGeom>
+          <a:solidFill>
+            <a:srgbClr val="0C8B96"/>
+          </a:solidFill>
+          <a:ln>
+            <a:noFill/>
+          </a:ln>
+          <a:effectLst/>
+        </p:spPr>
+        <p:style>
+          <a:lnRef idx="1">
+            <a:schemeClr val="accent1"/>
+          </a:lnRef>
+          <a:fillRef idx="3">
+            <a:schemeClr val="accent1"/>
+          </a:fillRef>
+          <a:effectRef idx="2">
+            <a:schemeClr val="accent1"/>
+          </a:effectRef>
+          <a:fontRef idx="minor">
+            <a:schemeClr val="lt1"/>
+          </a:fontRef>
+        </p:style>
+        <p:txBody>
+          <a:bodyPr rtlCol="0" anchor="ctr"/>
+          <a:lstStyle/>
+          <a:p>
+            <a:pPr algn="ctr"/>
+            <a:r>
+              <a:rPr sz="1700" b="1">
+                <a:solidFill>
+                  <a:srgbClr val="FFFFFF"/>
+                </a:solidFill>
+                <a:latin typeface="Segoe UI"/>
+              </a:rPr>
+              <a:t>CAPYTAINE</a:t>
+            </a:r>
+          </a:p>
+        </p:txBody>
+      </p:sp>
+      <p:sp>
+        <p:nvSpPr>
+          <p:cNvPr id="7" name="TextBox 6"/>
+          <p:cNvSpPr txBox="1"/>
+          <p:nvPr/>
+        </p:nvSpPr>
+        <p:spPr>
+          <a:xfrm>
+            <a:off x="502920" y="2313432"/>
+            <a:ext cx="5029200" cy="310896"/>
+          </a:xfrm>
+          <a:prstGeom prst="rect">
+            <a:avLst/>
+          </a:prstGeom>
+          <a:noFill/>
+        </p:spPr>
+        <p:txBody>
+          <a:bodyPr wrap="none">
+            <a:spAutoFit/>
+          </a:bodyPr>
+          <a:lstStyle/>
+          <a:p>
+            <a:pPr algn="ctr"/>
+            <a:r>
+              <a:rPr sz="1050" i="1">
+                <a:solidFill>
+                  <a:srgbClr val="54636D"/>
+                </a:solidFill>
+                <a:latin typeface="Segoe UI"/>
+              </a:rPr>
+              <a:t>run once · frequency domain · linear + inviscid</a:t>
+            </a:r>
+          </a:p>
+        </p:txBody>
+      </p:sp>
+      <p:sp>
+        <p:nvSpPr>
+          <p:cNvPr id="8" name="TextBox 7"/>
+          <p:cNvSpPr txBox="1"/>
+          <p:nvPr/>
+        </p:nvSpPr>
+        <p:spPr>
+          <a:xfrm>
+            <a:off x="758952" y="2715768"/>
+            <a:ext cx="4553712" cy="3108960"/>
+          </a:xfrm>
+          <a:prstGeom prst="rect">
+            <a:avLst/>
+          </a:prstGeom>
+          <a:noFill/>
+        </p:spPr>
+        <p:txBody>
+          <a:bodyPr wrap="square">
+            <a:spAutoFit/>
+          </a:bodyPr>
+          <a:lstStyle/>
+          <a:p>
+            <a:pPr>
+              <a:spcAft>
+                <a:spcPts val="600"/>
+              </a:spcAft>
+            </a:pPr>
+            <a:r>
+              <a:rPr sz="1300">
+                <a:solidFill>
+                  <a:srgbClr val="0C8B96"/>
+                </a:solidFill>
+                <a:latin typeface="Segoe UI"/>
+              </a:rPr>
+              <a:t>•  </a:t>
+            </a:r>
+            <a:r>
+              <a:rPr sz="1300" b="0" i="0">
+                <a:solidFill>
+                  <a:srgbClr val="25323A"/>
+                </a:solidFill>
+                <a:latin typeface="Segoe UI"/>
+              </a:rPr>
+              <a:t>Panel mesh of the wetted hull</a:t>
+            </a:r>
+          </a:p>
+          <a:p>
+            <a:pPr>
+              <a:spcAft>
+                <a:spcPts val="600"/>
+              </a:spcAft>
+            </a:pPr>
+            <a:r>
+              <a:rPr sz="1300">
+                <a:solidFill>
+                  <a:srgbClr val="0C8B96"/>
+                </a:solidFill>
+                <a:latin typeface="Segoe UI"/>
+              </a:rPr>
+              <a:t>•  </a:t>
+            </a:r>
+            <a:r>
+              <a:rPr sz="1300" b="0" i="0">
+                <a:solidFill>
+                  <a:srgbClr val="25323A"/>
+                </a:solidFill>
+                <a:latin typeface="Segoe UI"/>
+              </a:rPr>
+              <a:t>Radiation problem → A(ω), A∞ and B(ω)</a:t>
+            </a:r>
+          </a:p>
+          <a:p>
+            <a:pPr>
+              <a:spcAft>
+                <a:spcPts val="600"/>
+              </a:spcAft>
+            </a:pPr>
+            <a:r>
+              <a:rPr sz="1300">
+                <a:solidFill>
+                  <a:srgbClr val="0C8B96"/>
+                </a:solidFill>
+                <a:latin typeface="Segoe UI"/>
+              </a:rPr>
+              <a:t>•  </a:t>
+            </a:r>
+            <a:r>
+              <a:rPr sz="1300" b="0" i="0">
+                <a:solidFill>
+                  <a:srgbClr val="25323A"/>
+                </a:solidFill>
+                <a:latin typeface="Segoe UI"/>
+              </a:rPr>
+              <a:t>Diffraction problem → F_exc(ω, β)</a:t>
+            </a:r>
+          </a:p>
+          <a:p>
+            <a:pPr>
+              <a:spcAft>
+                <a:spcPts val="600"/>
+              </a:spcAft>
+            </a:pPr>
+            <a:r>
+              <a:rPr sz="1300">
+                <a:solidFill>
+                  <a:srgbClr val="0C8B96"/>
+                </a:solidFill>
+                <a:latin typeface="Segoe UI"/>
+              </a:rPr>
+              <a:t>•  </a:t>
+            </a:r>
+            <a:r>
+              <a:rPr sz="1300" b="0" i="0">
+                <a:solidFill>
+                  <a:srgbClr val="25323A"/>
+                </a:solidFill>
+                <a:latin typeface="Segoe UI"/>
+              </a:rPr>
+              <a:t>Hydrostatic stiffness C (buoyancy)</a:t>
+            </a:r>
+          </a:p>
+          <a:p>
+            <a:pPr>
+              <a:spcAft>
+                <a:spcPts val="200"/>
+              </a:spcAft>
+            </a:pPr>
+            <a:r>
+              <a:rPr sz="1300">
+                <a:solidFill>
+                  <a:srgbClr val="0C8B96"/>
+                </a:solidFill>
+                <a:latin typeface="Segoe UI"/>
+              </a:rPr>
+              <a:t>⇒  </a:t>
+            </a:r>
+            <a:r>
+              <a:rPr sz="1300" b="1" i="0">
+                <a:solidFill>
+                  <a:srgbClr val="0A5560"/>
+                </a:solidFill>
+                <a:latin typeface="Segoe UI"/>
+              </a:rPr>
+              <a:t>Outputs: hydrodynamic coefficients</a:t>
+            </a:r>
+          </a:p>
+        </p:txBody>
+      </p:sp>
+      <p:sp>
+        <p:nvSpPr>
+          <p:cNvPr id="9" name="Rectangle 8"/>
+          <p:cNvSpPr/>
+          <p:nvPr/>
+        </p:nvSpPr>
+        <p:spPr>
+          <a:xfrm>
+            <a:off x="6656832" y="1783080"/>
+            <a:ext cx="5029200" cy="4160520"/>
+          </a:xfrm>
+          <a:prstGeom prst="rect">
+            <a:avLst/>
+          </a:prstGeom>
+          <a:solidFill>
+            <a:srgbClr val="F7FAFB"/>
+          </a:solidFill>
+          <a:ln w="15875">
+            <a:solidFill>
+              <a:srgbClr val="0A5560"/>
+            </a:solidFill>
+          </a:ln>
+          <a:effectLst/>
+        </p:spPr>
+        <p:style>
+          <a:lnRef idx="1">
+            <a:schemeClr val="accent1"/>
+          </a:lnRef>
+          <a:fillRef idx="3">
+            <a:schemeClr val="accent1"/>
+          </a:fillRef>
+          <a:effectRef idx="2">
+            <a:schemeClr val="accent1"/>
+          </a:effectRef>
+          <a:fontRef idx="minor">
+            <a:schemeClr val="lt1"/>
+          </a:fontRef>
+        </p:style>
+        <p:txBody>
+          <a:bodyPr rtlCol="0" anchor="ctr"/>
+          <a:lstStyle/>
+          <a:p>
+            <a:pPr algn="ctr"/>
+            <a:endParaRPr/>
+          </a:p>
+        </p:txBody>
+      </p:sp>
+      <p:sp>
+        <p:nvSpPr>
+          <p:cNvPr id="10" name="Rectangle 9"/>
+          <p:cNvSpPr/>
+          <p:nvPr/>
+        </p:nvSpPr>
+        <p:spPr>
+          <a:xfrm>
+            <a:off x="6656832" y="1783080"/>
+            <a:ext cx="5029200" cy="548640"/>
+          </a:xfrm>
+          <a:prstGeom prst="rect">
+            <a:avLst/>
+          </a:prstGeom>
+          <a:solidFill>
+            <a:srgbClr val="0A5560"/>
+          </a:solidFill>
+          <a:ln>
+            <a:noFill/>
+          </a:ln>
+          <a:effectLst/>
+        </p:spPr>
+        <p:style>
+          <a:lnRef idx="1">
+            <a:schemeClr val="accent1"/>
+          </a:lnRef>
+          <a:fillRef idx="3">
+            <a:schemeClr val="accent1"/>
+          </a:fillRef>
+          <a:effectRef idx="2">
+            <a:schemeClr val="accent1"/>
+          </a:effectRef>
+          <a:fontRef idx="minor">
+            <a:schemeClr val="lt1"/>
+          </a:fontRef>
+        </p:style>
+        <p:txBody>
+          <a:bodyPr rtlCol="0" anchor="ctr"/>
+          <a:lstStyle/>
+          <a:p>
+            <a:pPr algn="ctr"/>
+            <a:r>
+              <a:rPr sz="1700" b="1">
+                <a:solidFill>
+                  <a:srgbClr val="FFFFFF"/>
+                </a:solidFill>
+                <a:latin typeface="Segoe UI"/>
+              </a:rPr>
+              <a:t>FLOATSIM</a:t>
+            </a:r>
+          </a:p>
+        </p:txBody>
+      </p:sp>
+      <p:sp>
+        <p:nvSpPr>
+          <p:cNvPr id="11" name="TextBox 10"/>
+          <p:cNvSpPr txBox="1"/>
+          <p:nvPr/>
+        </p:nvSpPr>
+        <p:spPr>
+          <a:xfrm>
+            <a:off x="6656832" y="2313432"/>
+            <a:ext cx="5029200" cy="310896"/>
+          </a:xfrm>
+          <a:prstGeom prst="rect">
+            <a:avLst/>
+          </a:prstGeom>
+          <a:noFill/>
+        </p:spPr>
+        <p:txBody>
+          <a:bodyPr wrap="none">
+            <a:spAutoFit/>
+          </a:bodyPr>
+          <a:lstStyle/>
+          <a:p>
+            <a:pPr algn="ctr"/>
+            <a:r>
+              <a:rPr sz="1050" i="1">
+                <a:solidFill>
+                  <a:srgbClr val="54636D"/>
+                </a:solidFill>
+                <a:latin typeface="Segoe UI"/>
+              </a:rPr>
+              <a:t>per simulation · time domain</a:t>
+            </a:r>
+          </a:p>
+        </p:txBody>
+      </p:sp>
+      <p:sp>
+        <p:nvSpPr>
+          <p:cNvPr id="12" name="TextBox 11"/>
+          <p:cNvSpPr txBox="1"/>
+          <p:nvPr/>
+        </p:nvSpPr>
+        <p:spPr>
+          <a:xfrm>
+            <a:off x="6912864" y="2715768"/>
+            <a:ext cx="4553712" cy="3108960"/>
+          </a:xfrm>
+          <a:prstGeom prst="rect">
+            <a:avLst/>
+          </a:prstGeom>
+          <a:noFill/>
+        </p:spPr>
+        <p:txBody>
+          <a:bodyPr wrap="square">
+            <a:spAutoFit/>
+          </a:bodyPr>
+          <a:lstStyle/>
+          <a:p>
+            <a:pPr>
+              <a:spcAft>
+                <a:spcPts val="600"/>
+              </a:spcAft>
+            </a:pPr>
+            <a:r>
+              <a:rPr sz="1300">
+                <a:solidFill>
+                  <a:srgbClr val="0A5560"/>
+                </a:solidFill>
+                <a:latin typeface="Segoe UI"/>
+              </a:rPr>
+              <a:t>•  </a:t>
+            </a:r>
+            <a:r>
+              <a:rPr sz="1300" b="0" i="0">
+                <a:solidFill>
+                  <a:srgbClr val="25323A"/>
+                </a:solidFill>
+                <a:latin typeface="Segoe UI"/>
+              </a:rPr>
+              <a:t>Retardation kernel K(t) from B(ω)</a:t>
+            </a:r>
+          </a:p>
+          <a:p>
+            <a:pPr>
+              <a:spcAft>
+                <a:spcPts val="600"/>
+              </a:spcAft>
+            </a:pPr>
+            <a:r>
+              <a:rPr sz="1300">
+                <a:solidFill>
+                  <a:srgbClr val="0A5560"/>
+                </a:solidFill>
+                <a:latin typeface="Segoe UI"/>
+              </a:rPr>
+              <a:t>•  </a:t>
+            </a:r>
+            <a:r>
+              <a:rPr sz="1300" b="0" i="0">
+                <a:solidFill>
+                  <a:srgbClr val="25323A"/>
+                </a:solidFill>
+                <a:latin typeface="Segoe UI"/>
+              </a:rPr>
+              <a:t>Body mass &amp; inertia M (structure)</a:t>
+            </a:r>
+          </a:p>
+          <a:p>
+            <a:pPr>
+              <a:spcAft>
+                <a:spcPts val="600"/>
+              </a:spcAft>
+            </a:pPr>
+            <a:r>
+              <a:rPr sz="1300">
+                <a:solidFill>
+                  <a:srgbClr val="0A5560"/>
+                </a:solidFill>
+                <a:latin typeface="Segoe UI"/>
+              </a:rPr>
+              <a:t>•  </a:t>
+            </a:r>
+            <a:r>
+              <a:rPr sz="1300" b="0" i="0">
+                <a:solidFill>
+                  <a:srgbClr val="25323A"/>
+                </a:solidFill>
+                <a:latin typeface="Segoe UI"/>
+              </a:rPr>
+              <a:t>Assemble (M+A∞), C + gravity m·g·z_G</a:t>
+            </a:r>
+          </a:p>
+          <a:p>
+            <a:pPr>
+              <a:spcAft>
+                <a:spcPts val="600"/>
+              </a:spcAft>
+            </a:pPr>
+            <a:r>
+              <a:rPr sz="1300">
+                <a:solidFill>
+                  <a:srgbClr val="0A5560"/>
+                </a:solidFill>
+                <a:latin typeface="Segoe UI"/>
+              </a:rPr>
+              <a:t>•  </a:t>
+            </a:r>
+            <a:r>
+              <a:rPr sz="1300" b="0" i="0">
+                <a:solidFill>
+                  <a:srgbClr val="D1543A"/>
+                </a:solidFill>
+                <a:latin typeface="Segoe UI"/>
+              </a:rPr>
+              <a:t>Viscous Morison drag F_drag — not in BEM</a:t>
+            </a:r>
+          </a:p>
+          <a:p>
+            <a:pPr>
+              <a:spcAft>
+                <a:spcPts val="600"/>
+              </a:spcAft>
+            </a:pPr>
+            <a:r>
+              <a:rPr sz="1300">
+                <a:solidFill>
+                  <a:srgbClr val="0A5560"/>
+                </a:solidFill>
+                <a:latin typeface="Segoe UI"/>
+              </a:rPr>
+              <a:t>•  </a:t>
+            </a:r>
+            <a:r>
+              <a:rPr sz="1300" b="0" i="0">
+                <a:solidFill>
+                  <a:srgbClr val="25323A"/>
+                </a:solidFill>
+                <a:latin typeface="Segoe UI"/>
+              </a:rPr>
+              <a:t>Static equilibrium solve</a:t>
+            </a:r>
+          </a:p>
+          <a:p>
+            <a:pPr>
+              <a:spcAft>
+                <a:spcPts val="600"/>
+              </a:spcAft>
+            </a:pPr>
+            <a:r>
+              <a:rPr sz="1300">
+                <a:solidFill>
+                  <a:srgbClr val="0A5560"/>
+                </a:solidFill>
+                <a:latin typeface="Segoe UI"/>
+              </a:rPr>
+              <a:t>•  </a:t>
+            </a:r>
+            <a:r>
+              <a:rPr sz="1300" b="0" i="0">
+                <a:solidFill>
+                  <a:srgbClr val="25323A"/>
+                </a:solidFill>
+                <a:latin typeface="Segoe UI"/>
+              </a:rPr>
+              <a:t>Time-integrate the Cummins EoM → x(t)</a:t>
+            </a:r>
+          </a:p>
+          <a:p>
+            <a:pPr>
+              <a:spcAft>
+                <a:spcPts val="200"/>
+              </a:spcAft>
+            </a:pPr>
+            <a:r>
+              <a:rPr sz="1300">
+                <a:solidFill>
+                  <a:srgbClr val="0A5560"/>
+                </a:solidFill>
+                <a:latin typeface="Segoe UI"/>
+              </a:rPr>
+              <a:t>⇒  </a:t>
+            </a:r>
+            <a:r>
+              <a:rPr sz="1300" b="1" i="0">
+                <a:solidFill>
+                  <a:srgbClr val="0A5560"/>
+                </a:solidFill>
+                <a:latin typeface="Segoe UI"/>
+              </a:rPr>
+              <a:t>Output: decay period T &amp; damping ζ</a:t>
+            </a:r>
+          </a:p>
+        </p:txBody>
+      </p:sp>
+      <p:sp>
+        <p:nvSpPr>
+          <p:cNvPr id="13" name="Right Arrow 12"/>
+          <p:cNvSpPr/>
+          <p:nvPr/>
+        </p:nvSpPr>
+        <p:spPr>
+          <a:xfrm>
+            <a:off x="5596128" y="3246120"/>
+            <a:ext cx="932688" cy="457200"/>
+          </a:xfrm>
+          <a:prstGeom prst="rightArrow">
+            <a:avLst/>
+          </a:prstGeom>
+          <a:solidFill>
+            <a:srgbClr val="54636D"/>
+          </a:solidFill>
+          <a:ln>
+            <a:noFill/>
+          </a:ln>
+          <a:effectLst/>
+        </p:spPr>
+        <p:style>
+          <a:lnRef idx="1">
+            <a:schemeClr val="accent1"/>
+          </a:lnRef>
+          <a:fillRef idx="3">
+            <a:schemeClr val="accent1"/>
+          </a:fillRef>
+          <a:effectRef idx="2">
+            <a:schemeClr val="accent1"/>
+          </a:effectRef>
+          <a:fontRef idx="minor">
+            <a:schemeClr val="lt1"/>
+          </a:fontRef>
+        </p:style>
+        <p:txBody>
+          <a:bodyPr rtlCol="0" anchor="ctr"/>
+          <a:lstStyle/>
+          <a:p>
+            <a:pPr algn="ctr"/>
+            <a:endParaRPr/>
+          </a:p>
+        </p:txBody>
+      </p:sp>
+      <p:sp>
+        <p:nvSpPr>
+          <p:cNvPr id="14" name="TextBox 13"/>
+          <p:cNvSpPr txBox="1"/>
+          <p:nvPr/>
+        </p:nvSpPr>
+        <p:spPr>
+          <a:xfrm>
+            <a:off x="5257800" y="3730752"/>
+            <a:ext cx="1600200" cy="640080"/>
+          </a:xfrm>
+          <a:prstGeom prst="rect">
+            <a:avLst/>
+          </a:prstGeom>
+          <a:noFill/>
+        </p:spPr>
+        <p:txBody>
+          <a:bodyPr wrap="none">
+            <a:spAutoFit/>
+          </a:bodyPr>
+          <a:lstStyle/>
+          <a:p>
+            <a:pPr algn="ctr"/>
+            <a:r>
+              <a:rPr sz="900">
+                <a:solidFill>
+                  <a:srgbClr val="54636D"/>
+                </a:solidFill>
+                <a:latin typeface="Consolas"/>
+              </a:rPr>
+              <a:t>capytaine_
+osu_buoy.nc</a:t>
+            </a:r>
+          </a:p>
+        </p:txBody>
+      </p:sp>
+      <p:sp>
+        <p:nvSpPr>
+          <p:cNvPr id="15" name="Rectangle 14"/>
+          <p:cNvSpPr/>
+          <p:nvPr/>
+        </p:nvSpPr>
+        <p:spPr>
+          <a:xfrm>
+            <a:off x="777240" y="6108192"/>
+            <a:ext cx="10927080" cy="566928"/>
+          </a:xfrm>
+          <a:prstGeom prst="rect">
+            <a:avLst/>
+          </a:prstGeom>
+          <a:solidFill>
+            <a:srgbClr val="EEF6F7"/>
+          </a:solidFill>
+          <a:ln>
+            <a:noFill/>
+          </a:ln>
+          <a:effectLst/>
+        </p:spPr>
+        <p:style>
+          <a:lnRef idx="1">
+            <a:schemeClr val="accent1"/>
+          </a:lnRef>
+          <a:fillRef idx="3">
+            <a:schemeClr val="accent1"/>
+          </a:fillRef>
+          <a:effectRef idx="2">
+            <a:schemeClr val="accent1"/>
+          </a:effectRef>
+          <a:fontRef idx="minor">
+            <a:schemeClr val="lt1"/>
+          </a:fontRef>
+        </p:style>
+        <p:txBody>
+          <a:bodyPr rtlCol="0" anchor="ctr"/>
+          <a:lstStyle/>
+          <a:p>
+            <a:pPr algn="ctr"/>
+            <a:endParaRPr/>
+          </a:p>
+        </p:txBody>
+      </p:sp>
+      <p:sp>
+        <p:nvSpPr>
+          <p:cNvPr id="16" name="TextBox 15"/>
+          <p:cNvSpPr txBox="1"/>
+          <p:nvPr/>
+        </p:nvSpPr>
+        <p:spPr>
+          <a:xfrm>
+            <a:off x="960120" y="6144768"/>
+            <a:ext cx="10515600" cy="493776"/>
+          </a:xfrm>
+          <a:prstGeom prst="rect">
+            <a:avLst/>
+          </a:prstGeom>
+          <a:noFill/>
+        </p:spPr>
+        <p:txBody>
+          <a:bodyPr wrap="square" anchor="ctr">
+            <a:spAutoFit/>
+          </a:bodyPr>
+          <a:lstStyle/>
+          <a:p>
+            <a:pPr algn="ctr"/>
+            <a:r>
+              <a:rPr sz="1250" b="1">
+                <a:solidFill>
+                  <a:srgbClr val="0A5560"/>
+                </a:solidFill>
+                <a:latin typeface="Segoe UI"/>
+              </a:rPr>
+              <a:t>Capytaine = the hydrodynamic coefficients</a:t>
+            </a:r>
+            <a:r>
+              <a:rPr sz="1250" b="0">
+                <a:solidFill>
+                  <a:srgbClr val="25323A"/>
+                </a:solidFill>
+                <a:latin typeface="Segoe UI"/>
+              </a:rPr>
+              <a:t>   ·   </a:t>
+            </a:r>
+            <a:r>
+              <a:rPr sz="1250" b="1">
+                <a:solidFill>
+                  <a:srgbClr val="0A5560"/>
+                </a:solidFill>
+                <a:latin typeface="Segoe UI"/>
+              </a:rPr>
+              <a:t>FloatSim = the equation of motion in time</a:t>
+            </a:r>
+            <a:r>
+              <a:rPr sz="1250" b="0">
+                <a:solidFill>
+                  <a:srgbClr val="25323A"/>
+                </a:solidFill>
+                <a:latin typeface="Segoe UI"/>
+              </a:rPr>
+              <a:t>  (adds mass, viscous drag, mooring, equilibrium; converts B(ω)→K(t)).  Decay T and ζ are a FloatSim output.</a:t>
+            </a:r>
+          </a:p>
+        </p:txBody>
+      </p:sp>
+    </p:spTree>
+  </p:cSld>
+  <p:clrMapOvr>
+    <a:masterClrMapping/>
+  </p:clrMapOvr>
+</p:sld>
+</file>
+
+<file path=ppt/slides/slide9.xml><?xml version="1.0" encoding="utf-8"?>
+<p:sld xmlns:a="http://schemas.openxmlformats.org/drawingml/2006/main" xmlns:r="http://schemas.openxmlformats.org/officeDocument/2006/relationships" xmlns:p="http://schemas.openxmlformats.org/presentationml/2006/main">
+  <p:cSld>
+    <p:bg>
+      <p:bgPr>
+        <a:solidFill>
+          <a:srgbClr val="FFFFFF"/>
+        </a:solidFill>
+        <a:effectLst/>
+      </p:bgPr>
+    </p:bg>
+    <p:spTree>
+      <p:nvGrpSpPr>
+        <p:cNvPr id="1" name=""/>
+        <p:cNvGrpSpPr/>
+        <p:nvPr/>
+      </p:nvGrpSpPr>
+      <p:grpSpPr>
+        <a:xfrm>
+          <a:off x="0" y="0"/>
+          <a:ext cx="0" cy="0"/>
+          <a:chOff x="0" y="0"/>
+          <a:chExt cx="0" cy="0"/>
+        </a:xfrm>
+      </p:grpSpPr>
+      <p:sp>
+        <p:nvSpPr>
+          <p:cNvPr id="2" name="TextBox 1"/>
+          <p:cNvSpPr txBox="1"/>
+          <p:nvPr/>
+        </p:nvSpPr>
+        <p:spPr>
+          <a:xfrm>
+            <a:off x="640080" y="384048"/>
+            <a:ext cx="10972800" cy="365760"/>
+          </a:xfrm>
+          <a:prstGeom prst="rect">
+            <a:avLst/>
+          </a:prstGeom>
+          <a:noFill/>
+        </p:spPr>
+        <p:txBody>
+          <a:bodyPr wrap="none">
+            <a:spAutoFit/>
+          </a:bodyPr>
+          <a:lstStyle/>
+          <a:p>
+            <a:r>
+              <a:rPr sz="1300" b="1">
+                <a:solidFill>
+                  <a:srgbClr val="0C8B96"/>
+                </a:solidFill>
+                <a:latin typeface="Segoe UI"/>
+              </a:rPr>
+              <a:t>CAVEATS</a:t>
+            </a:r>
+          </a:p>
+        </p:txBody>
+      </p:sp>
+      <p:sp>
+        <p:nvSpPr>
+          <p:cNvPr id="3" name="TextBox 2"/>
+          <p:cNvSpPr txBox="1"/>
+          <p:nvPr/>
+        </p:nvSpPr>
+        <p:spPr>
+          <a:xfrm>
+            <a:off x="640080" y="658368"/>
+            <a:ext cx="10972800" cy="822960"/>
+          </a:xfrm>
+          <a:prstGeom prst="rect">
+            <a:avLst/>
+          </a:prstGeom>
+          <a:noFill/>
+        </p:spPr>
+        <p:txBody>
+          <a:bodyPr wrap="none">
+            <a:spAutoFit/>
+          </a:bodyPr>
+          <a:lstStyle/>
+          <a:p>
+            <a:r>
+              <a:rPr sz="3000" b="1">
+                <a:solidFill>
+                  <a:srgbClr val="25323A"/>
+                </a:solidFill>
+                <a:latin typeface="Segoe UI"/>
+              </a:rPr>
+              <a:t>Limits — and why the heave plate needs the tank</a:t>
+            </a:r>
+          </a:p>
+        </p:txBody>
+      </p:sp>
+      <p:sp>
+        <p:nvSpPr>
+          <p:cNvPr id="4" name="Rectangle 3"/>
+          <p:cNvSpPr/>
+          <p:nvPr/>
+        </p:nvSpPr>
+        <p:spPr>
+          <a:xfrm>
+            <a:off x="658368" y="1444752"/>
+            <a:ext cx="2011680" cy="54864"/>
+          </a:xfrm>
+          <a:prstGeom prst="rect">
+            <a:avLst/>
+          </a:prstGeom>
+          <a:solidFill>
+            <a:srgbClr val="0C8B96"/>
+          </a:solidFill>
+          <a:ln>
+            <a:noFill/>
+          </a:ln>
+          <a:effectLst/>
+        </p:spPr>
+        <p:style>
+          <a:lnRef idx="1">
+            <a:schemeClr val="accent1"/>
+          </a:lnRef>
+          <a:fillRef idx="3">
+            <a:schemeClr val="accent1"/>
+          </a:fillRef>
+          <a:effectRef idx="2">
+            <a:schemeClr val="accent1"/>
+          </a:effectRef>
+          <a:fontRef idx="minor">
+            <a:schemeClr val="lt1"/>
+          </a:fontRef>
+        </p:style>
+        <p:txBody>
+          <a:bodyPr rtlCol="0" anchor="ctr"/>
+          <a:lstStyle/>
+          <a:p>
+            <a:pPr algn="ctr"/>
+            <a:endParaRPr/>
           </a:p>
         </p:txBody>
       </p:sp>
